--- a/slides/Lecture_Chapter04.pptx
+++ b/slides/Lecture_Chapter04.pptx
@@ -308,7 +308,7 @@
           <a:p>
             <a:fld id="{3E22BF2E-04DA-469E-97C5-BB68A0368813}" type="datetimeFigureOut">
               <a:rPr lang="en-US" smtClean="0"/>
-              <a:t>9/18/2025</a:t>
+              <a:t>11/29/2025</a:t>
             </a:fld>
             <a:endParaRPr lang="en-US"/>
           </a:p>
@@ -506,7 +506,7 @@
           <a:p>
             <a:fld id="{3E22BF2E-04DA-469E-97C5-BB68A0368813}" type="datetimeFigureOut">
               <a:rPr lang="en-US" smtClean="0"/>
-              <a:t>9/18/2025</a:t>
+              <a:t>11/29/2025</a:t>
             </a:fld>
             <a:endParaRPr lang="en-US"/>
           </a:p>
@@ -714,7 +714,7 @@
           <a:p>
             <a:fld id="{3E22BF2E-04DA-469E-97C5-BB68A0368813}" type="datetimeFigureOut">
               <a:rPr lang="en-US" smtClean="0"/>
-              <a:t>9/18/2025</a:t>
+              <a:t>11/29/2025</a:t>
             </a:fld>
             <a:endParaRPr lang="en-US"/>
           </a:p>
@@ -922,7 +922,7 @@
           <a:p>
             <a:fld id="{3E22BF2E-04DA-469E-97C5-BB68A0368813}" type="datetimeFigureOut">
               <a:rPr lang="en-US" smtClean="0"/>
-              <a:t>9/18/2025</a:t>
+              <a:t>11/29/2025</a:t>
             </a:fld>
             <a:endParaRPr lang="en-US"/>
           </a:p>
@@ -1197,7 +1197,7 @@
           <a:p>
             <a:fld id="{3E22BF2E-04DA-469E-97C5-BB68A0368813}" type="datetimeFigureOut">
               <a:rPr lang="en-US" smtClean="0"/>
-              <a:t>9/18/2025</a:t>
+              <a:t>11/29/2025</a:t>
             </a:fld>
             <a:endParaRPr lang="en-US"/>
           </a:p>
@@ -1462,7 +1462,7 @@
           <a:p>
             <a:fld id="{3E22BF2E-04DA-469E-97C5-BB68A0368813}" type="datetimeFigureOut">
               <a:rPr lang="en-US" smtClean="0"/>
-              <a:t>9/18/2025</a:t>
+              <a:t>11/29/2025</a:t>
             </a:fld>
             <a:endParaRPr lang="en-US"/>
           </a:p>
@@ -1874,7 +1874,7 @@
           <a:p>
             <a:fld id="{3E22BF2E-04DA-469E-97C5-BB68A0368813}" type="datetimeFigureOut">
               <a:rPr lang="en-US" smtClean="0"/>
-              <a:t>9/18/2025</a:t>
+              <a:t>11/29/2025</a:t>
             </a:fld>
             <a:endParaRPr lang="en-US"/>
           </a:p>
@@ -2015,7 +2015,7 @@
           <a:p>
             <a:fld id="{3E22BF2E-04DA-469E-97C5-BB68A0368813}" type="datetimeFigureOut">
               <a:rPr lang="en-US" smtClean="0"/>
-              <a:t>9/18/2025</a:t>
+              <a:t>11/29/2025</a:t>
             </a:fld>
             <a:endParaRPr lang="en-US"/>
           </a:p>
@@ -2128,7 +2128,7 @@
           <a:p>
             <a:fld id="{3E22BF2E-04DA-469E-97C5-BB68A0368813}" type="datetimeFigureOut">
               <a:rPr lang="en-US" smtClean="0"/>
-              <a:t>9/18/2025</a:t>
+              <a:t>11/29/2025</a:t>
             </a:fld>
             <a:endParaRPr lang="en-US"/>
           </a:p>
@@ -2439,7 +2439,7 @@
           <a:p>
             <a:fld id="{3E22BF2E-04DA-469E-97C5-BB68A0368813}" type="datetimeFigureOut">
               <a:rPr lang="en-US" smtClean="0"/>
-              <a:t>9/18/2025</a:t>
+              <a:t>11/29/2025</a:t>
             </a:fld>
             <a:endParaRPr lang="en-US"/>
           </a:p>
@@ -2727,7 +2727,7 @@
           <a:p>
             <a:fld id="{3E22BF2E-04DA-469E-97C5-BB68A0368813}" type="datetimeFigureOut">
               <a:rPr lang="en-US" smtClean="0"/>
-              <a:t>9/18/2025</a:t>
+              <a:t>11/29/2025</a:t>
             </a:fld>
             <a:endParaRPr lang="en-US"/>
           </a:p>
@@ -2968,7 +2968,7 @@
           <a:p>
             <a:fld id="{3E22BF2E-04DA-469E-97C5-BB68A0368813}" type="datetimeFigureOut">
               <a:rPr lang="en-US" smtClean="0"/>
-              <a:t>9/18/2025</a:t>
+              <a:t>11/29/2025</a:t>
             </a:fld>
             <a:endParaRPr lang="en-US"/>
           </a:p>
@@ -3943,6 +3943,53 @@
           <a:prstGeom prst="rect">
             <a:avLst/>
           </a:prstGeom>
+        </p:spPr>
+      </p:pic>
+      <p:pic>
+        <p:nvPicPr>
+          <p:cNvPr id="6" name="Picture 4">
+            <a:extLst>
+              <a:ext uri="{FF2B5EF4-FFF2-40B4-BE49-F238E27FC236}">
+                <a16:creationId xmlns:a16="http://schemas.microsoft.com/office/drawing/2014/main" id="{DF818925-CF68-EB6E-413D-FFCD573CCFF7}"/>
+              </a:ext>
+            </a:extLst>
+          </p:cNvPr>
+          <p:cNvPicPr>
+            <a:picLocks noChangeAspect="1" noChangeArrowheads="1"/>
+          </p:cNvPicPr>
+          <p:nvPr/>
+        </p:nvPicPr>
+        <p:blipFill>
+          <a:blip r:embed="rId5">
+            <a:extLst>
+              <a:ext uri="{28A0092B-C50C-407E-A947-70E740481C1C}">
+                <a14:useLocalDpi xmlns:a14="http://schemas.microsoft.com/office/drawing/2010/main" val="0"/>
+              </a:ext>
+            </a:extLst>
+          </a:blip>
+          <a:srcRect/>
+          <a:stretch>
+            <a:fillRect/>
+          </a:stretch>
+        </p:blipFill>
+        <p:spPr bwMode="auto">
+          <a:xfrm>
+            <a:off x="7987456" y="125210"/>
+            <a:ext cx="4182403" cy="1000945"/>
+          </a:xfrm>
+          <a:prstGeom prst="rect">
+            <a:avLst/>
+          </a:prstGeom>
+          <a:noFill/>
+          <a:extLst>
+            <a:ext uri="{909E8E84-426E-40DD-AFC4-6F175D3DCCD1}">
+              <a14:hiddenFill xmlns:a14="http://schemas.microsoft.com/office/drawing/2010/main">
+                <a:solidFill>
+                  <a:srgbClr val="FFFFFF"/>
+                </a:solidFill>
+              </a14:hiddenFill>
+            </a:ext>
+          </a:extLst>
         </p:spPr>
       </p:pic>
     </p:spTree>
@@ -13892,8 +13939,8 @@
           </a:p>
         </p:txBody>
       </p:sp>
-      <mc:AlternateContent xmlns:mc="http://schemas.openxmlformats.org/markup-compatibility/2006">
-        <mc:Choice xmlns:a14="http://schemas.microsoft.com/office/drawing/2010/main" Requires="a14">
+      <mc:AlternateContent xmlns:mc="http://schemas.openxmlformats.org/markup-compatibility/2006" xmlns:a14="http://schemas.microsoft.com/office/drawing/2010/main">
+        <mc:Choice Requires="a14">
           <p:sp>
             <p:nvSpPr>
               <p:cNvPr id="3" name="Content Placeholder 2">
@@ -15040,7 +15087,7 @@
             </p:txBody>
           </p:sp>
         </mc:Choice>
-        <mc:Fallback>
+        <mc:Fallback xmlns="">
           <p:sp>
             <p:nvSpPr>
               <p:cNvPr id="3" name="Content Placeholder 2">
@@ -15084,8 +15131,8 @@
           </p:sp>
         </mc:Fallback>
       </mc:AlternateContent>
-      <mc:AlternateContent xmlns:mc="http://schemas.openxmlformats.org/markup-compatibility/2006">
-        <mc:Choice xmlns:a14="http://schemas.microsoft.com/office/drawing/2010/main" Requires="a14">
+      <mc:AlternateContent xmlns:mc="http://schemas.openxmlformats.org/markup-compatibility/2006" xmlns:a14="http://schemas.microsoft.com/office/drawing/2010/main">
+        <mc:Choice Requires="a14">
           <p:sp>
             <p:nvSpPr>
               <p:cNvPr id="10" name="TextBox 9">
@@ -15225,7 +15272,6 @@
                 </a:r>
               </a:p>
               <a:p>
-                <a:pPr/>
                 <a14:m>
                   <m:oMath xmlns:m="http://schemas.openxmlformats.org/officeDocument/2006/math">
                     <m:r>
@@ -15701,7 +15747,7 @@
             </p:txBody>
           </p:sp>
         </mc:Choice>
-        <mc:Fallback>
+        <mc:Fallback xmlns="">
           <p:sp>
             <p:nvSpPr>
               <p:cNvPr id="10" name="TextBox 9">
@@ -15746,8 +15792,8 @@
           </p:sp>
         </mc:Fallback>
       </mc:AlternateContent>
-      <mc:AlternateContent xmlns:mc="http://schemas.openxmlformats.org/markup-compatibility/2006">
-        <mc:Choice xmlns:a14="http://schemas.microsoft.com/office/drawing/2010/main" Requires="a14">
+      <mc:AlternateContent xmlns:mc="http://schemas.openxmlformats.org/markup-compatibility/2006" xmlns:a14="http://schemas.microsoft.com/office/drawing/2010/main">
+        <mc:Choice Requires="a14">
           <p:sp>
             <p:nvSpPr>
               <p:cNvPr id="11" name="Content Placeholder 2">
@@ -16722,7 +16768,7 @@
             </p:txBody>
           </p:sp>
         </mc:Choice>
-        <mc:Fallback>
+        <mc:Fallback xmlns="">
           <p:sp>
             <p:nvSpPr>
               <p:cNvPr id="11" name="Content Placeholder 2">

--- a/slides/Lecture_Chapter04.pptx
+++ b/slides/Lecture_Chapter04.pptx
@@ -308,7 +308,7 @@
           <a:p>
             <a:fld id="{3E22BF2E-04DA-469E-97C5-BB68A0368813}" type="datetimeFigureOut">
               <a:rPr lang="en-US" smtClean="0"/>
-              <a:t>1/8/2026</a:t>
+              <a:t>1/9/2026</a:t>
             </a:fld>
             <a:endParaRPr lang="en-US"/>
           </a:p>
@@ -506,7 +506,7 @@
           <a:p>
             <a:fld id="{3E22BF2E-04DA-469E-97C5-BB68A0368813}" type="datetimeFigureOut">
               <a:rPr lang="en-US" smtClean="0"/>
-              <a:t>1/8/2026</a:t>
+              <a:t>1/9/2026</a:t>
             </a:fld>
             <a:endParaRPr lang="en-US"/>
           </a:p>
@@ -714,7 +714,7 @@
           <a:p>
             <a:fld id="{3E22BF2E-04DA-469E-97C5-BB68A0368813}" type="datetimeFigureOut">
               <a:rPr lang="en-US" smtClean="0"/>
-              <a:t>1/8/2026</a:t>
+              <a:t>1/9/2026</a:t>
             </a:fld>
             <a:endParaRPr lang="en-US"/>
           </a:p>
@@ -922,7 +922,7 @@
           <a:p>
             <a:fld id="{3E22BF2E-04DA-469E-97C5-BB68A0368813}" type="datetimeFigureOut">
               <a:rPr lang="en-US" smtClean="0"/>
-              <a:t>1/8/2026</a:t>
+              <a:t>1/9/2026</a:t>
             </a:fld>
             <a:endParaRPr lang="en-US"/>
           </a:p>
@@ -1197,7 +1197,7 @@
           <a:p>
             <a:fld id="{3E22BF2E-04DA-469E-97C5-BB68A0368813}" type="datetimeFigureOut">
               <a:rPr lang="en-US" smtClean="0"/>
-              <a:t>1/8/2026</a:t>
+              <a:t>1/9/2026</a:t>
             </a:fld>
             <a:endParaRPr lang="en-US"/>
           </a:p>
@@ -1462,7 +1462,7 @@
           <a:p>
             <a:fld id="{3E22BF2E-04DA-469E-97C5-BB68A0368813}" type="datetimeFigureOut">
               <a:rPr lang="en-US" smtClean="0"/>
-              <a:t>1/8/2026</a:t>
+              <a:t>1/9/2026</a:t>
             </a:fld>
             <a:endParaRPr lang="en-US"/>
           </a:p>
@@ -1874,7 +1874,7 @@
           <a:p>
             <a:fld id="{3E22BF2E-04DA-469E-97C5-BB68A0368813}" type="datetimeFigureOut">
               <a:rPr lang="en-US" smtClean="0"/>
-              <a:t>1/8/2026</a:t>
+              <a:t>1/9/2026</a:t>
             </a:fld>
             <a:endParaRPr lang="en-US"/>
           </a:p>
@@ -2015,7 +2015,7 @@
           <a:p>
             <a:fld id="{3E22BF2E-04DA-469E-97C5-BB68A0368813}" type="datetimeFigureOut">
               <a:rPr lang="en-US" smtClean="0"/>
-              <a:t>1/8/2026</a:t>
+              <a:t>1/9/2026</a:t>
             </a:fld>
             <a:endParaRPr lang="en-US"/>
           </a:p>
@@ -2128,7 +2128,7 @@
           <a:p>
             <a:fld id="{3E22BF2E-04DA-469E-97C5-BB68A0368813}" type="datetimeFigureOut">
               <a:rPr lang="en-US" smtClean="0"/>
-              <a:t>1/8/2026</a:t>
+              <a:t>1/9/2026</a:t>
             </a:fld>
             <a:endParaRPr lang="en-US"/>
           </a:p>
@@ -2439,7 +2439,7 @@
           <a:p>
             <a:fld id="{3E22BF2E-04DA-469E-97C5-BB68A0368813}" type="datetimeFigureOut">
               <a:rPr lang="en-US" smtClean="0"/>
-              <a:t>1/8/2026</a:t>
+              <a:t>1/9/2026</a:t>
             </a:fld>
             <a:endParaRPr lang="en-US"/>
           </a:p>
@@ -2727,7 +2727,7 @@
           <a:p>
             <a:fld id="{3E22BF2E-04DA-469E-97C5-BB68A0368813}" type="datetimeFigureOut">
               <a:rPr lang="en-US" smtClean="0"/>
-              <a:t>1/8/2026</a:t>
+              <a:t>1/9/2026</a:t>
             </a:fld>
             <a:endParaRPr lang="en-US"/>
           </a:p>
@@ -2968,7 +2968,7 @@
           <a:p>
             <a:fld id="{3E22BF2E-04DA-469E-97C5-BB68A0368813}" type="datetimeFigureOut">
               <a:rPr lang="en-US" smtClean="0"/>
-              <a:t>1/8/2026</a:t>
+              <a:t>1/9/2026</a:t>
             </a:fld>
             <a:endParaRPr lang="en-US"/>
           </a:p>
@@ -11876,8 +11876,8 @@
           </a:p>
         </p:txBody>
       </p:sp>
-      <mc:AlternateContent xmlns:mc="http://schemas.openxmlformats.org/markup-compatibility/2006">
-        <mc:Choice xmlns:a14="http://schemas.microsoft.com/office/drawing/2010/main" Requires="a14">
+      <mc:AlternateContent xmlns:mc="http://schemas.openxmlformats.org/markup-compatibility/2006" xmlns:a14="http://schemas.microsoft.com/office/drawing/2010/main">
+        <mc:Choice Requires="a14">
           <p:sp>
             <p:nvSpPr>
               <p:cNvPr id="3" name="Content Placeholder 2">
@@ -12846,7 +12846,7 @@
             </p:txBody>
           </p:sp>
         </mc:Choice>
-        <mc:Fallback>
+        <mc:Fallback xmlns="">
           <p:sp>
             <p:nvSpPr>
               <p:cNvPr id="3" name="Content Placeholder 2">
@@ -15107,8 +15107,8 @@
           </a:p>
         </p:txBody>
       </p:sp>
-      <mc:AlternateContent xmlns:mc="http://schemas.openxmlformats.org/markup-compatibility/2006">
-        <mc:Choice xmlns:a14="http://schemas.microsoft.com/office/drawing/2010/main" Requires="a14">
+      <mc:AlternateContent xmlns:mc="http://schemas.openxmlformats.org/markup-compatibility/2006" xmlns:a14="http://schemas.microsoft.com/office/drawing/2010/main">
+        <mc:Choice Requires="a14">
           <p:sp>
             <p:nvSpPr>
               <p:cNvPr id="3" name="Content Placeholder 2">
@@ -15241,7 +15241,7 @@
             </p:txBody>
           </p:sp>
         </mc:Choice>
-        <mc:Fallback>
+        <mc:Fallback xmlns="">
           <p:sp>
             <p:nvSpPr>
               <p:cNvPr id="3" name="Content Placeholder 2">
@@ -15365,12 +15365,31 @@
               <a:lstStyle/>
               <a:p>
                 <a:r>
+                  <a:rPr lang="en-US" sz="2000" b="1" dirty="0"/>
+                  <a:t>Remember</a:t>
+                </a:r>
+                <a:r>
                   <a:rPr lang="en-US" sz="2000" dirty="0"/>
-                  <a:t>Compute the </a:t>
-                </a:r>
+                  <a:t>: MDPs have an optimal </a:t>
+                </a:r>
+                <a:r>
+                  <a:rPr lang="en-US" sz="2000"/>
+                  <a:t>deterministic policy.</a:t>
+                </a:r>
+                <a:endParaRPr lang="en-US" sz="2000" dirty="0"/>
+              </a:p>
+              <a:p>
                 <a:r>
                   <a:rPr lang="en-US" sz="2000" b="1" dirty="0"/>
-                  <a:t>optimal policy </a:t>
+                  <a:t>Goal</a:t>
+                </a:r>
+                <a:r>
+                  <a:rPr lang="en-US" sz="2000" dirty="0"/>
+                  <a:t>: Compute the </a:t>
+                </a:r>
+                <a:r>
+                  <a:rPr lang="en-US" sz="2000" b="1" dirty="0"/>
+                  <a:t>optimal deterministic policy </a:t>
                 </a:r>
                 <a14:m>
                   <m:oMath xmlns:m="http://schemas.openxmlformats.org/officeDocument/2006/math">
@@ -16275,7 +16294,16 @@
                 <a:endParaRPr lang="en-US" sz="2000" dirty="0"/>
               </a:p>
               <a:p>
+                <a:pPr marL="0" indent="0">
+                  <a:buNone/>
+                </a:pPr>
                 <a:endParaRPr lang="en-US" sz="2000" dirty="0"/>
+              </a:p>
+              <a:p>
+                <a:pPr marL="0" indent="0">
+                  <a:buNone/>
+                </a:pPr>
+                <a:endParaRPr lang="en-US" sz="2000" b="1" dirty="0"/>
               </a:p>
               <a:p>
                 <a:r>
@@ -16427,7 +16455,7 @@
         </p:nvGrpSpPr>
         <p:grpSpPr>
           <a:xfrm>
-            <a:off x="5936874" y="3738285"/>
+            <a:off x="5945262" y="4233229"/>
             <a:ext cx="1622631" cy="579543"/>
             <a:chOff x="2533296" y="3175233"/>
             <a:chExt cx="1503726" cy="579543"/>
@@ -16700,8 +16728,8 @@
           </a:p>
         </p:txBody>
       </p:sp>
-      <mc:AlternateContent xmlns:mc="http://schemas.openxmlformats.org/markup-compatibility/2006">
-        <mc:Choice xmlns:a14="http://schemas.microsoft.com/office/drawing/2010/main" Requires="a14">
+      <mc:AlternateContent xmlns:mc="http://schemas.openxmlformats.org/markup-compatibility/2006" xmlns:a14="http://schemas.microsoft.com/office/drawing/2010/main">
+        <mc:Choice Requires="a14">
           <p:sp>
             <p:nvSpPr>
               <p:cNvPr id="3" name="Content Placeholder 2">
@@ -16950,7 +16978,7 @@
             </p:txBody>
           </p:sp>
         </mc:Choice>
-        <mc:Fallback>
+        <mc:Fallback xmlns="">
           <p:sp>
             <p:nvSpPr>
               <p:cNvPr id="3" name="Content Placeholder 2">
@@ -17554,8 +17582,8 @@
           <a:chExt cx="0" cy="0"/>
         </a:xfrm>
       </p:grpSpPr>
-      <mc:AlternateContent xmlns:mc="http://schemas.openxmlformats.org/markup-compatibility/2006">
-        <mc:Choice xmlns:a14="http://schemas.microsoft.com/office/drawing/2010/main" Requires="a14">
+      <mc:AlternateContent xmlns:mc="http://schemas.openxmlformats.org/markup-compatibility/2006" xmlns:a14="http://schemas.microsoft.com/office/drawing/2010/main">
+        <mc:Choice Requires="a14">
           <p:sp>
             <p:nvSpPr>
               <p:cNvPr id="2" name="Title 1">
@@ -17617,7 +17645,7 @@
             </p:txBody>
           </p:sp>
         </mc:Choice>
-        <mc:Fallback>
+        <mc:Fallback xmlns="">
           <p:sp>
             <p:nvSpPr>
               <p:cNvPr id="2" name="Title 1">
@@ -17657,8 +17685,8 @@
           </p:sp>
         </mc:Fallback>
       </mc:AlternateContent>
-      <mc:AlternateContent xmlns:mc="http://schemas.openxmlformats.org/markup-compatibility/2006">
-        <mc:Choice xmlns:a14="http://schemas.microsoft.com/office/drawing/2010/main" Requires="a14">
+      <mc:AlternateContent xmlns:mc="http://schemas.openxmlformats.org/markup-compatibility/2006" xmlns:a14="http://schemas.microsoft.com/office/drawing/2010/main">
+        <mc:Choice Requires="a14">
           <p:sp>
             <p:nvSpPr>
               <p:cNvPr id="3" name="Content Placeholder 2">
@@ -18791,7 +18819,7 @@
             </p:txBody>
           </p:sp>
         </mc:Choice>
-        <mc:Fallback>
+        <mc:Fallback xmlns="">
           <p:sp>
             <p:nvSpPr>
               <p:cNvPr id="3" name="Content Placeholder 2">
@@ -18893,8 +18921,8 @@
           </a:p>
         </p:txBody>
       </p:sp>
-      <mc:AlternateContent xmlns:mc="http://schemas.openxmlformats.org/markup-compatibility/2006">
-        <mc:Choice xmlns:a14="http://schemas.microsoft.com/office/drawing/2010/main" Requires="a14">
+      <mc:AlternateContent xmlns:mc="http://schemas.openxmlformats.org/markup-compatibility/2006" xmlns:a14="http://schemas.microsoft.com/office/drawing/2010/main">
+        <mc:Choice Requires="a14">
           <p:sp>
             <p:nvSpPr>
               <p:cNvPr id="3" name="Content Placeholder 2">
@@ -19732,7 +19760,7 @@
             </p:txBody>
           </p:sp>
         </mc:Choice>
-        <mc:Fallback>
+        <mc:Fallback xmlns="">
           <p:sp>
             <p:nvSpPr>
               <p:cNvPr id="3" name="Content Placeholder 2">
@@ -19945,8 +19973,8 @@
             </a:fontRef>
           </p:style>
         </p:cxnSp>
-        <mc:AlternateContent xmlns:mc="http://schemas.openxmlformats.org/markup-compatibility/2006">
-          <mc:Choice xmlns:a14="http://schemas.microsoft.com/office/drawing/2010/main" Requires="a14">
+        <mc:AlternateContent xmlns:mc="http://schemas.openxmlformats.org/markup-compatibility/2006" xmlns:a14="http://schemas.microsoft.com/office/drawing/2010/main">
+          <mc:Choice Requires="a14">
             <p:sp>
               <p:nvSpPr>
                 <p:cNvPr id="12" name="TextBox 8">
@@ -20112,7 +20140,7 @@
               </p:txBody>
             </p:sp>
           </mc:Choice>
-          <mc:Fallback>
+          <mc:Fallback xmlns="">
             <p:sp>
               <p:nvSpPr>
                 <p:cNvPr id="12" name="TextBox 8">
@@ -20772,8 +20800,8 @@
             </a:p>
           </p:txBody>
         </p:sp>
-        <mc:AlternateContent xmlns:mc="http://schemas.openxmlformats.org/markup-compatibility/2006">
-          <mc:Choice xmlns:a14="http://schemas.microsoft.com/office/drawing/2010/main" Requires="a14">
+        <mc:AlternateContent xmlns:mc="http://schemas.openxmlformats.org/markup-compatibility/2006" xmlns:a14="http://schemas.microsoft.com/office/drawing/2010/main">
+          <mc:Choice Requires="a14">
             <p:sp>
               <p:nvSpPr>
                 <p:cNvPr id="17" name="TextBox 29">
@@ -20939,7 +20967,7 @@
               </p:txBody>
             </p:sp>
           </mc:Choice>
-          <mc:Fallback>
+          <mc:Fallback xmlns="">
             <p:sp>
               <p:nvSpPr>
                 <p:cNvPr id="17" name="TextBox 29">
@@ -20987,8 +21015,8 @@
             </p:sp>
           </mc:Fallback>
         </mc:AlternateContent>
-        <mc:AlternateContent xmlns:mc="http://schemas.openxmlformats.org/markup-compatibility/2006">
-          <mc:Choice xmlns:a14="http://schemas.microsoft.com/office/drawing/2010/main" Requires="a14">
+        <mc:AlternateContent xmlns:mc="http://schemas.openxmlformats.org/markup-compatibility/2006" xmlns:a14="http://schemas.microsoft.com/office/drawing/2010/main">
+          <mc:Choice Requires="a14">
             <p:sp>
               <p:nvSpPr>
                 <p:cNvPr id="18" name="TextBox 30">
@@ -21154,7 +21182,7 @@
               </p:txBody>
             </p:sp>
           </mc:Choice>
-          <mc:Fallback>
+          <mc:Fallback xmlns="">
             <p:sp>
               <p:nvSpPr>
                 <p:cNvPr id="18" name="TextBox 30">

--- a/slides/Lecture_Chapter04.pptx
+++ b/slides/Lecture_Chapter04.pptx
@@ -13,19 +13,21 @@
     <p:sldId id="372" r:id="rId7"/>
     <p:sldId id="369" r:id="rId8"/>
     <p:sldId id="370" r:id="rId9"/>
-    <p:sldId id="371" r:id="rId10"/>
-    <p:sldId id="373" r:id="rId11"/>
-    <p:sldId id="375" r:id="rId12"/>
-    <p:sldId id="376" r:id="rId13"/>
-    <p:sldId id="377" r:id="rId14"/>
-    <p:sldId id="378" r:id="rId15"/>
-    <p:sldId id="379" r:id="rId16"/>
-    <p:sldId id="382" r:id="rId17"/>
-    <p:sldId id="383" r:id="rId18"/>
-    <p:sldId id="384" r:id="rId19"/>
-    <p:sldId id="385" r:id="rId20"/>
-    <p:sldId id="386" r:id="rId21"/>
-    <p:sldId id="387" r:id="rId22"/>
+    <p:sldId id="389" r:id="rId10"/>
+    <p:sldId id="390" r:id="rId11"/>
+    <p:sldId id="371" r:id="rId12"/>
+    <p:sldId id="373" r:id="rId13"/>
+    <p:sldId id="375" r:id="rId14"/>
+    <p:sldId id="376" r:id="rId15"/>
+    <p:sldId id="377" r:id="rId16"/>
+    <p:sldId id="378" r:id="rId17"/>
+    <p:sldId id="379" r:id="rId18"/>
+    <p:sldId id="382" r:id="rId19"/>
+    <p:sldId id="383" r:id="rId20"/>
+    <p:sldId id="384" r:id="rId21"/>
+    <p:sldId id="385" r:id="rId22"/>
+    <p:sldId id="386" r:id="rId23"/>
+    <p:sldId id="387" r:id="rId24"/>
   </p:sldIdLst>
   <p:sldSz cx="12192000" cy="6858000"/>
   <p:notesSz cx="6858000" cy="9144000"/>
@@ -137,6 +139,8 @@
             <p14:sldId id="372"/>
             <p14:sldId id="369"/>
             <p14:sldId id="370"/>
+            <p14:sldId id="389"/>
+            <p14:sldId id="390"/>
             <p14:sldId id="371"/>
             <p14:sldId id="373"/>
             <p14:sldId id="375"/>
@@ -308,7 +312,7 @@
           <a:p>
             <a:fld id="{3E22BF2E-04DA-469E-97C5-BB68A0368813}" type="datetimeFigureOut">
               <a:rPr lang="en-US" smtClean="0"/>
-              <a:t>1/9/2026</a:t>
+              <a:t>1/19/2026</a:t>
             </a:fld>
             <a:endParaRPr lang="en-US"/>
           </a:p>
@@ -506,7 +510,7 @@
           <a:p>
             <a:fld id="{3E22BF2E-04DA-469E-97C5-BB68A0368813}" type="datetimeFigureOut">
               <a:rPr lang="en-US" smtClean="0"/>
-              <a:t>1/9/2026</a:t>
+              <a:t>1/19/2026</a:t>
             </a:fld>
             <a:endParaRPr lang="en-US"/>
           </a:p>
@@ -714,7 +718,7 @@
           <a:p>
             <a:fld id="{3E22BF2E-04DA-469E-97C5-BB68A0368813}" type="datetimeFigureOut">
               <a:rPr lang="en-US" smtClean="0"/>
-              <a:t>1/9/2026</a:t>
+              <a:t>1/19/2026</a:t>
             </a:fld>
             <a:endParaRPr lang="en-US"/>
           </a:p>
@@ -922,7 +926,7 @@
           <a:p>
             <a:fld id="{3E22BF2E-04DA-469E-97C5-BB68A0368813}" type="datetimeFigureOut">
               <a:rPr lang="en-US" smtClean="0"/>
-              <a:t>1/9/2026</a:t>
+              <a:t>1/19/2026</a:t>
             </a:fld>
             <a:endParaRPr lang="en-US"/>
           </a:p>
@@ -1197,7 +1201,7 @@
           <a:p>
             <a:fld id="{3E22BF2E-04DA-469E-97C5-BB68A0368813}" type="datetimeFigureOut">
               <a:rPr lang="en-US" smtClean="0"/>
-              <a:t>1/9/2026</a:t>
+              <a:t>1/19/2026</a:t>
             </a:fld>
             <a:endParaRPr lang="en-US"/>
           </a:p>
@@ -1462,7 +1466,7 @@
           <a:p>
             <a:fld id="{3E22BF2E-04DA-469E-97C5-BB68A0368813}" type="datetimeFigureOut">
               <a:rPr lang="en-US" smtClean="0"/>
-              <a:t>1/9/2026</a:t>
+              <a:t>1/19/2026</a:t>
             </a:fld>
             <a:endParaRPr lang="en-US"/>
           </a:p>
@@ -1874,7 +1878,7 @@
           <a:p>
             <a:fld id="{3E22BF2E-04DA-469E-97C5-BB68A0368813}" type="datetimeFigureOut">
               <a:rPr lang="en-US" smtClean="0"/>
-              <a:t>1/9/2026</a:t>
+              <a:t>1/19/2026</a:t>
             </a:fld>
             <a:endParaRPr lang="en-US"/>
           </a:p>
@@ -2015,7 +2019,7 @@
           <a:p>
             <a:fld id="{3E22BF2E-04DA-469E-97C5-BB68A0368813}" type="datetimeFigureOut">
               <a:rPr lang="en-US" smtClean="0"/>
-              <a:t>1/9/2026</a:t>
+              <a:t>1/19/2026</a:t>
             </a:fld>
             <a:endParaRPr lang="en-US"/>
           </a:p>
@@ -2128,7 +2132,7 @@
           <a:p>
             <a:fld id="{3E22BF2E-04DA-469E-97C5-BB68A0368813}" type="datetimeFigureOut">
               <a:rPr lang="en-US" smtClean="0"/>
-              <a:t>1/9/2026</a:t>
+              <a:t>1/19/2026</a:t>
             </a:fld>
             <a:endParaRPr lang="en-US"/>
           </a:p>
@@ -2439,7 +2443,7 @@
           <a:p>
             <a:fld id="{3E22BF2E-04DA-469E-97C5-BB68A0368813}" type="datetimeFigureOut">
               <a:rPr lang="en-US" smtClean="0"/>
-              <a:t>1/9/2026</a:t>
+              <a:t>1/19/2026</a:t>
             </a:fld>
             <a:endParaRPr lang="en-US"/>
           </a:p>
@@ -2727,7 +2731,7 @@
           <a:p>
             <a:fld id="{3E22BF2E-04DA-469E-97C5-BB68A0368813}" type="datetimeFigureOut">
               <a:rPr lang="en-US" smtClean="0"/>
-              <a:t>1/9/2026</a:t>
+              <a:t>1/19/2026</a:t>
             </a:fld>
             <a:endParaRPr lang="en-US"/>
           </a:p>
@@ -2968,7 +2972,7 @@
           <a:p>
             <a:fld id="{3E22BF2E-04DA-469E-97C5-BB68A0368813}" type="datetimeFigureOut">
               <a:rPr lang="en-US" smtClean="0"/>
-              <a:t>1/9/2026</a:t>
+              <a:t>1/19/2026</a:t>
             </a:fld>
             <a:endParaRPr lang="en-US"/>
           </a:p>
@@ -4010,6 +4014,2030 @@
   <p:cSld>
     <p:spTree>
       <p:nvGrpSpPr>
+        <p:cNvPr id="1" name=""/>
+        <p:cNvGrpSpPr/>
+        <p:nvPr/>
+      </p:nvGrpSpPr>
+      <p:grpSpPr>
+        <a:xfrm>
+          <a:off x="0" y="0"/>
+          <a:ext cx="0" cy="0"/>
+          <a:chOff x="0" y="0"/>
+          <a:chExt cx="0" cy="0"/>
+        </a:xfrm>
+      </p:grpSpPr>
+      <p:sp>
+        <p:nvSpPr>
+          <p:cNvPr id="2" name="Title 1">
+            <a:extLst>
+              <a:ext uri="{FF2B5EF4-FFF2-40B4-BE49-F238E27FC236}">
+                <a16:creationId xmlns:a16="http://schemas.microsoft.com/office/drawing/2014/main" id="{FBC72B55-524F-2A13-6BD8-9A03EF8EAF5D}"/>
+              </a:ext>
+            </a:extLst>
+          </p:cNvPr>
+          <p:cNvSpPr>
+            <a:spLocks noGrp="1"/>
+          </p:cNvSpPr>
+          <p:nvPr>
+            <p:ph type="title"/>
+          </p:nvPr>
+        </p:nvSpPr>
+        <p:spPr/>
+        <p:txBody>
+          <a:bodyPr/>
+          <a:lstStyle/>
+          <a:p>
+            <a:r>
+              <a:rPr lang="en-US" dirty="0"/>
+              <a:t>Convergence of Iterative Policy Evaluation</a:t>
+            </a:r>
+          </a:p>
+        </p:txBody>
+      </p:sp>
+      <mc:AlternateContent xmlns:mc="http://schemas.openxmlformats.org/markup-compatibility/2006">
+        <mc:Choice xmlns:a14="http://schemas.microsoft.com/office/drawing/2010/main" Requires="a14">
+          <p:sp>
+            <p:nvSpPr>
+              <p:cNvPr id="3" name="Content Placeholder 2">
+                <a:extLst>
+                  <a:ext uri="{FF2B5EF4-FFF2-40B4-BE49-F238E27FC236}">
+                    <a16:creationId xmlns:a16="http://schemas.microsoft.com/office/drawing/2014/main" id="{1FC648E6-02D2-1E64-6265-DB7D1C1179F6}"/>
+                  </a:ext>
+                </a:extLst>
+              </p:cNvPr>
+              <p:cNvSpPr>
+                <a:spLocks noGrp="1"/>
+              </p:cNvSpPr>
+              <p:nvPr>
+                <p:ph idx="1"/>
+              </p:nvPr>
+            </p:nvSpPr>
+            <p:spPr>
+              <a:xfrm>
+                <a:off x="838200" y="1397331"/>
+                <a:ext cx="10515600" cy="3258432"/>
+              </a:xfrm>
+            </p:spPr>
+            <p:txBody>
+              <a:bodyPr>
+                <a:normAutofit fontScale="92500" lnSpcReduction="20000"/>
+              </a:bodyPr>
+              <a:lstStyle/>
+              <a:p>
+                <a:r>
+                  <a:rPr lang="en-US" dirty="0"/>
+                  <a:t>The expected Bellman update can be rewritten as an operator:</a:t>
+                </a:r>
+                <a:br>
+                  <a:rPr lang="en-US" dirty="0"/>
+                </a:br>
+                <a:r>
+                  <a:rPr lang="en-US" b="1" dirty="0"/>
+                  <a:t>Expected Bellman Operator </a:t>
+                </a:r>
+                <a14:m>
+                  <m:oMath xmlns:m="http://schemas.openxmlformats.org/officeDocument/2006/math">
+                    <m:sSup>
+                      <m:sSupPr>
+                        <m:ctrlPr>
+                          <a:rPr lang="en-US" b="0" i="1" smtClean="0">
+                            <a:latin typeface="Cambria Math" panose="02040503050406030204" pitchFamily="18" charset="0"/>
+                          </a:rPr>
+                        </m:ctrlPr>
+                      </m:sSupPr>
+                      <m:e>
+                        <m:r>
+                          <a:rPr lang="en-US" b="0" i="1" smtClean="0">
+                            <a:latin typeface="Cambria Math" panose="02040503050406030204" pitchFamily="18" charset="0"/>
+                          </a:rPr>
+                          <m:t>𝑇</m:t>
+                        </m:r>
+                      </m:e>
+                      <m:sup>
+                        <m:r>
+                          <a:rPr lang="en-US" b="0" i="1" smtClean="0">
+                            <a:latin typeface="Cambria Math" panose="02040503050406030204" pitchFamily="18" charset="0"/>
+                          </a:rPr>
+                          <m:t>𝜋</m:t>
+                        </m:r>
+                      </m:sup>
+                    </m:sSup>
+                  </m:oMath>
+                </a14:m>
+                <a:r>
+                  <a:rPr lang="en-US" dirty="0"/>
+                  <a:t>:</a:t>
+                </a:r>
+              </a:p>
+              <a:p>
+                <a:endParaRPr lang="en-US" dirty="0"/>
+              </a:p>
+              <a:p>
+                <a:pPr marL="0" indent="0">
+                  <a:buNone/>
+                </a:pPr>
+                <a14:m>
+                  <m:oMathPara xmlns:m="http://schemas.openxmlformats.org/officeDocument/2006/math">
+                    <m:oMathParaPr>
+                      <m:jc m:val="centerGroup"/>
+                    </m:oMathParaPr>
+                    <m:oMath xmlns:m="http://schemas.openxmlformats.org/officeDocument/2006/math">
+                      <m:sSup>
+                        <m:sSupPr>
+                          <m:ctrlPr>
+                            <a:rPr lang="en-US" b="0" i="1" smtClean="0">
+                              <a:latin typeface="Cambria Math" panose="02040503050406030204" pitchFamily="18" charset="0"/>
+                            </a:rPr>
+                          </m:ctrlPr>
+                        </m:sSupPr>
+                        <m:e>
+                          <m:r>
+                            <a:rPr lang="en-US" b="0" i="1" smtClean="0">
+                              <a:latin typeface="Cambria Math" panose="02040503050406030204" pitchFamily="18" charset="0"/>
+                            </a:rPr>
+                            <m:t>(</m:t>
+                          </m:r>
+                          <m:r>
+                            <a:rPr lang="en-US" b="0" i="1" smtClean="0">
+                              <a:latin typeface="Cambria Math" panose="02040503050406030204" pitchFamily="18" charset="0"/>
+                            </a:rPr>
+                            <m:t>𝑇</m:t>
+                          </m:r>
+                        </m:e>
+                        <m:sup>
+                          <m:r>
+                            <a:rPr lang="en-US" b="0" i="1" smtClean="0">
+                              <a:latin typeface="Cambria Math" panose="02040503050406030204" pitchFamily="18" charset="0"/>
+                            </a:rPr>
+                            <m:t>𝜋</m:t>
+                          </m:r>
+                        </m:sup>
+                      </m:sSup>
+                      <m:r>
+                        <a:rPr lang="en-US" b="0" i="1" smtClean="0">
+                          <a:latin typeface="Cambria Math" panose="02040503050406030204" pitchFamily="18" charset="0"/>
+                        </a:rPr>
+                        <m:t>𝑣</m:t>
+                      </m:r>
+                      <m:r>
+                        <a:rPr lang="en-US" b="0" i="1" smtClean="0">
+                          <a:latin typeface="Cambria Math" panose="02040503050406030204" pitchFamily="18" charset="0"/>
+                        </a:rPr>
+                        <m:t>)</m:t>
+                      </m:r>
+                      <m:d>
+                        <m:dPr>
+                          <m:ctrlPr>
+                            <a:rPr lang="en-US" b="0" i="1" smtClean="0">
+                              <a:latin typeface="Cambria Math" panose="02040503050406030204" pitchFamily="18" charset="0"/>
+                            </a:rPr>
+                          </m:ctrlPr>
+                        </m:dPr>
+                        <m:e>
+                          <m:r>
+                            <a:rPr lang="en-US" b="0" i="1" smtClean="0">
+                              <a:latin typeface="Cambria Math" panose="02040503050406030204" pitchFamily="18" charset="0"/>
+                            </a:rPr>
+                            <m:t>𝑠</m:t>
+                          </m:r>
+                        </m:e>
+                      </m:d>
+                      <m:r>
+                        <a:rPr lang="en-US" b="0" i="1" smtClean="0">
+                          <a:latin typeface="Cambria Math" panose="02040503050406030204" pitchFamily="18" charset="0"/>
+                        </a:rPr>
+                        <m:t>=</m:t>
+                      </m:r>
+                      <m:nary>
+                        <m:naryPr>
+                          <m:chr m:val="∑"/>
+                          <m:supHide m:val="on"/>
+                          <m:ctrlPr>
+                            <a:rPr lang="en-US" i="1">
+                              <a:latin typeface="Cambria Math" panose="02040503050406030204" pitchFamily="18" charset="0"/>
+                            </a:rPr>
+                          </m:ctrlPr>
+                        </m:naryPr>
+                        <m:sub>
+                          <m:r>
+                            <a:rPr lang="en-US" i="1">
+                              <a:latin typeface="Cambria Math" panose="02040503050406030204" pitchFamily="18" charset="0"/>
+                            </a:rPr>
+                            <m:t>𝑎</m:t>
+                          </m:r>
+                        </m:sub>
+                        <m:sup/>
+                        <m:e>
+                          <m:r>
+                            <a:rPr lang="en-US" i="1">
+                              <a:latin typeface="Cambria Math" panose="02040503050406030204" pitchFamily="18" charset="0"/>
+                            </a:rPr>
+                            <m:t>𝜋</m:t>
+                          </m:r>
+                          <m:r>
+                            <a:rPr lang="en-US" i="1">
+                              <a:latin typeface="Cambria Math" panose="02040503050406030204" pitchFamily="18" charset="0"/>
+                            </a:rPr>
+                            <m:t>(</m:t>
+                          </m:r>
+                          <m:r>
+                            <a:rPr lang="en-US" i="1">
+                              <a:latin typeface="Cambria Math" panose="02040503050406030204" pitchFamily="18" charset="0"/>
+                            </a:rPr>
+                            <m:t>𝑎</m:t>
+                          </m:r>
+                          <m:r>
+                            <a:rPr lang="en-US" i="1">
+                              <a:latin typeface="Cambria Math" panose="02040503050406030204" pitchFamily="18" charset="0"/>
+                            </a:rPr>
+                            <m:t>|</m:t>
+                          </m:r>
+                          <m:r>
+                            <a:rPr lang="en-US" i="1">
+                              <a:latin typeface="Cambria Math" panose="02040503050406030204" pitchFamily="18" charset="0"/>
+                            </a:rPr>
+                            <m:t>𝑠</m:t>
+                          </m:r>
+                          <m:r>
+                            <a:rPr lang="en-US" i="1">
+                              <a:latin typeface="Cambria Math" panose="02040503050406030204" pitchFamily="18" charset="0"/>
+                            </a:rPr>
+                            <m:t>)</m:t>
+                          </m:r>
+                        </m:e>
+                      </m:nary>
+                      <m:nary>
+                        <m:naryPr>
+                          <m:chr m:val="∑"/>
+                          <m:supHide m:val="on"/>
+                          <m:ctrlPr>
+                            <a:rPr lang="en-US" i="1">
+                              <a:latin typeface="Cambria Math" panose="02040503050406030204" pitchFamily="18" charset="0"/>
+                            </a:rPr>
+                          </m:ctrlPr>
+                        </m:naryPr>
+                        <m:sub>
+                          <m:sSup>
+                            <m:sSupPr>
+                              <m:ctrlPr>
+                                <a:rPr lang="en-US" i="1">
+                                  <a:latin typeface="Cambria Math" panose="02040503050406030204" pitchFamily="18" charset="0"/>
+                                </a:rPr>
+                              </m:ctrlPr>
+                            </m:sSupPr>
+                            <m:e>
+                              <m:r>
+                                <a:rPr lang="en-US" i="1">
+                                  <a:latin typeface="Cambria Math" panose="02040503050406030204" pitchFamily="18" charset="0"/>
+                                </a:rPr>
+                                <m:t>𝑠</m:t>
+                              </m:r>
+                            </m:e>
+                            <m:sup>
+                              <m:r>
+                                <a:rPr lang="en-US" i="1">
+                                  <a:latin typeface="Cambria Math" panose="02040503050406030204" pitchFamily="18" charset="0"/>
+                                </a:rPr>
+                                <m:t>′</m:t>
+                              </m:r>
+                            </m:sup>
+                          </m:sSup>
+                          <m:r>
+                            <a:rPr lang="en-US" i="1">
+                              <a:latin typeface="Cambria Math" panose="02040503050406030204" pitchFamily="18" charset="0"/>
+                            </a:rPr>
+                            <m:t>,</m:t>
+                          </m:r>
+                          <m:r>
+                            <a:rPr lang="en-US" i="1">
+                              <a:latin typeface="Cambria Math" panose="02040503050406030204" pitchFamily="18" charset="0"/>
+                            </a:rPr>
+                            <m:t>𝑟</m:t>
+                          </m:r>
+                        </m:sub>
+                        <m:sup/>
+                        <m:e>
+                          <m:r>
+                            <a:rPr lang="en-US" i="1">
+                              <a:latin typeface="Cambria Math" panose="02040503050406030204" pitchFamily="18" charset="0"/>
+                            </a:rPr>
+                            <m:t>𝑝</m:t>
+                          </m:r>
+                          <m:d>
+                            <m:dPr>
+                              <m:endChr m:val="|"/>
+                              <m:ctrlPr>
+                                <a:rPr lang="en-US" i="1">
+                                  <a:latin typeface="Cambria Math" panose="02040503050406030204" pitchFamily="18" charset="0"/>
+                                </a:rPr>
+                              </m:ctrlPr>
+                            </m:dPr>
+                            <m:e>
+                              <m:sSup>
+                                <m:sSupPr>
+                                  <m:ctrlPr>
+                                    <a:rPr lang="en-US" i="1">
+                                      <a:latin typeface="Cambria Math" panose="02040503050406030204" pitchFamily="18" charset="0"/>
+                                    </a:rPr>
+                                  </m:ctrlPr>
+                                </m:sSupPr>
+                                <m:e>
+                                  <m:r>
+                                    <a:rPr lang="en-US" i="1">
+                                      <a:latin typeface="Cambria Math" panose="02040503050406030204" pitchFamily="18" charset="0"/>
+                                    </a:rPr>
+                                    <m:t>𝑠</m:t>
+                                  </m:r>
+                                </m:e>
+                                <m:sup>
+                                  <m:r>
+                                    <a:rPr lang="en-US" i="1">
+                                      <a:latin typeface="Cambria Math" panose="02040503050406030204" pitchFamily="18" charset="0"/>
+                                    </a:rPr>
+                                    <m:t>′</m:t>
+                                  </m:r>
+                                </m:sup>
+                              </m:sSup>
+                              <m:r>
+                                <a:rPr lang="en-US" i="1">
+                                  <a:latin typeface="Cambria Math" panose="02040503050406030204" pitchFamily="18" charset="0"/>
+                                </a:rPr>
+                                <m:t>,</m:t>
+                              </m:r>
+                              <m:r>
+                                <a:rPr lang="en-US" i="1">
+                                  <a:latin typeface="Cambria Math" panose="02040503050406030204" pitchFamily="18" charset="0"/>
+                                </a:rPr>
+                                <m:t>𝑟</m:t>
+                              </m:r>
+                              <m:r>
+                                <a:rPr lang="en-US" i="1">
+                                  <a:latin typeface="Cambria Math" panose="02040503050406030204" pitchFamily="18" charset="0"/>
+                                </a:rPr>
+                                <m:t> </m:t>
+                              </m:r>
+                            </m:e>
+                          </m:d>
+                          <m:r>
+                            <a:rPr lang="en-US" i="1">
+                              <a:latin typeface="Cambria Math" panose="02040503050406030204" pitchFamily="18" charset="0"/>
+                            </a:rPr>
+                            <m:t>𝑠</m:t>
+                          </m:r>
+                          <m:r>
+                            <a:rPr lang="en-US" i="1">
+                              <a:latin typeface="Cambria Math" panose="02040503050406030204" pitchFamily="18" charset="0"/>
+                            </a:rPr>
+                            <m:t>,</m:t>
+                          </m:r>
+                          <m:r>
+                            <a:rPr lang="en-US" i="1">
+                              <a:latin typeface="Cambria Math" panose="02040503050406030204" pitchFamily="18" charset="0"/>
+                            </a:rPr>
+                            <m:t>𝑎</m:t>
+                          </m:r>
+                          <m:r>
+                            <a:rPr lang="en-US" i="1">
+                              <a:latin typeface="Cambria Math" panose="02040503050406030204" pitchFamily="18" charset="0"/>
+                            </a:rPr>
+                            <m:t>)[</m:t>
+                          </m:r>
+                          <m:r>
+                            <a:rPr lang="en-US" i="1">
+                              <a:latin typeface="Cambria Math" panose="02040503050406030204" pitchFamily="18" charset="0"/>
+                            </a:rPr>
+                            <m:t>𝑟</m:t>
+                          </m:r>
+                          <m:r>
+                            <a:rPr lang="en-US" i="1">
+                              <a:latin typeface="Cambria Math" panose="02040503050406030204" pitchFamily="18" charset="0"/>
+                            </a:rPr>
+                            <m:t>+</m:t>
+                          </m:r>
+                          <m:r>
+                            <a:rPr lang="en-US" i="1">
+                              <a:latin typeface="Cambria Math" panose="02040503050406030204" pitchFamily="18" charset="0"/>
+                            </a:rPr>
+                            <m:t>𝛾</m:t>
+                          </m:r>
+                          <m:r>
+                            <a:rPr lang="en-US" b="0" i="1" smtClean="0">
+                              <a:latin typeface="Cambria Math" panose="02040503050406030204" pitchFamily="18" charset="0"/>
+                            </a:rPr>
+                            <m:t>𝑣</m:t>
+                          </m:r>
+                          <m:d>
+                            <m:dPr>
+                              <m:ctrlPr>
+                                <a:rPr lang="en-US" i="1">
+                                  <a:latin typeface="Cambria Math" panose="02040503050406030204" pitchFamily="18" charset="0"/>
+                                </a:rPr>
+                              </m:ctrlPr>
+                            </m:dPr>
+                            <m:e>
+                              <m:sSup>
+                                <m:sSupPr>
+                                  <m:ctrlPr>
+                                    <a:rPr lang="en-US" i="1">
+                                      <a:latin typeface="Cambria Math" panose="02040503050406030204" pitchFamily="18" charset="0"/>
+                                    </a:rPr>
+                                  </m:ctrlPr>
+                                </m:sSupPr>
+                                <m:e>
+                                  <m:r>
+                                    <a:rPr lang="en-US" i="1">
+                                      <a:latin typeface="Cambria Math" panose="02040503050406030204" pitchFamily="18" charset="0"/>
+                                    </a:rPr>
+                                    <m:t>𝑠</m:t>
+                                  </m:r>
+                                </m:e>
+                                <m:sup>
+                                  <m:r>
+                                    <a:rPr lang="en-US" i="1">
+                                      <a:latin typeface="Cambria Math" panose="02040503050406030204" pitchFamily="18" charset="0"/>
+                                    </a:rPr>
+                                    <m:t>′</m:t>
+                                  </m:r>
+                                </m:sup>
+                              </m:sSup>
+                            </m:e>
+                          </m:d>
+                          <m:r>
+                            <a:rPr lang="en-US" i="1">
+                              <a:latin typeface="Cambria Math" panose="02040503050406030204" pitchFamily="18" charset="0"/>
+                            </a:rPr>
+                            <m:t>]</m:t>
+                          </m:r>
+                        </m:e>
+                      </m:nary>
+                    </m:oMath>
+                  </m:oMathPara>
+                </a14:m>
+                <a:endParaRPr lang="en-US" dirty="0"/>
+              </a:p>
+              <a:p>
+                <a:endParaRPr lang="en-US" dirty="0"/>
+              </a:p>
+              <a:p>
+                <a:r>
+                  <a:rPr lang="en-US" dirty="0"/>
+                  <a:t>The operator </a:t>
+                </a:r>
+                <a14:m>
+                  <m:oMath xmlns:m="http://schemas.openxmlformats.org/officeDocument/2006/math">
+                    <m:sSup>
+                      <m:sSupPr>
+                        <m:ctrlPr>
+                          <a:rPr lang="en-US" b="0" i="1" smtClean="0">
+                            <a:latin typeface="Cambria Math" panose="02040503050406030204" pitchFamily="18" charset="0"/>
+                          </a:rPr>
+                        </m:ctrlPr>
+                      </m:sSupPr>
+                      <m:e>
+                        <m:r>
+                          <a:rPr lang="en-US" b="0" i="1" smtClean="0">
+                            <a:latin typeface="Cambria Math" panose="02040503050406030204" pitchFamily="18" charset="0"/>
+                          </a:rPr>
+                          <m:t>𝑇</m:t>
+                        </m:r>
+                      </m:e>
+                      <m:sup>
+                        <m:r>
+                          <a:rPr lang="en-US" b="0" i="1" smtClean="0">
+                            <a:latin typeface="Cambria Math" panose="02040503050406030204" pitchFamily="18" charset="0"/>
+                          </a:rPr>
+                          <m:t>𝜋</m:t>
+                        </m:r>
+                      </m:sup>
+                    </m:sSup>
+                  </m:oMath>
+                </a14:m>
+                <a:r>
+                  <a:rPr lang="en-US" dirty="0"/>
+                  <a:t> is </a:t>
+                </a:r>
+                <a14:m>
+                  <m:oMath xmlns:m="http://schemas.openxmlformats.org/officeDocument/2006/math">
+                    <m:r>
+                      <a:rPr lang="en-US" b="0" i="1" smtClean="0">
+                        <a:latin typeface="Cambria Math" panose="02040503050406030204" pitchFamily="18" charset="0"/>
+                      </a:rPr>
+                      <m:t>𝛾</m:t>
+                    </m:r>
+                  </m:oMath>
+                </a14:m>
+                <a:r>
+                  <a:rPr lang="en-US" dirty="0"/>
+                  <a:t>-contracting:</a:t>
+                </a:r>
+              </a:p>
+              <a:p>
+                <a:pPr marL="0" indent="0">
+                  <a:buNone/>
+                </a:pPr>
+                <a14:m>
+                  <m:oMathPara xmlns:m="http://schemas.openxmlformats.org/officeDocument/2006/math">
+                    <m:oMathParaPr>
+                      <m:jc m:val="centerGroup"/>
+                    </m:oMathParaPr>
+                    <m:oMath xmlns:m="http://schemas.openxmlformats.org/officeDocument/2006/math">
+                      <m:sSub>
+                        <m:sSubPr>
+                          <m:ctrlPr>
+                            <a:rPr lang="en-US" b="0" i="1" smtClean="0">
+                              <a:latin typeface="Cambria Math" panose="02040503050406030204" pitchFamily="18" charset="0"/>
+                            </a:rPr>
+                          </m:ctrlPr>
+                        </m:sSubPr>
+                        <m:e>
+                          <m:d>
+                            <m:dPr>
+                              <m:begChr m:val="‖"/>
+                              <m:endChr m:val="‖"/>
+                              <m:ctrlPr>
+                                <a:rPr lang="en-US" i="1" smtClean="0">
+                                  <a:latin typeface="Cambria Math" panose="02040503050406030204" pitchFamily="18" charset="0"/>
+                                </a:rPr>
+                              </m:ctrlPr>
+                            </m:dPr>
+                            <m:e>
+                              <m:sSup>
+                                <m:sSupPr>
+                                  <m:ctrlPr>
+                                    <a:rPr lang="en-US" b="0" i="1" smtClean="0">
+                                      <a:latin typeface="Cambria Math" panose="02040503050406030204" pitchFamily="18" charset="0"/>
+                                    </a:rPr>
+                                  </m:ctrlPr>
+                                </m:sSupPr>
+                                <m:e>
+                                  <m:r>
+                                    <a:rPr lang="en-US" b="0" i="1" smtClean="0">
+                                      <a:latin typeface="Cambria Math" panose="02040503050406030204" pitchFamily="18" charset="0"/>
+                                    </a:rPr>
+                                    <m:t>𝑇</m:t>
+                                  </m:r>
+                                </m:e>
+                                <m:sup>
+                                  <m:r>
+                                    <a:rPr lang="en-US" b="0" i="1" smtClean="0">
+                                      <a:latin typeface="Cambria Math" panose="02040503050406030204" pitchFamily="18" charset="0"/>
+                                    </a:rPr>
+                                    <m:t>𝜋</m:t>
+                                  </m:r>
+                                </m:sup>
+                              </m:sSup>
+                              <m:sSub>
+                                <m:sSubPr>
+                                  <m:ctrlPr>
+                                    <a:rPr lang="en-US" b="0" i="1" smtClean="0">
+                                      <a:latin typeface="Cambria Math" panose="02040503050406030204" pitchFamily="18" charset="0"/>
+                                    </a:rPr>
+                                  </m:ctrlPr>
+                                </m:sSubPr>
+                                <m:e>
+                                  <m:r>
+                                    <a:rPr lang="en-US" b="0" i="1" smtClean="0">
+                                      <a:latin typeface="Cambria Math" panose="02040503050406030204" pitchFamily="18" charset="0"/>
+                                    </a:rPr>
+                                    <m:t>𝑣</m:t>
+                                  </m:r>
+                                </m:e>
+                                <m:sub>
+                                  <m:r>
+                                    <a:rPr lang="en-US" b="0" i="1" smtClean="0">
+                                      <a:latin typeface="Cambria Math" panose="02040503050406030204" pitchFamily="18" charset="0"/>
+                                    </a:rPr>
+                                    <m:t>𝜋</m:t>
+                                  </m:r>
+                                </m:sub>
+                              </m:sSub>
+                              <m:r>
+                                <a:rPr lang="en-US" b="0" i="1" smtClean="0">
+                                  <a:latin typeface="Cambria Math" panose="02040503050406030204" pitchFamily="18" charset="0"/>
+                                </a:rPr>
+                                <m:t>−</m:t>
+                              </m:r>
+                              <m:sSup>
+                                <m:sSupPr>
+                                  <m:ctrlPr>
+                                    <a:rPr lang="en-US" b="0" i="1" smtClean="0">
+                                      <a:latin typeface="Cambria Math" panose="02040503050406030204" pitchFamily="18" charset="0"/>
+                                    </a:rPr>
+                                  </m:ctrlPr>
+                                </m:sSupPr>
+                                <m:e>
+                                  <m:r>
+                                    <a:rPr lang="en-US" b="0" i="1" smtClean="0">
+                                      <a:latin typeface="Cambria Math" panose="02040503050406030204" pitchFamily="18" charset="0"/>
+                                    </a:rPr>
+                                    <m:t>𝑇</m:t>
+                                  </m:r>
+                                </m:e>
+                                <m:sup>
+                                  <m:r>
+                                    <a:rPr lang="en-US" b="0" i="1" smtClean="0">
+                                      <a:latin typeface="Cambria Math" panose="02040503050406030204" pitchFamily="18" charset="0"/>
+                                    </a:rPr>
+                                    <m:t>𝜋</m:t>
+                                  </m:r>
+                                </m:sup>
+                              </m:sSup>
+                              <m:r>
+                                <a:rPr lang="en-US" b="0" i="1" smtClean="0">
+                                  <a:latin typeface="Cambria Math" panose="02040503050406030204" pitchFamily="18" charset="0"/>
+                                </a:rPr>
+                                <m:t>𝑣</m:t>
+                              </m:r>
+                            </m:e>
+                          </m:d>
+                        </m:e>
+                        <m:sub>
+                          <m:r>
+                            <a:rPr lang="en-US" b="0" i="1" smtClean="0">
+                              <a:latin typeface="Cambria Math" panose="02040503050406030204" pitchFamily="18" charset="0"/>
+                            </a:rPr>
+                            <m:t>∞</m:t>
+                          </m:r>
+                        </m:sub>
+                      </m:sSub>
+                      <m:r>
+                        <a:rPr lang="en-US" b="0" i="1" smtClean="0">
+                          <a:latin typeface="Cambria Math" panose="02040503050406030204" pitchFamily="18" charset="0"/>
+                        </a:rPr>
+                        <m:t>≤ </m:t>
+                      </m:r>
+                      <m:sSub>
+                        <m:sSubPr>
+                          <m:ctrlPr>
+                            <a:rPr lang="en-US" i="1">
+                              <a:latin typeface="Cambria Math" panose="02040503050406030204" pitchFamily="18" charset="0"/>
+                            </a:rPr>
+                          </m:ctrlPr>
+                        </m:sSubPr>
+                        <m:e>
+                          <m:r>
+                            <a:rPr lang="en-US" b="0" i="1" smtClean="0">
+                              <a:latin typeface="Cambria Math" panose="02040503050406030204" pitchFamily="18" charset="0"/>
+                            </a:rPr>
+                            <m:t>𝛾</m:t>
+                          </m:r>
+                          <m:d>
+                            <m:dPr>
+                              <m:begChr m:val="‖"/>
+                              <m:endChr m:val="‖"/>
+                              <m:ctrlPr>
+                                <a:rPr lang="en-US" i="1">
+                                  <a:latin typeface="Cambria Math" panose="02040503050406030204" pitchFamily="18" charset="0"/>
+                                </a:rPr>
+                              </m:ctrlPr>
+                            </m:dPr>
+                            <m:e>
+                              <m:sSub>
+                                <m:sSubPr>
+                                  <m:ctrlPr>
+                                    <a:rPr lang="en-US" b="0" i="1" smtClean="0">
+                                      <a:latin typeface="Cambria Math" panose="02040503050406030204" pitchFamily="18" charset="0"/>
+                                    </a:rPr>
+                                  </m:ctrlPr>
+                                </m:sSubPr>
+                                <m:e>
+                                  <m:r>
+                                    <a:rPr lang="en-US" i="1">
+                                      <a:latin typeface="Cambria Math" panose="02040503050406030204" pitchFamily="18" charset="0"/>
+                                    </a:rPr>
+                                    <m:t>𝑣</m:t>
+                                  </m:r>
+                                </m:e>
+                                <m:sub>
+                                  <m:r>
+                                    <a:rPr lang="en-US" b="0" i="1" smtClean="0">
+                                      <a:latin typeface="Cambria Math" panose="02040503050406030204" pitchFamily="18" charset="0"/>
+                                    </a:rPr>
+                                    <m:t>𝜋</m:t>
+                                  </m:r>
+                                </m:sub>
+                              </m:sSub>
+                              <m:r>
+                                <a:rPr lang="en-US" i="1">
+                                  <a:latin typeface="Cambria Math" panose="02040503050406030204" pitchFamily="18" charset="0"/>
+                                </a:rPr>
+                                <m:t>−</m:t>
+                              </m:r>
+                              <m:r>
+                                <a:rPr lang="en-US" b="0" i="1" smtClean="0">
+                                  <a:latin typeface="Cambria Math" panose="02040503050406030204" pitchFamily="18" charset="0"/>
+                                </a:rPr>
+                                <m:t>𝑣</m:t>
+                              </m:r>
+                            </m:e>
+                          </m:d>
+                        </m:e>
+                        <m:sub>
+                          <m:r>
+                            <a:rPr lang="en-US" i="1">
+                              <a:latin typeface="Cambria Math" panose="02040503050406030204" pitchFamily="18" charset="0"/>
+                            </a:rPr>
+                            <m:t>∞</m:t>
+                          </m:r>
+                        </m:sub>
+                      </m:sSub>
+                      <m:r>
+                        <a:rPr lang="en-US" b="0" i="1" smtClean="0">
+                          <a:latin typeface="Cambria Math" panose="02040503050406030204" pitchFamily="18" charset="0"/>
+                        </a:rPr>
+                        <m:t>  </m:t>
+                      </m:r>
+                      <m:r>
+                        <m:rPr>
+                          <m:nor/>
+                        </m:rPr>
+                        <a:rPr lang="en-US" b="0" i="0" smtClean="0">
+                          <a:latin typeface="Cambria Math" panose="02040503050406030204" pitchFamily="18" charset="0"/>
+                        </a:rPr>
+                        <m:t> </m:t>
+                      </m:r>
+                      <m:r>
+                        <m:rPr>
+                          <m:nor/>
+                        </m:rPr>
+                        <a:rPr lang="en-US" b="0" i="0" smtClean="0">
+                          <a:latin typeface="Cambria Math" panose="02040503050406030204" pitchFamily="18" charset="0"/>
+                        </a:rPr>
+                        <m:t>for</m:t>
+                      </m:r>
+                      <m:r>
+                        <m:rPr>
+                          <m:nor/>
+                        </m:rPr>
+                        <a:rPr lang="en-US" b="0" i="0" smtClean="0">
+                          <a:latin typeface="Cambria Math" panose="02040503050406030204" pitchFamily="18" charset="0"/>
+                        </a:rPr>
+                        <m:t> </m:t>
+                      </m:r>
+                      <m:r>
+                        <m:rPr>
+                          <m:nor/>
+                        </m:rPr>
+                        <a:rPr lang="en-US" b="0" i="0" smtClean="0">
+                          <a:latin typeface="Cambria Math" panose="02040503050406030204" pitchFamily="18" charset="0"/>
+                        </a:rPr>
+                        <m:t>some</m:t>
+                      </m:r>
+                      <m:r>
+                        <m:rPr>
+                          <m:nor/>
+                        </m:rPr>
+                        <a:rPr lang="en-US" b="0" i="0" smtClean="0">
+                          <a:latin typeface="Cambria Math" panose="02040503050406030204" pitchFamily="18" charset="0"/>
+                        </a:rPr>
+                        <m:t>   </m:t>
+                      </m:r>
+                      <m:r>
+                        <a:rPr lang="en-US" b="0" i="1" smtClean="0">
+                          <a:latin typeface="Cambria Math" panose="02040503050406030204" pitchFamily="18" charset="0"/>
+                        </a:rPr>
+                        <m:t>𝛾</m:t>
+                      </m:r>
+                      <m:r>
+                        <a:rPr lang="en-US" b="0" i="1" smtClean="0">
+                          <a:latin typeface="Cambria Math" panose="02040503050406030204" pitchFamily="18" charset="0"/>
+                        </a:rPr>
+                        <m:t>&lt;1</m:t>
+                      </m:r>
+                    </m:oMath>
+                  </m:oMathPara>
+                </a14:m>
+                <a:endParaRPr lang="en-US" dirty="0"/>
+              </a:p>
+              <a:p>
+                <a:pPr marL="0" indent="0">
+                  <a:buNone/>
+                </a:pPr>
+                <a:endParaRPr lang="en-US" dirty="0"/>
+              </a:p>
+            </p:txBody>
+          </p:sp>
+        </mc:Choice>
+        <mc:Fallback>
+          <p:sp>
+            <p:nvSpPr>
+              <p:cNvPr id="3" name="Content Placeholder 2">
+                <a:extLst>
+                  <a:ext uri="{FF2B5EF4-FFF2-40B4-BE49-F238E27FC236}">
+                    <a16:creationId xmlns:a16="http://schemas.microsoft.com/office/drawing/2014/main" id="{1FC648E6-02D2-1E64-6265-DB7D1C1179F6}"/>
+                  </a:ext>
+                </a:extLst>
+              </p:cNvPr>
+              <p:cNvSpPr>
+                <a:spLocks noGrp="1" noRot="1" noChangeAspect="1" noMove="1" noResize="1" noEditPoints="1" noAdjustHandles="1" noChangeArrowheads="1" noChangeShapeType="1" noTextEdit="1"/>
+              </p:cNvSpPr>
+              <p:nvPr>
+                <p:ph idx="1"/>
+              </p:nvPr>
+            </p:nvSpPr>
+            <p:spPr>
+              <a:xfrm>
+                <a:off x="838200" y="1397331"/>
+                <a:ext cx="10515600" cy="3258432"/>
+              </a:xfrm>
+              <a:blipFill>
+                <a:blip r:embed="rId2"/>
+                <a:stretch>
+                  <a:fillRect l="-928" t="-4673"/>
+                </a:stretch>
+              </a:blipFill>
+            </p:spPr>
+            <p:txBody>
+              <a:bodyPr/>
+              <a:lstStyle/>
+              <a:p>
+                <a:r>
+                  <a:rPr lang="en-US">
+                    <a:noFill/>
+                  </a:rPr>
+                  <a:t> </a:t>
+                </a:r>
+              </a:p>
+            </p:txBody>
+          </p:sp>
+        </mc:Fallback>
+      </mc:AlternateContent>
+      <mc:AlternateContent xmlns:mc="http://schemas.openxmlformats.org/markup-compatibility/2006">
+        <mc:Choice xmlns:a14="http://schemas.microsoft.com/office/drawing/2010/main" Requires="a14">
+          <p:sp>
+            <p:nvSpPr>
+              <p:cNvPr id="4" name="Speech Bubble: Rectangle with Corners Rounded 3">
+                <a:extLst>
+                  <a:ext uri="{FF2B5EF4-FFF2-40B4-BE49-F238E27FC236}">
+                    <a16:creationId xmlns:a16="http://schemas.microsoft.com/office/drawing/2014/main" id="{5515D800-FF17-B0C5-3048-BCF34084F051}"/>
+                  </a:ext>
+                </a:extLst>
+              </p:cNvPr>
+              <p:cNvSpPr/>
+              <p:nvPr/>
+            </p:nvSpPr>
+            <p:spPr>
+              <a:xfrm>
+                <a:off x="2596617" y="5460670"/>
+                <a:ext cx="3776262" cy="1214547"/>
+              </a:xfrm>
+              <a:prstGeom prst="wedgeRoundRectCallout">
+                <a:avLst>
+                  <a:gd name="adj1" fmla="val 17160"/>
+                  <a:gd name="adj2" fmla="val -122557"/>
+                  <a:gd name="adj3" fmla="val 16667"/>
+                </a:avLst>
+              </a:prstGeom>
+            </p:spPr>
+            <p:style>
+              <a:lnRef idx="2">
+                <a:schemeClr val="accent1">
+                  <a:shade val="15000"/>
+                </a:schemeClr>
+              </a:lnRef>
+              <a:fillRef idx="1">
+                <a:schemeClr val="accent1"/>
+              </a:fillRef>
+              <a:effectRef idx="0">
+                <a:schemeClr val="accent1"/>
+              </a:effectRef>
+              <a:fontRef idx="minor">
+                <a:schemeClr val="lt1"/>
+              </a:fontRef>
+            </p:style>
+            <p:txBody>
+              <a:bodyPr rtlCol="0" anchor="ctr"/>
+              <a:lstStyle/>
+              <a:p>
+                <a:pPr algn="ctr"/>
+                <a:r>
+                  <a:rPr lang="en-US" dirty="0"/>
+                  <a:t>This means the largest difference (infinity norm) will be reduced, leading to convergence if </a:t>
+                </a:r>
+                <a14:m>
+                  <m:oMath xmlns:m="http://schemas.openxmlformats.org/officeDocument/2006/math">
+                    <m:sSup>
+                      <m:sSupPr>
+                        <m:ctrlPr>
+                          <a:rPr lang="en-US" b="0" i="1" smtClean="0">
+                            <a:latin typeface="Cambria Math" panose="02040503050406030204" pitchFamily="18" charset="0"/>
+                          </a:rPr>
+                        </m:ctrlPr>
+                      </m:sSupPr>
+                      <m:e>
+                        <m:r>
+                          <a:rPr lang="en-US" b="0" i="1" smtClean="0">
+                            <a:latin typeface="Cambria Math" panose="02040503050406030204" pitchFamily="18" charset="0"/>
+                          </a:rPr>
+                          <m:t>𝑇</m:t>
+                        </m:r>
+                      </m:e>
+                      <m:sup>
+                        <m:r>
+                          <a:rPr lang="en-US" b="0" i="1" smtClean="0">
+                            <a:latin typeface="Cambria Math" panose="02040503050406030204" pitchFamily="18" charset="0"/>
+                          </a:rPr>
+                          <m:t>𝜋</m:t>
+                        </m:r>
+                      </m:sup>
+                    </m:sSup>
+                  </m:oMath>
+                </a14:m>
+                <a:r>
+                  <a:rPr lang="en-US" dirty="0"/>
+                  <a:t> is applied many times.</a:t>
+                </a:r>
+              </a:p>
+            </p:txBody>
+          </p:sp>
+        </mc:Choice>
+        <mc:Fallback>
+          <p:sp>
+            <p:nvSpPr>
+              <p:cNvPr id="4" name="Speech Bubble: Rectangle with Corners Rounded 3">
+                <a:extLst>
+                  <a:ext uri="{FF2B5EF4-FFF2-40B4-BE49-F238E27FC236}">
+                    <a16:creationId xmlns:a16="http://schemas.microsoft.com/office/drawing/2014/main" id="{5515D800-FF17-B0C5-3048-BCF34084F051}"/>
+                  </a:ext>
+                </a:extLst>
+              </p:cNvPr>
+              <p:cNvSpPr>
+                <a:spLocks noRot="1" noChangeAspect="1" noMove="1" noResize="1" noEditPoints="1" noAdjustHandles="1" noChangeArrowheads="1" noChangeShapeType="1" noTextEdit="1"/>
+              </p:cNvSpPr>
+              <p:nvPr/>
+            </p:nvSpPr>
+            <p:spPr>
+              <a:xfrm>
+                <a:off x="2596617" y="5460670"/>
+                <a:ext cx="3776262" cy="1214547"/>
+              </a:xfrm>
+              <a:prstGeom prst="wedgeRoundRectCallout">
+                <a:avLst>
+                  <a:gd name="adj1" fmla="val 17160"/>
+                  <a:gd name="adj2" fmla="val -122557"/>
+                  <a:gd name="adj3" fmla="val 16667"/>
+                </a:avLst>
+              </a:prstGeom>
+              <a:blipFill>
+                <a:blip r:embed="rId3"/>
+                <a:stretch>
+                  <a:fillRect b="-3725"/>
+                </a:stretch>
+              </a:blipFill>
+            </p:spPr>
+            <p:txBody>
+              <a:bodyPr/>
+              <a:lstStyle/>
+              <a:p>
+                <a:r>
+                  <a:rPr lang="en-US">
+                    <a:noFill/>
+                  </a:rPr>
+                  <a:t> </a:t>
+                </a:r>
+              </a:p>
+            </p:txBody>
+          </p:sp>
+        </mc:Fallback>
+      </mc:AlternateContent>
+      <p:sp>
+        <p:nvSpPr>
+          <p:cNvPr id="5" name="Speech Bubble: Rectangle with Corners Rounded 4">
+            <a:extLst>
+              <a:ext uri="{FF2B5EF4-FFF2-40B4-BE49-F238E27FC236}">
+                <a16:creationId xmlns:a16="http://schemas.microsoft.com/office/drawing/2014/main" id="{32C5A7CC-4FA8-C473-6FA9-CC4B56CECEA4}"/>
+              </a:ext>
+            </a:extLst>
+          </p:cNvPr>
+          <p:cNvSpPr/>
+          <p:nvPr/>
+        </p:nvSpPr>
+        <p:spPr>
+          <a:xfrm>
+            <a:off x="7656065" y="5460670"/>
+            <a:ext cx="3198072" cy="1214547"/>
+          </a:xfrm>
+          <a:prstGeom prst="wedgeRoundRectCallout">
+            <a:avLst>
+              <a:gd name="adj1" fmla="val 2965"/>
+              <a:gd name="adj2" fmla="val -120258"/>
+              <a:gd name="adj3" fmla="val 16667"/>
+            </a:avLst>
+          </a:prstGeom>
+        </p:spPr>
+        <p:style>
+          <a:lnRef idx="2">
+            <a:schemeClr val="accent1">
+              <a:shade val="15000"/>
+            </a:schemeClr>
+          </a:lnRef>
+          <a:fillRef idx="1">
+            <a:schemeClr val="accent1"/>
+          </a:fillRef>
+          <a:effectRef idx="0">
+            <a:schemeClr val="accent1"/>
+          </a:effectRef>
+          <a:fontRef idx="minor">
+            <a:schemeClr val="lt1"/>
+          </a:fontRef>
+        </p:style>
+        <p:txBody>
+          <a:bodyPr rtlCol="0" anchor="ctr"/>
+          <a:lstStyle/>
+          <a:p>
+            <a:pPr algn="ctr"/>
+            <a:r>
+              <a:rPr lang="en-US" dirty="0"/>
+              <a:t>Convergence is only guaranteed if the discount rate is strictly smaller than 1!</a:t>
+            </a:r>
+          </a:p>
+        </p:txBody>
+      </p:sp>
+    </p:spTree>
+    <p:extLst>
+      <p:ext uri="{BB962C8B-B14F-4D97-AF65-F5344CB8AC3E}">
+        <p14:creationId xmlns:p14="http://schemas.microsoft.com/office/powerpoint/2010/main" val="3485702501"/>
+      </p:ext>
+    </p:extLst>
+  </p:cSld>
+  <p:clrMapOvr>
+    <a:masterClrMapping/>
+  </p:clrMapOvr>
+</p:sld>
+</file>
+
+<file path=ppt/slides/slide11.xml><?xml version="1.0" encoding="utf-8"?>
+<p:sld xmlns:a="http://schemas.openxmlformats.org/drawingml/2006/main" xmlns:r="http://schemas.openxmlformats.org/officeDocument/2006/relationships" xmlns:p="http://schemas.openxmlformats.org/presentationml/2006/main">
+  <p:cSld>
+    <p:spTree>
+      <p:nvGrpSpPr>
+        <p:cNvPr id="1" name=""/>
+        <p:cNvGrpSpPr/>
+        <p:nvPr/>
+      </p:nvGrpSpPr>
+      <p:grpSpPr>
+        <a:xfrm>
+          <a:off x="0" y="0"/>
+          <a:ext cx="0" cy="0"/>
+          <a:chOff x="0" y="0"/>
+          <a:chExt cx="0" cy="0"/>
+        </a:xfrm>
+      </p:grpSpPr>
+      <p:sp>
+        <p:nvSpPr>
+          <p:cNvPr id="2" name="Title 1">
+            <a:extLst>
+              <a:ext uri="{FF2B5EF4-FFF2-40B4-BE49-F238E27FC236}">
+                <a16:creationId xmlns:a16="http://schemas.microsoft.com/office/drawing/2014/main" id="{4D6978EC-0ABA-0841-5F8F-F9F724EE99ED}"/>
+              </a:ext>
+            </a:extLst>
+          </p:cNvPr>
+          <p:cNvSpPr>
+            <a:spLocks noGrp="1"/>
+          </p:cNvSpPr>
+          <p:nvPr>
+            <p:ph type="title"/>
+          </p:nvPr>
+        </p:nvSpPr>
+        <p:spPr/>
+        <p:txBody>
+          <a:bodyPr/>
+          <a:lstStyle/>
+          <a:p>
+            <a:r>
+              <a:rPr lang="en-US" dirty="0"/>
+              <a:t>Alg. Iterative Policy Evaluation</a:t>
+            </a:r>
+          </a:p>
+        </p:txBody>
+      </p:sp>
+      <p:pic>
+        <p:nvPicPr>
+          <p:cNvPr id="5" name="Picture 4">
+            <a:extLst>
+              <a:ext uri="{FF2B5EF4-FFF2-40B4-BE49-F238E27FC236}">
+                <a16:creationId xmlns:a16="http://schemas.microsoft.com/office/drawing/2014/main" id="{9E571EE0-04FA-AFEF-D4C0-742C0CA1C621}"/>
+              </a:ext>
+            </a:extLst>
+          </p:cNvPr>
+          <p:cNvPicPr>
+            <a:picLocks noChangeAspect="1"/>
+          </p:cNvPicPr>
+          <p:nvPr/>
+        </p:nvPicPr>
+        <p:blipFill>
+          <a:blip r:embed="rId2"/>
+          <a:stretch>
+            <a:fillRect/>
+          </a:stretch>
+        </p:blipFill>
+        <p:spPr>
+          <a:xfrm>
+            <a:off x="1823441" y="1614234"/>
+            <a:ext cx="8545118" cy="3629532"/>
+          </a:xfrm>
+          <a:prstGeom prst="rect">
+            <a:avLst/>
+          </a:prstGeom>
+        </p:spPr>
+      </p:pic>
+      <mc:AlternateContent xmlns:mc="http://schemas.openxmlformats.org/markup-compatibility/2006">
+        <mc:Choice xmlns:a14="http://schemas.microsoft.com/office/drawing/2010/main" Requires="a14">
+          <p:sp>
+            <p:nvSpPr>
+              <p:cNvPr id="3" name="Speech Bubble: Rectangle with Corners Rounded 2">
+                <a:extLst>
+                  <a:ext uri="{FF2B5EF4-FFF2-40B4-BE49-F238E27FC236}">
+                    <a16:creationId xmlns:a16="http://schemas.microsoft.com/office/drawing/2014/main" id="{4FDB9947-9818-7FF7-6A8C-58889DDE4BD2}"/>
+                  </a:ext>
+                </a:extLst>
+              </p:cNvPr>
+              <p:cNvSpPr/>
+              <p:nvPr/>
+            </p:nvSpPr>
+            <p:spPr>
+              <a:xfrm>
+                <a:off x="7838712" y="3329532"/>
+                <a:ext cx="1947462" cy="593313"/>
+              </a:xfrm>
+              <a:prstGeom prst="wedgeRoundRectCallout">
+                <a:avLst>
+                  <a:gd name="adj1" fmla="val -76118"/>
+                  <a:gd name="adj2" fmla="val 99041"/>
+                  <a:gd name="adj3" fmla="val 16667"/>
+                </a:avLst>
+              </a:prstGeom>
+            </p:spPr>
+            <p:style>
+              <a:lnRef idx="2">
+                <a:schemeClr val="accent1">
+                  <a:shade val="15000"/>
+                </a:schemeClr>
+              </a:lnRef>
+              <a:fillRef idx="1">
+                <a:schemeClr val="accent1"/>
+              </a:fillRef>
+              <a:effectRef idx="0">
+                <a:schemeClr val="accent1"/>
+              </a:effectRef>
+              <a:fontRef idx="minor">
+                <a:schemeClr val="lt1"/>
+              </a:fontRef>
+            </p:style>
+            <p:txBody>
+              <a:bodyPr rtlCol="0" anchor="ctr"/>
+              <a:lstStyle/>
+              <a:p>
+                <a:pPr algn="ctr"/>
+                <a:r>
+                  <a:rPr lang="en-US" sz="1400" dirty="0"/>
+                  <a:t>Bellman operator </a:t>
+                </a:r>
+                <a14:m>
+                  <m:oMath xmlns:m="http://schemas.openxmlformats.org/officeDocument/2006/math">
+                    <m:sSup>
+                      <m:sSupPr>
+                        <m:ctrlPr>
+                          <a:rPr lang="en-US" sz="1400" i="1">
+                            <a:latin typeface="Cambria Math" panose="02040503050406030204" pitchFamily="18" charset="0"/>
+                          </a:rPr>
+                        </m:ctrlPr>
+                      </m:sSupPr>
+                      <m:e>
+                        <m:r>
+                          <a:rPr lang="en-US" sz="1400" i="1">
+                            <a:latin typeface="Cambria Math" panose="02040503050406030204" pitchFamily="18" charset="0"/>
+                          </a:rPr>
+                          <m:t>𝑇</m:t>
+                        </m:r>
+                      </m:e>
+                      <m:sup>
+                        <m:r>
+                          <a:rPr lang="en-US" sz="1400" b="0" i="1" smtClean="0">
+                            <a:latin typeface="Cambria Math" panose="02040503050406030204" pitchFamily="18" charset="0"/>
+                          </a:rPr>
+                          <m:t>𝜋</m:t>
+                        </m:r>
+                      </m:sup>
+                    </m:sSup>
+                  </m:oMath>
+                </a14:m>
+                <a:r>
+                  <a:rPr lang="en-US" sz="1400" dirty="0"/>
+                  <a:t>: </a:t>
+                </a:r>
+                <a:br>
+                  <a:rPr lang="en-US" sz="1400" dirty="0"/>
+                </a:br>
+                <a14:m>
+                  <m:oMathPara xmlns:m="http://schemas.openxmlformats.org/officeDocument/2006/math">
+                    <m:oMathParaPr>
+                      <m:jc m:val="centerGroup"/>
+                    </m:oMathParaPr>
+                    <m:oMath xmlns:m="http://schemas.openxmlformats.org/officeDocument/2006/math">
+                      <m:sSub>
+                        <m:sSubPr>
+                          <m:ctrlPr>
+                            <a:rPr lang="en-US" sz="1400" i="1">
+                              <a:latin typeface="Cambria Math" panose="02040503050406030204" pitchFamily="18" charset="0"/>
+                            </a:rPr>
+                          </m:ctrlPr>
+                        </m:sSubPr>
+                        <m:e>
+                          <m:r>
+                            <a:rPr lang="en-US" sz="1400" i="1">
+                              <a:latin typeface="Cambria Math" panose="02040503050406030204" pitchFamily="18" charset="0"/>
+                            </a:rPr>
+                            <m:t>𝑉</m:t>
+                          </m:r>
+                        </m:e>
+                        <m:sub>
+                          <m:r>
+                            <a:rPr lang="en-US" sz="1400" i="1">
+                              <a:latin typeface="Cambria Math" panose="02040503050406030204" pitchFamily="18" charset="0"/>
+                            </a:rPr>
+                            <m:t>𝑘</m:t>
+                          </m:r>
+                          <m:r>
+                            <a:rPr lang="en-US" sz="1400" i="1">
+                              <a:latin typeface="Cambria Math" panose="02040503050406030204" pitchFamily="18" charset="0"/>
+                            </a:rPr>
+                            <m:t>+1</m:t>
+                          </m:r>
+                        </m:sub>
+                      </m:sSub>
+                      <m:r>
+                        <a:rPr lang="en-US" sz="1400" i="1">
+                          <a:latin typeface="Cambria Math" panose="02040503050406030204" pitchFamily="18" charset="0"/>
+                        </a:rPr>
+                        <m:t>=</m:t>
+                      </m:r>
+                      <m:sSup>
+                        <m:sSupPr>
+                          <m:ctrlPr>
+                            <a:rPr lang="en-US" sz="1400" i="1">
+                              <a:latin typeface="Cambria Math" panose="02040503050406030204" pitchFamily="18" charset="0"/>
+                            </a:rPr>
+                          </m:ctrlPr>
+                        </m:sSupPr>
+                        <m:e>
+                          <m:r>
+                            <a:rPr lang="en-US" sz="1400" i="1">
+                              <a:latin typeface="Cambria Math" panose="02040503050406030204" pitchFamily="18" charset="0"/>
+                            </a:rPr>
+                            <m:t>𝑇</m:t>
+                          </m:r>
+                        </m:e>
+                        <m:sup>
+                          <m:r>
+                            <a:rPr lang="en-US" sz="1400" b="0" i="1" smtClean="0">
+                              <a:latin typeface="Cambria Math" panose="02040503050406030204" pitchFamily="18" charset="0"/>
+                            </a:rPr>
+                            <m:t>𝜋</m:t>
+                          </m:r>
+                        </m:sup>
+                      </m:sSup>
+                      <m:sSub>
+                        <m:sSubPr>
+                          <m:ctrlPr>
+                            <a:rPr lang="en-US" sz="1400" i="1">
+                              <a:latin typeface="Cambria Math" panose="02040503050406030204" pitchFamily="18" charset="0"/>
+                            </a:rPr>
+                          </m:ctrlPr>
+                        </m:sSubPr>
+                        <m:e>
+                          <m:r>
+                            <a:rPr lang="en-US" sz="1400" i="1">
+                              <a:latin typeface="Cambria Math" panose="02040503050406030204" pitchFamily="18" charset="0"/>
+                            </a:rPr>
+                            <m:t>𝑉</m:t>
+                          </m:r>
+                        </m:e>
+                        <m:sub>
+                          <m:r>
+                            <a:rPr lang="en-US" sz="1400" i="1">
+                              <a:latin typeface="Cambria Math" panose="02040503050406030204" pitchFamily="18" charset="0"/>
+                            </a:rPr>
+                            <m:t>𝑘</m:t>
+                          </m:r>
+                        </m:sub>
+                      </m:sSub>
+                    </m:oMath>
+                  </m:oMathPara>
+                </a14:m>
+                <a:endParaRPr lang="en-US" sz="1400" dirty="0"/>
+              </a:p>
+            </p:txBody>
+          </p:sp>
+        </mc:Choice>
+        <mc:Fallback>
+          <p:sp>
+            <p:nvSpPr>
+              <p:cNvPr id="3" name="Speech Bubble: Rectangle with Corners Rounded 2">
+                <a:extLst>
+                  <a:ext uri="{FF2B5EF4-FFF2-40B4-BE49-F238E27FC236}">
+                    <a16:creationId xmlns:a16="http://schemas.microsoft.com/office/drawing/2014/main" id="{4FDB9947-9818-7FF7-6A8C-58889DDE4BD2}"/>
+                  </a:ext>
+                </a:extLst>
+              </p:cNvPr>
+              <p:cNvSpPr>
+                <a:spLocks noRot="1" noChangeAspect="1" noMove="1" noResize="1" noEditPoints="1" noAdjustHandles="1" noChangeArrowheads="1" noChangeShapeType="1" noTextEdit="1"/>
+              </p:cNvSpPr>
+              <p:nvPr/>
+            </p:nvSpPr>
+            <p:spPr>
+              <a:xfrm>
+                <a:off x="7838712" y="3329532"/>
+                <a:ext cx="1947462" cy="593313"/>
+              </a:xfrm>
+              <a:prstGeom prst="wedgeRoundRectCallout">
+                <a:avLst>
+                  <a:gd name="adj1" fmla="val -76118"/>
+                  <a:gd name="adj2" fmla="val 99041"/>
+                  <a:gd name="adj3" fmla="val 16667"/>
+                </a:avLst>
+              </a:prstGeom>
+              <a:blipFill>
+                <a:blip r:embed="rId3"/>
+                <a:stretch>
+                  <a:fillRect/>
+                </a:stretch>
+              </a:blipFill>
+            </p:spPr>
+            <p:txBody>
+              <a:bodyPr/>
+              <a:lstStyle/>
+              <a:p>
+                <a:r>
+                  <a:rPr lang="en-US">
+                    <a:noFill/>
+                  </a:rPr>
+                  <a:t> </a:t>
+                </a:r>
+              </a:p>
+            </p:txBody>
+          </p:sp>
+        </mc:Fallback>
+      </mc:AlternateContent>
+      <mc:AlternateContent xmlns:mc="http://schemas.openxmlformats.org/markup-compatibility/2006">
+        <mc:Choice xmlns:a14="http://schemas.microsoft.com/office/drawing/2010/main" Requires="a14">
+          <p:sp>
+            <p:nvSpPr>
+              <p:cNvPr id="6" name="Speech Bubble: Rectangle with Corners Rounded 5">
+                <a:extLst>
+                  <a:ext uri="{FF2B5EF4-FFF2-40B4-BE49-F238E27FC236}">
+                    <a16:creationId xmlns:a16="http://schemas.microsoft.com/office/drawing/2014/main" id="{A1E667CB-0634-45C9-45D9-EAFB5DCCC40D}"/>
+                  </a:ext>
+                </a:extLst>
+              </p:cNvPr>
+              <p:cNvSpPr/>
+              <p:nvPr/>
+            </p:nvSpPr>
+            <p:spPr>
+              <a:xfrm>
+                <a:off x="3699481" y="5381209"/>
+                <a:ext cx="3608738" cy="1111665"/>
+              </a:xfrm>
+              <a:prstGeom prst="wedgeRoundRectCallout">
+                <a:avLst>
+                  <a:gd name="adj1" fmla="val -35573"/>
+                  <a:gd name="adj2" fmla="val -112651"/>
+                  <a:gd name="adj3" fmla="val 16667"/>
+                </a:avLst>
+              </a:prstGeom>
+            </p:spPr>
+            <p:style>
+              <a:lnRef idx="2">
+                <a:schemeClr val="accent1">
+                  <a:shade val="15000"/>
+                </a:schemeClr>
+              </a:lnRef>
+              <a:fillRef idx="1">
+                <a:schemeClr val="accent1"/>
+              </a:fillRef>
+              <a:effectRef idx="0">
+                <a:schemeClr val="accent1"/>
+              </a:effectRef>
+              <a:fontRef idx="minor">
+                <a:schemeClr val="lt1"/>
+              </a:fontRef>
+            </p:style>
+            <p:txBody>
+              <a:bodyPr rtlCol="0" anchor="ctr"/>
+              <a:lstStyle/>
+              <a:p>
+                <a:pPr algn="ctr"/>
+                <a:r>
+                  <a:rPr lang="en-US" sz="1400" dirty="0"/>
+                  <a:t>Stop when value function changes little:</a:t>
+                </a:r>
+                <a:br>
+                  <a:rPr lang="en-US" sz="1400" b="0" i="0" dirty="0">
+                    <a:latin typeface="Cambria Math" panose="02040503050406030204" pitchFamily="18" charset="0"/>
+                  </a:rPr>
+                </a:br>
+                <a14:m>
+                  <m:oMathPara xmlns:m="http://schemas.openxmlformats.org/officeDocument/2006/math">
+                    <m:oMathParaPr>
+                      <m:jc m:val="centerGroup"/>
+                    </m:oMathParaPr>
+                    <m:oMath xmlns:m="http://schemas.openxmlformats.org/officeDocument/2006/math">
+                      <m:r>
+                        <a:rPr lang="en-US" sz="1400" b="0" i="0" smtClean="0">
+                          <a:latin typeface="Cambria Math" panose="02040503050406030204" pitchFamily="18" charset="0"/>
+                        </a:rPr>
+                        <m:t> </m:t>
+                      </m:r>
+                      <m:sSub>
+                        <m:sSubPr>
+                          <m:ctrlPr>
+                            <a:rPr lang="en-US" sz="1400" b="0" i="1" smtClean="0">
+                              <a:latin typeface="Cambria Math" panose="02040503050406030204" pitchFamily="18" charset="0"/>
+                            </a:rPr>
+                          </m:ctrlPr>
+                        </m:sSubPr>
+                        <m:e>
+                          <m:d>
+                            <m:dPr>
+                              <m:begChr m:val="‖"/>
+                              <m:endChr m:val="‖"/>
+                              <m:ctrlPr>
+                                <a:rPr lang="en-US" sz="1400" i="1" smtClean="0">
+                                  <a:latin typeface="Cambria Math" panose="02040503050406030204" pitchFamily="18" charset="0"/>
+                                </a:rPr>
+                              </m:ctrlPr>
+                            </m:dPr>
+                            <m:e>
+                              <m:sSup>
+                                <m:sSupPr>
+                                  <m:ctrlPr>
+                                    <a:rPr lang="en-US" sz="1400" b="0" i="1" smtClean="0">
+                                      <a:latin typeface="Cambria Math" panose="02040503050406030204" pitchFamily="18" charset="0"/>
+                                    </a:rPr>
+                                  </m:ctrlPr>
+                                </m:sSupPr>
+                                <m:e>
+                                  <m:r>
+                                    <a:rPr lang="en-US" sz="1400" b="0" i="1" smtClean="0">
+                                      <a:latin typeface="Cambria Math" panose="02040503050406030204" pitchFamily="18" charset="0"/>
+                                    </a:rPr>
+                                    <m:t>𝑇</m:t>
+                                  </m:r>
+                                </m:e>
+                                <m:sup>
+                                  <m:r>
+                                    <a:rPr lang="en-US" sz="1400" b="0" i="1" smtClean="0">
+                                      <a:latin typeface="Cambria Math" panose="02040503050406030204" pitchFamily="18" charset="0"/>
+                                    </a:rPr>
+                                    <m:t>𝜋</m:t>
+                                  </m:r>
+                                </m:sup>
+                              </m:sSup>
+                              <m:sSub>
+                                <m:sSubPr>
+                                  <m:ctrlPr>
+                                    <a:rPr lang="en-US" sz="1400" b="0" i="1" smtClean="0">
+                                      <a:latin typeface="Cambria Math" panose="02040503050406030204" pitchFamily="18" charset="0"/>
+                                    </a:rPr>
+                                  </m:ctrlPr>
+                                </m:sSubPr>
+                                <m:e>
+                                  <m:r>
+                                    <a:rPr lang="en-US" sz="1400" b="0" i="1" smtClean="0">
+                                      <a:latin typeface="Cambria Math" panose="02040503050406030204" pitchFamily="18" charset="0"/>
+                                    </a:rPr>
+                                    <m:t>𝑉</m:t>
+                                  </m:r>
+                                </m:e>
+                                <m:sub>
+                                  <m:r>
+                                    <a:rPr lang="en-US" sz="1400" b="0" i="1" smtClean="0">
+                                      <a:latin typeface="Cambria Math" panose="02040503050406030204" pitchFamily="18" charset="0"/>
+                                    </a:rPr>
+                                    <m:t>𝑘</m:t>
+                                  </m:r>
+                                </m:sub>
+                              </m:sSub>
+                              <m:r>
+                                <a:rPr lang="en-US" sz="1400" b="0" i="1" smtClean="0">
+                                  <a:latin typeface="Cambria Math" panose="02040503050406030204" pitchFamily="18" charset="0"/>
+                                </a:rPr>
+                                <m:t>−</m:t>
+                              </m:r>
+                              <m:sSub>
+                                <m:sSubPr>
+                                  <m:ctrlPr>
+                                    <a:rPr lang="en-US" sz="1400" b="0" i="1" smtClean="0">
+                                      <a:latin typeface="Cambria Math" panose="02040503050406030204" pitchFamily="18" charset="0"/>
+                                    </a:rPr>
+                                  </m:ctrlPr>
+                                </m:sSubPr>
+                                <m:e>
+                                  <m:r>
+                                    <a:rPr lang="en-US" sz="1400" b="0" i="1" smtClean="0">
+                                      <a:latin typeface="Cambria Math" panose="02040503050406030204" pitchFamily="18" charset="0"/>
+                                    </a:rPr>
+                                    <m:t>𝑉</m:t>
+                                  </m:r>
+                                </m:e>
+                                <m:sub>
+                                  <m:r>
+                                    <a:rPr lang="en-US" sz="1400" b="0" i="1" smtClean="0">
+                                      <a:latin typeface="Cambria Math" panose="02040503050406030204" pitchFamily="18" charset="0"/>
+                                    </a:rPr>
+                                    <m:t>𝑘</m:t>
+                                  </m:r>
+                                </m:sub>
+                              </m:sSub>
+                            </m:e>
+                          </m:d>
+                        </m:e>
+                        <m:sub>
+                          <m:r>
+                            <a:rPr lang="en-US" sz="1400" b="0" i="1" smtClean="0">
+                              <a:latin typeface="Cambria Math" panose="02040503050406030204" pitchFamily="18" charset="0"/>
+                            </a:rPr>
+                            <m:t>∞</m:t>
+                          </m:r>
+                        </m:sub>
+                      </m:sSub>
+                      <m:r>
+                        <a:rPr lang="en-US" sz="1400" b="0" i="1" smtClean="0">
+                          <a:latin typeface="Cambria Math" panose="02040503050406030204" pitchFamily="18" charset="0"/>
+                        </a:rPr>
+                        <m:t>&lt;</m:t>
+                      </m:r>
+                      <m:r>
+                        <a:rPr lang="en-US" sz="1400" b="0" i="1" smtClean="0">
+                          <a:latin typeface="Cambria Math" panose="02040503050406030204" pitchFamily="18" charset="0"/>
+                        </a:rPr>
+                        <m:t>𝜃</m:t>
+                      </m:r>
+                    </m:oMath>
+                  </m:oMathPara>
+                </a14:m>
+                <a:endParaRPr lang="en-US" sz="1400" dirty="0"/>
+              </a:p>
+              <a:p>
+                <a:pPr algn="ctr"/>
+                <a:r>
+                  <a:rPr lang="en-US" sz="1400" dirty="0"/>
+                  <a:t>It can be shown that the error is bounded:</a:t>
+                </a:r>
+              </a:p>
+              <a:p>
+                <a:pPr algn="ctr"/>
+                <a14:m>
+                  <m:oMathPara xmlns:m="http://schemas.openxmlformats.org/officeDocument/2006/math">
+                    <m:oMathParaPr>
+                      <m:jc m:val="centerGroup"/>
+                    </m:oMathParaPr>
+                    <m:oMath xmlns:m="http://schemas.openxmlformats.org/officeDocument/2006/math">
+                      <m:sSub>
+                        <m:sSubPr>
+                          <m:ctrlPr>
+                            <a:rPr lang="en-US" sz="1400" b="0" i="1" smtClean="0">
+                              <a:latin typeface="Cambria Math" panose="02040503050406030204" pitchFamily="18" charset="0"/>
+                            </a:rPr>
+                          </m:ctrlPr>
+                        </m:sSubPr>
+                        <m:e>
+                          <m:d>
+                            <m:dPr>
+                              <m:begChr m:val="‖"/>
+                              <m:endChr m:val="‖"/>
+                              <m:ctrlPr>
+                                <a:rPr lang="en-US" sz="1400" i="1" smtClean="0">
+                                  <a:latin typeface="Cambria Math" panose="02040503050406030204" pitchFamily="18" charset="0"/>
+                                </a:rPr>
+                              </m:ctrlPr>
+                            </m:dPr>
+                            <m:e>
+                              <m:sSub>
+                                <m:sSubPr>
+                                  <m:ctrlPr>
+                                    <a:rPr lang="en-US" sz="1400" b="0" i="1" smtClean="0">
+                                      <a:latin typeface="Cambria Math" panose="02040503050406030204" pitchFamily="18" charset="0"/>
+                                    </a:rPr>
+                                  </m:ctrlPr>
+                                </m:sSubPr>
+                                <m:e>
+                                  <m:r>
+                                    <a:rPr lang="en-US" sz="1400" b="0" i="1" smtClean="0">
+                                      <a:latin typeface="Cambria Math" panose="02040503050406030204" pitchFamily="18" charset="0"/>
+                                    </a:rPr>
+                                    <m:t>𝑉</m:t>
+                                  </m:r>
+                                </m:e>
+                                <m:sub>
+                                  <m:r>
+                                    <a:rPr lang="en-US" sz="1400" b="0" i="1" smtClean="0">
+                                      <a:latin typeface="Cambria Math" panose="02040503050406030204" pitchFamily="18" charset="0"/>
+                                    </a:rPr>
+                                    <m:t>𝑘</m:t>
+                                  </m:r>
+                                </m:sub>
+                              </m:sSub>
+                              <m:r>
+                                <a:rPr lang="en-US" sz="1400" b="0" i="1" smtClean="0">
+                                  <a:latin typeface="Cambria Math" panose="02040503050406030204" pitchFamily="18" charset="0"/>
+                                </a:rPr>
+                                <m:t>−</m:t>
+                              </m:r>
+                              <m:sSub>
+                                <m:sSubPr>
+                                  <m:ctrlPr>
+                                    <a:rPr lang="en-US" sz="1400" b="0" i="1" smtClean="0">
+                                      <a:latin typeface="Cambria Math" panose="02040503050406030204" pitchFamily="18" charset="0"/>
+                                    </a:rPr>
+                                  </m:ctrlPr>
+                                </m:sSubPr>
+                                <m:e>
+                                  <m:r>
+                                    <a:rPr lang="en-US" sz="1400" b="0" i="1" smtClean="0">
+                                      <a:latin typeface="Cambria Math" panose="02040503050406030204" pitchFamily="18" charset="0"/>
+                                    </a:rPr>
+                                    <m:t>𝑣</m:t>
+                                  </m:r>
+                                </m:e>
+                                <m:sub>
+                                  <m:r>
+                                    <a:rPr lang="en-US" sz="1400" b="0" i="1" smtClean="0">
+                                      <a:latin typeface="Cambria Math" panose="02040503050406030204" pitchFamily="18" charset="0"/>
+                                    </a:rPr>
+                                    <m:t>𝜋</m:t>
+                                  </m:r>
+                                </m:sub>
+                              </m:sSub>
+                            </m:e>
+                          </m:d>
+                        </m:e>
+                        <m:sub>
+                          <m:r>
+                            <a:rPr lang="en-US" sz="1400" b="0" i="1" smtClean="0">
+                              <a:latin typeface="Cambria Math" panose="02040503050406030204" pitchFamily="18" charset="0"/>
+                            </a:rPr>
+                            <m:t>∞</m:t>
+                          </m:r>
+                        </m:sub>
+                      </m:sSub>
+                      <m:r>
+                        <a:rPr lang="en-US" sz="1400" b="0" i="1" smtClean="0">
+                          <a:latin typeface="Cambria Math" panose="02040503050406030204" pitchFamily="18" charset="0"/>
+                        </a:rPr>
+                        <m:t>&lt;</m:t>
+                      </m:r>
+                      <m:f>
+                        <m:fPr>
+                          <m:ctrlPr>
+                            <a:rPr lang="en-US" sz="1400" b="0" i="1" smtClean="0">
+                              <a:latin typeface="Cambria Math" panose="02040503050406030204" pitchFamily="18" charset="0"/>
+                            </a:rPr>
+                          </m:ctrlPr>
+                        </m:fPr>
+                        <m:num>
+                          <m:r>
+                            <a:rPr lang="en-US" sz="1400" b="0" i="1" smtClean="0">
+                              <a:latin typeface="Cambria Math" panose="02040503050406030204" pitchFamily="18" charset="0"/>
+                            </a:rPr>
+                            <m:t>𝜃</m:t>
+                          </m:r>
+                        </m:num>
+                        <m:den>
+                          <m:r>
+                            <a:rPr lang="en-US" sz="1400" b="0" i="1" smtClean="0">
+                              <a:latin typeface="Cambria Math" panose="02040503050406030204" pitchFamily="18" charset="0"/>
+                            </a:rPr>
+                            <m:t>1−</m:t>
+                          </m:r>
+                          <m:r>
+                            <a:rPr lang="en-US" sz="1400" b="0" i="1" smtClean="0">
+                              <a:latin typeface="Cambria Math" panose="02040503050406030204" pitchFamily="18" charset="0"/>
+                            </a:rPr>
+                            <m:t>𝛾</m:t>
+                          </m:r>
+                        </m:den>
+                      </m:f>
+                    </m:oMath>
+                  </m:oMathPara>
+                </a14:m>
+                <a:endParaRPr lang="en-US" sz="1400" dirty="0"/>
+              </a:p>
+            </p:txBody>
+          </p:sp>
+        </mc:Choice>
+        <mc:Fallback>
+          <p:sp>
+            <p:nvSpPr>
+              <p:cNvPr id="6" name="Speech Bubble: Rectangle with Corners Rounded 5">
+                <a:extLst>
+                  <a:ext uri="{FF2B5EF4-FFF2-40B4-BE49-F238E27FC236}">
+                    <a16:creationId xmlns:a16="http://schemas.microsoft.com/office/drawing/2014/main" id="{A1E667CB-0634-45C9-45D9-EAFB5DCCC40D}"/>
+                  </a:ext>
+                </a:extLst>
+              </p:cNvPr>
+              <p:cNvSpPr>
+                <a:spLocks noRot="1" noChangeAspect="1" noMove="1" noResize="1" noEditPoints="1" noAdjustHandles="1" noChangeArrowheads="1" noChangeShapeType="1" noTextEdit="1"/>
+              </p:cNvSpPr>
+              <p:nvPr/>
+            </p:nvSpPr>
+            <p:spPr>
+              <a:xfrm>
+                <a:off x="3699481" y="5381209"/>
+                <a:ext cx="3608738" cy="1111665"/>
+              </a:xfrm>
+              <a:prstGeom prst="wedgeRoundRectCallout">
+                <a:avLst>
+                  <a:gd name="adj1" fmla="val -35573"/>
+                  <a:gd name="adj2" fmla="val -112651"/>
+                  <a:gd name="adj3" fmla="val 16667"/>
+                </a:avLst>
+              </a:prstGeom>
+              <a:blipFill>
+                <a:blip r:embed="rId4"/>
+                <a:stretch>
+                  <a:fillRect b="-1661"/>
+                </a:stretch>
+              </a:blipFill>
+            </p:spPr>
+            <p:txBody>
+              <a:bodyPr/>
+              <a:lstStyle/>
+              <a:p>
+                <a:r>
+                  <a:rPr lang="en-US">
+                    <a:noFill/>
+                  </a:rPr>
+                  <a:t> </a:t>
+                </a:r>
+              </a:p>
+            </p:txBody>
+          </p:sp>
+        </mc:Fallback>
+      </mc:AlternateContent>
+      <mc:AlternateContent xmlns:mc="http://schemas.openxmlformats.org/markup-compatibility/2006">
+        <mc:Choice xmlns:a14="http://schemas.microsoft.com/office/drawing/2010/main" Requires="a14">
+          <p:sp>
+            <p:nvSpPr>
+              <p:cNvPr id="7" name="Speech Bubble: Rectangle with Corners Rounded 6">
+                <a:extLst>
+                  <a:ext uri="{FF2B5EF4-FFF2-40B4-BE49-F238E27FC236}">
+                    <a16:creationId xmlns:a16="http://schemas.microsoft.com/office/drawing/2014/main" id="{DC293BB5-29C7-EBCB-3BD0-962870DC2F43}"/>
+                  </a:ext>
+                </a:extLst>
+              </p:cNvPr>
+              <p:cNvSpPr/>
+              <p:nvPr/>
+            </p:nvSpPr>
+            <p:spPr>
+              <a:xfrm>
+                <a:off x="8242397" y="827541"/>
+                <a:ext cx="1947462" cy="593313"/>
+              </a:xfrm>
+              <a:prstGeom prst="wedgeRoundRectCallout">
+                <a:avLst>
+                  <a:gd name="adj1" fmla="val -99057"/>
+                  <a:gd name="adj2" fmla="val 119041"/>
+                  <a:gd name="adj3" fmla="val 16667"/>
+                </a:avLst>
+              </a:prstGeom>
+            </p:spPr>
+            <p:style>
+              <a:lnRef idx="2">
+                <a:schemeClr val="accent1">
+                  <a:shade val="15000"/>
+                </a:schemeClr>
+              </a:lnRef>
+              <a:fillRef idx="1">
+                <a:schemeClr val="accent1"/>
+              </a:fillRef>
+              <a:effectRef idx="0">
+                <a:schemeClr val="accent1"/>
+              </a:effectRef>
+              <a:fontRef idx="minor">
+                <a:schemeClr val="lt1"/>
+              </a:fontRef>
+            </p:style>
+            <p:txBody>
+              <a:bodyPr rtlCol="0" anchor="ctr"/>
+              <a:lstStyle/>
+              <a:p>
+                <a:pPr algn="ctr"/>
+                <a:r>
+                  <a:rPr lang="en-US" sz="1400" b="0" dirty="0"/>
+                  <a:t>Notation: </a:t>
+                </a:r>
+                <a14:m>
+                  <m:oMath xmlns:m="http://schemas.openxmlformats.org/officeDocument/2006/math">
+                    <m:r>
+                      <a:rPr lang="en-US" sz="1400" b="0" i="1" smtClean="0">
+                        <a:latin typeface="Cambria Math" panose="02040503050406030204" pitchFamily="18" charset="0"/>
+                      </a:rPr>
+                      <m:t>𝑉</m:t>
+                    </m:r>
+                  </m:oMath>
+                </a14:m>
+                <a:r>
+                  <a:rPr lang="en-US" sz="1400" dirty="0"/>
+                  <a:t> is the tabular estimate of </a:t>
+                </a:r>
+                <a14:m>
+                  <m:oMath xmlns:m="http://schemas.openxmlformats.org/officeDocument/2006/math">
+                    <m:r>
+                      <a:rPr lang="en-US" sz="1400" b="0" i="1" smtClean="0">
+                        <a:latin typeface="Cambria Math" panose="02040503050406030204" pitchFamily="18" charset="0"/>
+                      </a:rPr>
+                      <m:t>𝑣</m:t>
+                    </m:r>
+                  </m:oMath>
+                </a14:m>
+                <a:endParaRPr lang="en-US" sz="1400" dirty="0"/>
+              </a:p>
+            </p:txBody>
+          </p:sp>
+        </mc:Choice>
+        <mc:Fallback>
+          <p:sp>
+            <p:nvSpPr>
+              <p:cNvPr id="7" name="Speech Bubble: Rectangle with Corners Rounded 6">
+                <a:extLst>
+                  <a:ext uri="{FF2B5EF4-FFF2-40B4-BE49-F238E27FC236}">
+                    <a16:creationId xmlns:a16="http://schemas.microsoft.com/office/drawing/2014/main" id="{DC293BB5-29C7-EBCB-3BD0-962870DC2F43}"/>
+                  </a:ext>
+                </a:extLst>
+              </p:cNvPr>
+              <p:cNvSpPr>
+                <a:spLocks noRot="1" noChangeAspect="1" noMove="1" noResize="1" noEditPoints="1" noAdjustHandles="1" noChangeArrowheads="1" noChangeShapeType="1" noTextEdit="1"/>
+              </p:cNvSpPr>
+              <p:nvPr/>
+            </p:nvSpPr>
+            <p:spPr>
+              <a:xfrm>
+                <a:off x="8242397" y="827541"/>
+                <a:ext cx="1947462" cy="593313"/>
+              </a:xfrm>
+              <a:prstGeom prst="wedgeRoundRectCallout">
+                <a:avLst>
+                  <a:gd name="adj1" fmla="val -99057"/>
+                  <a:gd name="adj2" fmla="val 119041"/>
+                  <a:gd name="adj3" fmla="val 16667"/>
+                </a:avLst>
+              </a:prstGeom>
+              <a:blipFill>
+                <a:blip r:embed="rId5"/>
+                <a:stretch>
+                  <a:fillRect/>
+                </a:stretch>
+              </a:blipFill>
+            </p:spPr>
+            <p:txBody>
+              <a:bodyPr/>
+              <a:lstStyle/>
+              <a:p>
+                <a:r>
+                  <a:rPr lang="en-US">
+                    <a:noFill/>
+                  </a:rPr>
+                  <a:t> </a:t>
+                </a:r>
+              </a:p>
+            </p:txBody>
+          </p:sp>
+        </mc:Fallback>
+      </mc:AlternateContent>
+      <mc:AlternateContent xmlns:mc="http://schemas.openxmlformats.org/markup-compatibility/2006">
+        <mc:Choice xmlns:a14="http://schemas.microsoft.com/office/drawing/2010/main" Requires="a14">
+          <p:sp>
+            <p:nvSpPr>
+              <p:cNvPr id="8" name="Rectangle: Rounded Corners 7">
+                <a:extLst>
+                  <a:ext uri="{FF2B5EF4-FFF2-40B4-BE49-F238E27FC236}">
+                    <a16:creationId xmlns:a16="http://schemas.microsoft.com/office/drawing/2014/main" id="{E2583962-6C30-E802-8782-E155488FA659}"/>
+                  </a:ext>
+                </a:extLst>
+              </p:cNvPr>
+              <p:cNvSpPr/>
+              <p:nvPr/>
+            </p:nvSpPr>
+            <p:spPr>
+              <a:xfrm>
+                <a:off x="8242397" y="5381209"/>
+                <a:ext cx="3212034" cy="1040531"/>
+              </a:xfrm>
+              <a:prstGeom prst="roundRect">
+                <a:avLst/>
+              </a:prstGeom>
+            </p:spPr>
+            <p:style>
+              <a:lnRef idx="2">
+                <a:schemeClr val="accent2">
+                  <a:shade val="15000"/>
+                </a:schemeClr>
+              </a:lnRef>
+              <a:fillRef idx="1">
+                <a:schemeClr val="accent2"/>
+              </a:fillRef>
+              <a:effectRef idx="0">
+                <a:schemeClr val="accent2"/>
+              </a:effectRef>
+              <a:fontRef idx="minor">
+                <a:schemeClr val="lt1"/>
+              </a:fontRef>
+            </p:style>
+            <p:txBody>
+              <a:bodyPr rtlCol="0" anchor="ctr"/>
+              <a:lstStyle/>
+              <a:p>
+                <a:pPr algn="ctr"/>
+                <a:r>
+                  <a:rPr lang="en-US" sz="1600" dirty="0"/>
+                  <a:t>If we stop policy evaluation early (after </a:t>
+                </a:r>
+                <a14:m>
+                  <m:oMath xmlns:m="http://schemas.openxmlformats.org/officeDocument/2006/math">
+                    <m:r>
+                      <a:rPr lang="en-US" sz="1600" i="1" dirty="0" smtClean="0">
+                        <a:latin typeface="Cambria Math" panose="02040503050406030204" pitchFamily="18" charset="0"/>
+                      </a:rPr>
+                      <m:t>𝑛</m:t>
+                    </m:r>
+                  </m:oMath>
+                </a14:m>
+                <a:r>
+                  <a:rPr lang="en-US" sz="1600" dirty="0"/>
+                  <a:t> iterations) then it is called </a:t>
+                </a:r>
+                <a:r>
+                  <a:rPr lang="en-US" sz="1600" b="1" dirty="0"/>
+                  <a:t>modified policy iteration.</a:t>
+                </a:r>
+              </a:p>
+            </p:txBody>
+          </p:sp>
+        </mc:Choice>
+        <mc:Fallback>
+          <p:sp>
+            <p:nvSpPr>
+              <p:cNvPr id="8" name="Rectangle: Rounded Corners 7">
+                <a:extLst>
+                  <a:ext uri="{FF2B5EF4-FFF2-40B4-BE49-F238E27FC236}">
+                    <a16:creationId xmlns:a16="http://schemas.microsoft.com/office/drawing/2014/main" id="{E2583962-6C30-E802-8782-E155488FA659}"/>
+                  </a:ext>
+                </a:extLst>
+              </p:cNvPr>
+              <p:cNvSpPr>
+                <a:spLocks noRot="1" noChangeAspect="1" noMove="1" noResize="1" noEditPoints="1" noAdjustHandles="1" noChangeArrowheads="1" noChangeShapeType="1" noTextEdit="1"/>
+              </p:cNvSpPr>
+              <p:nvPr/>
+            </p:nvSpPr>
+            <p:spPr>
+              <a:xfrm>
+                <a:off x="8242397" y="5381209"/>
+                <a:ext cx="3212034" cy="1040531"/>
+              </a:xfrm>
+              <a:prstGeom prst="roundRect">
+                <a:avLst/>
+              </a:prstGeom>
+              <a:blipFill>
+                <a:blip r:embed="rId6"/>
+                <a:stretch>
+                  <a:fillRect r="-189"/>
+                </a:stretch>
+              </a:blipFill>
+            </p:spPr>
+            <p:txBody>
+              <a:bodyPr/>
+              <a:lstStyle/>
+              <a:p>
+                <a:r>
+                  <a:rPr lang="en-US">
+                    <a:noFill/>
+                  </a:rPr>
+                  <a:t> </a:t>
+                </a:r>
+              </a:p>
+            </p:txBody>
+          </p:sp>
+        </mc:Fallback>
+      </mc:AlternateContent>
+    </p:spTree>
+    <p:extLst>
+      <p:ext uri="{BB962C8B-B14F-4D97-AF65-F5344CB8AC3E}">
+        <p14:creationId xmlns:p14="http://schemas.microsoft.com/office/powerpoint/2010/main" val="4091045570"/>
+      </p:ext>
+    </p:extLst>
+  </p:cSld>
+  <p:clrMapOvr>
+    <a:masterClrMapping/>
+  </p:clrMapOvr>
+</p:sld>
+</file>
+
+<file path=ppt/slides/slide12.xml><?xml version="1.0" encoding="utf-8"?>
+<p:sld xmlns:a="http://schemas.openxmlformats.org/drawingml/2006/main" xmlns:r="http://schemas.openxmlformats.org/officeDocument/2006/relationships" xmlns:p="http://schemas.openxmlformats.org/presentationml/2006/main">
+  <p:cSld>
+    <p:spTree>
+      <p:nvGrpSpPr>
         <p:cNvPr id="1" name="">
           <a:extLst>
             <a:ext uri="{FF2B5EF4-FFF2-40B4-BE49-F238E27FC236}">
@@ -4101,7 +6129,7 @@
 </p:sld>
 </file>
 
-<file path=ppt/slides/slide11.xml><?xml version="1.0" encoding="utf-8"?>
+<file path=ppt/slides/slide13.xml><?xml version="1.0" encoding="utf-8"?>
 <p:sld xmlns:a="http://schemas.openxmlformats.org/drawingml/2006/main" xmlns:r="http://schemas.openxmlformats.org/officeDocument/2006/relationships" xmlns:p="http://schemas.openxmlformats.org/presentationml/2006/main">
   <p:cSld>
     <p:spTree>
@@ -4919,7 +6947,7 @@
 </p:sld>
 </file>
 
-<file path=ppt/slides/slide12.xml><?xml version="1.0" encoding="utf-8"?>
+<file path=ppt/slides/slide14.xml><?xml version="1.0" encoding="utf-8"?>
 <p:sld xmlns:a="http://schemas.openxmlformats.org/drawingml/2006/main" xmlns:r="http://schemas.openxmlformats.org/officeDocument/2006/relationships" xmlns:p="http://schemas.openxmlformats.org/presentationml/2006/main">
   <p:cSld>
     <p:spTree>
@@ -7435,8 +9463,8 @@
           </p:txBody>
         </p:sp>
       </p:grpSp>
-      <mc:AlternateContent xmlns:mc="http://schemas.openxmlformats.org/markup-compatibility/2006" xmlns:a14="http://schemas.microsoft.com/office/drawing/2010/main">
-        <mc:Choice Requires="a14">
+      <mc:AlternateContent xmlns:mc="http://schemas.openxmlformats.org/markup-compatibility/2006">
+        <mc:Choice xmlns:a14="http://schemas.microsoft.com/office/drawing/2010/main" Requires="a14">
           <p:sp>
             <p:nvSpPr>
               <p:cNvPr id="25" name="Content Placeholder 2">
@@ -7453,8 +9481,8 @@
             </p:nvSpPr>
             <p:spPr>
               <a:xfrm>
-                <a:off x="806042" y="4181912"/>
-                <a:ext cx="7897536" cy="2193918"/>
+                <a:off x="846192" y="3292095"/>
+                <a:ext cx="7897536" cy="2428293"/>
               </a:xfrm>
               <a:prstGeom prst="rect">
                 <a:avLst/>
@@ -7733,8 +9761,12 @@
               <a:p>
                 <a:pPr lvl="1"/>
                 <a:r>
+                  <a:rPr lang="en-US" b="1" dirty="0"/>
+                  <a:t>Issue</a:t>
+                </a:r>
+                <a:r>
                   <a:rPr lang="en-US" dirty="0"/>
-                  <a:t>Issue: Policy estimation is </a:t>
+                  <a:t>: Policy estimation is </a:t>
                 </a:r>
                 <a:r>
                   <a:rPr lang="en-US" dirty="0" err="1"/>
@@ -7742,13 +9774,13 @@
                 </a:r>
                 <a:r>
                   <a:rPr lang="en-US" dirty="0"/>
-                  <a:t> expensive!</a:t>
+                  <a:t> expensive! Using fewer iterations leads to modified policy iteration.</a:t>
                 </a:r>
               </a:p>
             </p:txBody>
           </p:sp>
         </mc:Choice>
-        <mc:Fallback xmlns="">
+        <mc:Fallback>
           <p:sp>
             <p:nvSpPr>
               <p:cNvPr id="25" name="Content Placeholder 2">
@@ -7765,8 +9797,8 @@
             </p:nvSpPr>
             <p:spPr>
               <a:xfrm>
-                <a:off x="806042" y="4181912"/>
-                <a:ext cx="7897536" cy="2193918"/>
+                <a:off x="846192" y="3292095"/>
+                <a:ext cx="7897536" cy="2428293"/>
               </a:xfrm>
               <a:prstGeom prst="rect">
                 <a:avLst/>
@@ -7774,7 +9806,7 @@
               <a:blipFill>
                 <a:blip r:embed="rId8"/>
                 <a:stretch>
-                  <a:fillRect l="-1003" t="-5556" b="-3889"/>
+                  <a:fillRect l="-1004" t="-5025" b="-2261"/>
                 </a:stretch>
               </a:blipFill>
             </p:spPr>
@@ -7806,7 +9838,7 @@
 </p:sld>
 </file>
 
-<file path=ppt/slides/slide13.xml><?xml version="1.0" encoding="utf-8"?>
+<file path=ppt/slides/slide15.xml><?xml version="1.0" encoding="utf-8"?>
 <p:sld xmlns:a="http://schemas.openxmlformats.org/drawingml/2006/main" xmlns:r="http://schemas.openxmlformats.org/officeDocument/2006/relationships" xmlns:p="http://schemas.openxmlformats.org/presentationml/2006/main">
   <p:cSld>
     <p:spTree>
@@ -7883,6 +9915,120 @@
           </a:prstGeom>
         </p:spPr>
       </p:pic>
+      <p:sp>
+        <p:nvSpPr>
+          <p:cNvPr id="3" name="Speech Bubble: Rectangle with Corners Rounded 2">
+            <a:extLst>
+              <a:ext uri="{FF2B5EF4-FFF2-40B4-BE49-F238E27FC236}">
+                <a16:creationId xmlns:a16="http://schemas.microsoft.com/office/drawing/2014/main" id="{DBD8C865-4D7E-35E7-E0FA-305C8DD8611A}"/>
+              </a:ext>
+            </a:extLst>
+          </p:cNvPr>
+          <p:cNvSpPr/>
+          <p:nvPr/>
+        </p:nvSpPr>
+        <p:spPr>
+          <a:xfrm>
+            <a:off x="6330998" y="2506070"/>
+            <a:ext cx="3587689" cy="753857"/>
+          </a:xfrm>
+          <a:prstGeom prst="wedgeRoundRectCallout">
+            <a:avLst>
+              <a:gd name="adj1" fmla="val -123530"/>
+              <a:gd name="adj2" fmla="val 527"/>
+              <a:gd name="adj3" fmla="val 16667"/>
+            </a:avLst>
+          </a:prstGeom>
+        </p:spPr>
+        <p:style>
+          <a:lnRef idx="2">
+            <a:schemeClr val="accent1">
+              <a:shade val="15000"/>
+            </a:schemeClr>
+          </a:lnRef>
+          <a:fillRef idx="1">
+            <a:schemeClr val="accent1"/>
+          </a:fillRef>
+          <a:effectRef idx="0">
+            <a:schemeClr val="accent1"/>
+          </a:effectRef>
+          <a:fontRef idx="minor">
+            <a:schemeClr val="lt1"/>
+          </a:fontRef>
+        </p:style>
+        <p:txBody>
+          <a:bodyPr rtlCol="0" anchor="ctr"/>
+          <a:lstStyle/>
+          <a:p>
+            <a:pPr algn="ctr"/>
+            <a:r>
+              <a:rPr lang="en-US" sz="1600" dirty="0"/>
+              <a:t>Just policy evaluation from before. Can also stop this loop early (</a:t>
+            </a:r>
+            <a:r>
+              <a:rPr lang="en-US" sz="1600" b="1" dirty="0"/>
+              <a:t>modified policy iteration)</a:t>
+            </a:r>
+            <a:r>
+              <a:rPr lang="en-US" sz="1600" dirty="0"/>
+              <a:t>.</a:t>
+            </a:r>
+          </a:p>
+        </p:txBody>
+      </p:sp>
+      <p:sp>
+        <p:nvSpPr>
+          <p:cNvPr id="4" name="Speech Bubble: Rectangle with Corners Rounded 3">
+            <a:extLst>
+              <a:ext uri="{FF2B5EF4-FFF2-40B4-BE49-F238E27FC236}">
+                <a16:creationId xmlns:a16="http://schemas.microsoft.com/office/drawing/2014/main" id="{A8BE2AD8-D811-FC6E-9D2F-35BC6E1C23CB}"/>
+              </a:ext>
+            </a:extLst>
+          </p:cNvPr>
+          <p:cNvSpPr/>
+          <p:nvPr/>
+        </p:nvSpPr>
+        <p:spPr>
+          <a:xfrm>
+            <a:off x="7237255" y="4641802"/>
+            <a:ext cx="2625702" cy="557248"/>
+          </a:xfrm>
+          <a:prstGeom prst="wedgeRoundRectCallout">
+            <a:avLst>
+              <a:gd name="adj1" fmla="val -57774"/>
+              <a:gd name="adj2" fmla="val 87946"/>
+              <a:gd name="adj3" fmla="val 16667"/>
+            </a:avLst>
+          </a:prstGeom>
+        </p:spPr>
+        <p:style>
+          <a:lnRef idx="2">
+            <a:schemeClr val="accent1">
+              <a:shade val="15000"/>
+            </a:schemeClr>
+          </a:lnRef>
+          <a:fillRef idx="1">
+            <a:schemeClr val="accent1"/>
+          </a:fillRef>
+          <a:effectRef idx="0">
+            <a:schemeClr val="accent1"/>
+          </a:effectRef>
+          <a:fontRef idx="minor">
+            <a:schemeClr val="lt1"/>
+          </a:fontRef>
+        </p:style>
+        <p:txBody>
+          <a:bodyPr rtlCol="0" anchor="ctr"/>
+          <a:lstStyle/>
+          <a:p>
+            <a:pPr algn="ctr"/>
+            <a:r>
+              <a:rPr lang="en-US" sz="1600" dirty="0"/>
+              <a:t>Picks the greedy action with the highest Q-value.</a:t>
+            </a:r>
+          </a:p>
+        </p:txBody>
+      </p:sp>
     </p:spTree>
     <p:extLst>
       <p:ext uri="{BB962C8B-B14F-4D97-AF65-F5344CB8AC3E}">
@@ -7896,7 +10042,7 @@
 </p:sld>
 </file>
 
-<file path=ppt/slides/slide14.xml><?xml version="1.0" encoding="utf-8"?>
+<file path=ppt/slides/slide16.xml><?xml version="1.0" encoding="utf-8"?>
 <p:sld xmlns:a="http://schemas.openxmlformats.org/drawingml/2006/main" xmlns:r="http://schemas.openxmlformats.org/officeDocument/2006/relationships" xmlns:p="http://schemas.openxmlformats.org/presentationml/2006/main">
   <p:cSld>
     <p:spTree>
@@ -7982,7 +10128,7 @@
 </p:sld>
 </file>
 
-<file path=ppt/slides/slide15.xml><?xml version="1.0" encoding="utf-8"?>
+<file path=ppt/slides/slide17.xml><?xml version="1.0" encoding="utf-8"?>
 <p:sld xmlns:a="http://schemas.openxmlformats.org/drawingml/2006/main" xmlns:r="http://schemas.openxmlformats.org/officeDocument/2006/relationships" xmlns:p="http://schemas.openxmlformats.org/presentationml/2006/main">
   <p:cSld>
     <p:spTree>
@@ -8027,8 +10173,8 @@
           </a:p>
         </p:txBody>
       </p:sp>
-      <mc:AlternateContent xmlns:mc="http://schemas.openxmlformats.org/markup-compatibility/2006" xmlns:a14="http://schemas.microsoft.com/office/drawing/2010/main">
-        <mc:Choice Requires="a14">
+      <mc:AlternateContent xmlns:mc="http://schemas.openxmlformats.org/markup-compatibility/2006">
+        <mc:Choice xmlns:a14="http://schemas.microsoft.com/office/drawing/2010/main" Requires="a14">
           <p:sp>
             <p:nvSpPr>
               <p:cNvPr id="3" name="Content Placeholder 2">
@@ -8047,23 +10193,28 @@
             </p:nvSpPr>
             <p:spPr>
               <a:xfrm>
-                <a:off x="838200" y="1397331"/>
-                <a:ext cx="7990869" cy="4235652"/>
+                <a:off x="838200" y="1397330"/>
+                <a:ext cx="7990869" cy="4759161"/>
               </a:xfrm>
             </p:spPr>
             <p:txBody>
               <a:bodyPr>
-                <a:normAutofit/>
+                <a:normAutofit lnSpcReduction="10000"/>
               </a:bodyPr>
               <a:lstStyle/>
               <a:p>
                 <a:r>
                   <a:rPr lang="en-US" sz="2400" dirty="0"/>
-                  <a:t>Combines the policy improvement and truncated policy evaluation steps:</a:t>
-                </a:r>
-              </a:p>
-              <a:p>
-                <a:endParaRPr lang="en-US" sz="2400" dirty="0"/>
+                  <a:t>Combines the policy improvement and truncated policy evaluation steps. This is called the </a:t>
+                </a:r>
+                <a:r>
+                  <a:rPr lang="en-US" sz="2400" b="1" dirty="0"/>
+                  <a:t>expected Bellman optimality update</a:t>
+                </a:r>
+                <a:r>
+                  <a:rPr lang="en-US" sz="2400" dirty="0"/>
+                  <a:t>.</a:t>
+                </a:r>
               </a:p>
               <a:p>
                 <a:pPr marL="0" indent="0">
@@ -8696,19 +10847,389 @@
                 </a:endParaRPr>
               </a:p>
               <a:p>
+                <a:r>
+                  <a:rPr lang="en-US" sz="2400" dirty="0"/>
+                  <a:t>Written as the </a:t>
+                </a:r>
+                <a:r>
+                  <a:rPr lang="en-US" sz="2400" b="1" dirty="0"/>
+                  <a:t>Bellman optimality operator</a:t>
+                </a:r>
+                <a:r>
+                  <a:rPr lang="en-US" sz="2400" dirty="0"/>
+                  <a:t>:</a:t>
+                </a:r>
+              </a:p>
+              <a:p>
                 <a:pPr marL="0" indent="0">
                   <a:buNone/>
                 </a:pPr>
+                <a14:m>
+                  <m:oMathPara xmlns:m="http://schemas.openxmlformats.org/officeDocument/2006/math">
+                    <m:oMathParaPr>
+                      <m:jc m:val="centerGroup"/>
+                    </m:oMathParaPr>
+                    <m:oMath xmlns:m="http://schemas.openxmlformats.org/officeDocument/2006/math">
+                      <m:d>
+                        <m:dPr>
+                          <m:ctrlPr>
+                            <a:rPr lang="en-US" sz="2400" b="0" i="1" smtClean="0">
+                              <a:latin typeface="Cambria Math" panose="02040503050406030204" pitchFamily="18" charset="0"/>
+                            </a:rPr>
+                          </m:ctrlPr>
+                        </m:dPr>
+                        <m:e>
+                          <m:sSup>
+                            <m:sSupPr>
+                              <m:ctrlPr>
+                                <a:rPr lang="en-US" sz="2400" b="0" i="1" smtClean="0">
+                                  <a:latin typeface="Cambria Math" panose="02040503050406030204" pitchFamily="18" charset="0"/>
+                                </a:rPr>
+                              </m:ctrlPr>
+                            </m:sSupPr>
+                            <m:e>
+                              <m:r>
+                                <a:rPr lang="en-US" sz="2400" b="0" i="1" smtClean="0">
+                                  <a:latin typeface="Cambria Math" panose="02040503050406030204" pitchFamily="18" charset="0"/>
+                                </a:rPr>
+                                <m:t>𝑇</m:t>
+                              </m:r>
+                            </m:e>
+                            <m:sup>
+                              <m:r>
+                                <a:rPr lang="en-US" sz="2400" b="0" i="1" smtClean="0">
+                                  <a:latin typeface="Cambria Math" panose="02040503050406030204" pitchFamily="18" charset="0"/>
+                                </a:rPr>
+                                <m:t>∗</m:t>
+                              </m:r>
+                            </m:sup>
+                          </m:sSup>
+                          <m:r>
+                            <a:rPr lang="en-US" sz="2400" b="0" i="1" smtClean="0">
+                              <a:latin typeface="Cambria Math" panose="02040503050406030204" pitchFamily="18" charset="0"/>
+                            </a:rPr>
+                            <m:t>𝑣</m:t>
+                          </m:r>
+                        </m:e>
+                      </m:d>
+                      <m:d>
+                        <m:dPr>
+                          <m:ctrlPr>
+                            <a:rPr lang="en-US" sz="2400" b="0" i="1" smtClean="0">
+                              <a:latin typeface="Cambria Math" panose="02040503050406030204" pitchFamily="18" charset="0"/>
+                            </a:rPr>
+                          </m:ctrlPr>
+                        </m:dPr>
+                        <m:e>
+                          <m:r>
+                            <a:rPr lang="en-US" sz="2400" b="0" i="1" smtClean="0">
+                              <a:latin typeface="Cambria Math" panose="02040503050406030204" pitchFamily="18" charset="0"/>
+                            </a:rPr>
+                            <m:t>𝑠</m:t>
+                          </m:r>
+                        </m:e>
+                      </m:d>
+                      <m:r>
+                        <a:rPr lang="en-US" sz="2400" b="0" i="1" smtClean="0">
+                          <a:latin typeface="Cambria Math" panose="02040503050406030204" pitchFamily="18" charset="0"/>
+                        </a:rPr>
+                        <m:t>=</m:t>
+                      </m:r>
+                      <m:limLow>
+                        <m:limLowPr>
+                          <m:ctrlPr>
+                            <a:rPr lang="en-US" sz="2400" i="1">
+                              <a:latin typeface="Cambria Math" panose="02040503050406030204" pitchFamily="18" charset="0"/>
+                            </a:rPr>
+                          </m:ctrlPr>
+                        </m:limLowPr>
+                        <m:e>
+                          <m:r>
+                            <m:rPr>
+                              <m:sty m:val="p"/>
+                            </m:rPr>
+                            <a:rPr lang="en-US" sz="2400">
+                              <a:latin typeface="Cambria Math" panose="02040503050406030204" pitchFamily="18" charset="0"/>
+                            </a:rPr>
+                            <m:t>max</m:t>
+                          </m:r>
+                        </m:e>
+                        <m:lim>
+                          <m:r>
+                            <a:rPr lang="en-US" sz="2400" i="1">
+                              <a:latin typeface="Cambria Math" panose="02040503050406030204" pitchFamily="18" charset="0"/>
+                            </a:rPr>
+                            <m:t>𝑎</m:t>
+                          </m:r>
+                        </m:lim>
+                      </m:limLow>
+                      <m:nary>
+                        <m:naryPr>
+                          <m:chr m:val="∑"/>
+                          <m:supHide m:val="on"/>
+                          <m:ctrlPr>
+                            <a:rPr lang="en-US" sz="2400" i="1">
+                              <a:latin typeface="Cambria Math" panose="02040503050406030204" pitchFamily="18" charset="0"/>
+                            </a:rPr>
+                          </m:ctrlPr>
+                        </m:naryPr>
+                        <m:sub>
+                          <m:sSup>
+                            <m:sSupPr>
+                              <m:ctrlPr>
+                                <a:rPr lang="en-US" sz="2400" i="1">
+                                  <a:latin typeface="Cambria Math" panose="02040503050406030204" pitchFamily="18" charset="0"/>
+                                </a:rPr>
+                              </m:ctrlPr>
+                            </m:sSupPr>
+                            <m:e>
+                              <m:r>
+                                <a:rPr lang="en-US" sz="2400" i="1">
+                                  <a:latin typeface="Cambria Math" panose="02040503050406030204" pitchFamily="18" charset="0"/>
+                                </a:rPr>
+                                <m:t>𝑠</m:t>
+                              </m:r>
+                            </m:e>
+                            <m:sup>
+                              <m:r>
+                                <a:rPr lang="en-US" sz="2400" i="1">
+                                  <a:latin typeface="Cambria Math" panose="02040503050406030204" pitchFamily="18" charset="0"/>
+                                </a:rPr>
+                                <m:t>′</m:t>
+                              </m:r>
+                            </m:sup>
+                          </m:sSup>
+                          <m:r>
+                            <a:rPr lang="en-US" sz="2400" i="1">
+                              <a:latin typeface="Cambria Math" panose="02040503050406030204" pitchFamily="18" charset="0"/>
+                            </a:rPr>
+                            <m:t>,</m:t>
+                          </m:r>
+                          <m:r>
+                            <a:rPr lang="en-US" sz="2400" i="1">
+                              <a:latin typeface="Cambria Math" panose="02040503050406030204" pitchFamily="18" charset="0"/>
+                            </a:rPr>
+                            <m:t>𝑟</m:t>
+                          </m:r>
+                        </m:sub>
+                        <m:sup/>
+                        <m:e>
+                          <m:r>
+                            <a:rPr lang="en-US" sz="2400" i="1">
+                              <a:latin typeface="Cambria Math" panose="02040503050406030204" pitchFamily="18" charset="0"/>
+                            </a:rPr>
+                            <m:t>𝑝</m:t>
+                          </m:r>
+                          <m:d>
+                            <m:dPr>
+                              <m:endChr m:val="|"/>
+                              <m:ctrlPr>
+                                <a:rPr lang="en-US" sz="2400" i="1">
+                                  <a:latin typeface="Cambria Math" panose="02040503050406030204" pitchFamily="18" charset="0"/>
+                                </a:rPr>
+                              </m:ctrlPr>
+                            </m:dPr>
+                            <m:e>
+                              <m:sSup>
+                                <m:sSupPr>
+                                  <m:ctrlPr>
+                                    <a:rPr lang="en-US" sz="2400" i="1">
+                                      <a:latin typeface="Cambria Math" panose="02040503050406030204" pitchFamily="18" charset="0"/>
+                                    </a:rPr>
+                                  </m:ctrlPr>
+                                </m:sSupPr>
+                                <m:e>
+                                  <m:r>
+                                    <a:rPr lang="en-US" sz="2400" i="1">
+                                      <a:latin typeface="Cambria Math" panose="02040503050406030204" pitchFamily="18" charset="0"/>
+                                    </a:rPr>
+                                    <m:t>𝑠</m:t>
+                                  </m:r>
+                                </m:e>
+                                <m:sup>
+                                  <m:r>
+                                    <a:rPr lang="en-US" sz="2400" i="1">
+                                      <a:latin typeface="Cambria Math" panose="02040503050406030204" pitchFamily="18" charset="0"/>
+                                    </a:rPr>
+                                    <m:t>′</m:t>
+                                  </m:r>
+                                </m:sup>
+                              </m:sSup>
+                              <m:r>
+                                <a:rPr lang="en-US" sz="2400" i="1">
+                                  <a:latin typeface="Cambria Math" panose="02040503050406030204" pitchFamily="18" charset="0"/>
+                                </a:rPr>
+                                <m:t>,</m:t>
+                              </m:r>
+                              <m:r>
+                                <a:rPr lang="en-US" sz="2400" i="1">
+                                  <a:latin typeface="Cambria Math" panose="02040503050406030204" pitchFamily="18" charset="0"/>
+                                </a:rPr>
+                                <m:t>𝑟</m:t>
+                              </m:r>
+                              <m:r>
+                                <a:rPr lang="en-US" sz="2400" i="1">
+                                  <a:latin typeface="Cambria Math" panose="02040503050406030204" pitchFamily="18" charset="0"/>
+                                </a:rPr>
+                                <m:t> </m:t>
+                              </m:r>
+                            </m:e>
+                          </m:d>
+                          <m:r>
+                            <a:rPr lang="en-US" sz="2400" i="1">
+                              <a:latin typeface="Cambria Math" panose="02040503050406030204" pitchFamily="18" charset="0"/>
+                            </a:rPr>
+                            <m:t>𝑠</m:t>
+                          </m:r>
+                          <m:r>
+                            <a:rPr lang="en-US" sz="2400" i="1">
+                              <a:latin typeface="Cambria Math" panose="02040503050406030204" pitchFamily="18" charset="0"/>
+                            </a:rPr>
+                            <m:t>,</m:t>
+                          </m:r>
+                          <m:r>
+                            <a:rPr lang="en-US" sz="2400" i="1">
+                              <a:latin typeface="Cambria Math" panose="02040503050406030204" pitchFamily="18" charset="0"/>
+                            </a:rPr>
+                            <m:t>𝑎</m:t>
+                          </m:r>
+                          <m:r>
+                            <a:rPr lang="en-US" sz="2400" i="1">
+                              <a:latin typeface="Cambria Math" panose="02040503050406030204" pitchFamily="18" charset="0"/>
+                            </a:rPr>
+                            <m:t>)[</m:t>
+                          </m:r>
+                          <m:r>
+                            <a:rPr lang="en-US" sz="2400" i="1">
+                              <a:latin typeface="Cambria Math" panose="02040503050406030204" pitchFamily="18" charset="0"/>
+                            </a:rPr>
+                            <m:t>𝑟</m:t>
+                          </m:r>
+                          <m:r>
+                            <a:rPr lang="en-US" sz="2400" i="1">
+                              <a:latin typeface="Cambria Math" panose="02040503050406030204" pitchFamily="18" charset="0"/>
+                            </a:rPr>
+                            <m:t>+</m:t>
+                          </m:r>
+                          <m:r>
+                            <a:rPr lang="en-US" sz="2400" i="1">
+                              <a:latin typeface="Cambria Math" panose="02040503050406030204" pitchFamily="18" charset="0"/>
+                            </a:rPr>
+                            <m:t>𝛾</m:t>
+                          </m:r>
+                          <m:r>
+                            <a:rPr lang="en-US" sz="2400" b="0" i="1" smtClean="0">
+                              <a:latin typeface="Cambria Math" panose="02040503050406030204" pitchFamily="18" charset="0"/>
+                            </a:rPr>
+                            <m:t>𝑣</m:t>
+                          </m:r>
+                          <m:d>
+                            <m:dPr>
+                              <m:ctrlPr>
+                                <a:rPr lang="en-US" sz="2400" i="1">
+                                  <a:latin typeface="Cambria Math" panose="02040503050406030204" pitchFamily="18" charset="0"/>
+                                </a:rPr>
+                              </m:ctrlPr>
+                            </m:dPr>
+                            <m:e>
+                              <m:sSup>
+                                <m:sSupPr>
+                                  <m:ctrlPr>
+                                    <a:rPr lang="en-US" sz="2400" i="1">
+                                      <a:latin typeface="Cambria Math" panose="02040503050406030204" pitchFamily="18" charset="0"/>
+                                    </a:rPr>
+                                  </m:ctrlPr>
+                                </m:sSupPr>
+                                <m:e>
+                                  <m:r>
+                                    <a:rPr lang="en-US" sz="2400" i="1">
+                                      <a:latin typeface="Cambria Math" panose="02040503050406030204" pitchFamily="18" charset="0"/>
+                                    </a:rPr>
+                                    <m:t>𝑠</m:t>
+                                  </m:r>
+                                </m:e>
+                                <m:sup>
+                                  <m:r>
+                                    <a:rPr lang="en-US" sz="2400" i="1">
+                                      <a:latin typeface="Cambria Math" panose="02040503050406030204" pitchFamily="18" charset="0"/>
+                                    </a:rPr>
+                                    <m:t>′</m:t>
+                                  </m:r>
+                                </m:sup>
+                              </m:sSup>
+                            </m:e>
+                          </m:d>
+                          <m:r>
+                            <a:rPr lang="en-US" sz="2400" i="1">
+                              <a:latin typeface="Cambria Math" panose="02040503050406030204" pitchFamily="18" charset="0"/>
+                            </a:rPr>
+                            <m:t>]</m:t>
+                          </m:r>
+                        </m:e>
+                      </m:nary>
+                    </m:oMath>
+                  </m:oMathPara>
+                </a14:m>
                 <a:endParaRPr lang="en-US" sz="2400" dirty="0"/>
               </a:p>
               <a:p>
+                <a:endParaRPr lang="en-US" sz="2400" b="1" dirty="0"/>
+              </a:p>
+              <a:p>
                 <a:r>
                   <a:rPr lang="en-US" sz="2400" b="1" dirty="0"/>
                   <a:t>Guarantee</a:t>
                 </a:r>
                 <a:r>
                   <a:rPr lang="en-US" sz="2400" dirty="0"/>
-                  <a:t>: Sequence </a:t>
+                  <a:t>:  </a:t>
+                </a:r>
+                <a14:m>
+                  <m:oMath xmlns:m="http://schemas.openxmlformats.org/officeDocument/2006/math">
+                    <m:sSup>
+                      <m:sSupPr>
+                        <m:ctrlPr>
+                          <a:rPr lang="en-US" sz="2400" b="0" i="1" smtClean="0">
+                            <a:latin typeface="Cambria Math" panose="02040503050406030204" pitchFamily="18" charset="0"/>
+                          </a:rPr>
+                        </m:ctrlPr>
+                      </m:sSupPr>
+                      <m:e>
+                        <m:r>
+                          <a:rPr lang="en-US" sz="2400" b="0" i="1" smtClean="0">
+                            <a:latin typeface="Cambria Math" panose="02040503050406030204" pitchFamily="18" charset="0"/>
+                          </a:rPr>
+                          <m:t>𝑇</m:t>
+                        </m:r>
+                      </m:e>
+                      <m:sup>
+                        <m:r>
+                          <a:rPr lang="en-US" sz="2400" b="0" i="1" smtClean="0">
+                            <a:latin typeface="Cambria Math" panose="02040503050406030204" pitchFamily="18" charset="0"/>
+                          </a:rPr>
+                          <m:t>∗</m:t>
+                        </m:r>
+                      </m:sup>
+                    </m:sSup>
+                  </m:oMath>
+                </a14:m>
+                <a:r>
+                  <a:rPr lang="en-US" sz="2400" dirty="0"/>
+                  <a:t>is also </a:t>
+                </a:r>
+                <a14:m>
+                  <m:oMath xmlns:m="http://schemas.openxmlformats.org/officeDocument/2006/math">
+                    <m:r>
+                      <a:rPr lang="en-US" sz="2400" b="0" i="1" smtClean="0">
+                        <a:latin typeface="Cambria Math" panose="02040503050406030204" pitchFamily="18" charset="0"/>
+                      </a:rPr>
+                      <m:t>𝛾</m:t>
+                    </m:r>
+                  </m:oMath>
+                </a14:m>
+                <a:r>
+                  <a:rPr lang="en-US" sz="2400" dirty="0"/>
+                  <a:t>-contracting. The Sequence </a:t>
                 </a:r>
                 <a14:m>
                   <m:oMath xmlns:m="http://schemas.openxmlformats.org/officeDocument/2006/math">
@@ -8786,154 +11307,10 @@
                 </a14:m>
                 <a:endParaRPr lang="en-US" sz="2400" dirty="0"/>
               </a:p>
-              <a:p>
-                <a:r>
-                  <a:rPr lang="en-US" sz="2400" dirty="0"/>
-                  <a:t>Practical termination when </a:t>
-                </a:r>
-                <a14:m>
-                  <m:oMath xmlns:m="http://schemas.openxmlformats.org/officeDocument/2006/math">
-                    <m:sSub>
-                      <m:sSubPr>
-                        <m:ctrlPr>
-                          <a:rPr lang="en-US" sz="2400" b="0" i="1" smtClean="0">
-                            <a:latin typeface="Cambria Math" panose="02040503050406030204" pitchFamily="18" charset="0"/>
-                          </a:rPr>
-                        </m:ctrlPr>
-                      </m:sSubPr>
-                      <m:e>
-                        <m:r>
-                          <a:rPr lang="en-US" sz="2400" b="0" i="1" smtClean="0">
-                            <a:latin typeface="Cambria Math" panose="02040503050406030204" pitchFamily="18" charset="0"/>
-                          </a:rPr>
-                          <m:t>𝑣</m:t>
-                        </m:r>
-                      </m:e>
-                      <m:sub>
-                        <m:r>
-                          <a:rPr lang="en-US" sz="2400" b="0" i="1" smtClean="0">
-                            <a:latin typeface="Cambria Math" panose="02040503050406030204" pitchFamily="18" charset="0"/>
-                          </a:rPr>
-                          <m:t>𝑘</m:t>
-                        </m:r>
-                        <m:r>
-                          <a:rPr lang="en-US" sz="2400" b="0" i="1" smtClean="0">
-                            <a:latin typeface="Cambria Math" panose="02040503050406030204" pitchFamily="18" charset="0"/>
-                          </a:rPr>
-                          <m:t>+1</m:t>
-                        </m:r>
-                      </m:sub>
-                    </m:sSub>
-                    <m:d>
-                      <m:dPr>
-                        <m:ctrlPr>
-                          <a:rPr lang="en-US" sz="2400" b="0" i="1" smtClean="0">
-                            <a:latin typeface="Cambria Math" panose="02040503050406030204" pitchFamily="18" charset="0"/>
-                          </a:rPr>
-                        </m:ctrlPr>
-                      </m:dPr>
-                      <m:e>
-                        <m:r>
-                          <a:rPr lang="en-US" sz="2400" b="0" i="1" smtClean="0">
-                            <a:latin typeface="Cambria Math" panose="02040503050406030204" pitchFamily="18" charset="0"/>
-                          </a:rPr>
-                          <m:t>𝑠</m:t>
-                        </m:r>
-                      </m:e>
-                    </m:d>
-                    <m:r>
-                      <a:rPr lang="en-US" sz="2400" b="0" i="1" smtClean="0">
-                        <a:latin typeface="Cambria Math" panose="02040503050406030204" pitchFamily="18" charset="0"/>
-                      </a:rPr>
-                      <m:t>−</m:t>
-                    </m:r>
-                    <m:sSub>
-                      <m:sSubPr>
-                        <m:ctrlPr>
-                          <a:rPr lang="en-US" sz="2400" b="0" i="1" smtClean="0">
-                            <a:latin typeface="Cambria Math" panose="02040503050406030204" pitchFamily="18" charset="0"/>
-                          </a:rPr>
-                        </m:ctrlPr>
-                      </m:sSubPr>
-                      <m:e>
-                        <m:r>
-                          <a:rPr lang="en-US" sz="2400" b="0" i="1" smtClean="0">
-                            <a:latin typeface="Cambria Math" panose="02040503050406030204" pitchFamily="18" charset="0"/>
-                          </a:rPr>
-                          <m:t>𝑣</m:t>
-                        </m:r>
-                      </m:e>
-                      <m:sub>
-                        <m:r>
-                          <a:rPr lang="en-US" sz="2400" b="0" i="1" smtClean="0">
-                            <a:latin typeface="Cambria Math" panose="02040503050406030204" pitchFamily="18" charset="0"/>
-                          </a:rPr>
-                          <m:t>𝑘</m:t>
-                        </m:r>
-                      </m:sub>
-                    </m:sSub>
-                    <m:d>
-                      <m:dPr>
-                        <m:ctrlPr>
-                          <a:rPr lang="en-US" sz="2400" b="0" i="1" smtClean="0">
-                            <a:latin typeface="Cambria Math" panose="02040503050406030204" pitchFamily="18" charset="0"/>
-                          </a:rPr>
-                        </m:ctrlPr>
-                      </m:dPr>
-                      <m:e>
-                        <m:r>
-                          <a:rPr lang="en-US" sz="2400" b="0" i="1" smtClean="0">
-                            <a:latin typeface="Cambria Math" panose="02040503050406030204" pitchFamily="18" charset="0"/>
-                          </a:rPr>
-                          <m:t>𝑠</m:t>
-                        </m:r>
-                      </m:e>
-                    </m:d>
-                    <m:r>
-                      <a:rPr lang="en-US" sz="2400" b="0" i="0" smtClean="0">
-                        <a:latin typeface="Cambria Math" panose="02040503050406030204" pitchFamily="18" charset="0"/>
-                      </a:rPr>
-                      <m:t>&lt;</m:t>
-                    </m:r>
-                    <m:r>
-                      <a:rPr lang="en-US" sz="2400" b="0" i="1" smtClean="0">
-                        <a:latin typeface="Cambria Math" panose="02040503050406030204" pitchFamily="18" charset="0"/>
-                      </a:rPr>
-                      <m:t>𝜃</m:t>
-                    </m:r>
-                    <m:r>
-                      <a:rPr lang="en-US" sz="2400" b="0" i="1" smtClean="0">
-                        <a:latin typeface="Cambria Math" panose="02040503050406030204" pitchFamily="18" charset="0"/>
-                      </a:rPr>
-                      <m:t>   ∀</m:t>
-                    </m:r>
-                    <m:r>
-                      <a:rPr lang="en-US" sz="2400" b="0" i="1" smtClean="0">
-                        <a:latin typeface="Cambria Math" panose="02040503050406030204" pitchFamily="18" charset="0"/>
-                      </a:rPr>
-                      <m:t>𝑠</m:t>
-                    </m:r>
-                    <m:r>
-                      <a:rPr lang="en-US" sz="2400" b="0" i="1" smtClean="0">
-                        <a:latin typeface="Cambria Math" panose="02040503050406030204" pitchFamily="18" charset="0"/>
-                      </a:rPr>
-                      <m:t>∈</m:t>
-                    </m:r>
-                    <m:r>
-                      <a:rPr lang="en-US" sz="2400" b="0" i="1" smtClean="0">
-                        <a:latin typeface="Cambria Math" panose="02040503050406030204" pitchFamily="18" charset="0"/>
-                        <a:ea typeface="Cambria Math" panose="02040503050406030204" pitchFamily="18" charset="0"/>
-                      </a:rPr>
-                      <m:t>𝒮</m:t>
-                    </m:r>
-                  </m:oMath>
-                </a14:m>
-                <a:endParaRPr lang="en-US" sz="2400" dirty="0"/>
-              </a:p>
             </p:txBody>
           </p:sp>
         </mc:Choice>
-        <mc:Fallback xmlns="">
+        <mc:Fallback>
           <p:sp>
             <p:nvSpPr>
               <p:cNvPr id="3" name="Content Placeholder 2">
@@ -8952,13 +11329,13 @@
             </p:nvSpPr>
             <p:spPr>
               <a:xfrm>
-                <a:off x="838200" y="1397331"/>
-                <a:ext cx="7990869" cy="4235652"/>
+                <a:off x="838200" y="1397330"/>
+                <a:ext cx="7990869" cy="4759161"/>
               </a:xfrm>
               <a:blipFill>
                 <a:blip r:embed="rId2"/>
                 <a:stretch>
-                  <a:fillRect l="-1069" t="-1871"/>
+                  <a:fillRect l="-1069" t="-2305" b="-256"/>
                 </a:stretch>
               </a:blipFill>
             </p:spPr>
@@ -11125,7 +13502,7 @@
 </p:sld>
 </file>
 
-<file path=ppt/slides/slide16.xml><?xml version="1.0" encoding="utf-8"?>
+<file path=ppt/slides/slide18.xml><?xml version="1.0" encoding="utf-8"?>
 <p:sld xmlns:a="http://schemas.openxmlformats.org/drawingml/2006/main" xmlns:r="http://schemas.openxmlformats.org/officeDocument/2006/relationships" xmlns:p="http://schemas.openxmlformats.org/presentationml/2006/main">
   <p:cSld>
     <p:spTree>
@@ -11142,6 +13519,36 @@
           <a:chExt cx="0" cy="0"/>
         </a:xfrm>
       </p:grpSpPr>
+      <p:pic>
+        <p:nvPicPr>
+          <p:cNvPr id="7" name="Content Placeholder 4">
+            <a:extLst>
+              <a:ext uri="{FF2B5EF4-FFF2-40B4-BE49-F238E27FC236}">
+                <a16:creationId xmlns:a16="http://schemas.microsoft.com/office/drawing/2014/main" id="{76B44262-ED50-A04F-C5AA-E6A746D04708}"/>
+              </a:ext>
+            </a:extLst>
+          </p:cNvPr>
+          <p:cNvPicPr>
+            <a:picLocks noChangeAspect="1"/>
+          </p:cNvPicPr>
+          <p:nvPr/>
+        </p:nvPicPr>
+        <p:blipFill>
+          <a:blip r:embed="rId2"/>
+          <a:stretch>
+            <a:fillRect/>
+          </a:stretch>
+        </p:blipFill>
+        <p:spPr>
+          <a:xfrm>
+            <a:off x="520239" y="1039018"/>
+            <a:ext cx="6849637" cy="4779963"/>
+          </a:xfrm>
+          <a:prstGeom prst="rect">
+            <a:avLst/>
+          </a:prstGeom>
+        </p:spPr>
+      </p:pic>
       <p:sp>
         <p:nvSpPr>
           <p:cNvPr id="2" name="Title 1">
@@ -11187,21 +13594,492 @@
           </p:nvPr>
         </p:nvPicPr>
         <p:blipFill>
-          <a:blip r:embed="rId2"/>
+          <a:blip r:embed="rId3"/>
+          <a:srcRect l="1659" t="2281"/>
           <a:stretch>
             <a:fillRect/>
           </a:stretch>
         </p:blipFill>
         <p:spPr>
           <a:xfrm>
-            <a:off x="1828204" y="1767399"/>
-            <a:ext cx="8535591" cy="4039164"/>
+            <a:off x="4411456" y="3092208"/>
+            <a:ext cx="7034263" cy="3307667"/>
           </a:xfrm>
           <a:prstGeom prst="rect">
             <a:avLst/>
           </a:prstGeom>
         </p:spPr>
       </p:pic>
+      <mc:AlternateContent xmlns:mc="http://schemas.openxmlformats.org/markup-compatibility/2006">
+        <mc:Choice xmlns:a14="http://schemas.microsoft.com/office/drawing/2010/main" Requires="a14">
+          <p:sp>
+            <p:nvSpPr>
+              <p:cNvPr id="3" name="Speech Bubble: Rectangle with Corners Rounded 2">
+                <a:extLst>
+                  <a:ext uri="{FF2B5EF4-FFF2-40B4-BE49-F238E27FC236}">
+                    <a16:creationId xmlns:a16="http://schemas.microsoft.com/office/drawing/2014/main" id="{9540CE52-AAD7-F286-13F5-1B8D753FE1D7}"/>
+                  </a:ext>
+                </a:extLst>
+              </p:cNvPr>
+              <p:cNvSpPr/>
+              <p:nvPr/>
+            </p:nvSpPr>
+            <p:spPr>
+              <a:xfrm>
+                <a:off x="8103956" y="4239859"/>
+                <a:ext cx="2889785" cy="569466"/>
+              </a:xfrm>
+              <a:prstGeom prst="wedgeRoundRectCallout">
+                <a:avLst>
+                  <a:gd name="adj1" fmla="val -66744"/>
+                  <a:gd name="adj2" fmla="val 62281"/>
+                  <a:gd name="adj3" fmla="val 16667"/>
+                </a:avLst>
+              </a:prstGeom>
+            </p:spPr>
+            <p:style>
+              <a:lnRef idx="2">
+                <a:schemeClr val="accent1">
+                  <a:shade val="15000"/>
+                </a:schemeClr>
+              </a:lnRef>
+              <a:fillRef idx="1">
+                <a:schemeClr val="accent1"/>
+              </a:fillRef>
+              <a:effectRef idx="0">
+                <a:schemeClr val="accent1"/>
+              </a:effectRef>
+              <a:fontRef idx="minor">
+                <a:schemeClr val="lt1"/>
+              </a:fontRef>
+            </p:style>
+            <p:txBody>
+              <a:bodyPr rtlCol="0" anchor="ctr"/>
+              <a:lstStyle/>
+              <a:p>
+                <a:pPr algn="ctr"/>
+                <a:r>
+                  <a:rPr lang="en-US" sz="1600" b="0" dirty="0"/>
+                  <a:t>Bellman optimality operator:</a:t>
+                </a:r>
+                <a:br>
+                  <a:rPr lang="en-US" sz="1600" b="0" dirty="0"/>
+                </a:br>
+                <a:r>
+                  <a:rPr lang="en-US" sz="1600" b="0" dirty="0"/>
+                  <a:t> </a:t>
+                </a:r>
+                <a14:m>
+                  <m:oMath xmlns:m="http://schemas.openxmlformats.org/officeDocument/2006/math">
+                    <m:sSub>
+                      <m:sSubPr>
+                        <m:ctrlPr>
+                          <a:rPr lang="en-US" sz="1600" b="0" i="1" smtClean="0">
+                            <a:latin typeface="Cambria Math" panose="02040503050406030204" pitchFamily="18" charset="0"/>
+                          </a:rPr>
+                        </m:ctrlPr>
+                      </m:sSubPr>
+                      <m:e>
+                        <m:r>
+                          <a:rPr lang="en-US" sz="1600" b="0" i="1" smtClean="0">
+                            <a:latin typeface="Cambria Math" panose="02040503050406030204" pitchFamily="18" charset="0"/>
+                          </a:rPr>
+                          <m:t>𝑉</m:t>
+                        </m:r>
+                      </m:e>
+                      <m:sub>
+                        <m:r>
+                          <a:rPr lang="en-US" sz="1600" b="0" i="1" smtClean="0">
+                            <a:latin typeface="Cambria Math" panose="02040503050406030204" pitchFamily="18" charset="0"/>
+                          </a:rPr>
+                          <m:t>𝑘</m:t>
+                        </m:r>
+                        <m:r>
+                          <a:rPr lang="en-US" sz="1600" b="0" i="1" smtClean="0">
+                            <a:latin typeface="Cambria Math" panose="02040503050406030204" pitchFamily="18" charset="0"/>
+                          </a:rPr>
+                          <m:t>+1</m:t>
+                        </m:r>
+                      </m:sub>
+                    </m:sSub>
+                    <m:r>
+                      <a:rPr lang="en-US" sz="1600" b="0" i="1" smtClean="0">
+                        <a:latin typeface="Cambria Math" panose="02040503050406030204" pitchFamily="18" charset="0"/>
+                      </a:rPr>
+                      <m:t>=</m:t>
+                    </m:r>
+                    <m:sSup>
+                      <m:sSupPr>
+                        <m:ctrlPr>
+                          <a:rPr lang="en-US" sz="1600" b="0" i="1" smtClean="0">
+                            <a:latin typeface="Cambria Math" panose="02040503050406030204" pitchFamily="18" charset="0"/>
+                          </a:rPr>
+                        </m:ctrlPr>
+                      </m:sSupPr>
+                      <m:e>
+                        <m:r>
+                          <a:rPr lang="en-US" sz="1600" b="0" i="1" smtClean="0">
+                            <a:latin typeface="Cambria Math" panose="02040503050406030204" pitchFamily="18" charset="0"/>
+                          </a:rPr>
+                          <m:t>𝑇</m:t>
+                        </m:r>
+                      </m:e>
+                      <m:sup>
+                        <m:r>
+                          <a:rPr lang="en-US" sz="1600" b="0" i="1" smtClean="0">
+                            <a:latin typeface="Cambria Math" panose="02040503050406030204" pitchFamily="18" charset="0"/>
+                          </a:rPr>
+                          <m:t>∗</m:t>
+                        </m:r>
+                      </m:sup>
+                    </m:sSup>
+                    <m:sSub>
+                      <m:sSubPr>
+                        <m:ctrlPr>
+                          <a:rPr lang="en-US" sz="1600" b="0" i="1" smtClean="0">
+                            <a:latin typeface="Cambria Math" panose="02040503050406030204" pitchFamily="18" charset="0"/>
+                          </a:rPr>
+                        </m:ctrlPr>
+                      </m:sSubPr>
+                      <m:e>
+                        <m:r>
+                          <a:rPr lang="en-US" sz="1600" b="0" i="1" smtClean="0">
+                            <a:latin typeface="Cambria Math" panose="02040503050406030204" pitchFamily="18" charset="0"/>
+                          </a:rPr>
+                          <m:t>𝑉</m:t>
+                        </m:r>
+                      </m:e>
+                      <m:sub>
+                        <m:r>
+                          <a:rPr lang="en-US" sz="1600" b="0" i="1" smtClean="0">
+                            <a:latin typeface="Cambria Math" panose="02040503050406030204" pitchFamily="18" charset="0"/>
+                          </a:rPr>
+                          <m:t>𝑘</m:t>
+                        </m:r>
+                      </m:sub>
+                    </m:sSub>
+                  </m:oMath>
+                </a14:m>
+                <a:endParaRPr lang="en-US" sz="1600" dirty="0"/>
+              </a:p>
+            </p:txBody>
+          </p:sp>
+        </mc:Choice>
+        <mc:Fallback>
+          <p:sp>
+            <p:nvSpPr>
+              <p:cNvPr id="3" name="Speech Bubble: Rectangle with Corners Rounded 2">
+                <a:extLst>
+                  <a:ext uri="{FF2B5EF4-FFF2-40B4-BE49-F238E27FC236}">
+                    <a16:creationId xmlns:a16="http://schemas.microsoft.com/office/drawing/2014/main" id="{9540CE52-AAD7-F286-13F5-1B8D753FE1D7}"/>
+                  </a:ext>
+                </a:extLst>
+              </p:cNvPr>
+              <p:cNvSpPr>
+                <a:spLocks noRot="1" noChangeAspect="1" noMove="1" noResize="1" noEditPoints="1" noAdjustHandles="1" noChangeArrowheads="1" noChangeShapeType="1" noTextEdit="1"/>
+              </p:cNvSpPr>
+              <p:nvPr/>
+            </p:nvSpPr>
+            <p:spPr>
+              <a:xfrm>
+                <a:off x="8103956" y="4239859"/>
+                <a:ext cx="2889785" cy="569466"/>
+              </a:xfrm>
+              <a:prstGeom prst="wedgeRoundRectCallout">
+                <a:avLst>
+                  <a:gd name="adj1" fmla="val -66744"/>
+                  <a:gd name="adj2" fmla="val 62281"/>
+                  <a:gd name="adj3" fmla="val 16667"/>
+                </a:avLst>
+              </a:prstGeom>
+              <a:blipFill>
+                <a:blip r:embed="rId4"/>
+                <a:stretch>
+                  <a:fillRect t="-2679"/>
+                </a:stretch>
+              </a:blipFill>
+            </p:spPr>
+            <p:txBody>
+              <a:bodyPr/>
+              <a:lstStyle/>
+              <a:p>
+                <a:r>
+                  <a:rPr lang="en-US">
+                    <a:noFill/>
+                  </a:rPr>
+                  <a:t> </a:t>
+                </a:r>
+              </a:p>
+            </p:txBody>
+          </p:sp>
+        </mc:Fallback>
+      </mc:AlternateContent>
+      <p:sp>
+        <p:nvSpPr>
+          <p:cNvPr id="6" name="Speech Bubble: Rectangle with Corners Rounded 5">
+            <a:extLst>
+              <a:ext uri="{FF2B5EF4-FFF2-40B4-BE49-F238E27FC236}">
+                <a16:creationId xmlns:a16="http://schemas.microsoft.com/office/drawing/2014/main" id="{C94FA055-A74C-A901-CCD7-6A1A7CC80DA2}"/>
+              </a:ext>
+            </a:extLst>
+          </p:cNvPr>
+          <p:cNvSpPr/>
+          <p:nvPr/>
+        </p:nvSpPr>
+        <p:spPr>
+          <a:xfrm>
+            <a:off x="8577442" y="6207869"/>
+            <a:ext cx="2667583" cy="384011"/>
+          </a:xfrm>
+          <a:prstGeom prst="wedgeRoundRectCallout">
+            <a:avLst>
+              <a:gd name="adj1" fmla="val -75681"/>
+              <a:gd name="adj2" fmla="val -48428"/>
+              <a:gd name="adj3" fmla="val 16667"/>
+            </a:avLst>
+          </a:prstGeom>
+        </p:spPr>
+        <p:style>
+          <a:lnRef idx="2">
+            <a:schemeClr val="accent1">
+              <a:shade val="15000"/>
+            </a:schemeClr>
+          </a:lnRef>
+          <a:fillRef idx="1">
+            <a:schemeClr val="accent1"/>
+          </a:fillRef>
+          <a:effectRef idx="0">
+            <a:schemeClr val="accent1"/>
+          </a:effectRef>
+          <a:fontRef idx="minor">
+            <a:schemeClr val="lt1"/>
+          </a:fontRef>
+        </p:style>
+        <p:txBody>
+          <a:bodyPr rtlCol="0" anchor="ctr"/>
+          <a:lstStyle/>
+          <a:p>
+            <a:pPr algn="ctr"/>
+            <a:r>
+              <a:rPr lang="en-US" sz="1600" b="0" dirty="0"/>
+              <a:t>Extract the greedy policy.</a:t>
+            </a:r>
+            <a:endParaRPr lang="en-US" sz="1600" dirty="0"/>
+          </a:p>
+        </p:txBody>
+      </p:sp>
+      <p:sp>
+        <p:nvSpPr>
+          <p:cNvPr id="8" name="Rectangle 7">
+            <a:extLst>
+              <a:ext uri="{FF2B5EF4-FFF2-40B4-BE49-F238E27FC236}">
+                <a16:creationId xmlns:a16="http://schemas.microsoft.com/office/drawing/2014/main" id="{AAC0C2CF-3D6C-5FB5-6FAF-5A3C70799FAF}"/>
+              </a:ext>
+            </a:extLst>
+          </p:cNvPr>
+          <p:cNvSpPr/>
+          <p:nvPr/>
+        </p:nvSpPr>
+        <p:spPr>
+          <a:xfrm>
+            <a:off x="1563554" y="3231811"/>
+            <a:ext cx="2847902" cy="300146"/>
+          </a:xfrm>
+          <a:prstGeom prst="rect">
+            <a:avLst/>
+          </a:prstGeom>
+          <a:noFill/>
+          <a:ln w="9525" cap="flat" cmpd="sng" algn="ctr">
+            <a:solidFill>
+              <a:schemeClr val="accent2"/>
+            </a:solidFill>
+            <a:prstDash val="solid"/>
+            <a:round/>
+            <a:headEnd type="none" w="med" len="med"/>
+            <a:tailEnd type="none" w="med" len="med"/>
+          </a:ln>
+        </p:spPr>
+        <p:style>
+          <a:lnRef idx="0">
+            <a:scrgbClr r="0" g="0" b="0"/>
+          </a:lnRef>
+          <a:fillRef idx="0">
+            <a:scrgbClr r="0" g="0" b="0"/>
+          </a:fillRef>
+          <a:effectRef idx="0">
+            <a:scrgbClr r="0" g="0" b="0"/>
+          </a:effectRef>
+          <a:fontRef idx="minor">
+            <a:schemeClr val="accent2"/>
+          </a:fontRef>
+        </p:style>
+        <p:txBody>
+          <a:bodyPr rtlCol="0" anchor="ctr"/>
+          <a:lstStyle/>
+          <a:p>
+            <a:pPr algn="ctr"/>
+            <a:endParaRPr lang="en-US"/>
+          </a:p>
+        </p:txBody>
+      </p:sp>
+      <p:sp>
+        <p:nvSpPr>
+          <p:cNvPr id="9" name="Rectangle 8">
+            <a:extLst>
+              <a:ext uri="{FF2B5EF4-FFF2-40B4-BE49-F238E27FC236}">
+                <a16:creationId xmlns:a16="http://schemas.microsoft.com/office/drawing/2014/main" id="{6D968F04-390C-807C-E196-34BFDCCC50A5}"/>
+              </a:ext>
+            </a:extLst>
+          </p:cNvPr>
+          <p:cNvSpPr/>
+          <p:nvPr/>
+        </p:nvSpPr>
+        <p:spPr>
+          <a:xfrm>
+            <a:off x="2155703" y="4954746"/>
+            <a:ext cx="2255753" cy="300146"/>
+          </a:xfrm>
+          <a:prstGeom prst="rect">
+            <a:avLst/>
+          </a:prstGeom>
+          <a:noFill/>
+          <a:ln w="9525" cap="flat" cmpd="sng" algn="ctr">
+            <a:solidFill>
+              <a:schemeClr val="accent2"/>
+            </a:solidFill>
+            <a:prstDash val="solid"/>
+            <a:round/>
+            <a:headEnd type="none" w="med" len="med"/>
+            <a:tailEnd type="none" w="med" len="med"/>
+          </a:ln>
+        </p:spPr>
+        <p:style>
+          <a:lnRef idx="0">
+            <a:scrgbClr r="0" g="0" b="0"/>
+          </a:lnRef>
+          <a:fillRef idx="0">
+            <a:scrgbClr r="0" g="0" b="0"/>
+          </a:fillRef>
+          <a:effectRef idx="0">
+            <a:scrgbClr r="0" g="0" b="0"/>
+          </a:effectRef>
+          <a:fontRef idx="minor">
+            <a:schemeClr val="accent2"/>
+          </a:fontRef>
+        </p:style>
+        <p:txBody>
+          <a:bodyPr rtlCol="0" anchor="ctr"/>
+          <a:lstStyle/>
+          <a:p>
+            <a:pPr algn="ctr"/>
+            <a:endParaRPr lang="en-US"/>
+          </a:p>
+        </p:txBody>
+      </p:sp>
+      <p:sp>
+        <p:nvSpPr>
+          <p:cNvPr id="10" name="TextBox 9">
+            <a:extLst>
+              <a:ext uri="{FF2B5EF4-FFF2-40B4-BE49-F238E27FC236}">
+                <a16:creationId xmlns:a16="http://schemas.microsoft.com/office/drawing/2014/main" id="{C06B028D-DF2E-6F82-30C8-7142C1BEBEA8}"/>
+              </a:ext>
+            </a:extLst>
+          </p:cNvPr>
+          <p:cNvSpPr txBox="1"/>
+          <p:nvPr/>
+        </p:nvSpPr>
+        <p:spPr>
+          <a:xfrm>
+            <a:off x="1695311" y="3678540"/>
+            <a:ext cx="2584388" cy="1200329"/>
+          </a:xfrm>
+          <a:prstGeom prst="rect">
+            <a:avLst/>
+          </a:prstGeom>
+        </p:spPr>
+        <p:style>
+          <a:lnRef idx="2">
+            <a:schemeClr val="accent2">
+              <a:shade val="15000"/>
+            </a:schemeClr>
+          </a:lnRef>
+          <a:fillRef idx="1">
+            <a:schemeClr val="accent2"/>
+          </a:fillRef>
+          <a:effectRef idx="0">
+            <a:schemeClr val="accent2"/>
+          </a:effectRef>
+          <a:fontRef idx="minor">
+            <a:schemeClr val="lt1"/>
+          </a:fontRef>
+        </p:style>
+        <p:txBody>
+          <a:bodyPr wrap="square" rtlCol="0">
+            <a:spAutoFit/>
+          </a:bodyPr>
+          <a:lstStyle/>
+          <a:p>
+            <a:r>
+              <a:rPr lang="en-US" dirty="0"/>
+              <a:t>Combine improvement and modified evaluation (1 iteration) into a single update.</a:t>
+            </a:r>
+          </a:p>
+        </p:txBody>
+      </p:sp>
+      <p:sp>
+        <p:nvSpPr>
+          <p:cNvPr id="11" name="Rectangle 10">
+            <a:extLst>
+              <a:ext uri="{FF2B5EF4-FFF2-40B4-BE49-F238E27FC236}">
+                <a16:creationId xmlns:a16="http://schemas.microsoft.com/office/drawing/2014/main" id="{73AAE380-C886-4AD1-501B-DC3FA8D0D18B}"/>
+              </a:ext>
+            </a:extLst>
+          </p:cNvPr>
+          <p:cNvSpPr/>
+          <p:nvPr/>
+        </p:nvSpPr>
+        <p:spPr>
+          <a:xfrm>
+            <a:off x="5114123" y="4899809"/>
+            <a:ext cx="3541266" cy="300146"/>
+          </a:xfrm>
+          <a:prstGeom prst="rect">
+            <a:avLst/>
+          </a:prstGeom>
+          <a:noFill/>
+          <a:ln w="9525" cap="flat" cmpd="sng" algn="ctr">
+            <a:solidFill>
+              <a:schemeClr val="accent2"/>
+            </a:solidFill>
+            <a:prstDash val="solid"/>
+            <a:round/>
+            <a:headEnd type="none" w="med" len="med"/>
+            <a:tailEnd type="none" w="med" len="med"/>
+          </a:ln>
+        </p:spPr>
+        <p:style>
+          <a:lnRef idx="0">
+            <a:scrgbClr r="0" g="0" b="0"/>
+          </a:lnRef>
+          <a:fillRef idx="0">
+            <a:scrgbClr r="0" g="0" b="0"/>
+          </a:fillRef>
+          <a:effectRef idx="0">
+            <a:scrgbClr r="0" g="0" b="0"/>
+          </a:effectRef>
+          <a:fontRef idx="minor">
+            <a:schemeClr val="accent2"/>
+          </a:fontRef>
+        </p:style>
+        <p:txBody>
+          <a:bodyPr rtlCol="0" anchor="ctr"/>
+          <a:lstStyle/>
+          <a:p>
+            <a:pPr algn="ctr"/>
+            <a:endParaRPr lang="en-US"/>
+          </a:p>
+        </p:txBody>
+      </p:sp>
     </p:spTree>
     <p:extLst>
       <p:ext uri="{BB962C8B-B14F-4D97-AF65-F5344CB8AC3E}">
@@ -11215,7 +14093,7 @@
 </p:sld>
 </file>
 
-<file path=ppt/slides/slide17.xml><?xml version="1.0" encoding="utf-8"?>
+<file path=ppt/slides/slide19.xml><?xml version="1.0" encoding="utf-8"?>
 <p:sld xmlns:a="http://schemas.openxmlformats.org/drawingml/2006/main" xmlns:r="http://schemas.openxmlformats.org/officeDocument/2006/relationships" xmlns:p="http://schemas.openxmlformats.org/presentationml/2006/main">
   <p:cSld>
     <p:spTree>
@@ -11386,442 +14264,6 @@
     <p:extLst>
       <p:ext uri="{BB962C8B-B14F-4D97-AF65-F5344CB8AC3E}">
         <p14:creationId xmlns:p14="http://schemas.microsoft.com/office/powerpoint/2010/main" val="2486968449"/>
-      </p:ext>
-    </p:extLst>
-  </p:cSld>
-  <p:clrMapOvr>
-    <a:masterClrMapping/>
-  </p:clrMapOvr>
-</p:sld>
-</file>
-
-<file path=ppt/slides/slide18.xml><?xml version="1.0" encoding="utf-8"?>
-<p:sld xmlns:a="http://schemas.openxmlformats.org/drawingml/2006/main" xmlns:r="http://schemas.openxmlformats.org/officeDocument/2006/relationships" xmlns:p="http://schemas.openxmlformats.org/presentationml/2006/main">
-  <p:cSld>
-    <p:spTree>
-      <p:nvGrpSpPr>
-        <p:cNvPr id="1" name=""/>
-        <p:cNvGrpSpPr/>
-        <p:nvPr/>
-      </p:nvGrpSpPr>
-      <p:grpSpPr>
-        <a:xfrm>
-          <a:off x="0" y="0"/>
-          <a:ext cx="0" cy="0"/>
-          <a:chOff x="0" y="0"/>
-          <a:chExt cx="0" cy="0"/>
-        </a:xfrm>
-      </p:grpSpPr>
-      <p:sp>
-        <p:nvSpPr>
-          <p:cNvPr id="2" name="Title 1">
-            <a:extLst>
-              <a:ext uri="{FF2B5EF4-FFF2-40B4-BE49-F238E27FC236}">
-                <a16:creationId xmlns:a16="http://schemas.microsoft.com/office/drawing/2014/main" id="{2542819D-6D6F-85AF-5816-7FFAE79AF0F0}"/>
-              </a:ext>
-            </a:extLst>
-          </p:cNvPr>
-          <p:cNvSpPr>
-            <a:spLocks noGrp="1"/>
-          </p:cNvSpPr>
-          <p:nvPr>
-            <p:ph type="title"/>
-          </p:nvPr>
-        </p:nvSpPr>
-        <p:spPr/>
-        <p:txBody>
-          <a:bodyPr/>
-          <a:lstStyle/>
-          <a:p>
-            <a:r>
-              <a:rPr lang="en-US" dirty="0"/>
-              <a:t>GPI: Generalized Policy Iteration</a:t>
-            </a:r>
-          </a:p>
-        </p:txBody>
-      </p:sp>
-      <p:sp>
-        <p:nvSpPr>
-          <p:cNvPr id="4" name="Text Placeholder 3">
-            <a:extLst>
-              <a:ext uri="{FF2B5EF4-FFF2-40B4-BE49-F238E27FC236}">
-                <a16:creationId xmlns:a16="http://schemas.microsoft.com/office/drawing/2014/main" id="{2C33D3AB-3DD4-67C8-8B22-66483B0E48C0}"/>
-              </a:ext>
-            </a:extLst>
-          </p:cNvPr>
-          <p:cNvSpPr>
-            <a:spLocks noGrp="1"/>
-          </p:cNvSpPr>
-          <p:nvPr>
-            <p:ph type="body" idx="1"/>
-          </p:nvPr>
-        </p:nvSpPr>
-        <p:spPr/>
-        <p:txBody>
-          <a:bodyPr/>
-          <a:lstStyle/>
-          <a:p>
-            <a:endParaRPr lang="en-US"/>
-          </a:p>
-        </p:txBody>
-      </p:sp>
-    </p:spTree>
-    <p:extLst>
-      <p:ext uri="{BB962C8B-B14F-4D97-AF65-F5344CB8AC3E}">
-        <p14:creationId xmlns:p14="http://schemas.microsoft.com/office/powerpoint/2010/main" val="391152602"/>
-      </p:ext>
-    </p:extLst>
-  </p:cSld>
-  <p:clrMapOvr>
-    <a:masterClrMapping/>
-  </p:clrMapOvr>
-</p:sld>
-</file>
-
-<file path=ppt/slides/slide19.xml><?xml version="1.0" encoding="utf-8"?>
-<p:sld xmlns:a="http://schemas.openxmlformats.org/drawingml/2006/main" xmlns:r="http://schemas.openxmlformats.org/officeDocument/2006/relationships" xmlns:p="http://schemas.openxmlformats.org/presentationml/2006/main">
-  <p:cSld>
-    <p:spTree>
-      <p:nvGrpSpPr>
-        <p:cNvPr id="1" name="">
-          <a:extLst>
-            <a:ext uri="{FF2B5EF4-FFF2-40B4-BE49-F238E27FC236}">
-              <a16:creationId xmlns:a16="http://schemas.microsoft.com/office/drawing/2014/main" id="{2A863CDC-59B1-7366-BF66-6498BF0BDA45}"/>
-            </a:ext>
-          </a:extLst>
-        </p:cNvPr>
-        <p:cNvGrpSpPr/>
-        <p:nvPr/>
-      </p:nvGrpSpPr>
-      <p:grpSpPr>
-        <a:xfrm>
-          <a:off x="0" y="0"/>
-          <a:ext cx="0" cy="0"/>
-          <a:chOff x="0" y="0"/>
-          <a:chExt cx="0" cy="0"/>
-        </a:xfrm>
-      </p:grpSpPr>
-      <p:sp>
-        <p:nvSpPr>
-          <p:cNvPr id="2" name="Title 1">
-            <a:extLst>
-              <a:ext uri="{FF2B5EF4-FFF2-40B4-BE49-F238E27FC236}">
-                <a16:creationId xmlns:a16="http://schemas.microsoft.com/office/drawing/2014/main" id="{BB27E42A-9F26-864D-705B-AD1A7F35C8A1}"/>
-              </a:ext>
-            </a:extLst>
-          </p:cNvPr>
-          <p:cNvSpPr>
-            <a:spLocks noGrp="1"/>
-          </p:cNvSpPr>
-          <p:nvPr>
-            <p:ph type="title"/>
-          </p:nvPr>
-        </p:nvSpPr>
-        <p:spPr/>
-        <p:txBody>
-          <a:bodyPr/>
-          <a:lstStyle/>
-          <a:p>
-            <a:r>
-              <a:rPr lang="en-US" dirty="0"/>
-              <a:t>GPI: Generalized Policy Iteration</a:t>
-            </a:r>
-          </a:p>
-        </p:txBody>
-      </p:sp>
-      <mc:AlternateContent xmlns:mc="http://schemas.openxmlformats.org/markup-compatibility/2006" xmlns:a14="http://schemas.microsoft.com/office/drawing/2010/main">
-        <mc:Choice Requires="a14">
-          <p:sp>
-            <p:nvSpPr>
-              <p:cNvPr id="3" name="Content Placeholder 2">
-                <a:extLst>
-                  <a:ext uri="{FF2B5EF4-FFF2-40B4-BE49-F238E27FC236}">
-                    <a16:creationId xmlns:a16="http://schemas.microsoft.com/office/drawing/2014/main" id="{439A61E8-38E7-2C6A-1812-C00D57947FA6}"/>
-                  </a:ext>
-                </a:extLst>
-              </p:cNvPr>
-              <p:cNvSpPr>
-                <a:spLocks noGrp="1"/>
-              </p:cNvSpPr>
-              <p:nvPr>
-                <p:ph idx="1"/>
-              </p:nvPr>
-            </p:nvSpPr>
-            <p:spPr>
-              <a:xfrm>
-                <a:off x="838201" y="1397330"/>
-                <a:ext cx="7223876" cy="4779633"/>
-              </a:xfrm>
-            </p:spPr>
-            <p:txBody>
-              <a:bodyPr>
-                <a:normAutofit fontScale="62500" lnSpcReduction="20000"/>
-              </a:bodyPr>
-              <a:lstStyle/>
-              <a:p>
-                <a:pPr marL="0" indent="0">
-                  <a:buNone/>
-                </a:pPr>
-                <a:endParaRPr lang="en-US" dirty="0"/>
-              </a:p>
-              <a:p>
-                <a:pPr marL="0" indent="0">
-                  <a:buNone/>
-                </a:pPr>
-                <a:r>
-                  <a:rPr lang="en-US" b="1" dirty="0"/>
-                  <a:t>Steps</a:t>
-                </a:r>
-              </a:p>
-              <a:p>
-                <a:r>
-                  <a:rPr lang="en-US" b="1" dirty="0"/>
-                  <a:t>Policy evaluation</a:t>
-                </a:r>
-                <a:r>
-                  <a:rPr lang="en-US" dirty="0"/>
-                  <a:t>: make the value function consistent with the current policy </a:t>
-                </a:r>
-                <a14:m>
-                  <m:oMath xmlns:m="http://schemas.openxmlformats.org/officeDocument/2006/math">
-                    <m:r>
-                      <a:rPr lang="en-US" b="0" i="1" smtClean="0">
-                        <a:latin typeface="Cambria Math" panose="02040503050406030204" pitchFamily="18" charset="0"/>
-                      </a:rPr>
-                      <m:t>𝜋</m:t>
-                    </m:r>
-                  </m:oMath>
-                </a14:m>
-                <a:r>
-                  <a:rPr lang="en-US" dirty="0"/>
-                  <a:t>.</a:t>
-                </a:r>
-              </a:p>
-              <a:p>
-                <a:r>
-                  <a:rPr lang="en-US" b="1" dirty="0"/>
-                  <a:t>Policy improvement</a:t>
-                </a:r>
-                <a:r>
-                  <a:rPr lang="en-US" dirty="0"/>
-                  <a:t>: make policy greedy with respect to the current value function estimate </a:t>
-                </a:r>
-                <a14:m>
-                  <m:oMath xmlns:m="http://schemas.openxmlformats.org/officeDocument/2006/math">
-                    <m:r>
-                      <a:rPr lang="en-US" b="0" i="1" smtClean="0">
-                        <a:latin typeface="Cambria Math" panose="02040503050406030204" pitchFamily="18" charset="0"/>
-                      </a:rPr>
-                      <m:t>𝑉</m:t>
-                    </m:r>
-                    <m:r>
-                      <a:rPr lang="en-US" b="0" i="1" smtClean="0">
-                        <a:latin typeface="Cambria Math" panose="02040503050406030204" pitchFamily="18" charset="0"/>
-                      </a:rPr>
-                      <m:t>.</m:t>
-                    </m:r>
-                  </m:oMath>
-                </a14:m>
-                <a:endParaRPr lang="en-US" dirty="0"/>
-              </a:p>
-              <a:p>
-                <a:endParaRPr lang="en-US" dirty="0"/>
-              </a:p>
-              <a:p>
-                <a:pPr marL="0" indent="0">
-                  <a:buNone/>
-                </a:pPr>
-                <a:r>
-                  <a:rPr lang="en-US" dirty="0"/>
-                  <a:t>Most DP methods can be described as a special case of GPI:</a:t>
-                </a:r>
-              </a:p>
-              <a:p>
-                <a:r>
-                  <a:rPr lang="en-US" b="1" dirty="0"/>
-                  <a:t>Policy iteration</a:t>
-                </a:r>
-                <a:r>
-                  <a:rPr lang="en-US" dirty="0"/>
-                  <a:t>: each eval and improvement step is completed (by a sweep over </a:t>
-                </a:r>
-                <a14:m>
-                  <m:oMath xmlns:m="http://schemas.openxmlformats.org/officeDocument/2006/math">
-                    <m:r>
-                      <a:rPr lang="en-US" i="1" smtClean="0">
-                        <a:latin typeface="Cambria Math" panose="02040503050406030204" pitchFamily="18" charset="0"/>
-                        <a:ea typeface="Cambria Math" panose="02040503050406030204" pitchFamily="18" charset="0"/>
-                      </a:rPr>
-                      <m:t>𝒮</m:t>
-                    </m:r>
-                  </m:oMath>
-                </a14:m>
-                <a:r>
-                  <a:rPr lang="en-US" dirty="0"/>
-                  <a:t>) before moving on.</a:t>
-                </a:r>
-              </a:p>
-              <a:p>
-                <a:r>
-                  <a:rPr lang="en-US" b="1" dirty="0"/>
-                  <a:t>Value iteration</a:t>
-                </a:r>
-                <a:r>
-                  <a:rPr lang="en-US" dirty="0"/>
-                  <a:t>: uses a single iteration for the policy iteration.</a:t>
-                </a:r>
-              </a:p>
-              <a:p>
-                <a:r>
-                  <a:rPr lang="en-US" b="1" dirty="0"/>
-                  <a:t>Asynchronous DP</a:t>
-                </a:r>
-                <a:r>
-                  <a:rPr lang="en-US" dirty="0"/>
-                  <a:t>: Instead of sweeps over </a:t>
-                </a:r>
-                <a14:m>
-                  <m:oMath xmlns:m="http://schemas.openxmlformats.org/officeDocument/2006/math">
-                    <m:r>
-                      <a:rPr lang="en-US" i="1" smtClean="0">
-                        <a:latin typeface="Cambria Math" panose="02040503050406030204" pitchFamily="18" charset="0"/>
-                        <a:ea typeface="Cambria Math" panose="02040503050406030204" pitchFamily="18" charset="0"/>
-                      </a:rPr>
-                      <m:t>𝒮</m:t>
-                    </m:r>
-                  </m:oMath>
-                </a14:m>
-                <a:r>
-                  <a:rPr lang="en-US" dirty="0"/>
-                  <a:t>, updates states in some other order. This interleaves pol. eval. and pol. Improvement. </a:t>
-                </a:r>
-              </a:p>
-              <a:p>
-                <a:pPr marL="0" indent="0">
-                  <a:buNone/>
-                </a:pPr>
-                <a:endParaRPr lang="en-US" dirty="0"/>
-              </a:p>
-              <a:p>
-                <a:pPr marL="0" indent="0">
-                  <a:buNone/>
-                </a:pPr>
-                <a:r>
-                  <a:rPr lang="en-US" dirty="0"/>
-                  <a:t>All three approaches typically converge to the optimal solution.</a:t>
-                </a:r>
-              </a:p>
-            </p:txBody>
-          </p:sp>
-        </mc:Choice>
-        <mc:Fallback xmlns="">
-          <p:sp>
-            <p:nvSpPr>
-              <p:cNvPr id="3" name="Content Placeholder 2">
-                <a:extLst>
-                  <a:ext uri="{FF2B5EF4-FFF2-40B4-BE49-F238E27FC236}">
-                    <a16:creationId xmlns:a16="http://schemas.microsoft.com/office/drawing/2014/main" id="{439A61E8-38E7-2C6A-1812-C00D57947FA6}"/>
-                  </a:ext>
-                </a:extLst>
-              </p:cNvPr>
-              <p:cNvSpPr>
-                <a:spLocks noGrp="1" noRot="1" noChangeAspect="1" noMove="1" noResize="1" noEditPoints="1" noAdjustHandles="1" noChangeArrowheads="1" noChangeShapeType="1" noTextEdit="1"/>
-              </p:cNvSpPr>
-              <p:nvPr>
-                <p:ph idx="1"/>
-              </p:nvPr>
-            </p:nvSpPr>
-            <p:spPr>
-              <a:xfrm>
-                <a:off x="838201" y="1397330"/>
-                <a:ext cx="7223876" cy="4779633"/>
-              </a:xfrm>
-              <a:blipFill>
-                <a:blip r:embed="rId2"/>
-                <a:stretch>
-                  <a:fillRect l="-759" r="-844"/>
-                </a:stretch>
-              </a:blipFill>
-            </p:spPr>
-            <p:txBody>
-              <a:bodyPr/>
-              <a:lstStyle/>
-              <a:p>
-                <a:r>
-                  <a:rPr lang="en-US">
-                    <a:noFill/>
-                  </a:rPr>
-                  <a:t> </a:t>
-                </a:r>
-              </a:p>
-            </p:txBody>
-          </p:sp>
-        </mc:Fallback>
-      </mc:AlternateContent>
-      <p:pic>
-        <p:nvPicPr>
-          <p:cNvPr id="7" name="Picture 6">
-            <a:extLst>
-              <a:ext uri="{FF2B5EF4-FFF2-40B4-BE49-F238E27FC236}">
-                <a16:creationId xmlns:a16="http://schemas.microsoft.com/office/drawing/2014/main" id="{37D4EB40-D8C7-544A-60A9-FB0F86C14D14}"/>
-              </a:ext>
-            </a:extLst>
-          </p:cNvPr>
-          <p:cNvPicPr>
-            <a:picLocks noChangeAspect="1"/>
-          </p:cNvPicPr>
-          <p:nvPr/>
-        </p:nvPicPr>
-        <p:blipFill>
-          <a:blip r:embed="rId3"/>
-          <a:stretch>
-            <a:fillRect/>
-          </a:stretch>
-        </p:blipFill>
-        <p:spPr>
-          <a:xfrm>
-            <a:off x="8962513" y="1184939"/>
-            <a:ext cx="2682923" cy="4292677"/>
-          </a:xfrm>
-          <a:prstGeom prst="rect">
-            <a:avLst/>
-          </a:prstGeom>
-        </p:spPr>
-      </p:pic>
-      <p:pic>
-        <p:nvPicPr>
-          <p:cNvPr id="10" name="Picture 9">
-            <a:extLst>
-              <a:ext uri="{FF2B5EF4-FFF2-40B4-BE49-F238E27FC236}">
-                <a16:creationId xmlns:a16="http://schemas.microsoft.com/office/drawing/2014/main" id="{349C9802-DC7A-3741-A414-F95D8B5FE1E8}"/>
-              </a:ext>
-            </a:extLst>
-          </p:cNvPr>
-          <p:cNvPicPr>
-            <a:picLocks noChangeAspect="1"/>
-          </p:cNvPicPr>
-          <p:nvPr/>
-        </p:nvPicPr>
-        <p:blipFill>
-          <a:blip r:embed="rId4"/>
-          <a:stretch>
-            <a:fillRect/>
-          </a:stretch>
-        </p:blipFill>
-        <p:spPr>
-          <a:xfrm>
-            <a:off x="8492219" y="3787146"/>
-            <a:ext cx="3511083" cy="2389817"/>
-          </a:xfrm>
-          <a:prstGeom prst="rect">
-            <a:avLst/>
-          </a:prstGeom>
-        </p:spPr>
-      </p:pic>
-    </p:spTree>
-    <p:extLst>
-      <p:ext uri="{BB962C8B-B14F-4D97-AF65-F5344CB8AC3E}">
-        <p14:creationId xmlns:p14="http://schemas.microsoft.com/office/powerpoint/2010/main" val="4159298732"/>
       </p:ext>
     </p:extLst>
   </p:cSld>
@@ -14662,6 +17104,442 @@
           <p:cNvPr id="2" name="Title 1">
             <a:extLst>
               <a:ext uri="{FF2B5EF4-FFF2-40B4-BE49-F238E27FC236}">
+                <a16:creationId xmlns:a16="http://schemas.microsoft.com/office/drawing/2014/main" id="{2542819D-6D6F-85AF-5816-7FFAE79AF0F0}"/>
+              </a:ext>
+            </a:extLst>
+          </p:cNvPr>
+          <p:cNvSpPr>
+            <a:spLocks noGrp="1"/>
+          </p:cNvSpPr>
+          <p:nvPr>
+            <p:ph type="title"/>
+          </p:nvPr>
+        </p:nvSpPr>
+        <p:spPr/>
+        <p:txBody>
+          <a:bodyPr/>
+          <a:lstStyle/>
+          <a:p>
+            <a:r>
+              <a:rPr lang="en-US" dirty="0"/>
+              <a:t>GPI: Generalized Policy Iteration</a:t>
+            </a:r>
+          </a:p>
+        </p:txBody>
+      </p:sp>
+      <p:sp>
+        <p:nvSpPr>
+          <p:cNvPr id="4" name="Text Placeholder 3">
+            <a:extLst>
+              <a:ext uri="{FF2B5EF4-FFF2-40B4-BE49-F238E27FC236}">
+                <a16:creationId xmlns:a16="http://schemas.microsoft.com/office/drawing/2014/main" id="{2C33D3AB-3DD4-67C8-8B22-66483B0E48C0}"/>
+              </a:ext>
+            </a:extLst>
+          </p:cNvPr>
+          <p:cNvSpPr>
+            <a:spLocks noGrp="1"/>
+          </p:cNvSpPr>
+          <p:nvPr>
+            <p:ph type="body" idx="1"/>
+          </p:nvPr>
+        </p:nvSpPr>
+        <p:spPr/>
+        <p:txBody>
+          <a:bodyPr/>
+          <a:lstStyle/>
+          <a:p>
+            <a:endParaRPr lang="en-US"/>
+          </a:p>
+        </p:txBody>
+      </p:sp>
+    </p:spTree>
+    <p:extLst>
+      <p:ext uri="{BB962C8B-B14F-4D97-AF65-F5344CB8AC3E}">
+        <p14:creationId xmlns:p14="http://schemas.microsoft.com/office/powerpoint/2010/main" val="391152602"/>
+      </p:ext>
+    </p:extLst>
+  </p:cSld>
+  <p:clrMapOvr>
+    <a:masterClrMapping/>
+  </p:clrMapOvr>
+</p:sld>
+</file>
+
+<file path=ppt/slides/slide21.xml><?xml version="1.0" encoding="utf-8"?>
+<p:sld xmlns:a="http://schemas.openxmlformats.org/drawingml/2006/main" xmlns:r="http://schemas.openxmlformats.org/officeDocument/2006/relationships" xmlns:p="http://schemas.openxmlformats.org/presentationml/2006/main">
+  <p:cSld>
+    <p:spTree>
+      <p:nvGrpSpPr>
+        <p:cNvPr id="1" name="">
+          <a:extLst>
+            <a:ext uri="{FF2B5EF4-FFF2-40B4-BE49-F238E27FC236}">
+              <a16:creationId xmlns:a16="http://schemas.microsoft.com/office/drawing/2014/main" id="{2A863CDC-59B1-7366-BF66-6498BF0BDA45}"/>
+            </a:ext>
+          </a:extLst>
+        </p:cNvPr>
+        <p:cNvGrpSpPr/>
+        <p:nvPr/>
+      </p:nvGrpSpPr>
+      <p:grpSpPr>
+        <a:xfrm>
+          <a:off x="0" y="0"/>
+          <a:ext cx="0" cy="0"/>
+          <a:chOff x="0" y="0"/>
+          <a:chExt cx="0" cy="0"/>
+        </a:xfrm>
+      </p:grpSpPr>
+      <p:sp>
+        <p:nvSpPr>
+          <p:cNvPr id="2" name="Title 1">
+            <a:extLst>
+              <a:ext uri="{FF2B5EF4-FFF2-40B4-BE49-F238E27FC236}">
+                <a16:creationId xmlns:a16="http://schemas.microsoft.com/office/drawing/2014/main" id="{BB27E42A-9F26-864D-705B-AD1A7F35C8A1}"/>
+              </a:ext>
+            </a:extLst>
+          </p:cNvPr>
+          <p:cNvSpPr>
+            <a:spLocks noGrp="1"/>
+          </p:cNvSpPr>
+          <p:nvPr>
+            <p:ph type="title"/>
+          </p:nvPr>
+        </p:nvSpPr>
+        <p:spPr/>
+        <p:txBody>
+          <a:bodyPr/>
+          <a:lstStyle/>
+          <a:p>
+            <a:r>
+              <a:rPr lang="en-US" dirty="0"/>
+              <a:t>GPI: Generalized Policy Iteration</a:t>
+            </a:r>
+          </a:p>
+        </p:txBody>
+      </p:sp>
+      <mc:AlternateContent xmlns:mc="http://schemas.openxmlformats.org/markup-compatibility/2006" xmlns:a14="http://schemas.microsoft.com/office/drawing/2010/main">
+        <mc:Choice Requires="a14">
+          <p:sp>
+            <p:nvSpPr>
+              <p:cNvPr id="3" name="Content Placeholder 2">
+                <a:extLst>
+                  <a:ext uri="{FF2B5EF4-FFF2-40B4-BE49-F238E27FC236}">
+                    <a16:creationId xmlns:a16="http://schemas.microsoft.com/office/drawing/2014/main" id="{439A61E8-38E7-2C6A-1812-C00D57947FA6}"/>
+                  </a:ext>
+                </a:extLst>
+              </p:cNvPr>
+              <p:cNvSpPr>
+                <a:spLocks noGrp="1"/>
+              </p:cNvSpPr>
+              <p:nvPr>
+                <p:ph idx="1"/>
+              </p:nvPr>
+            </p:nvSpPr>
+            <p:spPr>
+              <a:xfrm>
+                <a:off x="838201" y="1397330"/>
+                <a:ext cx="7223876" cy="4779633"/>
+              </a:xfrm>
+            </p:spPr>
+            <p:txBody>
+              <a:bodyPr>
+                <a:normAutofit fontScale="62500" lnSpcReduction="20000"/>
+              </a:bodyPr>
+              <a:lstStyle/>
+              <a:p>
+                <a:pPr marL="0" indent="0">
+                  <a:buNone/>
+                </a:pPr>
+                <a:endParaRPr lang="en-US" dirty="0"/>
+              </a:p>
+              <a:p>
+                <a:pPr marL="0" indent="0">
+                  <a:buNone/>
+                </a:pPr>
+                <a:r>
+                  <a:rPr lang="en-US" b="1" dirty="0"/>
+                  <a:t>Steps</a:t>
+                </a:r>
+              </a:p>
+              <a:p>
+                <a:r>
+                  <a:rPr lang="en-US" b="1" dirty="0"/>
+                  <a:t>Policy evaluation</a:t>
+                </a:r>
+                <a:r>
+                  <a:rPr lang="en-US" dirty="0"/>
+                  <a:t>: make the value function consistent with the current policy </a:t>
+                </a:r>
+                <a14:m>
+                  <m:oMath xmlns:m="http://schemas.openxmlformats.org/officeDocument/2006/math">
+                    <m:r>
+                      <a:rPr lang="en-US" b="0" i="1" smtClean="0">
+                        <a:latin typeface="Cambria Math" panose="02040503050406030204" pitchFamily="18" charset="0"/>
+                      </a:rPr>
+                      <m:t>𝜋</m:t>
+                    </m:r>
+                  </m:oMath>
+                </a14:m>
+                <a:r>
+                  <a:rPr lang="en-US" dirty="0"/>
+                  <a:t>.</a:t>
+                </a:r>
+              </a:p>
+              <a:p>
+                <a:r>
+                  <a:rPr lang="en-US" b="1" dirty="0"/>
+                  <a:t>Policy improvement</a:t>
+                </a:r>
+                <a:r>
+                  <a:rPr lang="en-US" dirty="0"/>
+                  <a:t>: make policy greedy with respect to the current value function estimate </a:t>
+                </a:r>
+                <a14:m>
+                  <m:oMath xmlns:m="http://schemas.openxmlformats.org/officeDocument/2006/math">
+                    <m:r>
+                      <a:rPr lang="en-US" b="0" i="1" smtClean="0">
+                        <a:latin typeface="Cambria Math" panose="02040503050406030204" pitchFamily="18" charset="0"/>
+                      </a:rPr>
+                      <m:t>𝑉</m:t>
+                    </m:r>
+                    <m:r>
+                      <a:rPr lang="en-US" b="0" i="1" smtClean="0">
+                        <a:latin typeface="Cambria Math" panose="02040503050406030204" pitchFamily="18" charset="0"/>
+                      </a:rPr>
+                      <m:t>.</m:t>
+                    </m:r>
+                  </m:oMath>
+                </a14:m>
+                <a:endParaRPr lang="en-US" dirty="0"/>
+              </a:p>
+              <a:p>
+                <a:endParaRPr lang="en-US" dirty="0"/>
+              </a:p>
+              <a:p>
+                <a:pPr marL="0" indent="0">
+                  <a:buNone/>
+                </a:pPr>
+                <a:r>
+                  <a:rPr lang="en-US" dirty="0"/>
+                  <a:t>Most DP methods can be described as a special case of GPI:</a:t>
+                </a:r>
+              </a:p>
+              <a:p>
+                <a:r>
+                  <a:rPr lang="en-US" b="1" dirty="0"/>
+                  <a:t>Policy iteration</a:t>
+                </a:r>
+                <a:r>
+                  <a:rPr lang="en-US" dirty="0"/>
+                  <a:t>: each eval and improvement step is completed (by a sweep over </a:t>
+                </a:r>
+                <a14:m>
+                  <m:oMath xmlns:m="http://schemas.openxmlformats.org/officeDocument/2006/math">
+                    <m:r>
+                      <a:rPr lang="en-US" i="1" smtClean="0">
+                        <a:latin typeface="Cambria Math" panose="02040503050406030204" pitchFamily="18" charset="0"/>
+                        <a:ea typeface="Cambria Math" panose="02040503050406030204" pitchFamily="18" charset="0"/>
+                      </a:rPr>
+                      <m:t>𝒮</m:t>
+                    </m:r>
+                  </m:oMath>
+                </a14:m>
+                <a:r>
+                  <a:rPr lang="en-US" dirty="0"/>
+                  <a:t>) before moving on.</a:t>
+                </a:r>
+              </a:p>
+              <a:p>
+                <a:r>
+                  <a:rPr lang="en-US" b="1" dirty="0"/>
+                  <a:t>Value iteration</a:t>
+                </a:r>
+                <a:r>
+                  <a:rPr lang="en-US" dirty="0"/>
+                  <a:t>: uses a single iteration for the policy iteration.</a:t>
+                </a:r>
+              </a:p>
+              <a:p>
+                <a:r>
+                  <a:rPr lang="en-US" b="1" dirty="0"/>
+                  <a:t>Asynchronous DP</a:t>
+                </a:r>
+                <a:r>
+                  <a:rPr lang="en-US" dirty="0"/>
+                  <a:t>: Instead of sweeps over </a:t>
+                </a:r>
+                <a14:m>
+                  <m:oMath xmlns:m="http://schemas.openxmlformats.org/officeDocument/2006/math">
+                    <m:r>
+                      <a:rPr lang="en-US" i="1" smtClean="0">
+                        <a:latin typeface="Cambria Math" panose="02040503050406030204" pitchFamily="18" charset="0"/>
+                        <a:ea typeface="Cambria Math" panose="02040503050406030204" pitchFamily="18" charset="0"/>
+                      </a:rPr>
+                      <m:t>𝒮</m:t>
+                    </m:r>
+                  </m:oMath>
+                </a14:m>
+                <a:r>
+                  <a:rPr lang="en-US" dirty="0"/>
+                  <a:t>, updates states in some other order. This interleaves pol. eval. and pol. Improvement. </a:t>
+                </a:r>
+              </a:p>
+              <a:p>
+                <a:pPr marL="0" indent="0">
+                  <a:buNone/>
+                </a:pPr>
+                <a:endParaRPr lang="en-US" dirty="0"/>
+              </a:p>
+              <a:p>
+                <a:pPr marL="0" indent="0">
+                  <a:buNone/>
+                </a:pPr>
+                <a:r>
+                  <a:rPr lang="en-US" dirty="0"/>
+                  <a:t>All three approaches typically converge to the optimal solution.</a:t>
+                </a:r>
+              </a:p>
+            </p:txBody>
+          </p:sp>
+        </mc:Choice>
+        <mc:Fallback xmlns="">
+          <p:sp>
+            <p:nvSpPr>
+              <p:cNvPr id="3" name="Content Placeholder 2">
+                <a:extLst>
+                  <a:ext uri="{FF2B5EF4-FFF2-40B4-BE49-F238E27FC236}">
+                    <a16:creationId xmlns:a16="http://schemas.microsoft.com/office/drawing/2014/main" id="{439A61E8-38E7-2C6A-1812-C00D57947FA6}"/>
+                  </a:ext>
+                </a:extLst>
+              </p:cNvPr>
+              <p:cNvSpPr>
+                <a:spLocks noGrp="1" noRot="1" noChangeAspect="1" noMove="1" noResize="1" noEditPoints="1" noAdjustHandles="1" noChangeArrowheads="1" noChangeShapeType="1" noTextEdit="1"/>
+              </p:cNvSpPr>
+              <p:nvPr>
+                <p:ph idx="1"/>
+              </p:nvPr>
+            </p:nvSpPr>
+            <p:spPr>
+              <a:xfrm>
+                <a:off x="838201" y="1397330"/>
+                <a:ext cx="7223876" cy="4779633"/>
+              </a:xfrm>
+              <a:blipFill>
+                <a:blip r:embed="rId2"/>
+                <a:stretch>
+                  <a:fillRect l="-759" r="-844"/>
+                </a:stretch>
+              </a:blipFill>
+            </p:spPr>
+            <p:txBody>
+              <a:bodyPr/>
+              <a:lstStyle/>
+              <a:p>
+                <a:r>
+                  <a:rPr lang="en-US">
+                    <a:noFill/>
+                  </a:rPr>
+                  <a:t> </a:t>
+                </a:r>
+              </a:p>
+            </p:txBody>
+          </p:sp>
+        </mc:Fallback>
+      </mc:AlternateContent>
+      <p:pic>
+        <p:nvPicPr>
+          <p:cNvPr id="7" name="Picture 6">
+            <a:extLst>
+              <a:ext uri="{FF2B5EF4-FFF2-40B4-BE49-F238E27FC236}">
+                <a16:creationId xmlns:a16="http://schemas.microsoft.com/office/drawing/2014/main" id="{37D4EB40-D8C7-544A-60A9-FB0F86C14D14}"/>
+              </a:ext>
+            </a:extLst>
+          </p:cNvPr>
+          <p:cNvPicPr>
+            <a:picLocks noChangeAspect="1"/>
+          </p:cNvPicPr>
+          <p:nvPr/>
+        </p:nvPicPr>
+        <p:blipFill>
+          <a:blip r:embed="rId3"/>
+          <a:stretch>
+            <a:fillRect/>
+          </a:stretch>
+        </p:blipFill>
+        <p:spPr>
+          <a:xfrm>
+            <a:off x="8962513" y="1184939"/>
+            <a:ext cx="2682923" cy="4292677"/>
+          </a:xfrm>
+          <a:prstGeom prst="rect">
+            <a:avLst/>
+          </a:prstGeom>
+        </p:spPr>
+      </p:pic>
+      <p:pic>
+        <p:nvPicPr>
+          <p:cNvPr id="10" name="Picture 9">
+            <a:extLst>
+              <a:ext uri="{FF2B5EF4-FFF2-40B4-BE49-F238E27FC236}">
+                <a16:creationId xmlns:a16="http://schemas.microsoft.com/office/drawing/2014/main" id="{349C9802-DC7A-3741-A414-F95D8B5FE1E8}"/>
+              </a:ext>
+            </a:extLst>
+          </p:cNvPr>
+          <p:cNvPicPr>
+            <a:picLocks noChangeAspect="1"/>
+          </p:cNvPicPr>
+          <p:nvPr/>
+        </p:nvPicPr>
+        <p:blipFill>
+          <a:blip r:embed="rId4"/>
+          <a:stretch>
+            <a:fillRect/>
+          </a:stretch>
+        </p:blipFill>
+        <p:spPr>
+          <a:xfrm>
+            <a:off x="8492219" y="3787146"/>
+            <a:ext cx="3511083" cy="2389817"/>
+          </a:xfrm>
+          <a:prstGeom prst="rect">
+            <a:avLst/>
+          </a:prstGeom>
+        </p:spPr>
+      </p:pic>
+    </p:spTree>
+    <p:extLst>
+      <p:ext uri="{BB962C8B-B14F-4D97-AF65-F5344CB8AC3E}">
+        <p14:creationId xmlns:p14="http://schemas.microsoft.com/office/powerpoint/2010/main" val="4159298732"/>
+      </p:ext>
+    </p:extLst>
+  </p:cSld>
+  <p:clrMapOvr>
+    <a:masterClrMapping/>
+  </p:clrMapOvr>
+</p:sld>
+</file>
+
+<file path=ppt/slides/slide22.xml><?xml version="1.0" encoding="utf-8"?>
+<p:sld xmlns:a="http://schemas.openxmlformats.org/drawingml/2006/main" xmlns:r="http://schemas.openxmlformats.org/officeDocument/2006/relationships" xmlns:p="http://schemas.openxmlformats.org/presentationml/2006/main">
+  <p:cSld>
+    <p:spTree>
+      <p:nvGrpSpPr>
+        <p:cNvPr id="1" name=""/>
+        <p:cNvGrpSpPr/>
+        <p:nvPr/>
+      </p:nvGrpSpPr>
+      <p:grpSpPr>
+        <a:xfrm>
+          <a:off x="0" y="0"/>
+          <a:ext cx="0" cy="0"/>
+          <a:chOff x="0" y="0"/>
+          <a:chExt cx="0" cy="0"/>
+        </a:xfrm>
+      </p:grpSpPr>
+      <p:sp>
+        <p:nvSpPr>
+          <p:cNvPr id="2" name="Title 1">
+            <a:extLst>
+              <a:ext uri="{FF2B5EF4-FFF2-40B4-BE49-F238E27FC236}">
                 <a16:creationId xmlns:a16="http://schemas.microsoft.com/office/drawing/2014/main" id="{C484FA30-1294-3E3D-F7B7-AE5ECD84C7FF}"/>
               </a:ext>
             </a:extLst>
@@ -14685,8 +17563,8 @@
           </a:p>
         </p:txBody>
       </p:sp>
-      <mc:AlternateContent xmlns:mc="http://schemas.openxmlformats.org/markup-compatibility/2006" xmlns:a14="http://schemas.microsoft.com/office/drawing/2010/main">
-        <mc:Choice Requires="a14">
+      <mc:AlternateContent xmlns:mc="http://schemas.openxmlformats.org/markup-compatibility/2006">
+        <mc:Choice xmlns:a14="http://schemas.microsoft.com/office/drawing/2010/main" Requires="a14">
           <p:sp>
             <p:nvSpPr>
               <p:cNvPr id="3" name="Content Placeholder 2">
@@ -14705,7 +17583,9 @@
             </p:nvSpPr>
             <p:spPr/>
             <p:txBody>
-              <a:bodyPr/>
+              <a:bodyPr>
+                <a:normAutofit lnSpcReduction="10000"/>
+              </a:bodyPr>
               <a:lstStyle/>
               <a:p>
                 <a:r>
@@ -14714,10 +17594,93 @@
                 </a:r>
                 <a:r>
                   <a:rPr lang="en-US" dirty="0"/>
-                  <a:t>: Search space is </a:t>
-                </a:r>
-                <a:r>
-                  <a:rPr lang="en-US" u="sng" dirty="0"/>
+                  <a:t>: Search space </a:t>
+                </a:r>
+                <a14:m>
+                  <m:oMath xmlns:m="http://schemas.openxmlformats.org/officeDocument/2006/math">
+                    <m:r>
+                      <a:rPr lang="en-US" i="1" dirty="0">
+                        <a:latin typeface="Cambria Math" panose="02040503050406030204" pitchFamily="18" charset="0"/>
+                      </a:rPr>
+                      <m:t>𝑂</m:t>
+                    </m:r>
+                    <m:r>
+                      <a:rPr lang="en-US" i="1" dirty="0">
+                        <a:latin typeface="Cambria Math" panose="02040503050406030204" pitchFamily="18" charset="0"/>
+                      </a:rPr>
+                      <m:t>(</m:t>
+                    </m:r>
+                    <m:sSup>
+                      <m:sSupPr>
+                        <m:ctrlPr>
+                          <a:rPr lang="en-US" i="1" dirty="0">
+                            <a:latin typeface="Cambria Math" panose="02040503050406030204" pitchFamily="18" charset="0"/>
+                            <a:ea typeface="Cambria Math" panose="02040503050406030204" pitchFamily="18" charset="0"/>
+                          </a:rPr>
+                        </m:ctrlPr>
+                      </m:sSupPr>
+                      <m:e>
+                        <m:d>
+                          <m:dPr>
+                            <m:begChr m:val="|"/>
+                            <m:endChr m:val="|"/>
+                            <m:ctrlPr>
+                              <a:rPr lang="en-US" i="1">
+                                <a:latin typeface="Cambria Math" panose="02040503050406030204" pitchFamily="18" charset="0"/>
+                                <a:ea typeface="Cambria Math" panose="02040503050406030204" pitchFamily="18" charset="0"/>
+                              </a:rPr>
+                            </m:ctrlPr>
+                          </m:dPr>
+                          <m:e>
+                            <m:r>
+                              <a:rPr lang="en-US" b="0" i="1" smtClean="0">
+                                <a:latin typeface="Cambria Math" panose="02040503050406030204" pitchFamily="18" charset="0"/>
+                                <a:ea typeface="Cambria Math" panose="02040503050406030204" pitchFamily="18" charset="0"/>
+                              </a:rPr>
+                              <m:t>𝐴</m:t>
+                            </m:r>
+                          </m:e>
+                        </m:d>
+                      </m:e>
+                      <m:sup>
+                        <m:d>
+                          <m:dPr>
+                            <m:begChr m:val="|"/>
+                            <m:endChr m:val="|"/>
+                            <m:ctrlPr>
+                              <a:rPr lang="en-US" i="1">
+                                <a:latin typeface="Cambria Math" panose="02040503050406030204" pitchFamily="18" charset="0"/>
+                                <a:ea typeface="Cambria Math" panose="02040503050406030204" pitchFamily="18" charset="0"/>
+                              </a:rPr>
+                            </m:ctrlPr>
+                          </m:dPr>
+                          <m:e>
+                            <m:r>
+                              <a:rPr lang="en-US" i="1">
+                                <a:latin typeface="Cambria Math" panose="02040503050406030204" pitchFamily="18" charset="0"/>
+                                <a:ea typeface="Cambria Math" panose="02040503050406030204" pitchFamily="18" charset="0"/>
+                              </a:rPr>
+                              <m:t>𝒮</m:t>
+                            </m:r>
+                          </m:e>
+                        </m:d>
+                      </m:sup>
+                    </m:sSup>
+                    <m:r>
+                      <a:rPr lang="en-US" i="1">
+                        <a:latin typeface="Cambria Math" panose="02040503050406030204" pitchFamily="18" charset="0"/>
+                        <a:ea typeface="Cambria Math" panose="02040503050406030204" pitchFamily="18" charset="0"/>
+                      </a:rPr>
+                      <m:t>)</m:t>
+                    </m:r>
+                  </m:oMath>
+                </a14:m>
+                <a:r>
+                  <a:rPr lang="en-US" dirty="0"/>
+                  <a:t> is </a:t>
+                </a:r>
+                <a:r>
+                  <a:rPr lang="en-US" b="1" dirty="0"/>
                   <a:t>exponential</a:t>
                 </a:r>
                 <a:r>
@@ -14792,7 +17755,7 @@
                 </a:r>
                 <a:r>
                   <a:rPr lang="en-US" dirty="0"/>
-                  <a:t>solve a system of </a:t>
+                  <a:t>Solve a system of </a:t>
                 </a:r>
                 <a14:m>
                   <m:oMath xmlns:m="http://schemas.openxmlformats.org/officeDocument/2006/math">
@@ -14906,7 +17869,76 @@
                 </a14:m>
                 <a:r>
                   <a:rPr lang="en-US" dirty="0"/>
-                  <a:t> constraints.</a:t>
+                  <a:t> constraints has a time complexity of </a:t>
+                </a:r>
+                <a14:m>
+                  <m:oMath xmlns:m="http://schemas.openxmlformats.org/officeDocument/2006/math">
+                    <m:r>
+                      <a:rPr lang="en-US" i="1" dirty="0">
+                        <a:latin typeface="Cambria Math" panose="02040503050406030204" pitchFamily="18" charset="0"/>
+                      </a:rPr>
+                      <m:t>𝑂</m:t>
+                    </m:r>
+                    <m:r>
+                      <a:rPr lang="en-US" i="1" dirty="0">
+                        <a:latin typeface="Cambria Math" panose="02040503050406030204" pitchFamily="18" charset="0"/>
+                      </a:rPr>
+                      <m:t>(</m:t>
+                    </m:r>
+                    <m:sSup>
+                      <m:sSupPr>
+                        <m:ctrlPr>
+                          <a:rPr lang="en-US" i="1" dirty="0">
+                            <a:latin typeface="Cambria Math" panose="02040503050406030204" pitchFamily="18" charset="0"/>
+                            <a:ea typeface="Cambria Math" panose="02040503050406030204" pitchFamily="18" charset="0"/>
+                          </a:rPr>
+                        </m:ctrlPr>
+                      </m:sSupPr>
+                      <m:e>
+                        <m:d>
+                          <m:dPr>
+                            <m:begChr m:val="|"/>
+                            <m:endChr m:val="|"/>
+                            <m:ctrlPr>
+                              <a:rPr lang="en-US" i="1">
+                                <a:latin typeface="Cambria Math" panose="02040503050406030204" pitchFamily="18" charset="0"/>
+                                <a:ea typeface="Cambria Math" panose="02040503050406030204" pitchFamily="18" charset="0"/>
+                              </a:rPr>
+                            </m:ctrlPr>
+                          </m:dPr>
+                          <m:e>
+                            <m:r>
+                              <a:rPr lang="en-US" i="1">
+                                <a:latin typeface="Cambria Math" panose="02040503050406030204" pitchFamily="18" charset="0"/>
+                                <a:ea typeface="Cambria Math" panose="02040503050406030204" pitchFamily="18" charset="0"/>
+                              </a:rPr>
+                              <m:t>𝒮</m:t>
+                            </m:r>
+                          </m:e>
+                        </m:d>
+                      </m:e>
+                      <m:sup>
+                        <m:r>
+                          <a:rPr lang="en-US" b="0" i="1" smtClean="0">
+                            <a:latin typeface="Cambria Math" panose="02040503050406030204" pitchFamily="18" charset="0"/>
+                            <a:ea typeface="Cambria Math" panose="02040503050406030204" pitchFamily="18" charset="0"/>
+                          </a:rPr>
+                          <m:t>3</m:t>
+                        </m:r>
+                      </m:sup>
+                    </m:sSup>
+                    <m:r>
+                      <a:rPr lang="en-US" b="0" i="1" smtClean="0">
+                        <a:latin typeface="Cambria Math" panose="02040503050406030204" pitchFamily="18" charset="0"/>
+                        <a:ea typeface="Cambria Math" panose="02040503050406030204" pitchFamily="18" charset="0"/>
+                      </a:rPr>
+                      <m:t>)</m:t>
+                    </m:r>
+                  </m:oMath>
+                </a14:m>
+                <a:r>
+                  <a:rPr lang="en-US" dirty="0"/>
+                  <a:t>.</a:t>
                 </a:r>
               </a:p>
               <a:p>
@@ -14919,10 +17951,99 @@
                 </a:r>
                 <a:r>
                   <a:rPr lang="en-US" dirty="0"/>
-                  <a:t>: </a:t>
-                </a:r>
-                <a:r>
-                  <a:rPr lang="en-US" u="sng" dirty="0"/>
+                  <a:t>: Time </a:t>
+                </a:r>
+                <a14:m>
+                  <m:oMath xmlns:m="http://schemas.openxmlformats.org/officeDocument/2006/math">
+                    <m:r>
+                      <a:rPr lang="en-US" i="1" dirty="0" smtClean="0">
+                        <a:latin typeface="Cambria Math" panose="02040503050406030204" pitchFamily="18" charset="0"/>
+                      </a:rPr>
+                      <m:t>𝑂</m:t>
+                    </m:r>
+                    <m:r>
+                      <a:rPr lang="en-US" i="1" dirty="0" smtClean="0">
+                        <a:latin typeface="Cambria Math" panose="02040503050406030204" pitchFamily="18" charset="0"/>
+                      </a:rPr>
+                      <m:t>(</m:t>
+                    </m:r>
+                    <m:sSup>
+                      <m:sSupPr>
+                        <m:ctrlPr>
+                          <a:rPr lang="en-US" b="0" i="1" dirty="0" smtClean="0">
+                            <a:latin typeface="Cambria Math" panose="02040503050406030204" pitchFamily="18" charset="0"/>
+                            <a:ea typeface="Cambria Math" panose="02040503050406030204" pitchFamily="18" charset="0"/>
+                          </a:rPr>
+                        </m:ctrlPr>
+                      </m:sSupPr>
+                      <m:e>
+                        <m:d>
+                          <m:dPr>
+                            <m:begChr m:val="|"/>
+                            <m:endChr m:val="|"/>
+                            <m:ctrlPr>
+                              <a:rPr lang="en-US" i="1">
+                                <a:latin typeface="Cambria Math" panose="02040503050406030204" pitchFamily="18" charset="0"/>
+                                <a:ea typeface="Cambria Math" panose="02040503050406030204" pitchFamily="18" charset="0"/>
+                              </a:rPr>
+                            </m:ctrlPr>
+                          </m:dPr>
+                          <m:e>
+                            <m:r>
+                              <a:rPr lang="en-US" i="1">
+                                <a:latin typeface="Cambria Math" panose="02040503050406030204" pitchFamily="18" charset="0"/>
+                                <a:ea typeface="Cambria Math" panose="02040503050406030204" pitchFamily="18" charset="0"/>
+                              </a:rPr>
+                              <m:t>𝒮</m:t>
+                            </m:r>
+                          </m:e>
+                        </m:d>
+                      </m:e>
+                      <m:sup>
+                        <m:r>
+                          <a:rPr lang="en-US" b="0" i="1" smtClean="0">
+                            <a:latin typeface="Cambria Math" panose="02040503050406030204" pitchFamily="18" charset="0"/>
+                            <a:ea typeface="Cambria Math" panose="02040503050406030204" pitchFamily="18" charset="0"/>
+                          </a:rPr>
+                          <m:t>2</m:t>
+                        </m:r>
+                      </m:sup>
+                    </m:sSup>
+                    <m:r>
+                      <a:rPr lang="en-US" i="1">
+                        <a:latin typeface="Cambria Math" panose="02040503050406030204" pitchFamily="18" charset="0"/>
+                        <a:ea typeface="Cambria Math" panose="02040503050406030204" pitchFamily="18" charset="0"/>
+                      </a:rPr>
+                      <m:t>×</m:t>
+                    </m:r>
+                    <m:r>
+                      <a:rPr lang="en-US" i="1">
+                        <a:latin typeface="Cambria Math" panose="02040503050406030204" pitchFamily="18" charset="0"/>
+                      </a:rPr>
+                      <m:t>|</m:t>
+                    </m:r>
+                    <m:r>
+                      <a:rPr lang="en-US" i="1">
+                        <a:latin typeface="Cambria Math" panose="02040503050406030204" pitchFamily="18" charset="0"/>
+                        <a:ea typeface="Cambria Math" panose="02040503050406030204" pitchFamily="18" charset="0"/>
+                      </a:rPr>
+                      <m:t>𝒜</m:t>
+                    </m:r>
+                    <m:r>
+                      <a:rPr lang="en-US" i="1">
+                        <a:latin typeface="Cambria Math" panose="02040503050406030204" pitchFamily="18" charset="0"/>
+                        <a:ea typeface="Cambria Math" panose="02040503050406030204" pitchFamily="18" charset="0"/>
+                      </a:rPr>
+                      <m:t>|)</m:t>
+                    </m:r>
+                  </m:oMath>
+                </a14:m>
+                <a:r>
+                  <a:rPr lang="en-US" dirty="0"/>
+                  <a:t> is </a:t>
+                </a:r>
+                <a:r>
+                  <a:rPr lang="en-US" b="1" dirty="0"/>
                   <a:t>polynomial</a:t>
                 </a:r>
                 <a:r>
@@ -15009,7 +18130,7 @@
             </p:txBody>
           </p:sp>
         </mc:Choice>
-        <mc:Fallback xmlns="">
+        <mc:Fallback>
           <p:sp>
             <p:nvSpPr>
               <p:cNvPr id="3" name="Content Placeholder 2">
@@ -15030,7 +18151,7 @@
               <a:blipFill>
                 <a:blip r:embed="rId2"/>
                 <a:stretch>
-                  <a:fillRect l="-1217" t="-2168" r="-1391" b="-1786"/>
+                  <a:fillRect l="-1217" t="-2423" r="-1623" b="-638"/>
                 </a:stretch>
               </a:blipFill>
             </p:spPr>
@@ -15062,7 +18183,7 @@
 </p:sld>
 </file>
 
-<file path=ppt/slides/slide21.xml><?xml version="1.0" encoding="utf-8"?>
+<file path=ppt/slides/slide23.xml><?xml version="1.0" encoding="utf-8"?>
 <p:sld xmlns:a="http://schemas.openxmlformats.org/drawingml/2006/main" xmlns:r="http://schemas.openxmlformats.org/officeDocument/2006/relationships" xmlns:p="http://schemas.openxmlformats.org/presentationml/2006/main">
   <p:cSld>
     <p:spTree>
@@ -15107,8 +18228,8 @@
           </a:p>
         </p:txBody>
       </p:sp>
-      <mc:AlternateContent xmlns:mc="http://schemas.openxmlformats.org/markup-compatibility/2006" xmlns:a14="http://schemas.microsoft.com/office/drawing/2010/main">
-        <mc:Choice Requires="a14">
+      <mc:AlternateContent xmlns:mc="http://schemas.openxmlformats.org/markup-compatibility/2006">
+        <mc:Choice xmlns:a14="http://schemas.microsoft.com/office/drawing/2010/main" Requires="a14">
           <p:sp>
             <p:nvSpPr>
               <p:cNvPr id="3" name="Content Placeholder 2">
@@ -15128,7 +18249,7 @@
             <p:spPr/>
             <p:txBody>
               <a:bodyPr>
-                <a:normAutofit fontScale="92500" lnSpcReduction="10000"/>
+                <a:normAutofit fontScale="77500" lnSpcReduction="20000"/>
               </a:bodyPr>
               <a:lstStyle/>
               <a:p>
@@ -15178,7 +18299,7 @@
                 </a:r>
                 <a:r>
                   <a:rPr lang="en-US" dirty="0"/>
-                  <a:t>since it a tabular method.</a:t>
+                  <a:t>since it is a tabular method.</a:t>
                 </a:r>
               </a:p>
               <a:p>
@@ -15225,8 +18346,95 @@
                 </a:r>
                 <a:r>
                   <a:rPr lang="en-US" dirty="0"/>
-                  <a:t>: Convert the recursive Bellman optimality equations into the Belmann update operator and sweep the state space till the optimal solution is found.</a:t>
-                </a:r>
+                  <a:t>: Convert the recursive Bellman equations into the Belmann update operators and sweep the state space till the optimal solution is found.</a:t>
+                </a:r>
+              </a:p>
+              <a:p>
+                <a:pPr lvl="1"/>
+                <a:r>
+                  <a:rPr lang="en-US" dirty="0"/>
+                  <a:t>Expected Bellman update operator </a:t>
+                </a:r>
+                <a14:m>
+                  <m:oMath xmlns:m="http://schemas.openxmlformats.org/officeDocument/2006/math">
+                    <m:sSup>
+                      <m:sSupPr>
+                        <m:ctrlPr>
+                          <a:rPr lang="en-US" b="0" i="1" smtClean="0">
+                            <a:latin typeface="Cambria Math" panose="02040503050406030204" pitchFamily="18" charset="0"/>
+                          </a:rPr>
+                        </m:ctrlPr>
+                      </m:sSupPr>
+                      <m:e>
+                        <m:r>
+                          <a:rPr lang="en-US" b="0" i="1" smtClean="0">
+                            <a:latin typeface="Cambria Math" panose="02040503050406030204" pitchFamily="18" charset="0"/>
+                          </a:rPr>
+                          <m:t>𝑇</m:t>
+                        </m:r>
+                      </m:e>
+                      <m:sup>
+                        <m:r>
+                          <a:rPr lang="en-US" b="0" i="1" smtClean="0">
+                            <a:latin typeface="Cambria Math" panose="02040503050406030204" pitchFamily="18" charset="0"/>
+                          </a:rPr>
+                          <m:t>𝜋</m:t>
+                        </m:r>
+                      </m:sup>
+                    </m:sSup>
+                  </m:oMath>
+                </a14:m>
+                <a:r>
+                  <a:rPr lang="en-US" dirty="0"/>
+                  <a:t> vs. Bellman optimality operator </a:t>
+                </a:r>
+                <a14:m>
+                  <m:oMath xmlns:m="http://schemas.openxmlformats.org/officeDocument/2006/math">
+                    <m:sSup>
+                      <m:sSupPr>
+                        <m:ctrlPr>
+                          <a:rPr lang="en-US" b="0" i="1" smtClean="0">
+                            <a:latin typeface="Cambria Math" panose="02040503050406030204" pitchFamily="18" charset="0"/>
+                          </a:rPr>
+                        </m:ctrlPr>
+                      </m:sSupPr>
+                      <m:e>
+                        <m:r>
+                          <a:rPr lang="en-US" b="0" i="1" smtClean="0">
+                            <a:latin typeface="Cambria Math" panose="02040503050406030204" pitchFamily="18" charset="0"/>
+                          </a:rPr>
+                          <m:t>𝑇</m:t>
+                        </m:r>
+                      </m:e>
+                      <m:sup>
+                        <m:r>
+                          <a:rPr lang="en-US" b="0" i="1" smtClean="0">
+                            <a:latin typeface="Cambria Math" panose="02040503050406030204" pitchFamily="18" charset="0"/>
+                          </a:rPr>
+                          <m:t>∗</m:t>
+                        </m:r>
+                      </m:sup>
+                    </m:sSup>
+                  </m:oMath>
+                </a14:m>
+                <a:endParaRPr lang="en-US" dirty="0"/>
+              </a:p>
+              <a:p>
+                <a:pPr lvl="1"/>
+                <a:r>
+                  <a:rPr lang="en-US" dirty="0"/>
+                  <a:t>Value iteration is a special case of modified policy iteration.</a:t>
+                </a:r>
+              </a:p>
+              <a:p>
+                <a:pPr lvl="1"/>
+                <a:r>
+                  <a:rPr lang="en-US" dirty="0"/>
+                  <a:t>Why and when is convergence guaranteed?</a:t>
+                </a:r>
+              </a:p>
+              <a:p>
+                <a:endParaRPr lang="en-US" b="1" dirty="0"/>
               </a:p>
               <a:p>
                 <a:r>
@@ -15241,7 +18449,7 @@
             </p:txBody>
           </p:sp>
         </mc:Choice>
-        <mc:Fallback xmlns="">
+        <mc:Fallback>
           <p:sp>
             <p:nvSpPr>
               <p:cNvPr id="3" name="Content Placeholder 2">
@@ -15262,7 +18470,7 @@
               <a:blipFill>
                 <a:blip r:embed="rId2"/>
                 <a:stretch>
-                  <a:fillRect l="-928" t="-2551" r="-1043"/>
+                  <a:fillRect l="-696" t="-2551"/>
                 </a:stretch>
               </a:blipFill>
             </p:spPr>
@@ -15339,8 +18547,8 @@
           </a:p>
         </p:txBody>
       </p:sp>
-      <mc:AlternateContent xmlns:mc="http://schemas.openxmlformats.org/markup-compatibility/2006">
-        <mc:Choice xmlns:a14="http://schemas.microsoft.com/office/drawing/2010/main" Requires="a14">
+      <mc:AlternateContent xmlns:mc="http://schemas.openxmlformats.org/markup-compatibility/2006" xmlns:a14="http://schemas.microsoft.com/office/drawing/2010/main">
+        <mc:Choice Requires="a14">
           <p:sp>
             <p:nvSpPr>
               <p:cNvPr id="3" name="Content Placeholder 2">
@@ -16401,7 +19609,7 @@
             </p:txBody>
           </p:sp>
         </mc:Choice>
-        <mc:Fallback>
+        <mc:Fallback xmlns="">
           <p:sp>
             <p:nvSpPr>
               <p:cNvPr id="3" name="Content Placeholder 2">
@@ -18916,13 +22124,13 @@
           <a:p>
             <a:r>
               <a:rPr lang="en-US" dirty="0"/>
-              <a:t>Solution Options</a:t>
+              <a:t>Solution Option 1: Linear Program</a:t>
             </a:r>
           </a:p>
         </p:txBody>
       </p:sp>
-      <mc:AlternateContent xmlns:mc="http://schemas.openxmlformats.org/markup-compatibility/2006" xmlns:a14="http://schemas.microsoft.com/office/drawing/2010/main">
-        <mc:Choice Requires="a14">
+      <mc:AlternateContent xmlns:mc="http://schemas.openxmlformats.org/markup-compatibility/2006">
+        <mc:Choice xmlns:a14="http://schemas.microsoft.com/office/drawing/2010/main" Requires="a14">
           <p:sp>
             <p:nvSpPr>
               <p:cNvPr id="3" name="Content Placeholder 2">
@@ -18941,20 +22149,16 @@
             </p:nvSpPr>
             <p:spPr>
               <a:xfrm>
-                <a:off x="838200" y="1397330"/>
-                <a:ext cx="7398380" cy="4996490"/>
+                <a:off x="838199" y="1397329"/>
+                <a:ext cx="10350985" cy="5170993"/>
               </a:xfrm>
             </p:spPr>
             <p:txBody>
               <a:bodyPr>
-                <a:normAutofit fontScale="92500" lnSpcReduction="10000"/>
+                <a:normAutofit/>
               </a:bodyPr>
               <a:lstStyle/>
               <a:p>
-                <a:pPr marL="514350" indent="-514350">
-                  <a:buFont typeface="+mj-lt"/>
-                  <a:buAutoNum type="arabicPeriod"/>
-                </a:pPr>
                 <a:r>
                   <a:rPr lang="en-US" sz="2400" dirty="0"/>
                   <a:t>Directly solve the system of </a:t>
@@ -18990,6 +22194,902 @@
                 <a:br>
                   <a:rPr lang="en-US" sz="2400" dirty="0"/>
                 </a:br>
+                <a:endParaRPr lang="en-US" sz="2400" dirty="0"/>
+              </a:p>
+              <a:p>
+                <a:pPr marL="0" indent="0">
+                  <a:buNone/>
+                </a:pPr>
+                <a14:m>
+                  <m:oMathPara xmlns:m="http://schemas.openxmlformats.org/officeDocument/2006/math">
+                    <m:oMathParaPr>
+                      <m:jc m:val="centerGroup"/>
+                    </m:oMathParaPr>
+                    <m:oMath xmlns:m="http://schemas.openxmlformats.org/officeDocument/2006/math">
+                      <m:sSub>
+                        <m:sSubPr>
+                          <m:ctrlPr>
+                            <a:rPr lang="en-US" sz="2400" i="1">
+                              <a:latin typeface="Cambria Math" panose="02040503050406030204" pitchFamily="18" charset="0"/>
+                            </a:rPr>
+                          </m:ctrlPr>
+                        </m:sSubPr>
+                        <m:e>
+                          <m:r>
+                            <a:rPr lang="en-US" sz="2400" i="1">
+                              <a:latin typeface="Cambria Math" panose="02040503050406030204" pitchFamily="18" charset="0"/>
+                            </a:rPr>
+                            <m:t>𝑣</m:t>
+                          </m:r>
+                        </m:e>
+                        <m:sub>
+                          <m:r>
+                            <a:rPr lang="en-US" sz="2400" i="1">
+                              <a:latin typeface="Cambria Math" panose="02040503050406030204" pitchFamily="18" charset="0"/>
+                            </a:rPr>
+                            <m:t>𝜋</m:t>
+                          </m:r>
+                        </m:sub>
+                      </m:sSub>
+                      <m:d>
+                        <m:dPr>
+                          <m:ctrlPr>
+                            <a:rPr lang="en-US" sz="2400" i="1">
+                              <a:latin typeface="Cambria Math" panose="02040503050406030204" pitchFamily="18" charset="0"/>
+                            </a:rPr>
+                          </m:ctrlPr>
+                        </m:dPr>
+                        <m:e>
+                          <m:sSub>
+                            <m:sSubPr>
+                              <m:ctrlPr>
+                                <a:rPr lang="en-US" sz="2400" b="0" i="1" smtClean="0">
+                                  <a:latin typeface="Cambria Math" panose="02040503050406030204" pitchFamily="18" charset="0"/>
+                                </a:rPr>
+                              </m:ctrlPr>
+                            </m:sSubPr>
+                            <m:e>
+                              <m:r>
+                                <a:rPr lang="en-US" sz="2400" i="1">
+                                  <a:latin typeface="Cambria Math" panose="02040503050406030204" pitchFamily="18" charset="0"/>
+                                </a:rPr>
+                                <m:t>𝑠</m:t>
+                              </m:r>
+                            </m:e>
+                            <m:sub>
+                              <m:r>
+                                <a:rPr lang="en-US" sz="2400" b="0" i="1" smtClean="0">
+                                  <a:latin typeface="Cambria Math" panose="02040503050406030204" pitchFamily="18" charset="0"/>
+                                </a:rPr>
+                                <m:t>1</m:t>
+                              </m:r>
+                            </m:sub>
+                          </m:sSub>
+                        </m:e>
+                      </m:d>
+                      <m:r>
+                        <m:rPr>
+                          <m:aln/>
+                        </m:rPr>
+                        <a:rPr lang="en-US" sz="2400" i="1">
+                          <a:latin typeface="Cambria Math" panose="02040503050406030204" pitchFamily="18" charset="0"/>
+                        </a:rPr>
+                        <m:t>=</m:t>
+                      </m:r>
+                      <m:nary>
+                        <m:naryPr>
+                          <m:chr m:val="∑"/>
+                          <m:supHide m:val="on"/>
+                          <m:ctrlPr>
+                            <a:rPr lang="en-US" sz="2400" i="1">
+                              <a:latin typeface="Cambria Math" panose="02040503050406030204" pitchFamily="18" charset="0"/>
+                            </a:rPr>
+                          </m:ctrlPr>
+                        </m:naryPr>
+                        <m:sub>
+                          <m:r>
+                            <a:rPr lang="en-US" sz="2400" i="1">
+                              <a:latin typeface="Cambria Math" panose="02040503050406030204" pitchFamily="18" charset="0"/>
+                            </a:rPr>
+                            <m:t>𝑎</m:t>
+                          </m:r>
+                        </m:sub>
+                        <m:sup/>
+                        <m:e>
+                          <m:r>
+                            <a:rPr lang="en-US" sz="2400" i="1">
+                              <a:latin typeface="Cambria Math" panose="02040503050406030204" pitchFamily="18" charset="0"/>
+                            </a:rPr>
+                            <m:t>𝜋</m:t>
+                          </m:r>
+                          <m:r>
+                            <a:rPr lang="en-US" sz="2400" i="1">
+                              <a:latin typeface="Cambria Math" panose="02040503050406030204" pitchFamily="18" charset="0"/>
+                            </a:rPr>
+                            <m:t>(</m:t>
+                          </m:r>
+                          <m:r>
+                            <a:rPr lang="en-US" sz="2400" i="1">
+                              <a:latin typeface="Cambria Math" panose="02040503050406030204" pitchFamily="18" charset="0"/>
+                            </a:rPr>
+                            <m:t>𝑎</m:t>
+                          </m:r>
+                          <m:r>
+                            <a:rPr lang="en-US" sz="2400" i="1">
+                              <a:latin typeface="Cambria Math" panose="02040503050406030204" pitchFamily="18" charset="0"/>
+                            </a:rPr>
+                            <m:t>|</m:t>
+                          </m:r>
+                          <m:sSub>
+                            <m:sSubPr>
+                              <m:ctrlPr>
+                                <a:rPr lang="en-US" sz="2400" b="0" i="1" smtClean="0">
+                                  <a:latin typeface="Cambria Math" panose="02040503050406030204" pitchFamily="18" charset="0"/>
+                                </a:rPr>
+                              </m:ctrlPr>
+                            </m:sSubPr>
+                            <m:e>
+                              <m:r>
+                                <a:rPr lang="en-US" sz="2400" i="1">
+                                  <a:latin typeface="Cambria Math" panose="02040503050406030204" pitchFamily="18" charset="0"/>
+                                </a:rPr>
+                                <m:t>𝑠</m:t>
+                              </m:r>
+                            </m:e>
+                            <m:sub>
+                              <m:r>
+                                <a:rPr lang="en-US" sz="2400" b="0" i="1" smtClean="0">
+                                  <a:latin typeface="Cambria Math" panose="02040503050406030204" pitchFamily="18" charset="0"/>
+                                </a:rPr>
+                                <m:t>1</m:t>
+                              </m:r>
+                            </m:sub>
+                          </m:sSub>
+                          <m:r>
+                            <a:rPr lang="en-US" sz="2400" i="1">
+                              <a:latin typeface="Cambria Math" panose="02040503050406030204" pitchFamily="18" charset="0"/>
+                            </a:rPr>
+                            <m:t>)</m:t>
+                          </m:r>
+                        </m:e>
+                      </m:nary>
+                      <m:nary>
+                        <m:naryPr>
+                          <m:chr m:val="∑"/>
+                          <m:supHide m:val="on"/>
+                          <m:ctrlPr>
+                            <a:rPr lang="en-US" sz="2400" i="1">
+                              <a:latin typeface="Cambria Math" panose="02040503050406030204" pitchFamily="18" charset="0"/>
+                            </a:rPr>
+                          </m:ctrlPr>
+                        </m:naryPr>
+                        <m:sub>
+                          <m:sSup>
+                            <m:sSupPr>
+                              <m:ctrlPr>
+                                <a:rPr lang="en-US" sz="2400" i="1">
+                                  <a:latin typeface="Cambria Math" panose="02040503050406030204" pitchFamily="18" charset="0"/>
+                                </a:rPr>
+                              </m:ctrlPr>
+                            </m:sSupPr>
+                            <m:e>
+                              <m:r>
+                                <a:rPr lang="en-US" sz="2400" i="1">
+                                  <a:latin typeface="Cambria Math" panose="02040503050406030204" pitchFamily="18" charset="0"/>
+                                </a:rPr>
+                                <m:t>𝑠</m:t>
+                              </m:r>
+                            </m:e>
+                            <m:sup>
+                              <m:r>
+                                <a:rPr lang="en-US" sz="2400" i="1">
+                                  <a:latin typeface="Cambria Math" panose="02040503050406030204" pitchFamily="18" charset="0"/>
+                                </a:rPr>
+                                <m:t>′</m:t>
+                              </m:r>
+                            </m:sup>
+                          </m:sSup>
+                          <m:r>
+                            <a:rPr lang="en-US" sz="2400" i="1">
+                              <a:latin typeface="Cambria Math" panose="02040503050406030204" pitchFamily="18" charset="0"/>
+                            </a:rPr>
+                            <m:t>,</m:t>
+                          </m:r>
+                          <m:r>
+                            <a:rPr lang="en-US" sz="2400" i="1">
+                              <a:latin typeface="Cambria Math" panose="02040503050406030204" pitchFamily="18" charset="0"/>
+                            </a:rPr>
+                            <m:t>𝑟</m:t>
+                          </m:r>
+                        </m:sub>
+                        <m:sup/>
+                        <m:e>
+                          <m:r>
+                            <a:rPr lang="en-US" sz="2400" i="1">
+                              <a:latin typeface="Cambria Math" panose="02040503050406030204" pitchFamily="18" charset="0"/>
+                            </a:rPr>
+                            <m:t>𝑝</m:t>
+                          </m:r>
+                          <m:d>
+                            <m:dPr>
+                              <m:endChr m:val="|"/>
+                              <m:ctrlPr>
+                                <a:rPr lang="en-US" sz="2400" i="1">
+                                  <a:latin typeface="Cambria Math" panose="02040503050406030204" pitchFamily="18" charset="0"/>
+                                </a:rPr>
+                              </m:ctrlPr>
+                            </m:dPr>
+                            <m:e>
+                              <m:sSup>
+                                <m:sSupPr>
+                                  <m:ctrlPr>
+                                    <a:rPr lang="en-US" sz="2400" i="1">
+                                      <a:latin typeface="Cambria Math" panose="02040503050406030204" pitchFamily="18" charset="0"/>
+                                    </a:rPr>
+                                  </m:ctrlPr>
+                                </m:sSupPr>
+                                <m:e>
+                                  <m:r>
+                                    <a:rPr lang="en-US" sz="2400" i="1">
+                                      <a:latin typeface="Cambria Math" panose="02040503050406030204" pitchFamily="18" charset="0"/>
+                                    </a:rPr>
+                                    <m:t>𝑠</m:t>
+                                  </m:r>
+                                </m:e>
+                                <m:sup>
+                                  <m:r>
+                                    <a:rPr lang="en-US" sz="2400" i="1">
+                                      <a:latin typeface="Cambria Math" panose="02040503050406030204" pitchFamily="18" charset="0"/>
+                                    </a:rPr>
+                                    <m:t>′</m:t>
+                                  </m:r>
+                                </m:sup>
+                              </m:sSup>
+                              <m:r>
+                                <a:rPr lang="en-US" sz="2400" i="1">
+                                  <a:latin typeface="Cambria Math" panose="02040503050406030204" pitchFamily="18" charset="0"/>
+                                </a:rPr>
+                                <m:t>,</m:t>
+                              </m:r>
+                              <m:r>
+                                <a:rPr lang="en-US" sz="2400" i="1">
+                                  <a:latin typeface="Cambria Math" panose="02040503050406030204" pitchFamily="18" charset="0"/>
+                                </a:rPr>
+                                <m:t>𝑟</m:t>
+                              </m:r>
+                              <m:r>
+                                <a:rPr lang="en-US" sz="2400" i="1">
+                                  <a:latin typeface="Cambria Math" panose="02040503050406030204" pitchFamily="18" charset="0"/>
+                                </a:rPr>
+                                <m:t> </m:t>
+                              </m:r>
+                            </m:e>
+                          </m:d>
+                          <m:sSub>
+                            <m:sSubPr>
+                              <m:ctrlPr>
+                                <a:rPr lang="en-US" sz="2400" b="0" i="1" smtClean="0">
+                                  <a:latin typeface="Cambria Math" panose="02040503050406030204" pitchFamily="18" charset="0"/>
+                                </a:rPr>
+                              </m:ctrlPr>
+                            </m:sSubPr>
+                            <m:e>
+                              <m:r>
+                                <a:rPr lang="en-US" sz="2400" i="1">
+                                  <a:latin typeface="Cambria Math" panose="02040503050406030204" pitchFamily="18" charset="0"/>
+                                </a:rPr>
+                                <m:t>𝑠</m:t>
+                              </m:r>
+                            </m:e>
+                            <m:sub>
+                              <m:r>
+                                <a:rPr lang="en-US" sz="2400" b="0" i="1" smtClean="0">
+                                  <a:latin typeface="Cambria Math" panose="02040503050406030204" pitchFamily="18" charset="0"/>
+                                </a:rPr>
+                                <m:t>1</m:t>
+                              </m:r>
+                            </m:sub>
+                          </m:sSub>
+                          <m:r>
+                            <a:rPr lang="en-US" sz="2400" i="1">
+                              <a:latin typeface="Cambria Math" panose="02040503050406030204" pitchFamily="18" charset="0"/>
+                            </a:rPr>
+                            <m:t>,</m:t>
+                          </m:r>
+                          <m:r>
+                            <a:rPr lang="en-US" sz="2400" i="1">
+                              <a:latin typeface="Cambria Math" panose="02040503050406030204" pitchFamily="18" charset="0"/>
+                            </a:rPr>
+                            <m:t>𝑎</m:t>
+                          </m:r>
+                          <m:r>
+                            <a:rPr lang="en-US" sz="2400" i="1">
+                              <a:latin typeface="Cambria Math" panose="02040503050406030204" pitchFamily="18" charset="0"/>
+                            </a:rPr>
+                            <m:t>)[</m:t>
+                          </m:r>
+                          <m:r>
+                            <a:rPr lang="en-US" sz="2400" i="1">
+                              <a:latin typeface="Cambria Math" panose="02040503050406030204" pitchFamily="18" charset="0"/>
+                            </a:rPr>
+                            <m:t>𝑟</m:t>
+                          </m:r>
+                          <m:r>
+                            <a:rPr lang="en-US" sz="2400" i="1">
+                              <a:latin typeface="Cambria Math" panose="02040503050406030204" pitchFamily="18" charset="0"/>
+                            </a:rPr>
+                            <m:t>+</m:t>
+                          </m:r>
+                          <m:r>
+                            <a:rPr lang="en-US" sz="2400" i="1">
+                              <a:latin typeface="Cambria Math" panose="02040503050406030204" pitchFamily="18" charset="0"/>
+                            </a:rPr>
+                            <m:t>𝛾</m:t>
+                          </m:r>
+                          <m:sSub>
+                            <m:sSubPr>
+                              <m:ctrlPr>
+                                <a:rPr lang="en-US" sz="2400" i="1">
+                                  <a:latin typeface="Cambria Math" panose="02040503050406030204" pitchFamily="18" charset="0"/>
+                                </a:rPr>
+                              </m:ctrlPr>
+                            </m:sSubPr>
+                            <m:e>
+                              <m:r>
+                                <a:rPr lang="en-US" sz="2400" i="1">
+                                  <a:latin typeface="Cambria Math" panose="02040503050406030204" pitchFamily="18" charset="0"/>
+                                </a:rPr>
+                                <m:t>𝑣</m:t>
+                              </m:r>
+                            </m:e>
+                            <m:sub>
+                              <m:r>
+                                <a:rPr lang="en-US" sz="2400" i="1">
+                                  <a:latin typeface="Cambria Math" panose="02040503050406030204" pitchFamily="18" charset="0"/>
+                                </a:rPr>
+                                <m:t>𝜋</m:t>
+                              </m:r>
+                            </m:sub>
+                          </m:sSub>
+                          <m:d>
+                            <m:dPr>
+                              <m:ctrlPr>
+                                <a:rPr lang="en-US" sz="2400" i="1">
+                                  <a:latin typeface="Cambria Math" panose="02040503050406030204" pitchFamily="18" charset="0"/>
+                                </a:rPr>
+                              </m:ctrlPr>
+                            </m:dPr>
+                            <m:e>
+                              <m:sSup>
+                                <m:sSupPr>
+                                  <m:ctrlPr>
+                                    <a:rPr lang="en-US" sz="2400" i="1">
+                                      <a:latin typeface="Cambria Math" panose="02040503050406030204" pitchFamily="18" charset="0"/>
+                                    </a:rPr>
+                                  </m:ctrlPr>
+                                </m:sSupPr>
+                                <m:e>
+                                  <m:r>
+                                    <a:rPr lang="en-US" sz="2400" i="1">
+                                      <a:latin typeface="Cambria Math" panose="02040503050406030204" pitchFamily="18" charset="0"/>
+                                    </a:rPr>
+                                    <m:t>𝑠</m:t>
+                                  </m:r>
+                                </m:e>
+                                <m:sup>
+                                  <m:r>
+                                    <a:rPr lang="en-US" sz="2400" i="1">
+                                      <a:latin typeface="Cambria Math" panose="02040503050406030204" pitchFamily="18" charset="0"/>
+                                    </a:rPr>
+                                    <m:t>′</m:t>
+                                  </m:r>
+                                </m:sup>
+                              </m:sSup>
+                            </m:e>
+                          </m:d>
+                          <m:r>
+                            <a:rPr lang="en-US" sz="2400" i="1">
+                              <a:latin typeface="Cambria Math" panose="02040503050406030204" pitchFamily="18" charset="0"/>
+                            </a:rPr>
+                            <m:t>]</m:t>
+                          </m:r>
+                        </m:e>
+                      </m:nary>
+                    </m:oMath>
+                  </m:oMathPara>
+                </a14:m>
+                <a:endParaRPr lang="en-US" sz="2400" dirty="0"/>
+              </a:p>
+              <a:p>
+                <a:pPr marL="0" indent="0">
+                  <a:buNone/>
+                </a:pPr>
+                <a14:m>
+                  <m:oMathPara xmlns:m="http://schemas.openxmlformats.org/officeDocument/2006/math">
+                    <m:oMathParaPr>
+                      <m:jc m:val="centerGroup"/>
+                    </m:oMathParaPr>
+                    <m:oMath xmlns:m="http://schemas.openxmlformats.org/officeDocument/2006/math">
+                      <m:sSub>
+                        <m:sSubPr>
+                          <m:ctrlPr>
+                            <a:rPr lang="en-US" sz="2400" i="1">
+                              <a:latin typeface="Cambria Math" panose="02040503050406030204" pitchFamily="18" charset="0"/>
+                            </a:rPr>
+                          </m:ctrlPr>
+                        </m:sSubPr>
+                        <m:e>
+                          <m:r>
+                            <a:rPr lang="en-US" sz="2400" i="1">
+                              <a:latin typeface="Cambria Math" panose="02040503050406030204" pitchFamily="18" charset="0"/>
+                            </a:rPr>
+                            <m:t>𝑣</m:t>
+                          </m:r>
+                        </m:e>
+                        <m:sub>
+                          <m:r>
+                            <a:rPr lang="en-US" sz="2400" i="1">
+                              <a:latin typeface="Cambria Math" panose="02040503050406030204" pitchFamily="18" charset="0"/>
+                            </a:rPr>
+                            <m:t>𝜋</m:t>
+                          </m:r>
+                        </m:sub>
+                      </m:sSub>
+                      <m:d>
+                        <m:dPr>
+                          <m:ctrlPr>
+                            <a:rPr lang="en-US" sz="2400" i="1">
+                              <a:latin typeface="Cambria Math" panose="02040503050406030204" pitchFamily="18" charset="0"/>
+                            </a:rPr>
+                          </m:ctrlPr>
+                        </m:dPr>
+                        <m:e>
+                          <m:sSub>
+                            <m:sSubPr>
+                              <m:ctrlPr>
+                                <a:rPr lang="en-US" sz="2400" i="1">
+                                  <a:latin typeface="Cambria Math" panose="02040503050406030204" pitchFamily="18" charset="0"/>
+                                </a:rPr>
+                              </m:ctrlPr>
+                            </m:sSubPr>
+                            <m:e>
+                              <m:r>
+                                <a:rPr lang="en-US" sz="2400" i="1">
+                                  <a:latin typeface="Cambria Math" panose="02040503050406030204" pitchFamily="18" charset="0"/>
+                                </a:rPr>
+                                <m:t>𝑠</m:t>
+                              </m:r>
+                            </m:e>
+                            <m:sub>
+                              <m:r>
+                                <a:rPr lang="en-US" sz="2400" b="0" i="1" smtClean="0">
+                                  <a:latin typeface="Cambria Math" panose="02040503050406030204" pitchFamily="18" charset="0"/>
+                                </a:rPr>
+                                <m:t>2</m:t>
+                              </m:r>
+                            </m:sub>
+                          </m:sSub>
+                        </m:e>
+                      </m:d>
+                      <m:r>
+                        <m:rPr>
+                          <m:aln/>
+                        </m:rPr>
+                        <a:rPr lang="en-US" sz="2400" i="1">
+                          <a:latin typeface="Cambria Math" panose="02040503050406030204" pitchFamily="18" charset="0"/>
+                        </a:rPr>
+                        <m:t>=</m:t>
+                      </m:r>
+                      <m:nary>
+                        <m:naryPr>
+                          <m:chr m:val="∑"/>
+                          <m:supHide m:val="on"/>
+                          <m:ctrlPr>
+                            <a:rPr lang="en-US" sz="2400" i="1">
+                              <a:latin typeface="Cambria Math" panose="02040503050406030204" pitchFamily="18" charset="0"/>
+                            </a:rPr>
+                          </m:ctrlPr>
+                        </m:naryPr>
+                        <m:sub>
+                          <m:r>
+                            <a:rPr lang="en-US" sz="2400" i="1">
+                              <a:latin typeface="Cambria Math" panose="02040503050406030204" pitchFamily="18" charset="0"/>
+                            </a:rPr>
+                            <m:t>𝑎</m:t>
+                          </m:r>
+                        </m:sub>
+                        <m:sup/>
+                        <m:e>
+                          <m:r>
+                            <a:rPr lang="en-US" sz="2400" i="1">
+                              <a:latin typeface="Cambria Math" panose="02040503050406030204" pitchFamily="18" charset="0"/>
+                            </a:rPr>
+                            <m:t>𝜋</m:t>
+                          </m:r>
+                          <m:r>
+                            <a:rPr lang="en-US" sz="2400" i="1">
+                              <a:latin typeface="Cambria Math" panose="02040503050406030204" pitchFamily="18" charset="0"/>
+                            </a:rPr>
+                            <m:t>(</m:t>
+                          </m:r>
+                          <m:r>
+                            <a:rPr lang="en-US" sz="2400" i="1">
+                              <a:latin typeface="Cambria Math" panose="02040503050406030204" pitchFamily="18" charset="0"/>
+                            </a:rPr>
+                            <m:t>𝑎</m:t>
+                          </m:r>
+                          <m:r>
+                            <a:rPr lang="en-US" sz="2400" i="1">
+                              <a:latin typeface="Cambria Math" panose="02040503050406030204" pitchFamily="18" charset="0"/>
+                            </a:rPr>
+                            <m:t>|</m:t>
+                          </m:r>
+                          <m:sSub>
+                            <m:sSubPr>
+                              <m:ctrlPr>
+                                <a:rPr lang="en-US" sz="2400" i="1">
+                                  <a:latin typeface="Cambria Math" panose="02040503050406030204" pitchFamily="18" charset="0"/>
+                                </a:rPr>
+                              </m:ctrlPr>
+                            </m:sSubPr>
+                            <m:e>
+                              <m:r>
+                                <a:rPr lang="en-US" sz="2400" i="1">
+                                  <a:latin typeface="Cambria Math" panose="02040503050406030204" pitchFamily="18" charset="0"/>
+                                </a:rPr>
+                                <m:t>𝑠</m:t>
+                              </m:r>
+                            </m:e>
+                            <m:sub>
+                              <m:r>
+                                <a:rPr lang="en-US" sz="2400" b="0" i="1" smtClean="0">
+                                  <a:latin typeface="Cambria Math" panose="02040503050406030204" pitchFamily="18" charset="0"/>
+                                </a:rPr>
+                                <m:t>2</m:t>
+                              </m:r>
+                            </m:sub>
+                          </m:sSub>
+                          <m:r>
+                            <a:rPr lang="en-US" sz="2400" i="1">
+                              <a:latin typeface="Cambria Math" panose="02040503050406030204" pitchFamily="18" charset="0"/>
+                            </a:rPr>
+                            <m:t>)</m:t>
+                          </m:r>
+                        </m:e>
+                      </m:nary>
+                      <m:nary>
+                        <m:naryPr>
+                          <m:chr m:val="∑"/>
+                          <m:supHide m:val="on"/>
+                          <m:ctrlPr>
+                            <a:rPr lang="en-US" sz="2400" i="1">
+                              <a:latin typeface="Cambria Math" panose="02040503050406030204" pitchFamily="18" charset="0"/>
+                            </a:rPr>
+                          </m:ctrlPr>
+                        </m:naryPr>
+                        <m:sub>
+                          <m:sSup>
+                            <m:sSupPr>
+                              <m:ctrlPr>
+                                <a:rPr lang="en-US" sz="2400" i="1">
+                                  <a:latin typeface="Cambria Math" panose="02040503050406030204" pitchFamily="18" charset="0"/>
+                                </a:rPr>
+                              </m:ctrlPr>
+                            </m:sSupPr>
+                            <m:e>
+                              <m:r>
+                                <a:rPr lang="en-US" sz="2400" i="1">
+                                  <a:latin typeface="Cambria Math" panose="02040503050406030204" pitchFamily="18" charset="0"/>
+                                </a:rPr>
+                                <m:t>𝑠</m:t>
+                              </m:r>
+                            </m:e>
+                            <m:sup>
+                              <m:r>
+                                <a:rPr lang="en-US" sz="2400" i="1">
+                                  <a:latin typeface="Cambria Math" panose="02040503050406030204" pitchFamily="18" charset="0"/>
+                                </a:rPr>
+                                <m:t>′</m:t>
+                              </m:r>
+                            </m:sup>
+                          </m:sSup>
+                          <m:r>
+                            <a:rPr lang="en-US" sz="2400" i="1">
+                              <a:latin typeface="Cambria Math" panose="02040503050406030204" pitchFamily="18" charset="0"/>
+                            </a:rPr>
+                            <m:t>,</m:t>
+                          </m:r>
+                          <m:r>
+                            <a:rPr lang="en-US" sz="2400" i="1">
+                              <a:latin typeface="Cambria Math" panose="02040503050406030204" pitchFamily="18" charset="0"/>
+                            </a:rPr>
+                            <m:t>𝑟</m:t>
+                          </m:r>
+                        </m:sub>
+                        <m:sup/>
+                        <m:e>
+                          <m:r>
+                            <a:rPr lang="en-US" sz="2400" i="1">
+                              <a:latin typeface="Cambria Math" panose="02040503050406030204" pitchFamily="18" charset="0"/>
+                            </a:rPr>
+                            <m:t>𝑝</m:t>
+                          </m:r>
+                          <m:d>
+                            <m:dPr>
+                              <m:endChr m:val="|"/>
+                              <m:ctrlPr>
+                                <a:rPr lang="en-US" sz="2400" i="1">
+                                  <a:latin typeface="Cambria Math" panose="02040503050406030204" pitchFamily="18" charset="0"/>
+                                </a:rPr>
+                              </m:ctrlPr>
+                            </m:dPr>
+                            <m:e>
+                              <m:sSup>
+                                <m:sSupPr>
+                                  <m:ctrlPr>
+                                    <a:rPr lang="en-US" sz="2400" i="1">
+                                      <a:latin typeface="Cambria Math" panose="02040503050406030204" pitchFamily="18" charset="0"/>
+                                    </a:rPr>
+                                  </m:ctrlPr>
+                                </m:sSupPr>
+                                <m:e>
+                                  <m:r>
+                                    <a:rPr lang="en-US" sz="2400" i="1">
+                                      <a:latin typeface="Cambria Math" panose="02040503050406030204" pitchFamily="18" charset="0"/>
+                                    </a:rPr>
+                                    <m:t>𝑠</m:t>
+                                  </m:r>
+                                </m:e>
+                                <m:sup>
+                                  <m:r>
+                                    <a:rPr lang="en-US" sz="2400" i="1">
+                                      <a:latin typeface="Cambria Math" panose="02040503050406030204" pitchFamily="18" charset="0"/>
+                                    </a:rPr>
+                                    <m:t>′</m:t>
+                                  </m:r>
+                                </m:sup>
+                              </m:sSup>
+                              <m:r>
+                                <a:rPr lang="en-US" sz="2400" i="1">
+                                  <a:latin typeface="Cambria Math" panose="02040503050406030204" pitchFamily="18" charset="0"/>
+                                </a:rPr>
+                                <m:t>,</m:t>
+                              </m:r>
+                              <m:r>
+                                <a:rPr lang="en-US" sz="2400" i="1">
+                                  <a:latin typeface="Cambria Math" panose="02040503050406030204" pitchFamily="18" charset="0"/>
+                                </a:rPr>
+                                <m:t>𝑟</m:t>
+                              </m:r>
+                              <m:r>
+                                <a:rPr lang="en-US" sz="2400" i="1">
+                                  <a:latin typeface="Cambria Math" panose="02040503050406030204" pitchFamily="18" charset="0"/>
+                                </a:rPr>
+                                <m:t> </m:t>
+                              </m:r>
+                            </m:e>
+                          </m:d>
+                          <m:sSub>
+                            <m:sSubPr>
+                              <m:ctrlPr>
+                                <a:rPr lang="en-US" sz="2400" i="1">
+                                  <a:latin typeface="Cambria Math" panose="02040503050406030204" pitchFamily="18" charset="0"/>
+                                </a:rPr>
+                              </m:ctrlPr>
+                            </m:sSubPr>
+                            <m:e>
+                              <m:r>
+                                <a:rPr lang="en-US" sz="2400" i="1">
+                                  <a:latin typeface="Cambria Math" panose="02040503050406030204" pitchFamily="18" charset="0"/>
+                                </a:rPr>
+                                <m:t>𝑠</m:t>
+                              </m:r>
+                            </m:e>
+                            <m:sub>
+                              <m:r>
+                                <a:rPr lang="en-US" sz="2400" b="0" i="1" smtClean="0">
+                                  <a:latin typeface="Cambria Math" panose="02040503050406030204" pitchFamily="18" charset="0"/>
+                                </a:rPr>
+                                <m:t>2</m:t>
+                              </m:r>
+                            </m:sub>
+                          </m:sSub>
+                          <m:r>
+                            <a:rPr lang="en-US" sz="2400" i="1">
+                              <a:latin typeface="Cambria Math" panose="02040503050406030204" pitchFamily="18" charset="0"/>
+                            </a:rPr>
+                            <m:t>,</m:t>
+                          </m:r>
+                          <m:r>
+                            <a:rPr lang="en-US" sz="2400" i="1">
+                              <a:latin typeface="Cambria Math" panose="02040503050406030204" pitchFamily="18" charset="0"/>
+                            </a:rPr>
+                            <m:t>𝑎</m:t>
+                          </m:r>
+                          <m:r>
+                            <a:rPr lang="en-US" sz="2400" i="1">
+                              <a:latin typeface="Cambria Math" panose="02040503050406030204" pitchFamily="18" charset="0"/>
+                            </a:rPr>
+                            <m:t>)[</m:t>
+                          </m:r>
+                          <m:r>
+                            <a:rPr lang="en-US" sz="2400" i="1">
+                              <a:latin typeface="Cambria Math" panose="02040503050406030204" pitchFamily="18" charset="0"/>
+                            </a:rPr>
+                            <m:t>𝑟</m:t>
+                          </m:r>
+                          <m:r>
+                            <a:rPr lang="en-US" sz="2400" i="1">
+                              <a:latin typeface="Cambria Math" panose="02040503050406030204" pitchFamily="18" charset="0"/>
+                            </a:rPr>
+                            <m:t>+</m:t>
+                          </m:r>
+                          <m:r>
+                            <a:rPr lang="en-US" sz="2400" i="1">
+                              <a:latin typeface="Cambria Math" panose="02040503050406030204" pitchFamily="18" charset="0"/>
+                            </a:rPr>
+                            <m:t>𝛾</m:t>
+                          </m:r>
+                          <m:sSub>
+                            <m:sSubPr>
+                              <m:ctrlPr>
+                                <a:rPr lang="en-US" sz="2400" i="1">
+                                  <a:latin typeface="Cambria Math" panose="02040503050406030204" pitchFamily="18" charset="0"/>
+                                </a:rPr>
+                              </m:ctrlPr>
+                            </m:sSubPr>
+                            <m:e>
+                              <m:r>
+                                <a:rPr lang="en-US" sz="2400" i="1">
+                                  <a:latin typeface="Cambria Math" panose="02040503050406030204" pitchFamily="18" charset="0"/>
+                                </a:rPr>
+                                <m:t>𝑣</m:t>
+                              </m:r>
+                            </m:e>
+                            <m:sub>
+                              <m:r>
+                                <a:rPr lang="en-US" sz="2400" i="1">
+                                  <a:latin typeface="Cambria Math" panose="02040503050406030204" pitchFamily="18" charset="0"/>
+                                </a:rPr>
+                                <m:t>𝜋</m:t>
+                              </m:r>
+                            </m:sub>
+                          </m:sSub>
+                          <m:d>
+                            <m:dPr>
+                              <m:ctrlPr>
+                                <a:rPr lang="en-US" sz="2400" i="1">
+                                  <a:latin typeface="Cambria Math" panose="02040503050406030204" pitchFamily="18" charset="0"/>
+                                </a:rPr>
+                              </m:ctrlPr>
+                            </m:dPr>
+                            <m:e>
+                              <m:sSup>
+                                <m:sSupPr>
+                                  <m:ctrlPr>
+                                    <a:rPr lang="en-US" sz="2400" i="1">
+                                      <a:latin typeface="Cambria Math" panose="02040503050406030204" pitchFamily="18" charset="0"/>
+                                    </a:rPr>
+                                  </m:ctrlPr>
+                                </m:sSupPr>
+                                <m:e>
+                                  <m:r>
+                                    <a:rPr lang="en-US" sz="2400" i="1">
+                                      <a:latin typeface="Cambria Math" panose="02040503050406030204" pitchFamily="18" charset="0"/>
+                                    </a:rPr>
+                                    <m:t>𝑠</m:t>
+                                  </m:r>
+                                </m:e>
+                                <m:sup>
+                                  <m:r>
+                                    <a:rPr lang="en-US" sz="2400" i="1">
+                                      <a:latin typeface="Cambria Math" panose="02040503050406030204" pitchFamily="18" charset="0"/>
+                                    </a:rPr>
+                                    <m:t>′</m:t>
+                                  </m:r>
+                                </m:sup>
+                              </m:sSup>
+                            </m:e>
+                          </m:d>
+                          <m:r>
+                            <a:rPr lang="en-US" sz="2400" i="1">
+                              <a:latin typeface="Cambria Math" panose="02040503050406030204" pitchFamily="18" charset="0"/>
+                            </a:rPr>
+                            <m:t>]</m:t>
+                          </m:r>
+                        </m:e>
+                      </m:nary>
+                    </m:oMath>
+                  </m:oMathPara>
+                </a14:m>
+                <a:endParaRPr lang="en-US" sz="2400" dirty="0"/>
+              </a:p>
+              <a:p>
+                <a:pPr marL="0" indent="0">
+                  <a:buNone/>
+                </a:pPr>
+                <a:endParaRPr lang="en-US" sz="2400" dirty="0"/>
+              </a:p>
+              <a:p>
+                <a:pPr marL="0" indent="0">
+                  <a:buNone/>
+                </a:pPr>
+                <a14:m>
+                  <m:oMathPara xmlns:m="http://schemas.openxmlformats.org/officeDocument/2006/math">
+                    <m:oMathParaPr>
+                      <m:jc m:val="centerGroup"/>
+                    </m:oMathParaPr>
+                    <m:oMath xmlns:m="http://schemas.openxmlformats.org/officeDocument/2006/math">
+                      <m:r>
+                        <a:rPr lang="en-US" sz="2400" b="0" i="1" smtClean="0">
+                          <a:latin typeface="Cambria Math" panose="02040503050406030204" pitchFamily="18" charset="0"/>
+                        </a:rPr>
+                        <m:t>…  </m:t>
+                      </m:r>
+                      <m:r>
+                        <m:rPr>
+                          <m:nor/>
+                        </m:rPr>
+                        <a:rPr lang="en-US" sz="2400" b="0" i="0" smtClean="0">
+                          <a:latin typeface="Cambria Math" panose="02040503050406030204" pitchFamily="18" charset="0"/>
+                        </a:rPr>
+                        <m:t>for</m:t>
+                      </m:r>
+                      <m:r>
+                        <m:rPr>
+                          <m:nor/>
+                        </m:rPr>
+                        <a:rPr lang="en-US" sz="2400" b="0" i="0" smtClean="0">
+                          <a:latin typeface="Cambria Math" panose="02040503050406030204" pitchFamily="18" charset="0"/>
+                        </a:rPr>
+                        <m:t> </m:t>
+                      </m:r>
+                      <m:r>
+                        <m:rPr>
+                          <m:nor/>
+                        </m:rPr>
+                        <a:rPr lang="en-US" sz="2400" b="0" i="0" smtClean="0">
+                          <a:latin typeface="Cambria Math" panose="02040503050406030204" pitchFamily="18" charset="0"/>
+                        </a:rPr>
+                        <m:t>all</m:t>
+                      </m:r>
+                      <m:r>
+                        <m:rPr>
+                          <m:nor/>
+                        </m:rPr>
+                        <a:rPr lang="en-US" sz="2400" b="0" i="0" smtClean="0">
+                          <a:latin typeface="Cambria Math" panose="02040503050406030204" pitchFamily="18" charset="0"/>
+                        </a:rPr>
+                        <m:t> </m:t>
+                      </m:r>
+                      <m:r>
+                        <a:rPr lang="en-US" sz="2400" b="0" i="1" smtClean="0">
+                          <a:latin typeface="Cambria Math" panose="02040503050406030204" pitchFamily="18" charset="0"/>
+                        </a:rPr>
+                        <m:t>𝑠</m:t>
+                      </m:r>
+                      <m:r>
+                        <a:rPr lang="en-US" sz="2400" b="0" i="1" smtClean="0">
+                          <a:latin typeface="Cambria Math" panose="02040503050406030204" pitchFamily="18" charset="0"/>
+                        </a:rPr>
+                        <m:t>∈</m:t>
+                      </m:r>
+                      <m:r>
+                        <a:rPr lang="en-US" sz="2400" b="0" i="1" smtClean="0">
+                          <a:latin typeface="Cambria Math" panose="02040503050406030204" pitchFamily="18" charset="0"/>
+                          <a:ea typeface="Cambria Math" panose="02040503050406030204" pitchFamily="18" charset="0"/>
+                        </a:rPr>
+                        <m:t>𝒮</m:t>
+                      </m:r>
+                    </m:oMath>
+                  </m:oMathPara>
+                </a14:m>
+                <a:endParaRPr lang="en-US" sz="2400" dirty="0"/>
+              </a:p>
+              <a:p>
+                <a:endParaRPr lang="en-US" sz="2400" dirty="0"/>
+              </a:p>
+              <a:p>
                 <a:r>
                   <a:rPr lang="en-US" sz="2400" dirty="0"/>
                   <a:t>This is hard if </a:t>
@@ -19030,15 +23130,166 @@
                 </a:pPr>
                 <a:endParaRPr lang="en-US" sz="2400" dirty="0"/>
               </a:p>
+            </p:txBody>
+          </p:sp>
+        </mc:Choice>
+        <mc:Fallback>
+          <p:sp>
+            <p:nvSpPr>
+              <p:cNvPr id="3" name="Content Placeholder 2">
+                <a:extLst>
+                  <a:ext uri="{FF2B5EF4-FFF2-40B4-BE49-F238E27FC236}">
+                    <a16:creationId xmlns:a16="http://schemas.microsoft.com/office/drawing/2014/main" id="{295FDADB-CB9E-5700-5CD5-2A4F4B7D2B20}"/>
+                  </a:ext>
+                </a:extLst>
+              </p:cNvPr>
+              <p:cNvSpPr>
+                <a:spLocks noGrp="1" noRot="1" noChangeAspect="1" noMove="1" noResize="1" noEditPoints="1" noAdjustHandles="1" noChangeArrowheads="1" noChangeShapeType="1" noTextEdit="1"/>
+              </p:cNvSpPr>
+              <p:nvPr>
+                <p:ph idx="1"/>
+              </p:nvPr>
+            </p:nvSpPr>
+            <p:spPr>
+              <a:xfrm>
+                <a:off x="838199" y="1397329"/>
+                <a:ext cx="10350985" cy="5170993"/>
+              </a:xfrm>
+              <a:blipFill>
+                <a:blip r:embed="rId2"/>
+                <a:stretch>
+                  <a:fillRect l="-766" t="-1533"/>
+                </a:stretch>
+              </a:blipFill>
+            </p:spPr>
+            <p:txBody>
+              <a:bodyPr/>
+              <a:lstStyle/>
               <a:p>
-                <a:pPr marL="514350" indent="-514350">
-                  <a:buFont typeface="+mj-lt"/>
-                  <a:buAutoNum type="arabicPeriod"/>
+                <a:r>
+                  <a:rPr lang="en-US">
+                    <a:noFill/>
+                  </a:rPr>
+                  <a:t> </a:t>
+                </a:r>
+              </a:p>
+            </p:txBody>
+          </p:sp>
+        </mc:Fallback>
+      </mc:AlternateContent>
+    </p:spTree>
+    <p:extLst>
+      <p:ext uri="{BB962C8B-B14F-4D97-AF65-F5344CB8AC3E}">
+        <p14:creationId xmlns:p14="http://schemas.microsoft.com/office/powerpoint/2010/main" val="1864265012"/>
+      </p:ext>
+    </p:extLst>
+  </p:cSld>
+  <p:clrMapOvr>
+    <a:masterClrMapping/>
+  </p:clrMapOvr>
+</p:sld>
+</file>
+
+<file path=ppt/slides/slide9.xml><?xml version="1.0" encoding="utf-8"?>
+<p:sld xmlns:a="http://schemas.openxmlformats.org/drawingml/2006/main" xmlns:r="http://schemas.openxmlformats.org/officeDocument/2006/relationships" xmlns:p="http://schemas.openxmlformats.org/presentationml/2006/main">
+  <p:cSld>
+    <p:spTree>
+      <p:nvGrpSpPr>
+        <p:cNvPr id="1" name="">
+          <a:extLst>
+            <a:ext uri="{FF2B5EF4-FFF2-40B4-BE49-F238E27FC236}">
+              <a16:creationId xmlns:a16="http://schemas.microsoft.com/office/drawing/2014/main" id="{4CD6658F-139C-0BE8-0CD7-8FE00B9A33B6}"/>
+            </a:ext>
+          </a:extLst>
+        </p:cNvPr>
+        <p:cNvGrpSpPr/>
+        <p:nvPr/>
+      </p:nvGrpSpPr>
+      <p:grpSpPr>
+        <a:xfrm>
+          <a:off x="0" y="0"/>
+          <a:ext cx="0" cy="0"/>
+          <a:chOff x="0" y="0"/>
+          <a:chExt cx="0" cy="0"/>
+        </a:xfrm>
+      </p:grpSpPr>
+      <p:sp>
+        <p:nvSpPr>
+          <p:cNvPr id="2" name="Title 1">
+            <a:extLst>
+              <a:ext uri="{FF2B5EF4-FFF2-40B4-BE49-F238E27FC236}">
+                <a16:creationId xmlns:a16="http://schemas.microsoft.com/office/drawing/2014/main" id="{C05886B1-B3C3-36AF-DCCF-70C3CEDCBC67}"/>
+              </a:ext>
+            </a:extLst>
+          </p:cNvPr>
+          <p:cNvSpPr>
+            <a:spLocks noGrp="1"/>
+          </p:cNvSpPr>
+          <p:nvPr>
+            <p:ph type="title"/>
+          </p:nvPr>
+        </p:nvSpPr>
+        <p:spPr/>
+        <p:txBody>
+          <a:bodyPr>
+            <a:normAutofit/>
+          </a:bodyPr>
+          <a:lstStyle/>
+          <a:p>
+            <a:r>
+              <a:rPr lang="en-US" dirty="0"/>
+              <a:t>Solution Option 2: Iterative Policy Evaluation</a:t>
+            </a:r>
+          </a:p>
+        </p:txBody>
+      </p:sp>
+      <mc:AlternateContent xmlns:mc="http://schemas.openxmlformats.org/markup-compatibility/2006">
+        <mc:Choice xmlns:a14="http://schemas.microsoft.com/office/drawing/2010/main" Requires="a14">
+          <p:sp>
+            <p:nvSpPr>
+              <p:cNvPr id="3" name="Content Placeholder 2">
+                <a:extLst>
+                  <a:ext uri="{FF2B5EF4-FFF2-40B4-BE49-F238E27FC236}">
+                    <a16:creationId xmlns:a16="http://schemas.microsoft.com/office/drawing/2014/main" id="{C25F1F25-389C-B9C9-77EC-6351FB4FE076}"/>
+                  </a:ext>
+                </a:extLst>
+              </p:cNvPr>
+              <p:cNvSpPr>
+                <a:spLocks noGrp="1"/>
+              </p:cNvSpPr>
+              <p:nvPr>
+                <p:ph idx="1"/>
+              </p:nvPr>
+            </p:nvSpPr>
+            <p:spPr>
+              <a:xfrm>
+                <a:off x="838200" y="1397329"/>
+                <a:ext cx="7398380" cy="5170993"/>
+              </a:xfrm>
+            </p:spPr>
+            <p:txBody>
+              <a:bodyPr>
+                <a:normAutofit fontScale="92500" lnSpcReduction="20000"/>
+              </a:bodyPr>
+              <a:lstStyle/>
+              <a:p>
+                <a:pPr marL="0" indent="0">
+                  <a:buNone/>
                 </a:pPr>
                 <a:r>
+                  <a:rPr lang="en-US" sz="2400" b="1" dirty="0"/>
+                  <a:t>Dynamic Programming</a:t>
+                </a:r>
+                <a:r>
                   <a:rPr lang="en-US" sz="2400" dirty="0"/>
-                  <a:t>Dynamic Programming: Iterative Policy Evaluation</a:t>
-                </a:r>
+                  <a:t>: solves a complex optimization problem by breaking it down into smaller, overlapping subproblems and using their solutions to build the overall optimal solution.</a:t>
+                </a:r>
+              </a:p>
+              <a:p>
+                <a:pPr marL="0" indent="0">
+                  <a:buNone/>
+                </a:pPr>
+                <a:endParaRPr lang="en-US" sz="2400" dirty="0"/>
               </a:p>
               <a:p>
                 <a:pPr lvl="1"/>
@@ -19097,7 +23348,7 @@
                 </a:r>
                 <a:r>
                   <a:rPr lang="en-US" sz="2000" b="1" dirty="0"/>
-                  <a:t>Bellman Update (Operator):</a:t>
+                  <a:t>(expected) Bellman Update:</a:t>
                 </a:r>
               </a:p>
               <a:p>
@@ -19675,6 +23926,22 @@
               </a:p>
               <a:p>
                 <a:pPr lvl="1"/>
+                <a:endParaRPr lang="en-US" sz="2000" b="1" dirty="0"/>
+              </a:p>
+              <a:p>
+                <a:pPr lvl="1"/>
+                <a:r>
+                  <a:rPr lang="en-US" sz="2000" b="1" dirty="0"/>
+                  <a:t>Convergence</a:t>
+                </a:r>
+                <a:r>
+                  <a:rPr lang="en-US" sz="2000" b="0" dirty="0"/>
+                  <a:t>: The </a:t>
+                </a:r>
+                <a:r>
+                  <a:rPr lang="en-US" sz="2000" dirty="0"/>
+                  <a:t>Belman update is a contracting mapping with </a:t>
+                </a:r>
                 <a14:m>
                   <m:oMath xmlns:m="http://schemas.openxmlformats.org/officeDocument/2006/math">
                     <m:sSub>
@@ -19737,7 +24004,73 @@
                 </a14:m>
                 <a:r>
                   <a:rPr lang="en-US" sz="2000" dirty="0"/>
-                  <a:t> is a fixed point. Updates converge for </a:t>
+                  <a:t> as its fixed point (for </a:t>
+                </a:r>
+                <a14:m>
+                  <m:oMath xmlns:m="http://schemas.openxmlformats.org/officeDocument/2006/math">
+                    <m:r>
+                      <a:rPr lang="en-US" sz="2000" b="0" i="1" smtClean="0">
+                        <a:latin typeface="Cambria Math" panose="02040503050406030204" pitchFamily="18" charset="0"/>
+                      </a:rPr>
+                      <m:t>0≤</m:t>
+                    </m:r>
+                    <m:r>
+                      <a:rPr lang="en-US" sz="2000" b="0" i="1" smtClean="0">
+                        <a:latin typeface="Cambria Math" panose="02040503050406030204" pitchFamily="18" charset="0"/>
+                      </a:rPr>
+                      <m:t>𝛾</m:t>
+                    </m:r>
+                    <m:r>
+                      <a:rPr lang="en-US" sz="2000" b="0" i="1" smtClean="0">
+                        <a:latin typeface="Cambria Math" panose="02040503050406030204" pitchFamily="18" charset="0"/>
+                      </a:rPr>
+                      <m:t>&lt;1</m:t>
+                    </m:r>
+                  </m:oMath>
+                </a14:m>
+                <a:r>
+                  <a:rPr lang="en-US" sz="2000" dirty="0"/>
+                  <a:t>). </a:t>
+                </a:r>
+                <a:br>
+                  <a:rPr lang="en-US" sz="2000" dirty="0"/>
+                </a:br>
+                <a:r>
+                  <a:rPr lang="en-US" sz="2000" dirty="0"/>
+                  <a:t>I.e., updates converge to </a:t>
+                </a:r>
+                <a14:m>
+                  <m:oMath xmlns:m="http://schemas.openxmlformats.org/officeDocument/2006/math">
+                    <m:sSub>
+                      <m:sSubPr>
+                        <m:ctrlPr>
+                          <a:rPr lang="en-US" sz="2000" i="1">
+                            <a:latin typeface="Cambria Math" panose="02040503050406030204" pitchFamily="18" charset="0"/>
+                          </a:rPr>
+                        </m:ctrlPr>
+                      </m:sSubPr>
+                      <m:e>
+                        <m:r>
+                          <a:rPr lang="en-US" sz="2000" i="1">
+                            <a:latin typeface="Cambria Math" panose="02040503050406030204" pitchFamily="18" charset="0"/>
+                          </a:rPr>
+                          <m:t>𝑣</m:t>
+                        </m:r>
+                      </m:e>
+                      <m:sub>
+                        <m:r>
+                          <a:rPr lang="en-US" sz="2000" i="1">
+                            <a:latin typeface="Cambria Math" panose="02040503050406030204" pitchFamily="18" charset="0"/>
+                          </a:rPr>
+                          <m:t>𝜋</m:t>
+                        </m:r>
+                      </m:sub>
+                    </m:sSub>
+                  </m:oMath>
+                </a14:m>
+                <a:r>
+                  <a:rPr lang="en-US" sz="2000" dirty="0"/>
+                  <a:t> for </a:t>
                 </a:r>
                 <a14:m>
                   <m:oMath xmlns:m="http://schemas.openxmlformats.org/officeDocument/2006/math">
@@ -19760,13 +24093,13 @@
             </p:txBody>
           </p:sp>
         </mc:Choice>
-        <mc:Fallback xmlns="">
+        <mc:Fallback>
           <p:sp>
             <p:nvSpPr>
               <p:cNvPr id="3" name="Content Placeholder 2">
                 <a:extLst>
                   <a:ext uri="{FF2B5EF4-FFF2-40B4-BE49-F238E27FC236}">
-                    <a16:creationId xmlns:a16="http://schemas.microsoft.com/office/drawing/2014/main" id="{295FDADB-CB9E-5700-5CD5-2A4F4B7D2B20}"/>
+                    <a16:creationId xmlns:a16="http://schemas.microsoft.com/office/drawing/2014/main" id="{C25F1F25-389C-B9C9-77EC-6351FB4FE076}"/>
                   </a:ext>
                 </a:extLst>
               </p:cNvPr>
@@ -19779,13 +24112,13 @@
             </p:nvSpPr>
             <p:spPr>
               <a:xfrm>
-                <a:off x="838200" y="1397330"/>
-                <a:ext cx="7398380" cy="4996490"/>
+                <a:off x="838200" y="1397329"/>
+                <a:ext cx="7398380" cy="5170993"/>
               </a:xfrm>
               <a:blipFill>
                 <a:blip r:embed="rId2"/>
                 <a:stretch>
-                  <a:fillRect l="-1154" t="-2073"/>
+                  <a:fillRect l="-1072" t="-2358"/>
                 </a:stretch>
               </a:blipFill>
             </p:spPr>
@@ -19809,7 +24142,7 @@
           <p:cNvPr id="4" name="Group 3">
             <a:extLst>
               <a:ext uri="{FF2B5EF4-FFF2-40B4-BE49-F238E27FC236}">
-                <a16:creationId xmlns:a16="http://schemas.microsoft.com/office/drawing/2014/main" id="{FD69E0E1-150E-502B-230D-20020733C03F}"/>
+                <a16:creationId xmlns:a16="http://schemas.microsoft.com/office/drawing/2014/main" id="{92891670-5E19-0B92-2000-67EB986C67EA}"/>
               </a:ext>
             </a:extLst>
           </p:cNvPr>
@@ -19818,8 +24151,8 @@
         </p:nvGrpSpPr>
         <p:grpSpPr>
           <a:xfrm>
-            <a:off x="4537390" y="4818946"/>
-            <a:ext cx="4076118" cy="730954"/>
+            <a:off x="3309346" y="4635227"/>
+            <a:ext cx="5249074" cy="730954"/>
             <a:chOff x="2458533" y="3098314"/>
             <a:chExt cx="1699913" cy="730954"/>
           </a:xfrm>
@@ -19829,7 +24162,7 @@
             <p:cNvPr id="5" name="Right Brace 4">
               <a:extLst>
                 <a:ext uri="{FF2B5EF4-FFF2-40B4-BE49-F238E27FC236}">
-                  <a16:creationId xmlns:a16="http://schemas.microsoft.com/office/drawing/2014/main" id="{67214591-2070-0693-973A-E1B8CCC315CF}"/>
+                  <a16:creationId xmlns:a16="http://schemas.microsoft.com/office/drawing/2014/main" id="{C6BB2930-2803-7CC6-BE5E-4F581F3D8212}"/>
                 </a:ext>
               </a:extLst>
             </p:cNvPr>
@@ -19873,7 +24206,7 @@
             <p:cNvPr id="6" name="TextBox 5">
               <a:extLst>
                 <a:ext uri="{FF2B5EF4-FFF2-40B4-BE49-F238E27FC236}">
-                  <a16:creationId xmlns:a16="http://schemas.microsoft.com/office/drawing/2014/main" id="{9FF88B54-F488-2CE8-6F14-974D1CC4F817}"/>
+                  <a16:creationId xmlns:a16="http://schemas.microsoft.com/office/drawing/2014/main" id="{90F03579-6BB3-CB46-DAC5-72EC42C594FC}"/>
                 </a:ext>
               </a:extLst>
             </p:cNvPr>
@@ -19906,7 +24239,7 @@
               </a:br>
               <a:r>
                 <a:rPr lang="en-US" sz="1400" dirty="0"/>
-                <a:t>Uses the expectation over all possible next states.</a:t>
+                <a:t>Uses the expectation over all possible actions and next states.</a:t>
               </a:r>
             </a:p>
           </p:txBody>
@@ -19917,7 +24250,7 @@
           <p:cNvPr id="8" name="Group 7" descr="Updating the value function using iterative Bellman updates.">
             <a:extLst>
               <a:ext uri="{FF2B5EF4-FFF2-40B4-BE49-F238E27FC236}">
-                <a16:creationId xmlns:a16="http://schemas.microsoft.com/office/drawing/2014/main" id="{63FD7C4D-64E2-3FEF-F62C-382BE07E89C8}"/>
+                <a16:creationId xmlns:a16="http://schemas.microsoft.com/office/drawing/2014/main" id="{E042F5F5-5CB0-3535-780C-93DC3965B4B3}"/>
               </a:ext>
             </a:extLst>
           </p:cNvPr>
@@ -19937,7 +24270,7 @@
             <p:cNvPr id="11" name="Straight Connector 10">
               <a:extLst>
                 <a:ext uri="{FF2B5EF4-FFF2-40B4-BE49-F238E27FC236}">
-                  <a16:creationId xmlns:a16="http://schemas.microsoft.com/office/drawing/2014/main" id="{53024366-3B9C-8541-0D28-708BBC7AE6C7}"/>
+                  <a16:creationId xmlns:a16="http://schemas.microsoft.com/office/drawing/2014/main" id="{1876D76D-10B4-4679-F653-BD6BA18B2860}"/>
                 </a:ext>
                 <a:ext uri="{C183D7F6-B498-43B3-948B-1728B52AA6E4}">
                   <adec:decorative xmlns:adec="http://schemas.microsoft.com/office/drawing/2017/decorative" val="1"/>
@@ -19980,7 +24313,7 @@
                 <p:cNvPr id="12" name="TextBox 8">
                   <a:extLst>
                     <a:ext uri="{FF2B5EF4-FFF2-40B4-BE49-F238E27FC236}">
-                      <a16:creationId xmlns:a16="http://schemas.microsoft.com/office/drawing/2014/main" id="{115AA05C-2180-0AF6-A384-9D75BED15ED1}"/>
+                      <a16:creationId xmlns:a16="http://schemas.microsoft.com/office/drawing/2014/main" id="{CD2E66AA-EA36-8916-48A7-F5C017DA6964}"/>
                     </a:ext>
                     <a:ext uri="{C183D7F6-B498-43B3-948B-1728B52AA6E4}">
                       <adec:decorative xmlns:adec="http://schemas.microsoft.com/office/drawing/2017/decorative" val="1"/>
@@ -20193,7 +24526,7 @@
             <p:cNvPr id="13" name="Arc 12">
               <a:extLst>
                 <a:ext uri="{FF2B5EF4-FFF2-40B4-BE49-F238E27FC236}">
-                  <a16:creationId xmlns:a16="http://schemas.microsoft.com/office/drawing/2014/main" id="{830A3C56-435D-BEBE-B83F-3BA9F9E0169B}"/>
+                  <a16:creationId xmlns:a16="http://schemas.microsoft.com/office/drawing/2014/main" id="{A915BDCA-A78B-A713-EF2C-BD76D59CE4C3}"/>
                 </a:ext>
                 <a:ext uri="{C183D7F6-B498-43B3-948B-1728B52AA6E4}">
                   <adec:decorative xmlns:adec="http://schemas.microsoft.com/office/drawing/2017/decorative" val="1"/>
@@ -20346,7 +24679,7 @@
             <p:cNvPr id="14" name="Arc 13">
               <a:extLst>
                 <a:ext uri="{FF2B5EF4-FFF2-40B4-BE49-F238E27FC236}">
-                  <a16:creationId xmlns:a16="http://schemas.microsoft.com/office/drawing/2014/main" id="{3FB9398F-7C22-1F4D-9C1A-D846D19FEED3}"/>
+                  <a16:creationId xmlns:a16="http://schemas.microsoft.com/office/drawing/2014/main" id="{9046C63F-C083-8CE3-5B67-AD0FC59C20CB}"/>
                 </a:ext>
                 <a:ext uri="{C183D7F6-B498-43B3-948B-1728B52AA6E4}">
                   <adec:decorative xmlns:adec="http://schemas.microsoft.com/office/drawing/2017/decorative" val="1"/>
@@ -20499,7 +24832,7 @@
             <p:cNvPr id="15" name="Arc 14">
               <a:extLst>
                 <a:ext uri="{FF2B5EF4-FFF2-40B4-BE49-F238E27FC236}">
-                  <a16:creationId xmlns:a16="http://schemas.microsoft.com/office/drawing/2014/main" id="{72229F87-12B2-362D-80BC-031A6CAAE42F}"/>
+                  <a16:creationId xmlns:a16="http://schemas.microsoft.com/office/drawing/2014/main" id="{FA9CADED-6B11-F60E-3E70-35BC15580022}"/>
                 </a:ext>
                 <a:ext uri="{C183D7F6-B498-43B3-948B-1728B52AA6E4}">
                   <adec:decorative xmlns:adec="http://schemas.microsoft.com/office/drawing/2017/decorative" val="1"/>
@@ -20652,7 +24985,7 @@
             <p:cNvPr id="16" name="Arc 15">
               <a:extLst>
                 <a:ext uri="{FF2B5EF4-FFF2-40B4-BE49-F238E27FC236}">
-                  <a16:creationId xmlns:a16="http://schemas.microsoft.com/office/drawing/2014/main" id="{936EFA66-6C09-679B-C4C9-F361F262C3E0}"/>
+                  <a16:creationId xmlns:a16="http://schemas.microsoft.com/office/drawing/2014/main" id="{2124ACB0-C3FA-2FAA-37B1-C6EECFECCE0B}"/>
                 </a:ext>
                 <a:ext uri="{C183D7F6-B498-43B3-948B-1728B52AA6E4}">
                   <adec:decorative xmlns:adec="http://schemas.microsoft.com/office/drawing/2017/decorative" val="1"/>
@@ -20807,7 +25140,7 @@
                 <p:cNvPr id="17" name="TextBox 29">
                   <a:extLst>
                     <a:ext uri="{FF2B5EF4-FFF2-40B4-BE49-F238E27FC236}">
-                      <a16:creationId xmlns:a16="http://schemas.microsoft.com/office/drawing/2014/main" id="{6DB673C8-2425-685A-8CBE-35EDDCA1EB91}"/>
+                      <a16:creationId xmlns:a16="http://schemas.microsoft.com/office/drawing/2014/main" id="{9FFAF23B-1B2A-B56C-21FE-4753439D8E51}"/>
                     </a:ext>
                     <a:ext uri="{C183D7F6-B498-43B3-948B-1728B52AA6E4}">
                       <adec:decorative xmlns:adec="http://schemas.microsoft.com/office/drawing/2017/decorative" val="1"/>
@@ -21022,7 +25355,7 @@
                 <p:cNvPr id="18" name="TextBox 30">
                   <a:extLst>
                     <a:ext uri="{FF2B5EF4-FFF2-40B4-BE49-F238E27FC236}">
-                      <a16:creationId xmlns:a16="http://schemas.microsoft.com/office/drawing/2014/main" id="{56DA2FE2-AC26-7B66-B5BD-7064ECD50CE7}"/>
+                      <a16:creationId xmlns:a16="http://schemas.microsoft.com/office/drawing/2014/main" id="{6147F0A6-B8EB-E05B-C1C0-350546463BA5}"/>
                     </a:ext>
                     <a:ext uri="{C183D7F6-B498-43B3-948B-1728B52AA6E4}">
                       <adec:decorative xmlns:adec="http://schemas.microsoft.com/office/drawing/2017/decorative" val="1"/>
@@ -21235,7 +25568,7 @@
             <p:cNvPr id="19" name="Oval 18">
               <a:extLst>
                 <a:ext uri="{FF2B5EF4-FFF2-40B4-BE49-F238E27FC236}">
-                  <a16:creationId xmlns:a16="http://schemas.microsoft.com/office/drawing/2014/main" id="{4AF4F629-36FB-BF7C-2361-1AFA669F5F24}"/>
+                  <a16:creationId xmlns:a16="http://schemas.microsoft.com/office/drawing/2014/main" id="{15DA345C-A981-1A04-9E3B-9233BA91B30B}"/>
                 </a:ext>
                 <a:ext uri="{C183D7F6-B498-43B3-948B-1728B52AA6E4}">
                   <adec:decorative xmlns:adec="http://schemas.microsoft.com/office/drawing/2017/decorative" val="1"/>
@@ -21378,7 +25711,7 @@
             <p:cNvPr id="20" name="TextBox 35">
               <a:extLst>
                 <a:ext uri="{FF2B5EF4-FFF2-40B4-BE49-F238E27FC236}">
-                  <a16:creationId xmlns:a16="http://schemas.microsoft.com/office/drawing/2014/main" id="{0C0182D5-6E45-5881-FEB0-C4755A1551A6}"/>
+                  <a16:creationId xmlns:a16="http://schemas.microsoft.com/office/drawing/2014/main" id="{89DB2870-24A4-433E-3096-F45510D7F24A}"/>
                 </a:ext>
                 <a:ext uri="{C183D7F6-B498-43B3-948B-1728B52AA6E4}">
                   <adec:decorative xmlns:adec="http://schemas.microsoft.com/office/drawing/2017/decorative" val="1"/>
@@ -21509,95 +25842,7 @@
     </p:spTree>
     <p:extLst>
       <p:ext uri="{BB962C8B-B14F-4D97-AF65-F5344CB8AC3E}">
-        <p14:creationId xmlns:p14="http://schemas.microsoft.com/office/powerpoint/2010/main" val="1864265012"/>
-      </p:ext>
-    </p:extLst>
-  </p:cSld>
-  <p:clrMapOvr>
-    <a:masterClrMapping/>
-  </p:clrMapOvr>
-</p:sld>
-</file>
-
-<file path=ppt/slides/slide9.xml><?xml version="1.0" encoding="utf-8"?>
-<p:sld xmlns:a="http://schemas.openxmlformats.org/drawingml/2006/main" xmlns:r="http://schemas.openxmlformats.org/officeDocument/2006/relationships" xmlns:p="http://schemas.openxmlformats.org/presentationml/2006/main">
-  <p:cSld>
-    <p:spTree>
-      <p:nvGrpSpPr>
-        <p:cNvPr id="1" name=""/>
-        <p:cNvGrpSpPr/>
-        <p:nvPr/>
-      </p:nvGrpSpPr>
-      <p:grpSpPr>
-        <a:xfrm>
-          <a:off x="0" y="0"/>
-          <a:ext cx="0" cy="0"/>
-          <a:chOff x="0" y="0"/>
-          <a:chExt cx="0" cy="0"/>
-        </a:xfrm>
-      </p:grpSpPr>
-      <p:sp>
-        <p:nvSpPr>
-          <p:cNvPr id="2" name="Title 1">
-            <a:extLst>
-              <a:ext uri="{FF2B5EF4-FFF2-40B4-BE49-F238E27FC236}">
-                <a16:creationId xmlns:a16="http://schemas.microsoft.com/office/drawing/2014/main" id="{4D6978EC-0ABA-0841-5F8F-F9F724EE99ED}"/>
-              </a:ext>
-            </a:extLst>
-          </p:cNvPr>
-          <p:cNvSpPr>
-            <a:spLocks noGrp="1"/>
-          </p:cNvSpPr>
-          <p:nvPr>
-            <p:ph type="title"/>
-          </p:nvPr>
-        </p:nvSpPr>
-        <p:spPr/>
-        <p:txBody>
-          <a:bodyPr/>
-          <a:lstStyle/>
-          <a:p>
-            <a:r>
-              <a:rPr lang="en-US" dirty="0"/>
-              <a:t>Alg. Iterative Policy Evaluation</a:t>
-            </a:r>
-          </a:p>
-        </p:txBody>
-      </p:sp>
-      <p:pic>
-        <p:nvPicPr>
-          <p:cNvPr id="5" name="Picture 4">
-            <a:extLst>
-              <a:ext uri="{FF2B5EF4-FFF2-40B4-BE49-F238E27FC236}">
-                <a16:creationId xmlns:a16="http://schemas.microsoft.com/office/drawing/2014/main" id="{9E571EE0-04FA-AFEF-D4C0-742C0CA1C621}"/>
-              </a:ext>
-            </a:extLst>
-          </p:cNvPr>
-          <p:cNvPicPr>
-            <a:picLocks noChangeAspect="1"/>
-          </p:cNvPicPr>
-          <p:nvPr/>
-        </p:nvPicPr>
-        <p:blipFill>
-          <a:blip r:embed="rId2"/>
-          <a:stretch>
-            <a:fillRect/>
-          </a:stretch>
-        </p:blipFill>
-        <p:spPr>
-          <a:xfrm>
-            <a:off x="1823441" y="1614234"/>
-            <a:ext cx="8545118" cy="3629532"/>
-          </a:xfrm>
-          <a:prstGeom prst="rect">
-            <a:avLst/>
-          </a:prstGeom>
-        </p:spPr>
-      </p:pic>
-    </p:spTree>
-    <p:extLst>
-      <p:ext uri="{BB962C8B-B14F-4D97-AF65-F5344CB8AC3E}">
-        <p14:creationId xmlns:p14="http://schemas.microsoft.com/office/powerpoint/2010/main" val="4091045570"/>
+        <p14:creationId xmlns:p14="http://schemas.microsoft.com/office/powerpoint/2010/main" val="1313034956"/>
       </p:ext>
     </p:extLst>
   </p:cSld>

--- a/slides/Lecture_Chapter04.pptx
+++ b/slides/Lecture_Chapter04.pptx
@@ -336,7 +336,7 @@
           <a:p>
             <a:fld id="{3E22BF2E-04DA-469E-97C5-BB68A0368813}" type="datetimeFigureOut">
               <a:rPr lang="en-US" smtClean="0"/>
-              <a:t>1/31/2026</a:t>
+              <a:t>2/2/2026</a:t>
             </a:fld>
             <a:endParaRPr lang="en-US"/>
           </a:p>
@@ -534,7 +534,7 @@
           <a:p>
             <a:fld id="{3E22BF2E-04DA-469E-97C5-BB68A0368813}" type="datetimeFigureOut">
               <a:rPr lang="en-US" smtClean="0"/>
-              <a:t>1/31/2026</a:t>
+              <a:t>2/2/2026</a:t>
             </a:fld>
             <a:endParaRPr lang="en-US"/>
           </a:p>
@@ -742,7 +742,7 @@
           <a:p>
             <a:fld id="{3E22BF2E-04DA-469E-97C5-BB68A0368813}" type="datetimeFigureOut">
               <a:rPr lang="en-US" smtClean="0"/>
-              <a:t>1/31/2026</a:t>
+              <a:t>2/2/2026</a:t>
             </a:fld>
             <a:endParaRPr lang="en-US"/>
           </a:p>
@@ -950,7 +950,7 @@
           <a:p>
             <a:fld id="{3E22BF2E-04DA-469E-97C5-BB68A0368813}" type="datetimeFigureOut">
               <a:rPr lang="en-US" smtClean="0"/>
-              <a:t>1/31/2026</a:t>
+              <a:t>2/2/2026</a:t>
             </a:fld>
             <a:endParaRPr lang="en-US"/>
           </a:p>
@@ -1225,7 +1225,7 @@
           <a:p>
             <a:fld id="{3E22BF2E-04DA-469E-97C5-BB68A0368813}" type="datetimeFigureOut">
               <a:rPr lang="en-US" smtClean="0"/>
-              <a:t>1/31/2026</a:t>
+              <a:t>2/2/2026</a:t>
             </a:fld>
             <a:endParaRPr lang="en-US"/>
           </a:p>
@@ -1490,7 +1490,7 @@
           <a:p>
             <a:fld id="{3E22BF2E-04DA-469E-97C5-BB68A0368813}" type="datetimeFigureOut">
               <a:rPr lang="en-US" smtClean="0"/>
-              <a:t>1/31/2026</a:t>
+              <a:t>2/2/2026</a:t>
             </a:fld>
             <a:endParaRPr lang="en-US"/>
           </a:p>
@@ -1902,7 +1902,7 @@
           <a:p>
             <a:fld id="{3E22BF2E-04DA-469E-97C5-BB68A0368813}" type="datetimeFigureOut">
               <a:rPr lang="en-US" smtClean="0"/>
-              <a:t>1/31/2026</a:t>
+              <a:t>2/2/2026</a:t>
             </a:fld>
             <a:endParaRPr lang="en-US"/>
           </a:p>
@@ -2043,7 +2043,7 @@
           <a:p>
             <a:fld id="{3E22BF2E-04DA-469E-97C5-BB68A0368813}" type="datetimeFigureOut">
               <a:rPr lang="en-US" smtClean="0"/>
-              <a:t>1/31/2026</a:t>
+              <a:t>2/2/2026</a:t>
             </a:fld>
             <a:endParaRPr lang="en-US"/>
           </a:p>
@@ -2156,7 +2156,7 @@
           <a:p>
             <a:fld id="{3E22BF2E-04DA-469E-97C5-BB68A0368813}" type="datetimeFigureOut">
               <a:rPr lang="en-US" smtClean="0"/>
-              <a:t>1/31/2026</a:t>
+              <a:t>2/2/2026</a:t>
             </a:fld>
             <a:endParaRPr lang="en-US"/>
           </a:p>
@@ -2467,7 +2467,7 @@
           <a:p>
             <a:fld id="{3E22BF2E-04DA-469E-97C5-BB68A0368813}" type="datetimeFigureOut">
               <a:rPr lang="en-US" smtClean="0"/>
-              <a:t>1/31/2026</a:t>
+              <a:t>2/2/2026</a:t>
             </a:fld>
             <a:endParaRPr lang="en-US"/>
           </a:p>
@@ -2755,7 +2755,7 @@
           <a:p>
             <a:fld id="{3E22BF2E-04DA-469E-97C5-BB68A0368813}" type="datetimeFigureOut">
               <a:rPr lang="en-US" smtClean="0"/>
-              <a:t>1/31/2026</a:t>
+              <a:t>2/2/2026</a:t>
             </a:fld>
             <a:endParaRPr lang="en-US"/>
           </a:p>
@@ -2996,7 +2996,7 @@
           <a:p>
             <a:fld id="{3E22BF2E-04DA-469E-97C5-BB68A0368813}" type="datetimeFigureOut">
               <a:rPr lang="en-US" smtClean="0"/>
-              <a:t>1/31/2026</a:t>
+              <a:t>2/2/2026</a:t>
             </a:fld>
             <a:endParaRPr lang="en-US"/>
           </a:p>
@@ -3513,7 +3513,7 @@
         </p:blipFill>
         <p:spPr bwMode="auto">
           <a:xfrm>
-            <a:off x="3653200" y="-18278"/>
+            <a:off x="3653200" y="-1502"/>
             <a:ext cx="8668512" cy="6857990"/>
           </a:xfrm>
           <a:prstGeom prst="rect">
@@ -4552,7 +4552,40 @@
                 </a14:m>
                 <a:r>
                   <a:rPr lang="en-US" dirty="0"/>
-                  <a:t>-contracting:</a:t>
+                  <a:t>-contracting with </a:t>
+                </a:r>
+                <a14:m>
+                  <m:oMath xmlns:m="http://schemas.openxmlformats.org/officeDocument/2006/math">
+                    <m:sSub>
+                      <m:sSubPr>
+                        <m:ctrlPr>
+                          <a:rPr lang="en-US" b="0" i="1" smtClean="0">
+                            <a:latin typeface="Cambria Math" panose="02040503050406030204" pitchFamily="18" charset="0"/>
+                          </a:rPr>
+                        </m:ctrlPr>
+                      </m:sSubPr>
+                      <m:e>
+                        <m:r>
+                          <a:rPr lang="en-US" b="0" i="1" smtClean="0">
+                            <a:latin typeface="Cambria Math" panose="02040503050406030204" pitchFamily="18" charset="0"/>
+                          </a:rPr>
+                          <m:t>𝑣</m:t>
+                        </m:r>
+                      </m:e>
+                      <m:sub>
+                        <m:r>
+                          <a:rPr lang="en-US" b="0" i="1" smtClean="0">
+                            <a:latin typeface="Cambria Math" panose="02040503050406030204" pitchFamily="18" charset="0"/>
+                          </a:rPr>
+                          <m:t>𝜋</m:t>
+                        </m:r>
+                      </m:sub>
+                    </m:sSub>
+                  </m:oMath>
+                </a14:m>
+                <a:r>
+                  <a:rPr lang="en-US" dirty="0"/>
+                  <a:t> as its fixed point:</a:t>
                 </a:r>
               </a:p>
               <a:p>
@@ -4936,7 +4969,52 @@
                 <a:pPr algn="ctr"/>
                 <a:r>
                   <a:rPr lang="en-US" dirty="0"/>
-                  <a:t>This means the largest difference (infinity norm) will be reduced, leading to convergence if </a:t>
+                  <a:t>This means the largest difference (infinity norm) will be reduced, leading to convergence of </a:t>
+                </a:r>
+                <a14:m>
+                  <m:oMath xmlns:m="http://schemas.openxmlformats.org/officeDocument/2006/math">
+                    <m:r>
+                      <a:rPr lang="en-US" b="0" i="1" smtClean="0">
+                        <a:latin typeface="Cambria Math" panose="02040503050406030204" pitchFamily="18" charset="0"/>
+                      </a:rPr>
+                      <m:t>𝑣</m:t>
+                    </m:r>
+                    <m:r>
+                      <a:rPr lang="en-US" b="0" i="1" smtClean="0">
+                        <a:latin typeface="Cambria Math" panose="02040503050406030204" pitchFamily="18" charset="0"/>
+                      </a:rPr>
+                      <m:t>=</m:t>
+                    </m:r>
+                    <m:sSub>
+                      <m:sSubPr>
+                        <m:ctrlPr>
+                          <a:rPr lang="en-US" b="0" i="1" smtClean="0">
+                            <a:latin typeface="Cambria Math" panose="02040503050406030204" pitchFamily="18" charset="0"/>
+                          </a:rPr>
+                        </m:ctrlPr>
+                      </m:sSubPr>
+                      <m:e>
+                        <m:r>
+                          <a:rPr lang="en-US" b="0" i="1" smtClean="0">
+                            <a:latin typeface="Cambria Math" panose="02040503050406030204" pitchFamily="18" charset="0"/>
+                          </a:rPr>
+                          <m:t>𝑣</m:t>
+                        </m:r>
+                      </m:e>
+                      <m:sub>
+                        <m:r>
+                          <a:rPr lang="en-US" b="0" i="1" smtClean="0">
+                            <a:latin typeface="Cambria Math" panose="02040503050406030204" pitchFamily="18" charset="0"/>
+                          </a:rPr>
+                          <m:t>𝜋</m:t>
+                        </m:r>
+                      </m:sub>
+                    </m:sSub>
+                  </m:oMath>
+                </a14:m>
+                <a:r>
+                  <a:rPr lang="en-US" dirty="0"/>
+                  <a:t> when </a:t>
                 </a:r>
                 <a14:m>
                   <m:oMath xmlns:m="http://schemas.openxmlformats.org/officeDocument/2006/math">
@@ -5038,8 +5116,8 @@
         </p:nvSpPr>
         <p:spPr>
           <a:xfrm>
-            <a:off x="5340084" y="5312557"/>
-            <a:ext cx="3198072" cy="1214547"/>
+            <a:off x="7697390" y="5278327"/>
+            <a:ext cx="3363494" cy="1214547"/>
           </a:xfrm>
           <a:prstGeom prst="wedgeRoundRectCallout">
             <a:avLst>
@@ -5072,13 +5150,13 @@
             <a:pPr algn="ctr"/>
             <a:r>
               <a:rPr lang="en-US" dirty="0"/>
-              <a:t>Convergence is only guaranteed if the discount rate is strictly smaller than 1!</a:t>
+              <a:t>Convergence is only guaranteed if the discount factor is strictly smaller than 1!</a:t>
             </a:r>
           </a:p>
         </p:txBody>
       </p:sp>
-      <mc:AlternateContent xmlns:mc="http://schemas.openxmlformats.org/markup-compatibility/2006">
-        <mc:Choice xmlns:a14="http://schemas.microsoft.com/office/drawing/2010/main" Requires="a14">
+      <mc:AlternateContent xmlns:mc="http://schemas.openxmlformats.org/markup-compatibility/2006" xmlns:a14="http://schemas.microsoft.com/office/drawing/2010/main">
+        <mc:Choice Requires="a14">
           <p:sp>
             <p:nvSpPr>
               <p:cNvPr id="6" name="TextBox 5">
@@ -5291,6 +5369,7 @@
                 </a:r>
               </a:p>
               <a:p>
+                <a:pPr/>
                 <a14:m>
                   <m:oMathPara xmlns:m="http://schemas.openxmlformats.org/officeDocument/2006/math">
                     <m:oMathParaPr>
@@ -5397,7 +5476,7 @@
             </p:txBody>
           </p:sp>
         </mc:Choice>
-        <mc:Fallback>
+        <mc:Fallback xmlns="">
           <p:sp>
             <p:nvSpPr>
               <p:cNvPr id="6" name="TextBox 5">
@@ -6294,8 +6373,8 @@
           </p:sp>
         </mc:Fallback>
       </mc:AlternateContent>
-      <mc:AlternateContent xmlns:mc="http://schemas.openxmlformats.org/markup-compatibility/2006">
-        <mc:Choice xmlns:a14="http://schemas.microsoft.com/office/drawing/2010/main" Requires="a14">
+      <mc:AlternateContent xmlns:mc="http://schemas.openxmlformats.org/markup-compatibility/2006" xmlns:a14="http://schemas.microsoft.com/office/drawing/2010/main">
+        <mc:Choice Requires="a14">
           <p:sp>
             <p:nvSpPr>
               <p:cNvPr id="8" name="Rectangle: Rounded Corners 7">
@@ -6369,7 +6448,7 @@
             </p:txBody>
           </p:sp>
         </mc:Choice>
-        <mc:Fallback>
+        <mc:Fallback xmlns="">
           <p:sp>
             <p:nvSpPr>
               <p:cNvPr id="8" name="Rectangle: Rounded Corners 7">
@@ -6755,7 +6834,7 @@
             <p:spPr/>
             <p:txBody>
               <a:bodyPr>
-                <a:normAutofit fontScale="92500" lnSpcReduction="10000"/>
+                <a:normAutofit fontScale="92500" lnSpcReduction="20000"/>
               </a:bodyPr>
               <a:lstStyle/>
               <a:p>
@@ -7174,7 +7253,7 @@
                 </a14:m>
                 <a:r>
                   <a:rPr lang="en-US" dirty="0"/>
-                  <a:t> by choosing in each state the best (aka greedy) action using </a:t>
+                  <a:t> by choosing in each state the best (aka greedy) action with respect to </a:t>
                 </a:r>
                 <a14:m>
                   <m:oMath xmlns:m="http://schemas.openxmlformats.org/officeDocument/2006/math">
@@ -7239,6 +7318,9 @@
                   <a:rPr lang="en-US" dirty="0"/>
                   <a:t>:</a:t>
                 </a:r>
+              </a:p>
+              <a:p>
+                <a:endParaRPr lang="en-US" dirty="0"/>
               </a:p>
               <a:p>
                 <a:pPr marL="0" indent="0">
@@ -7407,23 +7489,19 @@
                   <a:rPr lang="en-US" b="1" dirty="0"/>
                   <a:t>greedy policy </a:t>
                 </a:r>
-                <a:r>
-                  <a:rPr lang="en-US" dirty="0"/>
-                  <a:t>is strictly better policy </a:t>
-                </a:r>
                 <a14:m>
                   <m:oMath xmlns:m="http://schemas.openxmlformats.org/officeDocument/2006/math">
                     <m:sSup>
                       <m:sSupPr>
                         <m:ctrlPr>
-                          <a:rPr lang="en-US" b="0" i="1" smtClean="0">
+                          <a:rPr lang="en-US" i="1">
                             <a:latin typeface="Cambria Math" panose="02040503050406030204" pitchFamily="18" charset="0"/>
                           </a:rPr>
                         </m:ctrlPr>
                       </m:sSupPr>
                       <m:e>
                         <m:r>
-                          <a:rPr lang="en-US" b="0" i="1" smtClean="0">
+                          <a:rPr lang="en-US" i="1">
                             <a:latin typeface="Cambria Math" panose="02040503050406030204" pitchFamily="18" charset="0"/>
                           </a:rPr>
                           <m:t>𝜋</m:t>
@@ -7431,7 +7509,7 @@
                       </m:e>
                       <m:sup>
                         <m:r>
-                          <a:rPr lang="en-US" b="0" i="1" smtClean="0">
+                          <a:rPr lang="en-US" i="1">
                             <a:latin typeface="Cambria Math" panose="02040503050406030204" pitchFamily="18" charset="0"/>
                           </a:rPr>
                           <m:t>′</m:t>
@@ -7442,7 +7520,7 @@
                 </a14:m>
                 <a:r>
                   <a:rPr lang="en-US" dirty="0"/>
-                  <a:t>unless </a:t>
+                  <a:t> is strictly better unless </a:t>
                 </a:r>
                 <a14:m>
                   <m:oMath xmlns:m="http://schemas.openxmlformats.org/officeDocument/2006/math">
@@ -7483,7 +7561,7 @@
               <a:blipFill>
                 <a:blip r:embed="rId2"/>
                 <a:stretch>
-                  <a:fillRect l="-928" t="-2551" b="-2423"/>
+                  <a:fillRect l="-928" t="-3189" b="-2679"/>
                 </a:stretch>
               </a:blipFill>
             </p:spPr>
@@ -7516,8 +7594,8 @@
         </p:nvSpPr>
         <p:spPr>
           <a:xfrm>
-            <a:off x="779489" y="1798820"/>
-            <a:ext cx="8199619" cy="1926236"/>
+            <a:off x="800462" y="1731708"/>
+            <a:ext cx="8199619" cy="1758112"/>
           </a:xfrm>
           <a:prstGeom prst="rect">
             <a:avLst/>
@@ -7614,8 +7692,8 @@
           </a:p>
         </p:txBody>
       </p:sp>
-      <mc:AlternateContent xmlns:mc="http://schemas.openxmlformats.org/markup-compatibility/2006" xmlns:a14="http://schemas.microsoft.com/office/drawing/2010/main">
-        <mc:Choice Requires="a14">
+      <mc:AlternateContent xmlns:mc="http://schemas.openxmlformats.org/markup-compatibility/2006">
+        <mc:Choice xmlns:a14="http://schemas.microsoft.com/office/drawing/2010/main" Requires="a14">
           <p:sp>
             <p:nvSpPr>
               <p:cNvPr id="3" name="Content Placeholder 2">
@@ -7634,20 +7712,30 @@
             </p:nvSpPr>
             <p:spPr>
               <a:xfrm>
-                <a:off x="838200" y="1397331"/>
-                <a:ext cx="8771389" cy="907896"/>
+                <a:off x="838200" y="1397330"/>
+                <a:ext cx="8771389" cy="1383619"/>
               </a:xfrm>
             </p:spPr>
             <p:txBody>
               <a:bodyPr>
-                <a:normAutofit fontScale="92500" lnSpcReduction="20000"/>
+                <a:normAutofit fontScale="85000" lnSpcReduction="10000"/>
               </a:bodyPr>
               <a:lstStyle/>
               <a:p>
+                <a:pPr marL="0" indent="0">
+                  <a:buNone/>
+                </a:pPr>
+                <a:r>
+                  <a:rPr lang="en-US" b="1" dirty="0"/>
+                  <a:t>Idea</a:t>
+                </a:r>
                 <a:r>
                   <a:rPr lang="en-US" dirty="0"/>
-                  <a:t>Sequence of monotonically improving policies:</a:t>
-                </a:r>
+                  <a:t>: Create a sequence of monotonically improving policies:</a:t>
+                </a:r>
+              </a:p>
+              <a:p>
+                <a:endParaRPr lang="en-US" dirty="0"/>
               </a:p>
               <a:p>
                 <a:pPr marL="0" indent="0" algn="ctr">
@@ -7790,119 +7878,6 @@
                         </m:e>
                         <m:sub>
                           <m:r>
-                            <a:rPr lang="en-US" i="1">
-                              <a:latin typeface="Cambria Math" panose="02040503050406030204" pitchFamily="18" charset="0"/>
-                            </a:rPr>
-                            <m:t>0</m:t>
-                          </m:r>
-                        </m:sub>
-                      </m:sSub>
-                      <m:groupChr>
-                        <m:groupChrPr>
-                          <m:chr m:val="→"/>
-                          <m:vertJc m:val="bot"/>
-                          <m:ctrlPr>
-                            <a:rPr lang="en-US" i="1">
-                              <a:latin typeface="Cambria Math" panose="02040503050406030204" pitchFamily="18" charset="0"/>
-                            </a:rPr>
-                          </m:ctrlPr>
-                        </m:groupChrPr>
-                        <m:e>
-                          <m:r>
-                            <m:rPr>
-                              <m:brk m:alnAt="2"/>
-                            </m:rPr>
-                            <a:rPr lang="en-US" i="1">
-                              <a:latin typeface="Cambria Math" panose="02040503050406030204" pitchFamily="18" charset="0"/>
-                            </a:rPr>
-                            <m:t>𝐸</m:t>
-                          </m:r>
-                        </m:e>
-                      </m:groupChr>
-                      <m:sSub>
-                        <m:sSubPr>
-                          <m:ctrlPr>
-                            <a:rPr lang="en-US" i="1">
-                              <a:latin typeface="Cambria Math" panose="02040503050406030204" pitchFamily="18" charset="0"/>
-                            </a:rPr>
-                          </m:ctrlPr>
-                        </m:sSubPr>
-                        <m:e>
-                          <m:r>
-                            <a:rPr lang="en-US" i="1">
-                              <a:latin typeface="Cambria Math" panose="02040503050406030204" pitchFamily="18" charset="0"/>
-                            </a:rPr>
-                            <m:t>𝑣</m:t>
-                          </m:r>
-                        </m:e>
-                        <m:sub>
-                          <m:sSub>
-                            <m:sSubPr>
-                              <m:ctrlPr>
-                                <a:rPr lang="en-US" i="1">
-                                  <a:latin typeface="Cambria Math" panose="02040503050406030204" pitchFamily="18" charset="0"/>
-                                </a:rPr>
-                              </m:ctrlPr>
-                            </m:sSubPr>
-                            <m:e>
-                              <m:r>
-                                <a:rPr lang="en-US" i="1">
-                                  <a:latin typeface="Cambria Math" panose="02040503050406030204" pitchFamily="18" charset="0"/>
-                                </a:rPr>
-                                <m:t>𝜋</m:t>
-                              </m:r>
-                            </m:e>
-                            <m:sub>
-                              <m:r>
-                                <a:rPr lang="en-US" i="1">
-                                  <a:latin typeface="Cambria Math" panose="02040503050406030204" pitchFamily="18" charset="0"/>
-                                </a:rPr>
-                                <m:t>𝑜</m:t>
-                              </m:r>
-                            </m:sub>
-                          </m:sSub>
-                        </m:sub>
-                      </m:sSub>
-                      <m:groupChr>
-                        <m:groupChrPr>
-                          <m:chr m:val="→"/>
-                          <m:vertJc m:val="bot"/>
-                          <m:ctrlPr>
-                            <a:rPr lang="en-US" i="1">
-                              <a:latin typeface="Cambria Math" panose="02040503050406030204" pitchFamily="18" charset="0"/>
-                            </a:rPr>
-                          </m:ctrlPr>
-                        </m:groupChrPr>
-                        <m:e>
-                          <m:r>
-                            <m:rPr>
-                              <m:brk m:alnAt="2"/>
-                            </m:rPr>
-                            <a:rPr lang="en-US" i="1">
-                              <a:latin typeface="Cambria Math" panose="02040503050406030204" pitchFamily="18" charset="0"/>
-                            </a:rPr>
-                            <m:t>𝐼</m:t>
-                          </m:r>
-                        </m:e>
-                      </m:groupChr>
-                      <m:sSub>
-                        <m:sSubPr>
-                          <m:ctrlPr>
-                            <a:rPr lang="en-US" i="1">
-                              <a:latin typeface="Cambria Math" panose="02040503050406030204" pitchFamily="18" charset="0"/>
-                            </a:rPr>
-                          </m:ctrlPr>
-                        </m:sSubPr>
-                        <m:e>
-                          <m:r>
-                            <a:rPr lang="en-US" i="1">
-                              <a:latin typeface="Cambria Math" panose="02040503050406030204" pitchFamily="18" charset="0"/>
-                            </a:rPr>
-                            <m:t>𝜋</m:t>
-                          </m:r>
-                        </m:e>
-                        <m:sub>
-                          <m:r>
                             <a:rPr lang="en-US" b="0" i="1" smtClean="0">
                               <a:latin typeface="Cambria Math" panose="02040503050406030204" pitchFamily="18" charset="0"/>
                             </a:rPr>
@@ -8111,6 +8086,119 @@
                           </m:r>
                         </m:e>
                       </m:groupChr>
+                      <m:sSub>
+                        <m:sSubPr>
+                          <m:ctrlPr>
+                            <a:rPr lang="en-US" i="1">
+                              <a:latin typeface="Cambria Math" panose="02040503050406030204" pitchFamily="18" charset="0"/>
+                            </a:rPr>
+                          </m:ctrlPr>
+                        </m:sSubPr>
+                        <m:e>
+                          <m:r>
+                            <a:rPr lang="en-US" i="1">
+                              <a:latin typeface="Cambria Math" panose="02040503050406030204" pitchFamily="18" charset="0"/>
+                            </a:rPr>
+                            <m:t>𝜋</m:t>
+                          </m:r>
+                        </m:e>
+                        <m:sub>
+                          <m:r>
+                            <a:rPr lang="en-US" b="0" i="1" smtClean="0">
+                              <a:latin typeface="Cambria Math" panose="02040503050406030204" pitchFamily="18" charset="0"/>
+                            </a:rPr>
+                            <m:t>3</m:t>
+                          </m:r>
+                        </m:sub>
+                      </m:sSub>
+                      <m:groupChr>
+                        <m:groupChrPr>
+                          <m:chr m:val="→"/>
+                          <m:vertJc m:val="bot"/>
+                          <m:ctrlPr>
+                            <a:rPr lang="en-US" i="1">
+                              <a:latin typeface="Cambria Math" panose="02040503050406030204" pitchFamily="18" charset="0"/>
+                            </a:rPr>
+                          </m:ctrlPr>
+                        </m:groupChrPr>
+                        <m:e>
+                          <m:r>
+                            <m:rPr>
+                              <m:brk m:alnAt="2"/>
+                            </m:rPr>
+                            <a:rPr lang="en-US" i="1">
+                              <a:latin typeface="Cambria Math" panose="02040503050406030204" pitchFamily="18" charset="0"/>
+                            </a:rPr>
+                            <m:t>𝐸</m:t>
+                          </m:r>
+                        </m:e>
+                      </m:groupChr>
+                      <m:sSub>
+                        <m:sSubPr>
+                          <m:ctrlPr>
+                            <a:rPr lang="en-US" i="1">
+                              <a:latin typeface="Cambria Math" panose="02040503050406030204" pitchFamily="18" charset="0"/>
+                            </a:rPr>
+                          </m:ctrlPr>
+                        </m:sSubPr>
+                        <m:e>
+                          <m:r>
+                            <a:rPr lang="en-US" i="1">
+                              <a:latin typeface="Cambria Math" panose="02040503050406030204" pitchFamily="18" charset="0"/>
+                            </a:rPr>
+                            <m:t>𝑣</m:t>
+                          </m:r>
+                        </m:e>
+                        <m:sub>
+                          <m:sSub>
+                            <m:sSubPr>
+                              <m:ctrlPr>
+                                <a:rPr lang="en-US" i="1">
+                                  <a:latin typeface="Cambria Math" panose="02040503050406030204" pitchFamily="18" charset="0"/>
+                                </a:rPr>
+                              </m:ctrlPr>
+                            </m:sSubPr>
+                            <m:e>
+                              <m:r>
+                                <a:rPr lang="en-US" i="1">
+                                  <a:latin typeface="Cambria Math" panose="02040503050406030204" pitchFamily="18" charset="0"/>
+                                </a:rPr>
+                                <m:t>𝜋</m:t>
+                              </m:r>
+                            </m:e>
+                            <m:sub>
+                              <m:r>
+                                <a:rPr lang="en-US" b="0" i="1" smtClean="0">
+                                  <a:latin typeface="Cambria Math" panose="02040503050406030204" pitchFamily="18" charset="0"/>
+                                </a:rPr>
+                                <m:t>3</m:t>
+                              </m:r>
+                            </m:sub>
+                          </m:sSub>
+                        </m:sub>
+                      </m:sSub>
+                      <m:groupChr>
+                        <m:groupChrPr>
+                          <m:chr m:val="→"/>
+                          <m:vertJc m:val="bot"/>
+                          <m:ctrlPr>
+                            <a:rPr lang="en-US" i="1">
+                              <a:latin typeface="Cambria Math" panose="02040503050406030204" pitchFamily="18" charset="0"/>
+                            </a:rPr>
+                          </m:ctrlPr>
+                        </m:groupChrPr>
+                        <m:e>
+                          <m:r>
+                            <m:rPr>
+                              <m:brk m:alnAt="2"/>
+                            </m:rPr>
+                            <a:rPr lang="en-US" i="1">
+                              <a:latin typeface="Cambria Math" panose="02040503050406030204" pitchFamily="18" charset="0"/>
+                            </a:rPr>
+                            <m:t>𝐼</m:t>
+                          </m:r>
+                        </m:e>
+                      </m:groupChr>
                       <m:r>
                         <a:rPr lang="en-US" b="0" i="1" smtClean="0">
                           <a:latin typeface="Cambria Math" panose="02040503050406030204" pitchFamily="18" charset="0"/>
@@ -8197,7 +8285,7 @@
             </p:txBody>
           </p:sp>
         </mc:Choice>
-        <mc:Fallback xmlns="">
+        <mc:Fallback>
           <p:sp>
             <p:nvSpPr>
               <p:cNvPr id="3" name="Content Placeholder 2">
@@ -8216,13 +8304,13 @@
             </p:nvSpPr>
             <p:spPr>
               <a:xfrm>
-                <a:off x="838200" y="1397331"/>
-                <a:ext cx="8771389" cy="907896"/>
+                <a:off x="838200" y="1397330"/>
+                <a:ext cx="8771389" cy="1383619"/>
               </a:xfrm>
               <a:blipFill>
                 <a:blip r:embed="rId2"/>
                 <a:stretch>
-                  <a:fillRect l="-1113" t="-16779"/>
+                  <a:fillRect l="-1113" t="-7930"/>
                 </a:stretch>
               </a:blipFill>
             </p:spPr>
@@ -8257,7 +8345,7 @@
             </p:nvSpPr>
             <p:spPr>
               <a:xfrm>
-                <a:off x="9329091" y="1681237"/>
+                <a:off x="9230142" y="2098313"/>
                 <a:ext cx="2599595" cy="753924"/>
               </a:xfrm>
               <a:prstGeom prst="rect">
@@ -8391,7 +8479,7 @@
             </p:nvSpPr>
             <p:spPr>
               <a:xfrm>
-                <a:off x="9329091" y="1681237"/>
+                <a:off x="9230142" y="2098313"/>
                 <a:ext cx="2599595" cy="753924"/>
               </a:xfrm>
               <a:prstGeom prst="rect">
@@ -8400,7 +8488,7 @@
               <a:blipFill>
                 <a:blip r:embed="rId3"/>
                 <a:stretch>
-                  <a:fillRect l="-2791" b="-23016"/>
+                  <a:fillRect l="-2791" b="-22047"/>
                 </a:stretch>
               </a:blipFill>
             </p:spPr>
@@ -10104,7 +10192,7 @@
             <p:spPr>
               <a:xfrm>
                 <a:off x="846192" y="3292095"/>
-                <a:ext cx="7897536" cy="2793912"/>
+                <a:ext cx="7897536" cy="3049982"/>
               </a:xfrm>
               <a:prstGeom prst="rect">
                 <a:avLst/>
@@ -10302,7 +10390,7 @@
                 <a:pPr lvl="1"/>
                 <a:r>
                   <a:rPr lang="en-US" dirty="0"/>
-                  <a:t>MDPs have a finite number of policies </a:t>
+                  <a:t>Finite MDPs have a finite number of policies </a:t>
                 </a:r>
                 <a14:m>
                   <m:oMath xmlns:m="http://schemas.openxmlformats.org/officeDocument/2006/math">
@@ -10333,7 +10421,7 @@
                 </a:pPr>
                 <a:r>
                   <a:rPr lang="en-US" b="1" dirty="0"/>
-                  <a:t>Notes</a:t>
+                  <a:t>Advantages</a:t>
                 </a:r>
                 <a:r>
                   <a:rPr lang="en-US" dirty="0"/>
@@ -10388,14 +10476,30 @@
                 </a:r>
               </a:p>
               <a:p>
-                <a:pPr lvl="1"/>
+                <a:pPr marL="0" indent="0">
+                  <a:buNone/>
+                </a:pPr>
                 <a:r>
                   <a:rPr lang="en-US" b="1" dirty="0"/>
                   <a:t>Issue</a:t>
                 </a:r>
                 <a:r>
                   <a:rPr lang="en-US" dirty="0"/>
-                  <a:t>: Policy estimation is computationally expensive! Using fewer iterations leads to modified policy iteration.</a:t>
+                  <a:t>: </a:t>
+                </a:r>
+              </a:p>
+              <a:p>
+                <a:pPr lvl="1"/>
+                <a:r>
+                  <a:rPr lang="en-US" dirty="0"/>
+                  <a:t>Policy estimation is computationally expensive! </a:t>
+                </a:r>
+                <a:br>
+                  <a:rPr lang="en-US" dirty="0"/>
+                </a:br>
+                <a:r>
+                  <a:rPr lang="en-US" dirty="0"/>
+                  <a:t>Using fewer iterations leads to modified policy iteration.</a:t>
                 </a:r>
               </a:p>
             </p:txBody>
@@ -10419,7 +10523,7 @@
             <p:spPr>
               <a:xfrm>
                 <a:off x="846192" y="3292095"/>
-                <a:ext cx="7897536" cy="2793912"/>
+                <a:ext cx="7897536" cy="3049982"/>
               </a:xfrm>
               <a:prstGeom prst="rect">
                 <a:avLst/>
@@ -10427,7 +10531,7 @@
               <a:blipFill>
                 <a:blip r:embed="rId8"/>
                 <a:stretch>
-                  <a:fillRect l="-1236" t="-4803"/>
+                  <a:fillRect l="-1236" t="-4400" b="-200"/>
                 </a:stretch>
               </a:blipFill>
             </p:spPr>
@@ -10584,15 +10688,14 @@
             <a:pPr algn="ctr"/>
             <a:r>
               <a:rPr lang="en-US" sz="1600" dirty="0"/>
-              <a:t>Just policy evaluation from before. Can also stop this loop early (</a:t>
+              <a:t>Just policy evaluation from before. </a:t>
             </a:r>
-            <a:r>
-              <a:rPr lang="en-US" sz="1600" b="1" dirty="0"/>
-              <a:t>modified policy iteration)</a:t>
-            </a:r>
+            <a:br>
+              <a:rPr lang="en-US" sz="1600" dirty="0"/>
+            </a:br>
             <a:r>
               <a:rPr lang="en-US" sz="1600" dirty="0"/>
-              <a:t>.</a:t>
+              <a:t>We can also stop this loop early (modified policy iteration).</a:t>
             </a:r>
           </a:p>
         </p:txBody>
@@ -10826,7 +10929,7 @@
               <a:p>
                 <a:r>
                   <a:rPr lang="en-US" sz="2400" dirty="0"/>
-                  <a:t>Combines the policy improvement and truncated policy evaluation steps. This is called the </a:t>
+                  <a:t>Combines policy improvement and truncated policy evaluation into a single step. This is called the </a:t>
                 </a:r>
                 <a:r>
                   <a:rPr lang="en-US" sz="2400" b="1" dirty="0"/>
@@ -11965,7 +12068,7 @@
               <a:blipFill>
                 <a:blip r:embed="rId2"/>
                 <a:stretch>
-                  <a:fillRect l="-687" t="-1665"/>
+                  <a:fillRect l="-687" t="-1665" r="-611"/>
                 </a:stretch>
               </a:blipFill>
             </p:spPr>
@@ -13969,8 +14072,8 @@
           </mc:Fallback>
         </mc:AlternateContent>
       </p:grpSp>
-      <mc:AlternateContent xmlns:mc="http://schemas.openxmlformats.org/markup-compatibility/2006">
-        <mc:Choice xmlns:a14="http://schemas.microsoft.com/office/drawing/2010/main" Requires="a14">
+      <mc:AlternateContent xmlns:mc="http://schemas.openxmlformats.org/markup-compatibility/2006" xmlns:a14="http://schemas.microsoft.com/office/drawing/2010/main">
+        <mc:Choice Requires="a14">
           <p:sp>
             <p:nvSpPr>
               <p:cNvPr id="18" name="TextBox 17">
@@ -14081,7 +14184,7 @@
             </p:txBody>
           </p:sp>
         </mc:Choice>
-        <mc:Fallback>
+        <mc:Fallback xmlns="">
           <p:sp>
             <p:nvSpPr>
               <p:cNvPr id="18" name="TextBox 17">
@@ -15057,6 +15160,7 @@
                 <a:endParaRPr lang="en-US" dirty="0"/>
               </a:p>
               <a:p>
+                <a:pPr lvl="1"/>
                 <a:r>
                   <a:rPr lang="en-US" dirty="0"/>
                   <a:t>Tabular method: stores the complete value function as table </a:t>
@@ -15089,12 +15193,14 @@
                 </a:r>
               </a:p>
               <a:p>
+                <a:pPr lvl="1"/>
                 <a:r>
                   <a:rPr lang="en-US" dirty="0"/>
                   <a:t>Updates repeatedly sweep over the whole state space.</a:t>
                 </a:r>
               </a:p>
               <a:p>
+                <a:pPr lvl="1"/>
                 <a:r>
                   <a:rPr lang="en-US" dirty="0"/>
                   <a:t>Wastes computation by updating states that are not relevant for the optimal behavior. I.e., the optimal policy will never visit them.</a:t>
@@ -15222,7 +15328,7 @@
             <p:spPr>
               <a:xfrm>
                 <a:off x="822819" y="3658891"/>
-                <a:ext cx="5273179" cy="2234522"/>
+                <a:ext cx="5273179" cy="1902124"/>
               </a:xfrm>
             </p:spPr>
             <p:style>
@@ -16183,183 +16289,6 @@
                   </a:solidFill>
                 </a:endParaRPr>
               </a:p>
-              <a:p>
-                <a:pPr marL="0" indent="0">
-                  <a:spcBef>
-                    <a:spcPts val="0"/>
-                  </a:spcBef>
-                  <a:buNone/>
-                </a:pPr>
-                <a14:m>
-                  <m:oMath xmlns:m="http://schemas.openxmlformats.org/officeDocument/2006/math">
-                    <m:sSub>
-                      <m:sSubPr>
-                        <m:ctrlPr>
-                          <a:rPr lang="en-US" sz="1200" i="1" dirty="0">
-                            <a:solidFill>
-                              <a:schemeClr val="tx1"/>
-                            </a:solidFill>
-                            <a:latin typeface="Cambria Math" panose="02040503050406030204" pitchFamily="18" charset="0"/>
-                          </a:rPr>
-                        </m:ctrlPr>
-                      </m:sSubPr>
-                      <m:e>
-                        <m:acc>
-                          <m:accPr>
-                            <m:chr m:val="̅"/>
-                            <m:ctrlPr>
-                              <a:rPr lang="en-US" sz="1200" i="1" dirty="0">
-                                <a:solidFill>
-                                  <a:schemeClr val="tx1"/>
-                                </a:solidFill>
-                                <a:latin typeface="Cambria Math" panose="02040503050406030204" pitchFamily="18" charset="0"/>
-                              </a:rPr>
-                            </m:ctrlPr>
-                          </m:accPr>
-                          <m:e>
-                            <m:r>
-                              <a:rPr lang="en-US" sz="1200" i="1" dirty="0">
-                                <a:solidFill>
-                                  <a:schemeClr val="tx1"/>
-                                </a:solidFill>
-                                <a:latin typeface="Cambria Math" panose="02040503050406030204" pitchFamily="18" charset="0"/>
-                              </a:rPr>
-                              <m:t>𝑉</m:t>
-                            </m:r>
-                          </m:e>
-                        </m:acc>
-                      </m:e>
-                      <m:sub>
-                        <m:r>
-                          <a:rPr lang="en-US" sz="1200" i="1" dirty="0">
-                            <a:solidFill>
-                              <a:schemeClr val="tx1"/>
-                            </a:solidFill>
-                            <a:latin typeface="Cambria Math" panose="02040503050406030204" pitchFamily="18" charset="0"/>
-                          </a:rPr>
-                          <m:t>𝑡</m:t>
-                        </m:r>
-                      </m:sub>
-                    </m:sSub>
-                    <m:r>
-                      <a:rPr lang="en-US" sz="1200" i="1" dirty="0">
-                        <a:solidFill>
-                          <a:schemeClr val="tx1"/>
-                        </a:solidFill>
-                        <a:latin typeface="Cambria Math" panose="02040503050406030204" pitchFamily="18" charset="0"/>
-                      </a:rPr>
-                      <m:t>(</m:t>
-                    </m:r>
-                    <m:r>
-                      <a:rPr lang="en-US" sz="1200" i="1" dirty="0">
-                        <a:solidFill>
-                          <a:schemeClr val="tx1"/>
-                        </a:solidFill>
-                        <a:latin typeface="Cambria Math" panose="02040503050406030204" pitchFamily="18" charset="0"/>
-                      </a:rPr>
-                      <m:t>𝑠</m:t>
-                    </m:r>
-                    <m:r>
-                      <a:rPr lang="en-US" sz="1200" i="1" dirty="0">
-                        <a:solidFill>
-                          <a:schemeClr val="tx1"/>
-                        </a:solidFill>
-                        <a:latin typeface="Cambria Math" panose="02040503050406030204" pitchFamily="18" charset="0"/>
-                      </a:rPr>
-                      <m:t>) </m:t>
-                    </m:r>
-                  </m:oMath>
-                </a14:m>
-                <a:r>
-                  <a:rPr lang="en-US" sz="1200" dirty="0">
-                    <a:solidFill>
-                      <a:schemeClr val="tx1"/>
-                    </a:solidFill>
-                  </a:rPr>
-                  <a:t>	expected approximate action value</a:t>
-                </a:r>
-              </a:p>
-              <a:p>
-                <a:pPr marL="0" indent="0">
-                  <a:spcBef>
-                    <a:spcPts val="0"/>
-                  </a:spcBef>
-                  <a:buNone/>
-                </a:pPr>
-                <a14:m>
-                  <m:oMath xmlns:m="http://schemas.openxmlformats.org/officeDocument/2006/math">
-                    <m:sSub>
-                      <m:sSubPr>
-                        <m:ctrlPr>
-                          <a:rPr lang="en-US" sz="1200" i="1" dirty="0">
-                            <a:solidFill>
-                              <a:schemeClr val="tx1"/>
-                            </a:solidFill>
-                            <a:latin typeface="Cambria Math" panose="02040503050406030204" pitchFamily="18" charset="0"/>
-                          </a:rPr>
-                        </m:ctrlPr>
-                      </m:sSubPr>
-                      <m:e>
-                        <m:r>
-                          <a:rPr lang="en-US" sz="1200" i="1" dirty="0">
-                            <a:solidFill>
-                              <a:schemeClr val="tx1"/>
-                            </a:solidFill>
-                            <a:latin typeface="Cambria Math" panose="02040503050406030204" pitchFamily="18" charset="0"/>
-                          </a:rPr>
-                          <m:t>𝑈</m:t>
-                        </m:r>
-                      </m:e>
-                      <m:sub>
-                        <m:r>
-                          <a:rPr lang="en-US" sz="1200" i="1" dirty="0">
-                            <a:solidFill>
-                              <a:schemeClr val="tx1"/>
-                            </a:solidFill>
-                            <a:latin typeface="Cambria Math" panose="02040503050406030204" pitchFamily="18" charset="0"/>
-                          </a:rPr>
-                          <m:t>𝑡</m:t>
-                        </m:r>
-                      </m:sub>
-                    </m:sSub>
-                  </m:oMath>
-                </a14:m>
-                <a:r>
-                  <a:rPr lang="en-US" sz="1200" dirty="0">
-                    <a:solidFill>
-                      <a:schemeClr val="tx1"/>
-                    </a:solidFill>
-                  </a:rPr>
-                  <a:t>	target for estimate at time</a:t>
-                </a:r>
-                <a14:m>
-                  <m:oMath xmlns:m="http://schemas.openxmlformats.org/officeDocument/2006/math">
-                    <m:r>
-                      <a:rPr lang="en-US" sz="1200" i="1" dirty="0">
-                        <a:solidFill>
-                          <a:schemeClr val="tx1"/>
-                        </a:solidFill>
-                        <a:latin typeface="Cambria Math" panose="02040503050406030204" pitchFamily="18" charset="0"/>
-                      </a:rPr>
-                      <m:t> </m:t>
-                    </m:r>
-                    <m:r>
-                      <a:rPr lang="en-US" sz="1200" i="1" dirty="0">
-                        <a:solidFill>
-                          <a:schemeClr val="tx1"/>
-                        </a:solidFill>
-                        <a:latin typeface="Cambria Math" panose="02040503050406030204" pitchFamily="18" charset="0"/>
-                      </a:rPr>
-                      <m:t>𝑡</m:t>
-                    </m:r>
-                  </m:oMath>
-                </a14:m>
-                <a:endParaRPr lang="en-US" sz="1200" dirty="0">
-                  <a:solidFill>
-                    <a:schemeClr val="tx1"/>
-                  </a:solidFill>
-                </a:endParaRPr>
-              </a:p>
             </p:txBody>
           </p:sp>
         </mc:Choice>
@@ -16383,12 +16312,12 @@
             <p:spPr>
               <a:xfrm>
                 <a:off x="822819" y="3658891"/>
-                <a:ext cx="5273179" cy="2234522"/>
+                <a:ext cx="5273179" cy="1902124"/>
               </a:xfrm>
               <a:blipFill>
                 <a:blip r:embed="rId2"/>
                 <a:stretch>
-                  <a:fillRect b="-541"/>
+                  <a:fillRect b="-952"/>
                 </a:stretch>
               </a:blipFill>
             </p:spPr>
@@ -18614,8 +18543,8 @@
           </a:p>
         </p:txBody>
       </p:sp>
-      <mc:AlternateContent xmlns:mc="http://schemas.openxmlformats.org/markup-compatibility/2006" xmlns:a14="http://schemas.microsoft.com/office/drawing/2010/main">
-        <mc:Choice Requires="a14">
+      <mc:AlternateContent xmlns:mc="http://schemas.openxmlformats.org/markup-compatibility/2006">
+        <mc:Choice xmlns:a14="http://schemas.microsoft.com/office/drawing/2010/main" Requires="a14">
           <p:sp>
             <p:nvSpPr>
               <p:cNvPr id="3" name="Content Placeholder 2">
@@ -18640,7 +18569,7 @@
             </p:spPr>
             <p:txBody>
               <a:bodyPr>
-                <a:normAutofit fontScale="62500" lnSpcReduction="20000"/>
+                <a:normAutofit fontScale="70000" lnSpcReduction="20000"/>
               </a:bodyPr>
               <a:lstStyle/>
               <a:p>
@@ -18659,6 +18588,7 @@
                 </a:r>
               </a:p>
               <a:p>
+                <a:pPr lvl="1"/>
                 <a:r>
                   <a:rPr lang="en-US" b="1" dirty="0"/>
                   <a:t>Policy evaluation</a:t>
@@ -18683,6 +18613,7 @@
                 </a:r>
               </a:p>
               <a:p>
+                <a:pPr lvl="1"/>
                 <a:r>
                   <a:rPr lang="en-US" b="1" dirty="0"/>
                   <a:t>Policy improvement</a:t>
@@ -18722,13 +18653,14 @@
                 </a:r>
               </a:p>
               <a:p>
+                <a:pPr lvl="1"/>
                 <a:r>
                   <a:rPr lang="en-US" b="1" dirty="0"/>
                   <a:t>Policy iteration</a:t>
                 </a:r>
                 <a:r>
                   <a:rPr lang="en-US" dirty="0"/>
-                  <a:t>: each eval and improvement step is completed (by a sweep over </a:t>
+                  <a:t>: each evaluation and improvement step is completed (by a sweep over </a:t>
                 </a:r>
                 <a14:m>
                   <m:oMath xmlns:m="http://schemas.openxmlformats.org/officeDocument/2006/math">
@@ -18747,16 +18679,18 @@
                 </a:r>
               </a:p>
               <a:p>
+                <a:pPr lvl="1"/>
                 <a:r>
                   <a:rPr lang="en-US" b="1" dirty="0"/>
                   <a:t>Value iteration</a:t>
                 </a:r>
                 <a:r>
                   <a:rPr lang="en-US" dirty="0"/>
-                  <a:t>: uses a single iteration for the policy iteration.</a:t>
+                  <a:t>: uses a single iteration for the policy evaluation step.</a:t>
                 </a:r>
               </a:p>
               <a:p>
+                <a:pPr lvl="1"/>
                 <a:r>
                   <a:rPr lang="en-US" b="1" dirty="0"/>
                   <a:t>Asynchronous DP</a:t>
@@ -18778,7 +18712,7 @@
                 </a14:m>
                 <a:r>
                   <a:rPr lang="en-US" dirty="0"/>
-                  <a:t>, updates states in some other order. This interleaves pol. eval. and pol. Improvement. </a:t>
+                  <a:t>, updates states in some other order (e.g., focus on states where the value function changed a lot in the last step). This interleaves pol. eval. and pol. Improvement. </a:t>
                 </a:r>
               </a:p>
               <a:p>
@@ -18799,7 +18733,7 @@
             </p:txBody>
           </p:sp>
         </mc:Choice>
-        <mc:Fallback xmlns="">
+        <mc:Fallback>
           <p:sp>
             <p:nvSpPr>
               <p:cNvPr id="3" name="Content Placeholder 2">
@@ -18824,7 +18758,7 @@
               <a:blipFill>
                 <a:blip r:embed="rId2"/>
                 <a:stretch>
-                  <a:fillRect l="-759" r="-844"/>
+                  <a:fillRect l="-928" r="-675"/>
                 </a:stretch>
               </a:blipFill>
             </p:spPr>
@@ -18962,8 +18896,8 @@
           </a:p>
         </p:txBody>
       </p:sp>
-      <mc:AlternateContent xmlns:mc="http://schemas.openxmlformats.org/markup-compatibility/2006" xmlns:a14="http://schemas.microsoft.com/office/drawing/2010/main">
-        <mc:Choice Requires="a14">
+      <mc:AlternateContent xmlns:mc="http://schemas.openxmlformats.org/markup-compatibility/2006">
+        <mc:Choice xmlns:a14="http://schemas.microsoft.com/office/drawing/2010/main" Requires="a14">
           <p:sp>
             <p:nvSpPr>
               <p:cNvPr id="3" name="Content Placeholder 2">
@@ -19019,27 +18953,26 @@
                         </m:ctrlPr>
                       </m:sSupPr>
                       <m:e>
-                        <m:d>
-                          <m:dPr>
-                            <m:begChr m:val="|"/>
-                            <m:endChr m:val="|"/>
-                            <m:ctrlPr>
-                              <a:rPr lang="en-US" i="1">
-                                <a:latin typeface="Cambria Math" panose="02040503050406030204" pitchFamily="18" charset="0"/>
-                                <a:ea typeface="Cambria Math" panose="02040503050406030204" pitchFamily="18" charset="0"/>
-                              </a:rPr>
-                            </m:ctrlPr>
-                          </m:dPr>
-                          <m:e>
-                            <m:r>
-                              <a:rPr lang="en-US" b="0" i="1" smtClean="0">
-                                <a:latin typeface="Cambria Math" panose="02040503050406030204" pitchFamily="18" charset="0"/>
-                                <a:ea typeface="Cambria Math" panose="02040503050406030204" pitchFamily="18" charset="0"/>
-                              </a:rPr>
-                              <m:t>𝐴</m:t>
-                            </m:r>
-                          </m:e>
-                        </m:d>
+                        <m:r>
+                          <a:rPr lang="en-US" i="1">
+                            <a:latin typeface="Cambria Math" panose="02040503050406030204" pitchFamily="18" charset="0"/>
+                          </a:rPr>
+                          <m:t>|</m:t>
+                        </m:r>
+                        <m:r>
+                          <a:rPr lang="en-US" i="1">
+                            <a:latin typeface="Cambria Math" panose="02040503050406030204" pitchFamily="18" charset="0"/>
+                            <a:ea typeface="Cambria Math" panose="02040503050406030204" pitchFamily="18" charset="0"/>
+                          </a:rPr>
+                          <m:t>𝒜</m:t>
+                        </m:r>
+                        <m:r>
+                          <a:rPr lang="en-US" i="1">
+                            <a:latin typeface="Cambria Math" panose="02040503050406030204" pitchFamily="18" charset="0"/>
+                            <a:ea typeface="Cambria Math" panose="02040503050406030204" pitchFamily="18" charset="0"/>
+                          </a:rPr>
+                          <m:t>|</m:t>
+                        </m:r>
                       </m:e>
                       <m:sup>
                         <m:d>
@@ -19109,40 +19042,16 @@
                         </m:r>
                       </m:e>
                     </m:d>
-                  </m:oMath>
-                </a14:m>
-                <a:r>
-                  <a:rPr lang="en-US" dirty="0"/>
-                  <a:t>  and actions </a:t>
-                </a:r>
-                <a14:m>
-                  <m:oMath xmlns:m="http://schemas.openxmlformats.org/officeDocument/2006/math">
                     <m:r>
-                      <a:rPr lang="en-US" i="1">
-                        <a:latin typeface="Cambria Math" panose="02040503050406030204" pitchFamily="18" charset="0"/>
-                      </a:rPr>
-                      <m:t>|</m:t>
-                    </m:r>
-                    <m:r>
-                      <a:rPr lang="en-US" i="1">
+                      <a:rPr lang="en-US" b="0" i="1" smtClean="0">
                         <a:latin typeface="Cambria Math" panose="02040503050406030204" pitchFamily="18" charset="0"/>
                         <a:ea typeface="Cambria Math" panose="02040503050406030204" pitchFamily="18" charset="0"/>
                       </a:rPr>
-                      <m:t>𝒜</m:t>
-                    </m:r>
-                    <m:r>
-                      <a:rPr lang="en-US" i="1">
-                        <a:latin typeface="Cambria Math" panose="02040503050406030204" pitchFamily="18" charset="0"/>
-                        <a:ea typeface="Cambria Math" panose="02040503050406030204" pitchFamily="18" charset="0"/>
-                      </a:rPr>
-                      <m:t>|</m:t>
+                      <m:t>.</m:t>
                     </m:r>
                   </m:oMath>
                 </a14:m>
-                <a:r>
-                  <a:rPr lang="en-US" dirty="0"/>
-                  <a:t>. </a:t>
-                </a:r>
+                <a:endParaRPr lang="en-US" dirty="0"/>
               </a:p>
               <a:p>
                 <a:endParaRPr lang="en-US" dirty="0"/>
@@ -19443,7 +19352,7 @@
                 </a:r>
                 <a:r>
                   <a:rPr lang="en-US" b="1" dirty="0"/>
-                  <a:t>polynomial</a:t>
+                  <a:t>quadratic</a:t>
                 </a:r>
                 <a:r>
                   <a:rPr lang="en-US" dirty="0"/>
@@ -19476,34 +19385,6 @@
                 </a14:m>
                 <a:r>
                   <a:rPr lang="en-US" dirty="0"/>
-                  <a:t> and </a:t>
-                </a:r>
-                <a14:m>
-                  <m:oMath xmlns:m="http://schemas.openxmlformats.org/officeDocument/2006/math">
-                    <m:r>
-                      <a:rPr lang="en-US" b="0" i="1" smtClean="0">
-                        <a:latin typeface="Cambria Math" panose="02040503050406030204" pitchFamily="18" charset="0"/>
-                      </a:rPr>
-                      <m:t>|</m:t>
-                    </m:r>
-                    <m:r>
-                      <a:rPr lang="en-US" b="0" i="1" smtClean="0">
-                        <a:latin typeface="Cambria Math" panose="02040503050406030204" pitchFamily="18" charset="0"/>
-                        <a:ea typeface="Cambria Math" panose="02040503050406030204" pitchFamily="18" charset="0"/>
-                      </a:rPr>
-                      <m:t>𝒜</m:t>
-                    </m:r>
-                    <m:r>
-                      <a:rPr lang="en-US" b="0" i="1" smtClean="0">
-                        <a:latin typeface="Cambria Math" panose="02040503050406030204" pitchFamily="18" charset="0"/>
-                        <a:ea typeface="Cambria Math" panose="02040503050406030204" pitchFamily="18" charset="0"/>
-                      </a:rPr>
-                      <m:t>|</m:t>
-                    </m:r>
-                  </m:oMath>
-                </a14:m>
-                <a:r>
-                  <a:rPr lang="en-US" dirty="0"/>
                   <a:t>.</a:t>
                 </a:r>
               </a:p>
@@ -19519,7 +19400,7 @@
                 </a:pPr>
                 <a:r>
                   <a:rPr lang="en-US" dirty="0"/>
-                  <a:t>Search and LP are impractical. </a:t>
+                  <a:t>Search and LP are impractical. The number of actions is typically relatively small. </a:t>
                 </a:r>
                 <a:r>
                   <a:rPr lang="en-US" b="1" dirty="0"/>
@@ -19529,7 +19410,7 @@
             </p:txBody>
           </p:sp>
         </mc:Choice>
-        <mc:Fallback xmlns="">
+        <mc:Fallback>
           <p:sp>
             <p:nvSpPr>
               <p:cNvPr id="3" name="Content Placeholder 2">
@@ -19759,8 +19640,8 @@
           </a:extLst>
         </p:spPr>
       </p:pic>
-      <mc:AlternateContent xmlns:mc="http://schemas.openxmlformats.org/markup-compatibility/2006">
-        <mc:Choice xmlns:a14="http://schemas.microsoft.com/office/drawing/2010/main" Requires="a14">
+      <mc:AlternateContent xmlns:mc="http://schemas.openxmlformats.org/markup-compatibility/2006" xmlns:a14="http://schemas.microsoft.com/office/drawing/2010/main">
+        <mc:Choice Requires="a14">
           <p:sp>
             <p:nvSpPr>
               <p:cNvPr id="3" name="Content Placeholder 2">
@@ -20037,7 +19918,7 @@
             </p:txBody>
           </p:sp>
         </mc:Choice>
-        <mc:Fallback>
+        <mc:Fallback xmlns="">
           <p:sp>
             <p:nvSpPr>
               <p:cNvPr id="3" name="Content Placeholder 2">
@@ -20159,13 +20040,13 @@
             </p:nvSpPr>
             <p:spPr>
               <a:xfrm>
-                <a:off x="838200" y="1397330"/>
-                <a:ext cx="8403522" cy="4779633"/>
+                <a:off x="838200" y="1170264"/>
+                <a:ext cx="8403522" cy="5006699"/>
               </a:xfrm>
             </p:spPr>
             <p:txBody>
               <a:bodyPr>
-                <a:noAutofit/>
+                <a:normAutofit lnSpcReduction="10000"/>
               </a:bodyPr>
               <a:lstStyle/>
               <a:p>
@@ -20196,57 +20077,141 @@
                     <m:sSub>
                       <m:sSubPr>
                         <m:ctrlPr>
-                          <a:rPr lang="en-US" sz="1500" b="1" i="1" smtClean="0">
+                          <a:rPr lang="en-US" sz="1500" i="1" smtClean="0">
                             <a:latin typeface="Cambria Math" panose="02040503050406030204" pitchFamily="18" charset="0"/>
                           </a:rPr>
                         </m:ctrlPr>
                       </m:sSubPr>
                       <m:e>
                         <m:r>
-                          <a:rPr lang="en-US" sz="1500" b="1" i="1" smtClean="0">
+                          <a:rPr lang="en-US" sz="1500" b="0" i="1" smtClean="0">
                             <a:latin typeface="Cambria Math" panose="02040503050406030204" pitchFamily="18" charset="0"/>
                           </a:rPr>
-                          <m:t>𝝅</m:t>
+                          <m:t>𝜋</m:t>
                         </m:r>
                       </m:e>
                       <m:sub>
                         <m:r>
-                          <a:rPr lang="en-US" sz="1500" b="1" i="1" smtClean="0">
+                          <a:rPr lang="en-US" sz="1500" b="0" i="1" smtClean="0">
                             <a:latin typeface="Cambria Math" panose="02040503050406030204" pitchFamily="18" charset="0"/>
                           </a:rPr>
                           <m:t>∗</m:t>
                         </m:r>
                       </m:sub>
                     </m:sSub>
+                    <m:r>
+                      <a:rPr lang="en-US" sz="1500" b="1" i="1" smtClean="0">
+                        <a:latin typeface="Cambria Math" panose="02040503050406030204" pitchFamily="18" charset="0"/>
+                      </a:rPr>
+                      <m:t>=</m:t>
+                    </m:r>
+                    <m:func>
+                      <m:funcPr>
+                        <m:ctrlPr>
+                          <a:rPr lang="en-US" sz="1600" i="1">
+                            <a:latin typeface="Cambria Math" panose="02040503050406030204" pitchFamily="18" charset="0"/>
+                          </a:rPr>
+                        </m:ctrlPr>
+                      </m:funcPr>
+                      <m:fName>
+                        <m:limLow>
+                          <m:limLowPr>
+                            <m:ctrlPr>
+                              <a:rPr lang="en-US" sz="1600" i="1">
+                                <a:latin typeface="Cambria Math" panose="02040503050406030204" pitchFamily="18" charset="0"/>
+                              </a:rPr>
+                            </m:ctrlPr>
+                          </m:limLowPr>
+                          <m:e>
+                            <m:r>
+                              <m:rPr>
+                                <m:sty m:val="p"/>
+                              </m:rPr>
+                              <a:rPr lang="en-US" sz="1600">
+                                <a:latin typeface="Cambria Math" panose="02040503050406030204" pitchFamily="18" charset="0"/>
+                              </a:rPr>
+                              <m:t>argmax</m:t>
+                            </m:r>
+                          </m:e>
+                          <m:lim>
+                            <m:r>
+                              <a:rPr lang="en-US" sz="1600" i="1">
+                                <a:latin typeface="Cambria Math" panose="02040503050406030204" pitchFamily="18" charset="0"/>
+                              </a:rPr>
+                              <m:t>𝑎</m:t>
+                            </m:r>
+                          </m:lim>
+                        </m:limLow>
+                      </m:fName>
+                      <m:e>
+                        <m:sSub>
+                          <m:sSubPr>
+                            <m:ctrlPr>
+                              <a:rPr lang="en-US" sz="1600" i="1">
+                                <a:latin typeface="Cambria Math" panose="02040503050406030204" pitchFamily="18" charset="0"/>
+                              </a:rPr>
+                            </m:ctrlPr>
+                          </m:sSubPr>
+                          <m:e>
+                            <m:r>
+                              <a:rPr lang="en-US" sz="1600" i="1">
+                                <a:latin typeface="Cambria Math" panose="02040503050406030204" pitchFamily="18" charset="0"/>
+                              </a:rPr>
+                              <m:t>𝑞</m:t>
+                            </m:r>
+                          </m:e>
+                          <m:sub>
+                            <m:r>
+                              <a:rPr lang="en-US" sz="1600" b="0" i="1" smtClean="0">
+                                <a:latin typeface="Cambria Math" panose="02040503050406030204" pitchFamily="18" charset="0"/>
+                              </a:rPr>
+                              <m:t>∗</m:t>
+                            </m:r>
+                          </m:sub>
+                        </m:sSub>
+                        <m:r>
+                          <a:rPr lang="en-US" sz="1600" i="1">
+                            <a:latin typeface="Cambria Math" panose="02040503050406030204" pitchFamily="18" charset="0"/>
+                          </a:rPr>
+                          <m:t>(</m:t>
+                        </m:r>
+                        <m:r>
+                          <a:rPr lang="en-US" sz="1600" i="1">
+                            <a:latin typeface="Cambria Math" panose="02040503050406030204" pitchFamily="18" charset="0"/>
+                          </a:rPr>
+                          <m:t>𝑠</m:t>
+                        </m:r>
+                        <m:r>
+                          <a:rPr lang="en-US" sz="1600" i="1">
+                            <a:latin typeface="Cambria Math" panose="02040503050406030204" pitchFamily="18" charset="0"/>
+                          </a:rPr>
+                          <m:t>,</m:t>
+                        </m:r>
+                        <m:r>
+                          <a:rPr lang="en-US" sz="1600" i="1">
+                            <a:latin typeface="Cambria Math" panose="02040503050406030204" pitchFamily="18" charset="0"/>
+                          </a:rPr>
+                          <m:t>𝑎</m:t>
+                        </m:r>
+                        <m:r>
+                          <a:rPr lang="en-US" sz="1600" i="1">
+                            <a:latin typeface="Cambria Math" panose="02040503050406030204" pitchFamily="18" charset="0"/>
+                          </a:rPr>
+                          <m:t>)</m:t>
+                        </m:r>
+                      </m:e>
+                    </m:func>
                   </m:oMath>
                 </a14:m>
                 <a:r>
-                  <a:rPr lang="en-US" sz="1500" b="1" dirty="0"/>
-                  <a:t> </a:t>
-                </a:r>
-                <a:r>
                   <a:rPr lang="en-US" sz="1500" dirty="0"/>
-                  <a:t>given a perfect finite MDP model.</a:t>
+                  <a:t> given a perfect finite MDP model.</a:t>
                 </a:r>
               </a:p>
               <a:p>
                 <a:r>
                   <a:rPr lang="en-US" sz="1500" dirty="0"/>
-                  <a:t>Bellman optimality equations pick the best action </a:t>
-                </a:r>
-                <a14:m>
-                  <m:oMath xmlns:m="http://schemas.openxmlformats.org/officeDocument/2006/math">
-                    <m:r>
-                      <a:rPr lang="en-US" sz="1500" b="0" i="1" smtClean="0">
-                        <a:latin typeface="Cambria Math" panose="02040503050406030204" pitchFamily="18" charset="0"/>
-                      </a:rPr>
-                      <m:t>𝑎</m:t>
-                    </m:r>
-                  </m:oMath>
-                </a14:m>
-                <a:r>
-                  <a:rPr lang="en-US" sz="1500" dirty="0"/>
-                  <a:t>:</a:t>
+                  <a:t>Solve the Bellman optimality equations (the optimal policy always picks the best action):</a:t>
                 </a:r>
               </a:p>
               <a:p>
@@ -21565,13 +21530,13 @@
             </p:nvSpPr>
             <p:spPr>
               <a:xfrm>
-                <a:off x="838200" y="1397330"/>
-                <a:ext cx="8403522" cy="4779633"/>
+                <a:off x="838200" y="1170264"/>
+                <a:ext cx="8403522" cy="5006699"/>
               </a:xfrm>
               <a:blipFill>
                 <a:blip r:embed="rId2"/>
                 <a:stretch>
-                  <a:fillRect l="-218" t="-638" b="-3954"/>
+                  <a:fillRect l="-218" t="-853" r="-435"/>
                 </a:stretch>
               </a:blipFill>
             </p:spPr>
@@ -21604,7 +21569,7 @@
         </p:nvGrpSpPr>
         <p:grpSpPr>
           <a:xfrm>
-            <a:off x="5952243" y="3618978"/>
+            <a:off x="4924608" y="3522501"/>
             <a:ext cx="1265236" cy="517988"/>
             <a:chOff x="2533296" y="3175233"/>
             <a:chExt cx="1503726" cy="517988"/>
@@ -21654,8 +21619,8 @@
             </a:p>
           </p:txBody>
         </p:sp>
-        <mc:AlternateContent xmlns:mc="http://schemas.openxmlformats.org/markup-compatibility/2006">
-          <mc:Choice xmlns:a14="http://schemas.microsoft.com/office/drawing/2010/main" Requires="a14">
+        <mc:AlternateContent xmlns:mc="http://schemas.openxmlformats.org/markup-compatibility/2006" xmlns:a14="http://schemas.microsoft.com/office/drawing/2010/main">
+          <mc:Choice Requires="a14">
             <p:sp>
               <p:nvSpPr>
                 <p:cNvPr id="6" name="TextBox 5">
@@ -21773,7 +21738,7 @@
               </p:txBody>
             </p:sp>
           </mc:Choice>
-          <mc:Fallback>
+          <mc:Fallback xmlns="">
             <p:sp>
               <p:nvSpPr>
                 <p:cNvPr id="6" name="TextBox 5">
@@ -21952,7 +21917,7 @@
         </p:nvGrpSpPr>
         <p:grpSpPr>
           <a:xfrm>
-            <a:off x="9283600" y="5193234"/>
+            <a:off x="9283600" y="5079986"/>
             <a:ext cx="2717168" cy="1228272"/>
             <a:chOff x="9283602" y="5193234"/>
             <a:chExt cx="2728862" cy="1228272"/>
@@ -22047,11 +22012,15 @@
             <a:p>
               <a:r>
                 <a:rPr lang="en-US" sz="1600" b="1" dirty="0"/>
-                <a:t>Evaluation/Prediction</a:t>
+                <a:t>Prediction/</a:t>
+              </a:r>
+              <a:r>
+                <a:rPr lang="en-US" sz="1600" b="1" dirty="0" err="1"/>
+                <a:t>Evaluaiton</a:t>
               </a:r>
               <a:r>
                 <a:rPr lang="en-US" sz="1600" dirty="0"/>
-                <a:t>: Estimate the value function for a policy</a:t>
+                <a:t>: Estimate the value function for a policy.</a:t>
               </a:r>
             </a:p>
           </p:txBody>
@@ -22136,12 +22105,12 @@
             <p:spPr>
               <a:xfrm>
                 <a:off x="838200" y="1397330"/>
-                <a:ext cx="6763186" cy="4221693"/>
+                <a:ext cx="6763186" cy="4986692"/>
               </a:xfrm>
             </p:spPr>
             <p:txBody>
               <a:bodyPr>
-                <a:normAutofit fontScale="77500" lnSpcReduction="20000"/>
+                <a:normAutofit fontScale="70000" lnSpcReduction="20000"/>
               </a:bodyPr>
               <a:lstStyle/>
               <a:p>
@@ -22209,7 +22178,13 @@
               <a:p>
                 <a:r>
                   <a:rPr lang="en-US" dirty="0"/>
-                  <a:t>Tabular methods can often find the exact solution (i.e., optimal value function and policy).</a:t>
+                  <a:t>Important property: Entries in the table do not influence each other. We can change them independently.</a:t>
+                </a:r>
+              </a:p>
+              <a:p>
+                <a:r>
+                  <a:rPr lang="en-US" dirty="0"/>
+                  <a:t>Tabular methods find the exact solution (i.e., optimal value function and policy) given enough memory and time.</a:t>
                 </a:r>
               </a:p>
               <a:p>
@@ -22218,15 +22193,22 @@
               <a:p>
                 <a:r>
                   <a:rPr lang="en-US" b="1" dirty="0"/>
-                  <a:t>Issue</a:t>
+                  <a:t>Issues</a:t>
                 </a:r>
                 <a:r>
                   <a:rPr lang="en-US" dirty="0"/>
-                  <a:t>: Table size:</a:t>
+                  <a:t>: </a:t>
                 </a:r>
               </a:p>
               <a:p>
                 <a:pPr lvl="1"/>
+                <a:r>
+                  <a:rPr lang="en-US" dirty="0"/>
+                  <a:t>Table size:</a:t>
+                </a:r>
+              </a:p>
+              <a:p>
+                <a:pPr lvl="2"/>
                 <a14:m>
                   <m:oMath xmlns:m="http://schemas.openxmlformats.org/officeDocument/2006/math">
                     <m:r>
@@ -22272,7 +22254,7 @@
                 </a:r>
               </a:p>
               <a:p>
-                <a:pPr lvl="1"/>
+                <a:pPr lvl="2"/>
                 <a14:m>
                   <m:oMath xmlns:m="http://schemas.openxmlformats.org/officeDocument/2006/math">
                     <m:r>
@@ -22339,18 +22321,19 @@
                 </a:r>
               </a:p>
               <a:p>
-                <a:pPr marL="457200" lvl="1" indent="0">
+                <a:pPr marL="914400" lvl="2" indent="0">
                   <a:buNone/>
                 </a:pPr>
-                <a:endParaRPr lang="en-US" dirty="0"/>
+                <a:r>
+                  <a:rPr lang="en-US" dirty="0"/>
+                  <a:t>This is only feasible for problems with a small discrete state/action space!</a:t>
+                </a:r>
               </a:p>
               <a:p>
-                <a:pPr marL="457200" lvl="1" indent="0">
-                  <a:buNone/>
-                </a:pPr>
+                <a:pPr lvl="1"/>
                 <a:r>
                   <a:rPr lang="en-US" dirty="0"/>
-                  <a:t>This is only feasible for problems with a small discrete state/action space!</a:t>
+                  <a:t>No generalization: Knowledge about the value of one state (state-action pair) does not help us with similar states</a:t>
                 </a:r>
               </a:p>
               <a:p>
@@ -22359,7 +22342,7 @@
               <a:p>
                 <a:r>
                   <a:rPr lang="en-US" dirty="0"/>
-                  <a:t>We will later talk about approximate methods that can work with large state spaces.</a:t>
+                  <a:t>We will later talk about approximate methods that generalize and can work with large state spaces.</a:t>
                 </a:r>
               </a:p>
             </p:txBody>
@@ -22385,12 +22368,12 @@
             <p:spPr>
               <a:xfrm>
                 <a:off x="838200" y="1397330"/>
-                <a:ext cx="6763186" cy="4221693"/>
+                <a:ext cx="6763186" cy="4986692"/>
               </a:xfrm>
               <a:blipFill>
                 <a:blip r:embed="rId2"/>
                 <a:stretch>
-                  <a:fillRect l="-1082" t="-2886" r="-631" b="-722"/>
+                  <a:fillRect l="-812" t="-2078" r="-902"/>
                 </a:stretch>
               </a:blipFill>
             </p:spPr>
@@ -22669,8 +22652,8 @@
           </a:p>
         </p:txBody>
       </p:sp>
-      <mc:AlternateContent xmlns:mc="http://schemas.openxmlformats.org/markup-compatibility/2006">
-        <mc:Choice xmlns:a14="http://schemas.microsoft.com/office/drawing/2010/main" Requires="a14">
+      <mc:AlternateContent xmlns:mc="http://schemas.openxmlformats.org/markup-compatibility/2006" xmlns:a14="http://schemas.microsoft.com/office/drawing/2010/main">
+        <mc:Choice Requires="a14">
           <p:graphicFrame>
             <p:nvGraphicFramePr>
               <p:cNvPr id="9" name="Table 8">
@@ -23074,7 +23057,7 @@
             </a:graphic>
           </p:graphicFrame>
         </mc:Choice>
-        <mc:Fallback>
+        <mc:Fallback xmlns="">
           <p:graphicFrame>
             <p:nvGraphicFramePr>
               <p:cNvPr id="9" name="Table 8">
@@ -23422,8 +23405,8 @@
           </p:graphicFrame>
         </mc:Fallback>
       </mc:AlternateContent>
-      <mc:AlternateContent xmlns:mc="http://schemas.openxmlformats.org/markup-compatibility/2006">
-        <mc:Choice xmlns:a14="http://schemas.microsoft.com/office/drawing/2010/main" Requires="a14">
+      <mc:AlternateContent xmlns:mc="http://schemas.openxmlformats.org/markup-compatibility/2006" xmlns:a14="http://schemas.microsoft.com/office/drawing/2010/main">
+        <mc:Choice Requires="a14">
           <p:graphicFrame>
             <p:nvGraphicFramePr>
               <p:cNvPr id="10" name="Table 9">
@@ -23649,7 +23632,7 @@
             </a:graphic>
           </p:graphicFrame>
         </mc:Choice>
-        <mc:Fallback>
+        <mc:Fallback xmlns="">
           <p:graphicFrame>
             <p:nvGraphicFramePr>
               <p:cNvPr id="10" name="Table 9">
@@ -23842,8 +23825,8 @@
           </p:graphicFrame>
         </mc:Fallback>
       </mc:AlternateContent>
-      <mc:AlternateContent xmlns:mc="http://schemas.openxmlformats.org/markup-compatibility/2006">
-        <mc:Choice xmlns:a14="http://schemas.microsoft.com/office/drawing/2010/main" Requires="a14">
+      <mc:AlternateContent xmlns:mc="http://schemas.openxmlformats.org/markup-compatibility/2006" xmlns:a14="http://schemas.microsoft.com/office/drawing/2010/main">
+        <mc:Choice Requires="a14">
           <p:graphicFrame>
             <p:nvGraphicFramePr>
               <p:cNvPr id="11" name="Table 10">
@@ -24002,6 +23985,7 @@
                         <a:bodyPr/>
                         <a:lstStyle/>
                         <a:p>
+                          <a:pPr/>
                           <a14:m>
                             <m:oMathPara xmlns:m="http://schemas.openxmlformats.org/officeDocument/2006/math">
                               <m:oMathParaPr>
@@ -24075,6 +24059,7 @@
                         <a:bodyPr/>
                         <a:lstStyle/>
                         <a:p>
+                          <a:pPr/>
                           <a14:m>
                             <m:oMathPara xmlns:m="http://schemas.openxmlformats.org/officeDocument/2006/math">
                               <m:oMathParaPr>
@@ -24366,7 +24351,7 @@
             </a:graphic>
           </p:graphicFrame>
         </mc:Choice>
-        <mc:Fallback>
+        <mc:Fallback xmlns="">
           <p:graphicFrame>
             <p:nvGraphicFramePr>
               <p:cNvPr id="11" name="Table 10">
@@ -24988,37 +24973,6 @@
                                         <p:tgtEl>
                                           <p:spTgt spid="3">
                                             <p:txEl>
-                                              <p:pRg st="3" end="3"/>
-                                            </p:txEl>
-                                          </p:spTgt>
-                                        </p:tgtEl>
-                                        <p:attrNameLst>
-                                          <p:attrName>style.visibility</p:attrName>
-                                        </p:attrNameLst>
-                                      </p:cBhvr>
-                                      <p:to>
-                                        <p:strVal val="visible"/>
-                                      </p:to>
-                                    </p:set>
-                                  </p:childTnLst>
-                                </p:cTn>
-                              </p:par>
-                              <p:par>
-                                <p:cTn id="7" presetID="1" presetClass="entr" presetSubtype="0" fill="hold" nodeType="withEffect">
-                                  <p:stCondLst>
-                                    <p:cond delay="0"/>
-                                  </p:stCondLst>
-                                  <p:childTnLst>
-                                    <p:set>
-                                      <p:cBhvr>
-                                        <p:cTn id="8" dur="1" fill="hold">
-                                          <p:stCondLst>
-                                            <p:cond delay="0"/>
-                                          </p:stCondLst>
-                                        </p:cTn>
-                                        <p:tgtEl>
-                                          <p:spTgt spid="3">
-                                            <p:txEl>
                                               <p:pRg st="4" end="4"/>
                                             </p:txEl>
                                           </p:spTgt>
@@ -25034,8 +24988,26 @@
                                   </p:childTnLst>
                                 </p:cTn>
                               </p:par>
+                            </p:childTnLst>
+                          </p:cTn>
+                        </p:par>
+                      </p:childTnLst>
+                    </p:cTn>
+                  </p:par>
+                  <p:par>
+                    <p:cTn id="7" fill="hold">
+                      <p:stCondLst>
+                        <p:cond delay="indefinite"/>
+                      </p:stCondLst>
+                      <p:childTnLst>
+                        <p:par>
+                          <p:cTn id="8" fill="hold">
+                            <p:stCondLst>
+                              <p:cond delay="0"/>
+                            </p:stCondLst>
+                            <p:childTnLst>
                               <p:par>
-                                <p:cTn id="9" presetID="1" presetClass="entr" presetSubtype="0" fill="hold" nodeType="withEffect">
+                                <p:cTn id="9" presetID="1" presetClass="entr" presetSubtype="0" fill="hold" nodeType="clickEffect">
                                   <p:stCondLst>
                                     <p:cond delay="0"/>
                                   </p:stCondLst>
@@ -25081,7 +25053,7 @@
                                         <p:tgtEl>
                                           <p:spTgt spid="3">
                                             <p:txEl>
-                                              <p:pRg st="7" end="7"/>
+                                              <p:pRg st="6" end="6"/>
                                             </p:txEl>
                                           </p:spTgt>
                                         </p:tgtEl>
@@ -25112,7 +25084,100 @@
                                         <p:tgtEl>
                                           <p:spTgt spid="3">
                                             <p:txEl>
+                                              <p:pRg st="7" end="7"/>
+                                            </p:txEl>
+                                          </p:spTgt>
+                                        </p:tgtEl>
+                                        <p:attrNameLst>
+                                          <p:attrName>style.visibility</p:attrName>
+                                        </p:attrNameLst>
+                                      </p:cBhvr>
+                                      <p:to>
+                                        <p:strVal val="visible"/>
+                                      </p:to>
+                                    </p:set>
+                                  </p:childTnLst>
+                                </p:cTn>
+                              </p:par>
+                              <p:par>
+                                <p:cTn id="15" presetID="1" presetClass="entr" presetSubtype="0" fill="hold" nodeType="withEffect">
+                                  <p:stCondLst>
+                                    <p:cond delay="0"/>
+                                  </p:stCondLst>
+                                  <p:childTnLst>
+                                    <p:set>
+                                      <p:cBhvr>
+                                        <p:cTn id="16" dur="1" fill="hold">
+                                          <p:stCondLst>
+                                            <p:cond delay="0"/>
+                                          </p:stCondLst>
+                                        </p:cTn>
+                                        <p:tgtEl>
+                                          <p:spTgt spid="3">
+                                            <p:txEl>
+                                              <p:pRg st="8" end="8"/>
+                                            </p:txEl>
+                                          </p:spTgt>
+                                        </p:tgtEl>
+                                        <p:attrNameLst>
+                                          <p:attrName>style.visibility</p:attrName>
+                                        </p:attrNameLst>
+                                      </p:cBhvr>
+                                      <p:to>
+                                        <p:strVal val="visible"/>
+                                      </p:to>
+                                    </p:set>
+                                  </p:childTnLst>
+                                </p:cTn>
+                              </p:par>
+                              <p:par>
+                                <p:cTn id="17" presetID="1" presetClass="entr" presetSubtype="0" fill="hold" nodeType="withEffect">
+                                  <p:stCondLst>
+                                    <p:cond delay="0"/>
+                                  </p:stCondLst>
+                                  <p:childTnLst>
+                                    <p:set>
+                                      <p:cBhvr>
+                                        <p:cTn id="18" dur="1" fill="hold">
+                                          <p:stCondLst>
+                                            <p:cond delay="0"/>
+                                          </p:stCondLst>
+                                        </p:cTn>
+                                        <p:tgtEl>
+                                          <p:spTgt spid="3">
+                                            <p:txEl>
                                               <p:pRg st="9" end="9"/>
+                                            </p:txEl>
+                                          </p:spTgt>
+                                        </p:tgtEl>
+                                        <p:attrNameLst>
+                                          <p:attrName>style.visibility</p:attrName>
+                                        </p:attrNameLst>
+                                      </p:cBhvr>
+                                      <p:to>
+                                        <p:strVal val="visible"/>
+                                      </p:to>
+                                    </p:set>
+                                  </p:childTnLst>
+                                </p:cTn>
+                              </p:par>
+                              <p:par>
+                                <p:cTn id="19" presetID="1" presetClass="entr" presetSubtype="0" fill="hold" nodeType="withEffect">
+                                  <p:stCondLst>
+                                    <p:cond delay="0"/>
+                                  </p:stCondLst>
+                                  <p:childTnLst>
+                                    <p:set>
+                                      <p:cBhvr>
+                                        <p:cTn id="20" dur="1" fill="hold">
+                                          <p:stCondLst>
+                                            <p:cond delay="0"/>
+                                          </p:stCondLst>
+                                        </p:cTn>
+                                        <p:tgtEl>
+                                          <p:spTgt spid="3">
+                                            <p:txEl>
+                                              <p:pRg st="11" end="11"/>
                                             </p:txEl>
                                           </p:spTgt>
                                         </p:tgtEl>
@@ -25243,7 +25308,7 @@
             </a:r>
             <a:r>
               <a:rPr lang="en-US" dirty="0"/>
-              <a:t>: Estimate the value function for a policy. We can use this to compare two policies.</a:t>
+              <a:t>: Estimate the value function for a given policy. We can use this to compare two policies.</a:t>
             </a:r>
           </a:p>
           <a:p>
@@ -25264,7 +25329,7 @@
             </a:r>
             <a:r>
               <a:rPr lang="en-US" dirty="0"/>
-              <a:t>: Find the optimal policy. This requires being able to evaluate policies.</a:t>
+              <a:t>: Control the agent’s behavior to find the optimal policy. This requires being able to evaluate policies.</a:t>
             </a:r>
           </a:p>
         </p:txBody>
@@ -25322,7 +25387,7 @@
           <a:p>
             <a:r>
               <a:rPr lang="en-US" dirty="0"/>
-              <a:t>Policy Evaluation</a:t>
+              <a:t>Prediction: Policy Evaluation</a:t>
             </a:r>
           </a:p>
         </p:txBody>
@@ -25385,8 +25450,8 @@
           <a:chExt cx="0" cy="0"/>
         </a:xfrm>
       </p:grpSpPr>
-      <mc:AlternateContent xmlns:mc="http://schemas.openxmlformats.org/markup-compatibility/2006" xmlns:a14="http://schemas.microsoft.com/office/drawing/2010/main">
-        <mc:Choice Requires="a14">
+      <mc:AlternateContent xmlns:mc="http://schemas.openxmlformats.org/markup-compatibility/2006">
+        <mc:Choice xmlns:a14="http://schemas.microsoft.com/office/drawing/2010/main" Requires="a14">
           <p:sp>
             <p:nvSpPr>
               <p:cNvPr id="2" name="Title 1">
@@ -25412,7 +25477,7 @@
               <a:p>
                 <a:r>
                   <a:rPr lang="en-US" dirty="0"/>
-                  <a:t>Policy Evaluation (Prediction): Estimate </a:t>
+                  <a:t>Policy Evaluation to Estimate </a:t>
                 </a:r>
                 <a14:m>
                   <m:oMath xmlns:m="http://schemas.openxmlformats.org/officeDocument/2006/math">
@@ -25448,7 +25513,7 @@
             </p:txBody>
           </p:sp>
         </mc:Choice>
-        <mc:Fallback xmlns="">
+        <mc:Fallback>
           <p:sp>
             <p:nvSpPr>
               <p:cNvPr id="2" name="Title 1">
@@ -25514,7 +25579,7 @@
             </p:spPr>
             <p:txBody>
               <a:bodyPr>
-                <a:normAutofit fontScale="85000" lnSpcReduction="20000"/>
+                <a:normAutofit fontScale="77500" lnSpcReduction="20000"/>
               </a:bodyPr>
               <a:lstStyle/>
               <a:p>
@@ -25592,7 +25657,7 @@
                 </a:pPr>
                 <a:r>
                   <a:rPr lang="en-US" dirty="0"/>
-                  <a:t>Bellman expectation equations give us a recursive relationship:</a:t>
+                  <a:t>Bellman expectation equations give us the recursive relationship:</a:t>
                 </a:r>
               </a:p>
               <a:p>
@@ -26490,9 +26555,12 @@
                 <a:endParaRPr lang="en-US" dirty="0"/>
               </a:p>
               <a:p>
+                <a:pPr marL="457200" lvl="1" indent="0">
+                  <a:buNone/>
+                </a:pPr>
                 <a:r>
                   <a:rPr lang="en-US" dirty="0"/>
-                  <a:t> </a:t>
+                  <a:t>with </a:t>
                 </a:r>
                 <a14:m>
                   <m:oMath xmlns:m="http://schemas.openxmlformats.org/officeDocument/2006/math">
@@ -26553,7 +26621,7 @@
                 </a:r>
                 <a:r>
                   <a:rPr lang="en-US" dirty="0"/>
-                  <a:t>: The exists a unique </a:t>
+                  <a:t>: There exists a unique </a:t>
                 </a:r>
                 <a14:m>
                   <m:oMath xmlns:m="http://schemas.openxmlformats.org/officeDocument/2006/math">
@@ -26651,7 +26719,7 @@
               <a:blipFill>
                 <a:blip r:embed="rId3"/>
                 <a:stretch>
-                  <a:fillRect l="-812" t="-2788" b="-2028"/>
+                  <a:fillRect l="-696" t="-2535"/>
                 </a:stretch>
               </a:blipFill>
             </p:spPr>
@@ -26728,8 +26796,8 @@
           </a:p>
         </p:txBody>
       </p:sp>
-      <mc:AlternateContent xmlns:mc="http://schemas.openxmlformats.org/markup-compatibility/2006">
-        <mc:Choice xmlns:a14="http://schemas.microsoft.com/office/drawing/2010/main" Requires="a14">
+      <mc:AlternateContent xmlns:mc="http://schemas.openxmlformats.org/markup-compatibility/2006" xmlns:a14="http://schemas.microsoft.com/office/drawing/2010/main">
+        <mc:Choice Requires="a14">
           <p:sp>
             <p:nvSpPr>
               <p:cNvPr id="3" name="Content Placeholder 2">
@@ -27732,7 +27800,7 @@
             </p:txBody>
           </p:sp>
         </mc:Choice>
-        <mc:Fallback>
+        <mc:Fallback xmlns="">
           <p:sp>
             <p:nvSpPr>
               <p:cNvPr id="3" name="Content Placeholder 2">
@@ -27812,6 +27880,94 @@
           <a:chExt cx="0" cy="0"/>
         </a:xfrm>
       </p:grpSpPr>
+      <p:grpSp>
+        <p:nvGrpSpPr>
+          <p:cNvPr id="25" name="Group 24">
+            <a:extLst>
+              <a:ext uri="{FF2B5EF4-FFF2-40B4-BE49-F238E27FC236}">
+                <a16:creationId xmlns:a16="http://schemas.microsoft.com/office/drawing/2014/main" id="{52543F45-3A9E-C880-1230-772119373948}"/>
+              </a:ext>
+            </a:extLst>
+          </p:cNvPr>
+          <p:cNvGrpSpPr/>
+          <p:nvPr/>
+        </p:nvGrpSpPr>
+        <p:grpSpPr>
+          <a:xfrm>
+            <a:off x="200701" y="3523056"/>
+            <a:ext cx="2299156" cy="1791256"/>
+            <a:chOff x="8709114" y="1909044"/>
+            <a:chExt cx="2660677" cy="2268522"/>
+          </a:xfrm>
+        </p:grpSpPr>
+        <p:pic>
+          <p:nvPicPr>
+            <p:cNvPr id="9" name="Picture 8">
+              <a:extLst>
+                <a:ext uri="{FF2B5EF4-FFF2-40B4-BE49-F238E27FC236}">
+                  <a16:creationId xmlns:a16="http://schemas.microsoft.com/office/drawing/2014/main" id="{DC4F431F-EEDB-B955-97C6-C588C6C939BA}"/>
+                </a:ext>
+              </a:extLst>
+            </p:cNvPr>
+            <p:cNvPicPr>
+              <a:picLocks noChangeAspect="1"/>
+            </p:cNvPicPr>
+            <p:nvPr/>
+          </p:nvPicPr>
+          <p:blipFill>
+            <a:blip r:embed="rId2"/>
+            <a:srcRect b="15184"/>
+            <a:stretch>
+              <a:fillRect/>
+            </a:stretch>
+          </p:blipFill>
+          <p:spPr>
+            <a:xfrm>
+              <a:off x="8709114" y="2205386"/>
+              <a:ext cx="2660677" cy="1972180"/>
+            </a:xfrm>
+            <a:prstGeom prst="rect">
+              <a:avLst/>
+            </a:prstGeom>
+          </p:spPr>
+        </p:pic>
+        <p:sp>
+          <p:nvSpPr>
+            <p:cNvPr id="24" name="TextBox 23">
+              <a:extLst>
+                <a:ext uri="{FF2B5EF4-FFF2-40B4-BE49-F238E27FC236}">
+                  <a16:creationId xmlns:a16="http://schemas.microsoft.com/office/drawing/2014/main" id="{E45E00C3-80D2-F1CC-F7E7-B3AD2D79EB12}"/>
+                </a:ext>
+              </a:extLst>
+            </p:cNvPr>
+            <p:cNvSpPr txBox="1"/>
+            <p:nvPr/>
+          </p:nvSpPr>
+          <p:spPr>
+            <a:xfrm>
+              <a:off x="8928479" y="1909044"/>
+              <a:ext cx="2177124" cy="389782"/>
+            </a:xfrm>
+            <a:prstGeom prst="rect">
+              <a:avLst/>
+            </a:prstGeom>
+            <a:noFill/>
+          </p:spPr>
+          <p:txBody>
+            <a:bodyPr wrap="square">
+              <a:spAutoFit/>
+            </a:bodyPr>
+            <a:lstStyle/>
+            <a:p>
+              <a:pPr algn="ctr"/>
+              <a:r>
+                <a:rPr lang="en-US" sz="1400" dirty="0"/>
+                <a:t>Backup diagram</a:t>
+              </a:r>
+            </a:p>
+          </p:txBody>
+        </p:sp>
+      </p:grpSp>
       <p:sp>
         <p:nvSpPr>
           <p:cNvPr id="2" name="Title 1">
@@ -27863,12 +28019,12 @@
             <p:spPr>
               <a:xfrm>
                 <a:off x="838200" y="1397330"/>
-                <a:ext cx="7398380" cy="4847286"/>
+                <a:ext cx="7732419" cy="4847286"/>
               </a:xfrm>
             </p:spPr>
             <p:txBody>
               <a:bodyPr>
-                <a:normAutofit fontScale="85000" lnSpcReduction="10000"/>
+                <a:normAutofit fontScale="92500" lnSpcReduction="20000"/>
               </a:bodyPr>
               <a:lstStyle/>
               <a:p>
@@ -28540,111 +28696,11 @@
                 </a:r>
                 <a:r>
                   <a:rPr lang="en-US" sz="2000" b="0" dirty="0"/>
-                  <a:t>: The </a:t>
+                  <a:t>: </a:t>
                 </a:r>
                 <a:r>
                   <a:rPr lang="en-US" sz="2000" dirty="0"/>
-                  <a:t>Belman update is a contracting mapping with </a:t>
-                </a:r>
-                <a:br>
-                  <a:rPr lang="en-US" sz="2000" dirty="0"/>
-                </a:br>
-                <a14:m>
-                  <m:oMath xmlns:m="http://schemas.openxmlformats.org/officeDocument/2006/math">
-                    <m:sSub>
-                      <m:sSubPr>
-                        <m:ctrlPr>
-                          <a:rPr lang="en-US" sz="2000" b="0" i="1" smtClean="0">
-                            <a:latin typeface="Cambria Math" panose="02040503050406030204" pitchFamily="18" charset="0"/>
-                          </a:rPr>
-                        </m:ctrlPr>
-                      </m:sSubPr>
-                      <m:e>
-                        <m:r>
-                          <a:rPr lang="en-US" sz="2000" b="0" i="1" smtClean="0">
-                            <a:latin typeface="Cambria Math" panose="02040503050406030204" pitchFamily="18" charset="0"/>
-                          </a:rPr>
-                          <m:t>𝑣</m:t>
-                        </m:r>
-                      </m:e>
-                      <m:sub>
-                        <m:r>
-                          <a:rPr lang="en-US" sz="2000" b="0" i="1" smtClean="0">
-                            <a:latin typeface="Cambria Math" panose="02040503050406030204" pitchFamily="18" charset="0"/>
-                          </a:rPr>
-                          <m:t>𝑘</m:t>
-                        </m:r>
-                      </m:sub>
-                    </m:sSub>
-                    <m:r>
-                      <a:rPr lang="en-US" sz="2000" b="0" i="1" smtClean="0">
-                        <a:latin typeface="Cambria Math" panose="02040503050406030204" pitchFamily="18" charset="0"/>
-                      </a:rPr>
-                      <m:t>=</m:t>
-                    </m:r>
-                    <m:sSub>
-                      <m:sSubPr>
-                        <m:ctrlPr>
-                          <a:rPr lang="en-US" sz="2000" b="0" i="1" smtClean="0">
-                            <a:latin typeface="Cambria Math" panose="02040503050406030204" pitchFamily="18" charset="0"/>
-                          </a:rPr>
-                        </m:ctrlPr>
-                      </m:sSubPr>
-                      <m:e>
-                        <m:r>
-                          <a:rPr lang="en-US" sz="2000" b="0" i="1" smtClean="0">
-                            <a:latin typeface="Cambria Math" panose="02040503050406030204" pitchFamily="18" charset="0"/>
-                          </a:rPr>
-                          <m:t>𝑣</m:t>
-                        </m:r>
-                      </m:e>
-                      <m:sub>
-                        <m:r>
-                          <a:rPr lang="en-US" sz="2000" b="0" i="1" smtClean="0">
-                            <a:latin typeface="Cambria Math" panose="02040503050406030204" pitchFamily="18" charset="0"/>
-                          </a:rPr>
-                          <m:t>𝜋</m:t>
-                        </m:r>
-                      </m:sub>
-                    </m:sSub>
-                  </m:oMath>
-                </a14:m>
-                <a:r>
-                  <a:rPr lang="en-US" sz="2000" dirty="0"/>
-                  <a:t> as its fixed point (for </a:t>
-                </a:r>
-                <a14:m>
-                  <m:oMath xmlns:m="http://schemas.openxmlformats.org/officeDocument/2006/math">
-                    <m:r>
-                      <a:rPr lang="en-US" sz="2000" b="0" i="1" smtClean="0">
-                        <a:latin typeface="Cambria Math" panose="02040503050406030204" pitchFamily="18" charset="0"/>
-                      </a:rPr>
-                      <m:t>0≤</m:t>
-                    </m:r>
-                    <m:r>
-                      <a:rPr lang="en-US" sz="2000" b="0" i="1" smtClean="0">
-                        <a:latin typeface="Cambria Math" panose="02040503050406030204" pitchFamily="18" charset="0"/>
-                      </a:rPr>
-                      <m:t>𝛾</m:t>
-                    </m:r>
-                    <m:r>
-                      <a:rPr lang="en-US" sz="2000" b="0" i="1" smtClean="0">
-                        <a:latin typeface="Cambria Math" panose="02040503050406030204" pitchFamily="18" charset="0"/>
-                      </a:rPr>
-                      <m:t>&lt;1</m:t>
-                    </m:r>
-                  </m:oMath>
-                </a14:m>
-                <a:r>
-                  <a:rPr lang="en-US" sz="2000" dirty="0"/>
-                  <a:t>). </a:t>
-                </a:r>
-                <a:br>
-                  <a:rPr lang="en-US" sz="2000" dirty="0"/>
-                </a:br>
-                <a:r>
-                  <a:rPr lang="en-US" sz="2000" dirty="0"/>
-                  <a:t>I.e., updates converge to </a:t>
+                  <a:t>Updates converge to </a:t>
                 </a:r>
                 <a14:m>
                   <m:oMath xmlns:m="http://schemas.openxmlformats.org/officeDocument/2006/math">
@@ -28723,12 +28779,12 @@
             <p:spPr>
               <a:xfrm>
                 <a:off x="838200" y="1397330"/>
-                <a:ext cx="7398380" cy="4847286"/>
+                <a:ext cx="7732419" cy="4847286"/>
               </a:xfrm>
               <a:blipFill>
-                <a:blip r:embed="rId2"/>
+                <a:blip r:embed="rId3"/>
                 <a:stretch>
-                  <a:fillRect l="-907" t="-1635" b="-1132"/>
+                  <a:fillRect l="-1025" t="-2516"/>
                 </a:stretch>
               </a:blipFill>
             </p:spPr>
@@ -28761,10 +28817,10 @@
         </p:nvGrpSpPr>
         <p:grpSpPr>
           <a:xfrm>
-            <a:off x="3399786" y="4398634"/>
-            <a:ext cx="4912340" cy="730954"/>
-            <a:chOff x="2458533" y="3098314"/>
-            <a:chExt cx="1699913" cy="730954"/>
+            <a:off x="3338818" y="4633526"/>
+            <a:ext cx="4981697" cy="730954"/>
+            <a:chOff x="2344485" y="3098314"/>
+            <a:chExt cx="1813961" cy="730954"/>
           </a:xfrm>
         </p:grpSpPr>
         <p:sp>
@@ -28825,8 +28881,8 @@
           </p:nvSpPr>
           <p:spPr>
             <a:xfrm>
-              <a:off x="2458533" y="3306048"/>
-              <a:ext cx="1699913" cy="523220"/>
+              <a:off x="2344485" y="3306048"/>
+              <a:ext cx="1813961" cy="523220"/>
             </a:xfrm>
             <a:prstGeom prst="rect">
               <a:avLst/>
@@ -28869,7 +28925,7 @@
         </p:nvGrpSpPr>
         <p:grpSpPr>
           <a:xfrm>
-            <a:off x="8923602" y="5012370"/>
+            <a:off x="8930583" y="4867978"/>
             <a:ext cx="2854818" cy="1480504"/>
             <a:chOff x="8867761" y="4764111"/>
             <a:chExt cx="2854818" cy="1480504"/>
@@ -29130,7 +29186,7 @@
                     <a:avLst/>
                   </a:prstGeom>
                   <a:blipFill>
-                    <a:blip r:embed="rId3"/>
+                    <a:blip r:embed="rId4"/>
                     <a:stretch>
                       <a:fillRect/>
                     </a:stretch>
@@ -29957,7 +30013,7 @@
                     <a:avLst/>
                   </a:prstGeom>
                   <a:blipFill>
-                    <a:blip r:embed="rId4"/>
+                    <a:blip r:embed="rId5"/>
                     <a:stretch>
                       <a:fillRect/>
                     </a:stretch>
@@ -30172,7 +30228,7 @@
                     <a:avLst/>
                   </a:prstGeom>
                   <a:blipFill>
-                    <a:blip r:embed="rId5"/>
+                    <a:blip r:embed="rId6"/>
                     <a:stretch>
                       <a:fillRect/>
                     </a:stretch>
@@ -30508,10 +30564,10 @@
       </p:grpSp>
       <p:grpSp>
         <p:nvGrpSpPr>
-          <p:cNvPr id="25" name="Group 24">
+          <p:cNvPr id="27" name="Group 26">
             <a:extLst>
               <a:ext uri="{FF2B5EF4-FFF2-40B4-BE49-F238E27FC236}">
-                <a16:creationId xmlns:a16="http://schemas.microsoft.com/office/drawing/2014/main" id="{52543F45-3A9E-C880-1230-772119373948}"/>
+                <a16:creationId xmlns:a16="http://schemas.microsoft.com/office/drawing/2014/main" id="{CD6C0487-07CF-0018-3062-50B52F2A7AAD}"/>
               </a:ext>
             </a:extLst>
           </p:cNvPr>
@@ -30520,49 +30576,18 @@
         </p:nvGrpSpPr>
         <p:grpSpPr>
           <a:xfrm>
-            <a:off x="8789802" y="1822117"/>
-            <a:ext cx="2660677" cy="2397755"/>
-            <a:chOff x="8740049" y="1829375"/>
-            <a:chExt cx="2660677" cy="2397755"/>
+            <a:off x="8464259" y="1342160"/>
+            <a:ext cx="3325726" cy="2180896"/>
+            <a:chOff x="8464259" y="1342160"/>
+            <a:chExt cx="3325726" cy="2180896"/>
           </a:xfrm>
         </p:grpSpPr>
-        <p:pic>
-          <p:nvPicPr>
-            <p:cNvPr id="9" name="Picture 8">
+        <p:sp>
+          <p:nvSpPr>
+            <p:cNvPr id="21" name="TextBox 20">
               <a:extLst>
                 <a:ext uri="{FF2B5EF4-FFF2-40B4-BE49-F238E27FC236}">
-                  <a16:creationId xmlns:a16="http://schemas.microsoft.com/office/drawing/2014/main" id="{DC4F431F-EEDB-B955-97C6-C588C6C939BA}"/>
-                </a:ext>
-              </a:extLst>
-            </p:cNvPr>
-            <p:cNvPicPr>
-              <a:picLocks noChangeAspect="1"/>
-            </p:cNvPicPr>
-            <p:nvPr/>
-          </p:nvPicPr>
-          <p:blipFill>
-            <a:blip r:embed="rId6"/>
-            <a:srcRect b="15184"/>
-            <a:stretch>
-              <a:fillRect/>
-            </a:stretch>
-          </p:blipFill>
-          <p:spPr>
-            <a:xfrm>
-              <a:off x="8740049" y="2254950"/>
-              <a:ext cx="2660677" cy="1972180"/>
-            </a:xfrm>
-            <a:prstGeom prst="rect">
-              <a:avLst/>
-            </a:prstGeom>
-          </p:spPr>
-        </p:pic>
-        <p:sp>
-          <p:nvSpPr>
-            <p:cNvPr id="24" name="TextBox 23">
-              <a:extLst>
-                <a:ext uri="{FF2B5EF4-FFF2-40B4-BE49-F238E27FC236}">
-                  <a16:creationId xmlns:a16="http://schemas.microsoft.com/office/drawing/2014/main" id="{E45E00C3-80D2-F1CC-F7E7-B3AD2D79EB12}"/>
+                  <a16:creationId xmlns:a16="http://schemas.microsoft.com/office/drawing/2014/main" id="{E32527A9-170C-6824-B9CF-D3911C12D2CB}"/>
                 </a:ext>
               </a:extLst>
             </p:cNvPr>
@@ -30571,8 +30596,8 @@
           </p:nvSpPr>
           <p:spPr>
             <a:xfrm>
-              <a:off x="8799641" y="1829375"/>
-              <a:ext cx="2177124" cy="584775"/>
+              <a:off x="8956148" y="1342160"/>
+              <a:ext cx="2437818" cy="338554"/>
             </a:xfrm>
             <a:prstGeom prst="rect">
               <a:avLst/>
@@ -30587,11 +30612,58 @@
             <a:p>
               <a:r>
                 <a:rPr lang="en-US" sz="1600" dirty="0"/>
-                <a:t>Backup diagram for the Bellman updates</a:t>
+                <a:t>Sweep the state space</a:t>
               </a:r>
             </a:p>
           </p:txBody>
         </p:sp>
+        <p:pic>
+          <p:nvPicPr>
+            <p:cNvPr id="10" name="Picture 2">
+              <a:extLst>
+                <a:ext uri="{FF2B5EF4-FFF2-40B4-BE49-F238E27FC236}">
+                  <a16:creationId xmlns:a16="http://schemas.microsoft.com/office/drawing/2014/main" id="{AA982B42-2673-74EA-CFA0-028006FCF612}"/>
+                </a:ext>
+              </a:extLst>
+            </p:cNvPr>
+            <p:cNvPicPr>
+              <a:picLocks noChangeAspect="1" noChangeArrowheads="1"/>
+            </p:cNvPicPr>
+            <p:nvPr/>
+          </p:nvPicPr>
+          <p:blipFill>
+            <a:blip r:embed="rId7">
+              <a:extLst>
+                <a:ext uri="{28A0092B-C50C-407E-A947-70E740481C1C}">
+                  <a14:useLocalDpi xmlns:a14="http://schemas.microsoft.com/office/drawing/2010/main" val="0"/>
+                </a:ext>
+              </a:extLst>
+            </a:blip>
+            <a:srcRect/>
+            <a:stretch>
+              <a:fillRect/>
+            </a:stretch>
+          </p:blipFill>
+          <p:spPr bwMode="auto">
+            <a:xfrm>
+              <a:off x="8464259" y="1838913"/>
+              <a:ext cx="3325726" cy="1684143"/>
+            </a:xfrm>
+            <a:prstGeom prst="rect">
+              <a:avLst/>
+            </a:prstGeom>
+            <a:noFill/>
+            <a:extLst>
+              <a:ext uri="{909E8E84-426E-40DD-AFC4-6F175D3DCCD1}">
+                <a14:hiddenFill xmlns:a14="http://schemas.microsoft.com/office/drawing/2010/main">
+                  <a:solidFill>
+                    <a:srgbClr val="FFFFFF"/>
+                  </a:solidFill>
+                </a14:hiddenFill>
+              </a:ext>
+            </a:extLst>
+          </p:spPr>
+        </p:pic>
       </p:grpSp>
     </p:spTree>
     <p:extLst>

--- a/slides/Lecture_Chapter04.pptx
+++ b/slides/Lecture_Chapter04.pptx
@@ -336,7 +336,7 @@
           <a:p>
             <a:fld id="{3E22BF2E-04DA-469E-97C5-BB68A0368813}" type="datetimeFigureOut">
               <a:rPr lang="en-US" smtClean="0"/>
-              <a:t>2/2/2026</a:t>
+              <a:t>2/3/2026</a:t>
             </a:fld>
             <a:endParaRPr lang="en-US"/>
           </a:p>
@@ -534,7 +534,7 @@
           <a:p>
             <a:fld id="{3E22BF2E-04DA-469E-97C5-BB68A0368813}" type="datetimeFigureOut">
               <a:rPr lang="en-US" smtClean="0"/>
-              <a:t>2/2/2026</a:t>
+              <a:t>2/3/2026</a:t>
             </a:fld>
             <a:endParaRPr lang="en-US"/>
           </a:p>
@@ -742,7 +742,7 @@
           <a:p>
             <a:fld id="{3E22BF2E-04DA-469E-97C5-BB68A0368813}" type="datetimeFigureOut">
               <a:rPr lang="en-US" smtClean="0"/>
-              <a:t>2/2/2026</a:t>
+              <a:t>2/3/2026</a:t>
             </a:fld>
             <a:endParaRPr lang="en-US"/>
           </a:p>
@@ -950,7 +950,7 @@
           <a:p>
             <a:fld id="{3E22BF2E-04DA-469E-97C5-BB68A0368813}" type="datetimeFigureOut">
               <a:rPr lang="en-US" smtClean="0"/>
-              <a:t>2/2/2026</a:t>
+              <a:t>2/3/2026</a:t>
             </a:fld>
             <a:endParaRPr lang="en-US"/>
           </a:p>
@@ -1225,7 +1225,7 @@
           <a:p>
             <a:fld id="{3E22BF2E-04DA-469E-97C5-BB68A0368813}" type="datetimeFigureOut">
               <a:rPr lang="en-US" smtClean="0"/>
-              <a:t>2/2/2026</a:t>
+              <a:t>2/3/2026</a:t>
             </a:fld>
             <a:endParaRPr lang="en-US"/>
           </a:p>
@@ -1490,7 +1490,7 @@
           <a:p>
             <a:fld id="{3E22BF2E-04DA-469E-97C5-BB68A0368813}" type="datetimeFigureOut">
               <a:rPr lang="en-US" smtClean="0"/>
-              <a:t>2/2/2026</a:t>
+              <a:t>2/3/2026</a:t>
             </a:fld>
             <a:endParaRPr lang="en-US"/>
           </a:p>
@@ -1902,7 +1902,7 @@
           <a:p>
             <a:fld id="{3E22BF2E-04DA-469E-97C5-BB68A0368813}" type="datetimeFigureOut">
               <a:rPr lang="en-US" smtClean="0"/>
-              <a:t>2/2/2026</a:t>
+              <a:t>2/3/2026</a:t>
             </a:fld>
             <a:endParaRPr lang="en-US"/>
           </a:p>
@@ -2043,7 +2043,7 @@
           <a:p>
             <a:fld id="{3E22BF2E-04DA-469E-97C5-BB68A0368813}" type="datetimeFigureOut">
               <a:rPr lang="en-US" smtClean="0"/>
-              <a:t>2/2/2026</a:t>
+              <a:t>2/3/2026</a:t>
             </a:fld>
             <a:endParaRPr lang="en-US"/>
           </a:p>
@@ -2156,7 +2156,7 @@
           <a:p>
             <a:fld id="{3E22BF2E-04DA-469E-97C5-BB68A0368813}" type="datetimeFigureOut">
               <a:rPr lang="en-US" smtClean="0"/>
-              <a:t>2/2/2026</a:t>
+              <a:t>2/3/2026</a:t>
             </a:fld>
             <a:endParaRPr lang="en-US"/>
           </a:p>
@@ -2467,7 +2467,7 @@
           <a:p>
             <a:fld id="{3E22BF2E-04DA-469E-97C5-BB68A0368813}" type="datetimeFigureOut">
               <a:rPr lang="en-US" smtClean="0"/>
-              <a:t>2/2/2026</a:t>
+              <a:t>2/3/2026</a:t>
             </a:fld>
             <a:endParaRPr lang="en-US"/>
           </a:p>
@@ -2755,7 +2755,7 @@
           <a:p>
             <a:fld id="{3E22BF2E-04DA-469E-97C5-BB68A0368813}" type="datetimeFigureOut">
               <a:rPr lang="en-US" smtClean="0"/>
-              <a:t>2/2/2026</a:t>
+              <a:t>2/3/2026</a:t>
             </a:fld>
             <a:endParaRPr lang="en-US"/>
           </a:p>
@@ -2996,7 +2996,7 @@
           <a:p>
             <a:fld id="{3E22BF2E-04DA-469E-97C5-BB68A0368813}" type="datetimeFigureOut">
               <a:rPr lang="en-US" smtClean="0"/>
-              <a:t>2/2/2026</a:t>
+              <a:t>2/3/2026</a:t>
             </a:fld>
             <a:endParaRPr lang="en-US"/>
           </a:p>
@@ -3513,7 +3513,7 @@
         </p:blipFill>
         <p:spPr bwMode="auto">
           <a:xfrm>
-            <a:off x="3653200" y="-1502"/>
+            <a:off x="3527560" y="-1502"/>
             <a:ext cx="8668512" cy="6857990"/>
           </a:xfrm>
           <a:prstGeom prst="rect">
@@ -4078,8 +4078,8 @@
           </a:p>
         </p:txBody>
       </p:sp>
-      <mc:AlternateContent xmlns:mc="http://schemas.openxmlformats.org/markup-compatibility/2006">
-        <mc:Choice xmlns:a14="http://schemas.microsoft.com/office/drawing/2010/main" Requires="a14">
+      <mc:AlternateContent xmlns:mc="http://schemas.openxmlformats.org/markup-compatibility/2006" xmlns:a14="http://schemas.microsoft.com/office/drawing/2010/main">
+        <mc:Choice Requires="a14">
           <p:sp>
             <p:nvSpPr>
               <p:cNvPr id="3" name="Content Placeholder 2">
@@ -4875,7 +4875,7 @@
             </p:txBody>
           </p:sp>
         </mc:Choice>
-        <mc:Fallback>
+        <mc:Fallback xmlns="">
           <p:sp>
             <p:nvSpPr>
               <p:cNvPr id="3" name="Content Placeholder 2">
@@ -4919,8 +4919,8 @@
           </p:sp>
         </mc:Fallback>
       </mc:AlternateContent>
-      <mc:AlternateContent xmlns:mc="http://schemas.openxmlformats.org/markup-compatibility/2006">
-        <mc:Choice xmlns:a14="http://schemas.microsoft.com/office/drawing/2010/main" Requires="a14">
+      <mc:AlternateContent xmlns:mc="http://schemas.openxmlformats.org/markup-compatibility/2006" xmlns:a14="http://schemas.microsoft.com/office/drawing/2010/main">
+        <mc:Choice Requires="a14">
           <p:sp>
             <p:nvSpPr>
               <p:cNvPr id="4" name="Speech Bubble: Rectangle with Corners Rounded 3">
@@ -5053,7 +5053,7 @@
             </p:txBody>
           </p:sp>
         </mc:Choice>
-        <mc:Fallback>
+        <mc:Fallback xmlns="">
           <p:sp>
             <p:nvSpPr>
               <p:cNvPr id="4" name="Speech Bubble: Rectangle with Corners Rounded 3">
@@ -6808,7 +6808,7 @@
           <a:p>
             <a:r>
               <a:rPr lang="en-US" dirty="0"/>
-              <a:t>Policy Improvement</a:t>
+              <a:t>Policy Improvement and the Greedy Policy</a:t>
             </a:r>
           </a:p>
         </p:txBody>
@@ -6834,7 +6834,7 @@
             <p:spPr/>
             <p:txBody>
               <a:bodyPr>
-                <a:normAutofit fontScale="92500" lnSpcReduction="20000"/>
+                <a:normAutofit fontScale="85000" lnSpcReduction="20000"/>
               </a:bodyPr>
               <a:lstStyle/>
               <a:p>
@@ -7233,7 +7233,7 @@
                 </a:r>
                 <a:r>
                   <a:rPr lang="en-US" dirty="0"/>
-                  <a:t>: create a new policy </a:t>
+                  <a:t>: creating a new policy </a:t>
                 </a:r>
                 <a14:m>
                   <m:oMath xmlns:m="http://schemas.openxmlformats.org/officeDocument/2006/math">
@@ -7282,36 +7282,87 @@
                         </m:r>
                       </m:sub>
                     </m:sSub>
-                    <m:r>
-                      <a:rPr lang="en-US" b="0" i="1" smtClean="0">
-                        <a:latin typeface="Cambria Math" panose="02040503050406030204" pitchFamily="18" charset="0"/>
-                      </a:rPr>
-                      <m:t>(</m:t>
-                    </m:r>
-                    <m:r>
-                      <a:rPr lang="en-US" b="0" i="1" smtClean="0">
-                        <a:latin typeface="Cambria Math" panose="02040503050406030204" pitchFamily="18" charset="0"/>
-                      </a:rPr>
-                      <m:t>𝑠</m:t>
-                    </m:r>
-                    <m:r>
-                      <a:rPr lang="en-US" b="0" i="1" smtClean="0">
-                        <a:latin typeface="Cambria Math" panose="02040503050406030204" pitchFamily="18" charset="0"/>
-                      </a:rPr>
-                      <m:t>,</m:t>
-                    </m:r>
-                    <m:r>
-                      <a:rPr lang="en-US" b="0" i="1" smtClean="0">
-                        <a:latin typeface="Cambria Math" panose="02040503050406030204" pitchFamily="18" charset="0"/>
-                      </a:rPr>
-                      <m:t>𝑎</m:t>
-                    </m:r>
-                    <m:r>
-                      <a:rPr lang="en-US" b="0" i="1" smtClean="0">
-                        <a:latin typeface="Cambria Math" panose="02040503050406030204" pitchFamily="18" charset="0"/>
-                      </a:rPr>
-                      <m:t>)</m:t>
-                    </m:r>
+                    <m:d>
+                      <m:dPr>
+                        <m:ctrlPr>
+                          <a:rPr lang="en-US" b="0" i="1" smtClean="0">
+                            <a:latin typeface="Cambria Math" panose="02040503050406030204" pitchFamily="18" charset="0"/>
+                          </a:rPr>
+                        </m:ctrlPr>
+                      </m:dPr>
+                      <m:e>
+                        <m:r>
+                          <a:rPr lang="en-US" b="0" i="1" smtClean="0">
+                            <a:latin typeface="Cambria Math" panose="02040503050406030204" pitchFamily="18" charset="0"/>
+                          </a:rPr>
+                          <m:t>𝑠</m:t>
+                        </m:r>
+                        <m:r>
+                          <a:rPr lang="en-US" b="0" i="1" smtClean="0">
+                            <a:latin typeface="Cambria Math" panose="02040503050406030204" pitchFamily="18" charset="0"/>
+                          </a:rPr>
+                          <m:t>,</m:t>
+                        </m:r>
+                        <m:r>
+                          <a:rPr lang="en-US" b="0" i="1" smtClean="0">
+                            <a:latin typeface="Cambria Math" panose="02040503050406030204" pitchFamily="18" charset="0"/>
+                          </a:rPr>
+                          <m:t>𝑎</m:t>
+                        </m:r>
+                      </m:e>
+                    </m:d>
+                  </m:oMath>
+                </a14:m>
+                <a:r>
+                  <a:rPr lang="en-US" dirty="0"/>
+                  <a:t> will lead to the larges </a:t>
+                </a:r>
+                <a14:m>
+                  <m:oMath xmlns:m="http://schemas.openxmlformats.org/officeDocument/2006/math">
+                    <m:sSub>
+                      <m:sSubPr>
+                        <m:ctrlPr>
+                          <a:rPr lang="en-US" i="1">
+                            <a:latin typeface="Cambria Math" panose="02040503050406030204" pitchFamily="18" charset="0"/>
+                          </a:rPr>
+                        </m:ctrlPr>
+                      </m:sSubPr>
+                      <m:e>
+                        <m:r>
+                          <a:rPr lang="en-US" i="1">
+                            <a:latin typeface="Cambria Math" panose="02040503050406030204" pitchFamily="18" charset="0"/>
+                          </a:rPr>
+                          <m:t>𝑣</m:t>
+                        </m:r>
+                      </m:e>
+                      <m:sub>
+                        <m:sSup>
+                          <m:sSupPr>
+                            <m:ctrlPr>
+                              <a:rPr lang="en-US" i="1">
+                                <a:latin typeface="Cambria Math" panose="02040503050406030204" pitchFamily="18" charset="0"/>
+                              </a:rPr>
+                            </m:ctrlPr>
+                          </m:sSupPr>
+                          <m:e>
+                            <m:r>
+                              <a:rPr lang="en-US" i="1">
+                                <a:latin typeface="Cambria Math" panose="02040503050406030204" pitchFamily="18" charset="0"/>
+                              </a:rPr>
+                              <m:t>𝜋</m:t>
+                            </m:r>
+                          </m:e>
+                          <m:sup>
+                            <m:r>
+                              <a:rPr lang="en-US" i="1">
+                                <a:latin typeface="Cambria Math" panose="02040503050406030204" pitchFamily="18" charset="0"/>
+                              </a:rPr>
+                              <m:t>′</m:t>
+                            </m:r>
+                          </m:sup>
+                        </m:sSup>
+                      </m:sub>
+                    </m:sSub>
                   </m:oMath>
                 </a14:m>
                 <a:r>
@@ -7561,7 +7612,7 @@
               <a:blipFill>
                 <a:blip r:embed="rId2"/>
                 <a:stretch>
-                  <a:fillRect l="-928" t="-3189" b="-2679"/>
+                  <a:fillRect l="-812" t="-2806"/>
                 </a:stretch>
               </a:blipFill>
             </p:spPr>
@@ -7594,8 +7645,8 @@
         </p:nvSpPr>
         <p:spPr>
           <a:xfrm>
-            <a:off x="800462" y="1731708"/>
-            <a:ext cx="8199619" cy="1758112"/>
+            <a:off x="800463" y="1731708"/>
+            <a:ext cx="7624582" cy="1758112"/>
           </a:xfrm>
           <a:prstGeom prst="rect">
             <a:avLst/>
@@ -7692,8 +7743,8 @@
           </a:p>
         </p:txBody>
       </p:sp>
-      <mc:AlternateContent xmlns:mc="http://schemas.openxmlformats.org/markup-compatibility/2006">
-        <mc:Choice xmlns:a14="http://schemas.microsoft.com/office/drawing/2010/main" Requires="a14">
+      <mc:AlternateContent xmlns:mc="http://schemas.openxmlformats.org/markup-compatibility/2006" xmlns:a14="http://schemas.microsoft.com/office/drawing/2010/main">
+        <mc:Choice Requires="a14">
           <p:sp>
             <p:nvSpPr>
               <p:cNvPr id="3" name="Content Placeholder 2">
@@ -8285,7 +8336,7 @@
             </p:txBody>
           </p:sp>
         </mc:Choice>
-        <mc:Fallback>
+        <mc:Fallback xmlns="">
           <p:sp>
             <p:nvSpPr>
               <p:cNvPr id="3" name="Content Placeholder 2">
@@ -8329,8 +8380,8 @@
           </p:sp>
         </mc:Fallback>
       </mc:AlternateContent>
-      <mc:AlternateContent xmlns:mc="http://schemas.openxmlformats.org/markup-compatibility/2006">
-        <mc:Choice xmlns:a14="http://schemas.microsoft.com/office/drawing/2010/main" Requires="a14">
+      <mc:AlternateContent xmlns:mc="http://schemas.openxmlformats.org/markup-compatibility/2006" xmlns:a14="http://schemas.microsoft.com/office/drawing/2010/main">
+        <mc:Choice Requires="a14">
           <p:sp>
             <p:nvSpPr>
               <p:cNvPr id="5" name="TextBox 4">
@@ -8462,7 +8513,7 @@
             </p:txBody>
           </p:sp>
         </mc:Choice>
-        <mc:Fallback>
+        <mc:Fallback xmlns="">
           <p:sp>
             <p:nvSpPr>
               <p:cNvPr id="5" name="TextBox 4">
@@ -10173,8 +10224,8 @@
           </p:txBody>
         </p:sp>
       </p:grpSp>
-      <mc:AlternateContent xmlns:mc="http://schemas.openxmlformats.org/markup-compatibility/2006">
-        <mc:Choice xmlns:a14="http://schemas.microsoft.com/office/drawing/2010/main" Requires="a14">
+      <mc:AlternateContent xmlns:mc="http://schemas.openxmlformats.org/markup-compatibility/2006" xmlns:a14="http://schemas.microsoft.com/office/drawing/2010/main">
+        <mc:Choice Requires="a14">
           <p:sp>
             <p:nvSpPr>
               <p:cNvPr id="25" name="Content Placeholder 2">
@@ -10505,7 +10556,7 @@
             </p:txBody>
           </p:sp>
         </mc:Choice>
-        <mc:Fallback>
+        <mc:Fallback xmlns="">
           <p:sp>
             <p:nvSpPr>
               <p:cNvPr id="25" name="Content Placeholder 2">
@@ -10897,8 +10948,8 @@
           </a:p>
         </p:txBody>
       </p:sp>
-      <mc:AlternateContent xmlns:mc="http://schemas.openxmlformats.org/markup-compatibility/2006">
-        <mc:Choice xmlns:a14="http://schemas.microsoft.com/office/drawing/2010/main" Requires="a14">
+      <mc:AlternateContent xmlns:mc="http://schemas.openxmlformats.org/markup-compatibility/2006" xmlns:a14="http://schemas.microsoft.com/office/drawing/2010/main">
+        <mc:Choice Requires="a14">
           <p:sp>
             <p:nvSpPr>
               <p:cNvPr id="3" name="Content Placeholder 2">
@@ -12043,7 +12094,7 @@
             </p:txBody>
           </p:sp>
         </mc:Choice>
-        <mc:Fallback>
+        <mc:Fallback xmlns="">
           <p:sp>
             <p:nvSpPr>
               <p:cNvPr id="3" name="Content Placeholder 2">
@@ -15110,8 +15161,8 @@
           </a:p>
         </p:txBody>
       </p:sp>
-      <mc:AlternateContent xmlns:mc="http://schemas.openxmlformats.org/markup-compatibility/2006">
-        <mc:Choice xmlns:a14="http://schemas.microsoft.com/office/drawing/2010/main" Requires="a14">
+      <mc:AlternateContent xmlns:mc="http://schemas.openxmlformats.org/markup-compatibility/2006" xmlns:a14="http://schemas.microsoft.com/office/drawing/2010/main">
+        <mc:Choice Requires="a14">
           <p:sp>
             <p:nvSpPr>
               <p:cNvPr id="3" name="Content Placeholder 2">
@@ -15209,7 +15260,7 @@
             </p:txBody>
           </p:sp>
         </mc:Choice>
-        <mc:Fallback>
+        <mc:Fallback xmlns="">
           <p:sp>
             <p:nvSpPr>
               <p:cNvPr id="3" name="Content Placeholder 2">
@@ -18543,8 +18594,8 @@
           </a:p>
         </p:txBody>
       </p:sp>
-      <mc:AlternateContent xmlns:mc="http://schemas.openxmlformats.org/markup-compatibility/2006">
-        <mc:Choice xmlns:a14="http://schemas.microsoft.com/office/drawing/2010/main" Requires="a14">
+      <mc:AlternateContent xmlns:mc="http://schemas.openxmlformats.org/markup-compatibility/2006" xmlns:a14="http://schemas.microsoft.com/office/drawing/2010/main">
+        <mc:Choice Requires="a14">
           <p:sp>
             <p:nvSpPr>
               <p:cNvPr id="3" name="Content Placeholder 2">
@@ -18733,7 +18784,7 @@
             </p:txBody>
           </p:sp>
         </mc:Choice>
-        <mc:Fallback>
+        <mc:Fallback xmlns="">
           <p:sp>
             <p:nvSpPr>
               <p:cNvPr id="3" name="Content Placeholder 2">
@@ -18896,8 +18947,8 @@
           </a:p>
         </p:txBody>
       </p:sp>
-      <mc:AlternateContent xmlns:mc="http://schemas.openxmlformats.org/markup-compatibility/2006">
-        <mc:Choice xmlns:a14="http://schemas.microsoft.com/office/drawing/2010/main" Requires="a14">
+      <mc:AlternateContent xmlns:mc="http://schemas.openxmlformats.org/markup-compatibility/2006" xmlns:a14="http://schemas.microsoft.com/office/drawing/2010/main">
+        <mc:Choice Requires="a14">
           <p:sp>
             <p:nvSpPr>
               <p:cNvPr id="3" name="Content Placeholder 2">
@@ -19410,7 +19461,7 @@
             </p:txBody>
           </p:sp>
         </mc:Choice>
-        <mc:Fallback>
+        <mc:Fallback xmlns="">
           <p:sp>
             <p:nvSpPr>
               <p:cNvPr id="3" name="Content Placeholder 2">
@@ -20020,8 +20071,8 @@
           </a:p>
         </p:txBody>
       </p:sp>
-      <mc:AlternateContent xmlns:mc="http://schemas.openxmlformats.org/markup-compatibility/2006">
-        <mc:Choice xmlns:a14="http://schemas.microsoft.com/office/drawing/2010/main" Requires="a14">
+      <mc:AlternateContent xmlns:mc="http://schemas.openxmlformats.org/markup-compatibility/2006" xmlns:a14="http://schemas.microsoft.com/office/drawing/2010/main">
+        <mc:Choice Requires="a14">
           <p:sp>
             <p:nvSpPr>
               <p:cNvPr id="3" name="Content Placeholder 2">
@@ -21511,7 +21562,7 @@
             </p:txBody>
           </p:sp>
         </mc:Choice>
-        <mc:Fallback>
+        <mc:Fallback xmlns="">
           <p:sp>
             <p:nvSpPr>
               <p:cNvPr id="3" name="Content Placeholder 2">
@@ -22084,8 +22135,8 @@
           </a:p>
         </p:txBody>
       </p:sp>
-      <mc:AlternateContent xmlns:mc="http://schemas.openxmlformats.org/markup-compatibility/2006">
-        <mc:Choice xmlns:a14="http://schemas.microsoft.com/office/drawing/2010/main" Requires="a14">
+      <mc:AlternateContent xmlns:mc="http://schemas.openxmlformats.org/markup-compatibility/2006" xmlns:a14="http://schemas.microsoft.com/office/drawing/2010/main">
+        <mc:Choice Requires="a14">
           <p:sp>
             <p:nvSpPr>
               <p:cNvPr id="3" name="Content Placeholder 2">
@@ -22348,7 +22399,7 @@
             </p:txBody>
           </p:sp>
         </mc:Choice>
-        <mc:Fallback>
+        <mc:Fallback xmlns="">
           <p:sp>
             <p:nvSpPr>
               <p:cNvPr id="3" name="Content Placeholder 2">
@@ -25450,8 +25501,8 @@
           <a:chExt cx="0" cy="0"/>
         </a:xfrm>
       </p:grpSpPr>
-      <mc:AlternateContent xmlns:mc="http://schemas.openxmlformats.org/markup-compatibility/2006">
-        <mc:Choice xmlns:a14="http://schemas.microsoft.com/office/drawing/2010/main" Requires="a14">
+      <mc:AlternateContent xmlns:mc="http://schemas.openxmlformats.org/markup-compatibility/2006" xmlns:a14="http://schemas.microsoft.com/office/drawing/2010/main">
+        <mc:Choice Requires="a14">
           <p:sp>
             <p:nvSpPr>
               <p:cNvPr id="2" name="Title 1">
@@ -25513,7 +25564,7 @@
             </p:txBody>
           </p:sp>
         </mc:Choice>
-        <mc:Fallback>
+        <mc:Fallback xmlns="">
           <p:sp>
             <p:nvSpPr>
               <p:cNvPr id="2" name="Title 1">
@@ -25553,8 +25604,8 @@
           </p:sp>
         </mc:Fallback>
       </mc:AlternateContent>
-      <mc:AlternateContent xmlns:mc="http://schemas.openxmlformats.org/markup-compatibility/2006">
-        <mc:Choice xmlns:a14="http://schemas.microsoft.com/office/drawing/2010/main" Requires="a14">
+      <mc:AlternateContent xmlns:mc="http://schemas.openxmlformats.org/markup-compatibility/2006" xmlns:a14="http://schemas.microsoft.com/office/drawing/2010/main">
+        <mc:Choice Requires="a14">
           <p:sp>
             <p:nvSpPr>
               <p:cNvPr id="3" name="Content Placeholder 2">
@@ -26694,7 +26745,7 @@
             </p:txBody>
           </p:sp>
         </mc:Choice>
-        <mc:Fallback>
+        <mc:Fallback xmlns="">
           <p:sp>
             <p:nvSpPr>
               <p:cNvPr id="3" name="Content Placeholder 2">
@@ -27998,8 +28049,8 @@
           </a:p>
         </p:txBody>
       </p:sp>
-      <mc:AlternateContent xmlns:mc="http://schemas.openxmlformats.org/markup-compatibility/2006">
-        <mc:Choice xmlns:a14="http://schemas.microsoft.com/office/drawing/2010/main" Requires="a14">
+      <mc:AlternateContent xmlns:mc="http://schemas.openxmlformats.org/markup-compatibility/2006" xmlns:a14="http://schemas.microsoft.com/office/drawing/2010/main">
+        <mc:Choice Requires="a14">
           <p:sp>
             <p:nvSpPr>
               <p:cNvPr id="3" name="Content Placeholder 2">
@@ -28759,7 +28810,7 @@
             </p:txBody>
           </p:sp>
         </mc:Choice>
-        <mc:Fallback>
+        <mc:Fallback xmlns="">
           <p:sp>
             <p:nvSpPr>
               <p:cNvPr id="3" name="Content Placeholder 2">

--- a/slides/Lecture_Chapter04.pptx
+++ b/slides/Lecture_Chapter04.pptx
@@ -23,11 +23,12 @@
     <p:sldId id="378" r:id="rId17"/>
     <p:sldId id="379" r:id="rId18"/>
     <p:sldId id="382" r:id="rId19"/>
-    <p:sldId id="383" r:id="rId20"/>
-    <p:sldId id="384" r:id="rId21"/>
-    <p:sldId id="385" r:id="rId22"/>
-    <p:sldId id="386" r:id="rId23"/>
-    <p:sldId id="387" r:id="rId24"/>
+    <p:sldId id="479" r:id="rId20"/>
+    <p:sldId id="383" r:id="rId21"/>
+    <p:sldId id="384" r:id="rId22"/>
+    <p:sldId id="385" r:id="rId23"/>
+    <p:sldId id="386" r:id="rId24"/>
+    <p:sldId id="387" r:id="rId25"/>
   </p:sldIdLst>
   <p:sldSz cx="12192000" cy="6858000"/>
   <p:notesSz cx="6858000" cy="9144000"/>
@@ -165,6 +166,7 @@
             <p14:sldId id="378"/>
             <p14:sldId id="379"/>
             <p14:sldId id="382"/>
+            <p14:sldId id="479"/>
             <p14:sldId id="383"/>
           </p14:sldIdLst>
         </p14:section>
@@ -336,7 +338,7 @@
           <a:p>
             <a:fld id="{3E22BF2E-04DA-469E-97C5-BB68A0368813}" type="datetimeFigureOut">
               <a:rPr lang="en-US" smtClean="0"/>
-              <a:t>2/3/2026</a:t>
+              <a:t>2/4/2026</a:t>
             </a:fld>
             <a:endParaRPr lang="en-US"/>
           </a:p>
@@ -534,7 +536,7 @@
           <a:p>
             <a:fld id="{3E22BF2E-04DA-469E-97C5-BB68A0368813}" type="datetimeFigureOut">
               <a:rPr lang="en-US" smtClean="0"/>
-              <a:t>2/3/2026</a:t>
+              <a:t>2/4/2026</a:t>
             </a:fld>
             <a:endParaRPr lang="en-US"/>
           </a:p>
@@ -742,7 +744,7 @@
           <a:p>
             <a:fld id="{3E22BF2E-04DA-469E-97C5-BB68A0368813}" type="datetimeFigureOut">
               <a:rPr lang="en-US" smtClean="0"/>
-              <a:t>2/3/2026</a:t>
+              <a:t>2/4/2026</a:t>
             </a:fld>
             <a:endParaRPr lang="en-US"/>
           </a:p>
@@ -950,7 +952,7 @@
           <a:p>
             <a:fld id="{3E22BF2E-04DA-469E-97C5-BB68A0368813}" type="datetimeFigureOut">
               <a:rPr lang="en-US" smtClean="0"/>
-              <a:t>2/3/2026</a:t>
+              <a:t>2/4/2026</a:t>
             </a:fld>
             <a:endParaRPr lang="en-US"/>
           </a:p>
@@ -1225,7 +1227,7 @@
           <a:p>
             <a:fld id="{3E22BF2E-04DA-469E-97C5-BB68A0368813}" type="datetimeFigureOut">
               <a:rPr lang="en-US" smtClean="0"/>
-              <a:t>2/3/2026</a:t>
+              <a:t>2/4/2026</a:t>
             </a:fld>
             <a:endParaRPr lang="en-US"/>
           </a:p>
@@ -1490,7 +1492,7 @@
           <a:p>
             <a:fld id="{3E22BF2E-04DA-469E-97C5-BB68A0368813}" type="datetimeFigureOut">
               <a:rPr lang="en-US" smtClean="0"/>
-              <a:t>2/3/2026</a:t>
+              <a:t>2/4/2026</a:t>
             </a:fld>
             <a:endParaRPr lang="en-US"/>
           </a:p>
@@ -1902,7 +1904,7 @@
           <a:p>
             <a:fld id="{3E22BF2E-04DA-469E-97C5-BB68A0368813}" type="datetimeFigureOut">
               <a:rPr lang="en-US" smtClean="0"/>
-              <a:t>2/3/2026</a:t>
+              <a:t>2/4/2026</a:t>
             </a:fld>
             <a:endParaRPr lang="en-US"/>
           </a:p>
@@ -2043,7 +2045,7 @@
           <a:p>
             <a:fld id="{3E22BF2E-04DA-469E-97C5-BB68A0368813}" type="datetimeFigureOut">
               <a:rPr lang="en-US" smtClean="0"/>
-              <a:t>2/3/2026</a:t>
+              <a:t>2/4/2026</a:t>
             </a:fld>
             <a:endParaRPr lang="en-US"/>
           </a:p>
@@ -2156,7 +2158,7 @@
           <a:p>
             <a:fld id="{3E22BF2E-04DA-469E-97C5-BB68A0368813}" type="datetimeFigureOut">
               <a:rPr lang="en-US" smtClean="0"/>
-              <a:t>2/3/2026</a:t>
+              <a:t>2/4/2026</a:t>
             </a:fld>
             <a:endParaRPr lang="en-US"/>
           </a:p>
@@ -2467,7 +2469,7 @@
           <a:p>
             <a:fld id="{3E22BF2E-04DA-469E-97C5-BB68A0368813}" type="datetimeFigureOut">
               <a:rPr lang="en-US" smtClean="0"/>
-              <a:t>2/3/2026</a:t>
+              <a:t>2/4/2026</a:t>
             </a:fld>
             <a:endParaRPr lang="en-US"/>
           </a:p>
@@ -2755,7 +2757,7 @@
           <a:p>
             <a:fld id="{3E22BF2E-04DA-469E-97C5-BB68A0368813}" type="datetimeFigureOut">
               <a:rPr lang="en-US" smtClean="0"/>
-              <a:t>2/3/2026</a:t>
+              <a:t>2/4/2026</a:t>
             </a:fld>
             <a:endParaRPr lang="en-US"/>
           </a:p>
@@ -2996,7 +2998,7 @@
           <a:p>
             <a:fld id="{3E22BF2E-04DA-469E-97C5-BB68A0368813}" type="datetimeFigureOut">
               <a:rPr lang="en-US" smtClean="0"/>
-              <a:t>2/3/2026</a:t>
+              <a:t>2/4/2026</a:t>
             </a:fld>
             <a:endParaRPr lang="en-US"/>
           </a:p>
@@ -6834,7 +6836,7 @@
             <p:spPr/>
             <p:txBody>
               <a:bodyPr>
-                <a:normAutofit fontScale="85000" lnSpcReduction="20000"/>
+                <a:normAutofit fontScale="77500" lnSpcReduction="20000"/>
               </a:bodyPr>
               <a:lstStyle/>
               <a:p>
@@ -6848,380 +6850,19 @@
                 </a:r>
               </a:p>
               <a:p>
-                <a:r>
-                  <a:rPr lang="en-US" b="1" dirty="0"/>
-                  <a:t>Policy improvement theorem</a:t>
-                </a:r>
-                <a:r>
-                  <a:rPr lang="en-US" dirty="0"/>
-                  <a:t>: If </a:t>
-                </a:r>
+                <a:endParaRPr lang="en-US" dirty="0"/>
               </a:p>
               <a:p>
-                <a:pPr marL="0" indent="0" algn="ctr">
-                  <a:buNone/>
-                </a:pPr>
-                <a14:m>
-                  <m:oMath xmlns:m="http://schemas.openxmlformats.org/officeDocument/2006/math">
-                    <m:sSub>
-                      <m:sSubPr>
-                        <m:ctrlPr>
-                          <a:rPr lang="en-US" b="0" i="1" smtClean="0">
-                            <a:latin typeface="Cambria Math" panose="02040503050406030204" pitchFamily="18" charset="0"/>
-                          </a:rPr>
-                        </m:ctrlPr>
-                      </m:sSubPr>
-                      <m:e>
-                        <m:r>
-                          <a:rPr lang="en-US" b="0" i="1" smtClean="0">
-                            <a:latin typeface="Cambria Math" panose="02040503050406030204" pitchFamily="18" charset="0"/>
-                          </a:rPr>
-                          <m:t>𝑞</m:t>
-                        </m:r>
-                      </m:e>
-                      <m:sub>
-                        <m:r>
-                          <a:rPr lang="en-US" b="0" i="1" smtClean="0">
-                            <a:latin typeface="Cambria Math" panose="02040503050406030204" pitchFamily="18" charset="0"/>
-                          </a:rPr>
-                          <m:t>𝜋</m:t>
-                        </m:r>
-                      </m:sub>
-                    </m:sSub>
-                    <m:d>
-                      <m:dPr>
-                        <m:ctrlPr>
-                          <a:rPr lang="en-US" b="0" i="1" smtClean="0">
-                            <a:latin typeface="Cambria Math" panose="02040503050406030204" pitchFamily="18" charset="0"/>
-                          </a:rPr>
-                        </m:ctrlPr>
-                      </m:dPr>
-                      <m:e>
-                        <m:r>
-                          <a:rPr lang="en-US" b="0" i="1" smtClean="0">
-                            <a:latin typeface="Cambria Math" panose="02040503050406030204" pitchFamily="18" charset="0"/>
-                          </a:rPr>
-                          <m:t>𝑠</m:t>
-                        </m:r>
-                        <m:r>
-                          <a:rPr lang="en-US" b="0" i="1" smtClean="0">
-                            <a:latin typeface="Cambria Math" panose="02040503050406030204" pitchFamily="18" charset="0"/>
-                          </a:rPr>
-                          <m:t>, </m:t>
-                        </m:r>
-                        <m:sSup>
-                          <m:sSupPr>
-                            <m:ctrlPr>
-                              <a:rPr lang="en-US" b="0" i="1" smtClean="0">
-                                <a:latin typeface="Cambria Math" panose="02040503050406030204" pitchFamily="18" charset="0"/>
-                              </a:rPr>
-                            </m:ctrlPr>
-                          </m:sSupPr>
-                          <m:e>
-                            <m:r>
-                              <a:rPr lang="en-US" b="0" i="1" smtClean="0">
-                                <a:latin typeface="Cambria Math" panose="02040503050406030204" pitchFamily="18" charset="0"/>
-                              </a:rPr>
-                              <m:t>𝜋</m:t>
-                            </m:r>
-                          </m:e>
-                          <m:sup>
-                            <m:r>
-                              <a:rPr lang="en-US" b="0" i="1" smtClean="0">
-                                <a:latin typeface="Cambria Math" panose="02040503050406030204" pitchFamily="18" charset="0"/>
-                              </a:rPr>
-                              <m:t>′</m:t>
-                            </m:r>
-                          </m:sup>
-                        </m:sSup>
-                        <m:d>
-                          <m:dPr>
-                            <m:ctrlPr>
-                              <a:rPr lang="en-US" b="0" i="1" smtClean="0">
-                                <a:latin typeface="Cambria Math" panose="02040503050406030204" pitchFamily="18" charset="0"/>
-                              </a:rPr>
-                            </m:ctrlPr>
-                          </m:dPr>
-                          <m:e>
-                            <m:r>
-                              <a:rPr lang="en-US" b="0" i="1" smtClean="0">
-                                <a:latin typeface="Cambria Math" panose="02040503050406030204" pitchFamily="18" charset="0"/>
-                              </a:rPr>
-                              <m:t>𝑠</m:t>
-                            </m:r>
-                          </m:e>
-                        </m:d>
-                      </m:e>
-                    </m:d>
-                    <m:r>
-                      <a:rPr lang="en-US" b="0" i="1" smtClean="0">
-                        <a:latin typeface="Cambria Math" panose="02040503050406030204" pitchFamily="18" charset="0"/>
-                      </a:rPr>
-                      <m:t>≥</m:t>
-                    </m:r>
-                    <m:sSub>
-                      <m:sSubPr>
-                        <m:ctrlPr>
-                          <a:rPr lang="en-US" b="0" i="1" smtClean="0">
-                            <a:latin typeface="Cambria Math" panose="02040503050406030204" pitchFamily="18" charset="0"/>
-                          </a:rPr>
-                        </m:ctrlPr>
-                      </m:sSubPr>
-                      <m:e>
-                        <m:r>
-                          <a:rPr lang="en-US" b="0" i="1" smtClean="0">
-                            <a:latin typeface="Cambria Math" panose="02040503050406030204" pitchFamily="18" charset="0"/>
-                          </a:rPr>
-                          <m:t>𝑣</m:t>
-                        </m:r>
-                      </m:e>
-                      <m:sub>
-                        <m:r>
-                          <a:rPr lang="en-US" b="0" i="1" smtClean="0">
-                            <a:latin typeface="Cambria Math" panose="02040503050406030204" pitchFamily="18" charset="0"/>
-                          </a:rPr>
-                          <m:t>𝜋</m:t>
-                        </m:r>
-                      </m:sub>
-                    </m:sSub>
-                    <m:d>
-                      <m:dPr>
-                        <m:ctrlPr>
-                          <a:rPr lang="en-US" b="0" i="1" smtClean="0">
-                            <a:latin typeface="Cambria Math" panose="02040503050406030204" pitchFamily="18" charset="0"/>
-                          </a:rPr>
-                        </m:ctrlPr>
-                      </m:dPr>
-                      <m:e>
-                        <m:r>
-                          <a:rPr lang="en-US" b="0" i="1" smtClean="0">
-                            <a:latin typeface="Cambria Math" panose="02040503050406030204" pitchFamily="18" charset="0"/>
-                          </a:rPr>
-                          <m:t>𝑠</m:t>
-                        </m:r>
-                      </m:e>
-                    </m:d>
-                    <m:r>
-                      <a:rPr lang="en-US" b="0" i="1" smtClean="0">
-                        <a:latin typeface="Cambria Math" panose="02040503050406030204" pitchFamily="18" charset="0"/>
-                      </a:rPr>
-                      <m:t>  ∀</m:t>
-                    </m:r>
-                    <m:r>
-                      <a:rPr lang="en-US" b="0" i="1" smtClean="0">
-                        <a:latin typeface="Cambria Math" panose="02040503050406030204" pitchFamily="18" charset="0"/>
-                      </a:rPr>
-                      <m:t>𝑠</m:t>
-                    </m:r>
-                    <m:r>
-                      <a:rPr lang="en-US" b="0" i="1" smtClean="0">
-                        <a:latin typeface="Cambria Math" panose="02040503050406030204" pitchFamily="18" charset="0"/>
-                      </a:rPr>
-                      <m:t>∈</m:t>
-                    </m:r>
-                    <m:r>
-                      <a:rPr lang="en-US" b="0" i="1" smtClean="0">
-                        <a:latin typeface="Cambria Math" panose="02040503050406030204" pitchFamily="18" charset="0"/>
-                        <a:ea typeface="Cambria Math" panose="02040503050406030204" pitchFamily="18" charset="0"/>
-                      </a:rPr>
-                      <m:t>𝒮</m:t>
-                    </m:r>
-                  </m:oMath>
-                </a14:m>
-                <a:r>
-                  <a:rPr lang="en-US" dirty="0"/>
-                  <a:t> </a:t>
-                </a:r>
+                <a:endParaRPr lang="en-US" dirty="0"/>
               </a:p>
               <a:p>
-                <a:pPr marL="0" indent="0">
-                  <a:buNone/>
-                </a:pPr>
-                <a:r>
-                  <a:rPr lang="en-US" dirty="0"/>
-                  <a:t>	then </a:t>
-                </a:r>
-                <a14:m>
-                  <m:oMath xmlns:m="http://schemas.openxmlformats.org/officeDocument/2006/math">
-                    <m:r>
-                      <a:rPr lang="en-US" b="0" i="1" smtClean="0">
-                        <a:latin typeface="Cambria Math" panose="02040503050406030204" pitchFamily="18" charset="0"/>
-                      </a:rPr>
-                      <m:t>𝜋</m:t>
-                    </m:r>
-                    <m:r>
-                      <a:rPr lang="en-US" b="0" i="1" smtClean="0">
-                        <a:latin typeface="Cambria Math" panose="02040503050406030204" pitchFamily="18" charset="0"/>
-                      </a:rPr>
-                      <m:t>′</m:t>
-                    </m:r>
-                  </m:oMath>
-                </a14:m>
-                <a:r>
-                  <a:rPr lang="en-US" dirty="0"/>
-                  <a:t> is a least as good or better than </a:t>
-                </a:r>
-                <a14:m>
-                  <m:oMath xmlns:m="http://schemas.openxmlformats.org/officeDocument/2006/math">
-                    <m:r>
-                      <a:rPr lang="en-US" b="0" i="1" smtClean="0">
-                        <a:latin typeface="Cambria Math" panose="02040503050406030204" pitchFamily="18" charset="0"/>
-                      </a:rPr>
-                      <m:t>𝜋</m:t>
-                    </m:r>
-                  </m:oMath>
-                </a14:m>
-                <a:r>
-                  <a:rPr lang="en-US" dirty="0"/>
-                  <a:t>, i.e., </a:t>
-                </a:r>
+                <a:endParaRPr lang="en-US" dirty="0"/>
               </a:p>
               <a:p>
-                <a:pPr marL="0" indent="0" algn="ctr">
-                  <a:buNone/>
-                </a:pPr>
-                <a14:m>
-                  <m:oMath xmlns:m="http://schemas.openxmlformats.org/officeDocument/2006/math">
-                    <m:sSub>
-                      <m:sSubPr>
-                        <m:ctrlPr>
-                          <a:rPr lang="en-US" b="0" i="1" smtClean="0">
-                            <a:latin typeface="Cambria Math" panose="02040503050406030204" pitchFamily="18" charset="0"/>
-                          </a:rPr>
-                        </m:ctrlPr>
-                      </m:sSubPr>
-                      <m:e>
-                        <m:r>
-                          <a:rPr lang="en-US" b="0" i="1" smtClean="0">
-                            <a:latin typeface="Cambria Math" panose="02040503050406030204" pitchFamily="18" charset="0"/>
-                          </a:rPr>
-                          <m:t>𝑣</m:t>
-                        </m:r>
-                      </m:e>
-                      <m:sub>
-                        <m:sSup>
-                          <m:sSupPr>
-                            <m:ctrlPr>
-                              <a:rPr lang="en-US" b="0" i="1" smtClean="0">
-                                <a:latin typeface="Cambria Math" panose="02040503050406030204" pitchFamily="18" charset="0"/>
-                              </a:rPr>
-                            </m:ctrlPr>
-                          </m:sSupPr>
-                          <m:e>
-                            <m:r>
-                              <a:rPr lang="en-US" b="0" i="1" smtClean="0">
-                                <a:latin typeface="Cambria Math" panose="02040503050406030204" pitchFamily="18" charset="0"/>
-                              </a:rPr>
-                              <m:t>𝜋</m:t>
-                            </m:r>
-                          </m:e>
-                          <m:sup>
-                            <m:r>
-                              <a:rPr lang="en-US" b="0" i="1" smtClean="0">
-                                <a:latin typeface="Cambria Math" panose="02040503050406030204" pitchFamily="18" charset="0"/>
-                              </a:rPr>
-                              <m:t>′</m:t>
-                            </m:r>
-                          </m:sup>
-                        </m:sSup>
-                      </m:sub>
-                    </m:sSub>
-                    <m:d>
-                      <m:dPr>
-                        <m:ctrlPr>
-                          <a:rPr lang="en-US" b="0" i="1" smtClean="0">
-                            <a:latin typeface="Cambria Math" panose="02040503050406030204" pitchFamily="18" charset="0"/>
-                          </a:rPr>
-                        </m:ctrlPr>
-                      </m:dPr>
-                      <m:e>
-                        <m:r>
-                          <a:rPr lang="en-US" b="0" i="1" smtClean="0">
-                            <a:latin typeface="Cambria Math" panose="02040503050406030204" pitchFamily="18" charset="0"/>
-                          </a:rPr>
-                          <m:t>𝑠</m:t>
-                        </m:r>
-                      </m:e>
-                    </m:d>
-                    <m:r>
-                      <a:rPr lang="en-US" b="0" i="1" smtClean="0">
-                        <a:latin typeface="Cambria Math" panose="02040503050406030204" pitchFamily="18" charset="0"/>
-                      </a:rPr>
-                      <m:t>≥</m:t>
-                    </m:r>
-                    <m:sSub>
-                      <m:sSubPr>
-                        <m:ctrlPr>
-                          <a:rPr lang="en-US" b="0" i="1" smtClean="0">
-                            <a:latin typeface="Cambria Math" panose="02040503050406030204" pitchFamily="18" charset="0"/>
-                          </a:rPr>
-                        </m:ctrlPr>
-                      </m:sSubPr>
-                      <m:e>
-                        <m:r>
-                          <a:rPr lang="en-US" b="0" i="1" smtClean="0">
-                            <a:latin typeface="Cambria Math" panose="02040503050406030204" pitchFamily="18" charset="0"/>
-                          </a:rPr>
-                          <m:t>𝑣</m:t>
-                        </m:r>
-                      </m:e>
-                      <m:sub>
-                        <m:r>
-                          <a:rPr lang="en-US" b="0" i="1" smtClean="0">
-                            <a:latin typeface="Cambria Math" panose="02040503050406030204" pitchFamily="18" charset="0"/>
-                          </a:rPr>
-                          <m:t>𝜋</m:t>
-                        </m:r>
-                      </m:sub>
-                    </m:sSub>
-                    <m:d>
-                      <m:dPr>
-                        <m:ctrlPr>
-                          <a:rPr lang="en-US" b="0" i="1" smtClean="0">
-                            <a:latin typeface="Cambria Math" panose="02040503050406030204" pitchFamily="18" charset="0"/>
-                          </a:rPr>
-                        </m:ctrlPr>
-                      </m:dPr>
-                      <m:e>
-                        <m:r>
-                          <a:rPr lang="en-US" b="0" i="1" smtClean="0">
-                            <a:latin typeface="Cambria Math" panose="02040503050406030204" pitchFamily="18" charset="0"/>
-                          </a:rPr>
-                          <m:t>𝑠</m:t>
-                        </m:r>
-                      </m:e>
-                    </m:d>
-                    <m:r>
-                      <a:rPr lang="en-US" b="0" i="1" smtClean="0">
-                        <a:latin typeface="Cambria Math" panose="02040503050406030204" pitchFamily="18" charset="0"/>
-                      </a:rPr>
-                      <m:t>  ∀</m:t>
-                    </m:r>
-                    <m:r>
-                      <a:rPr lang="en-US" b="0" i="1" smtClean="0">
-                        <a:latin typeface="Cambria Math" panose="02040503050406030204" pitchFamily="18" charset="0"/>
-                      </a:rPr>
-                      <m:t>𝑠</m:t>
-                    </m:r>
-                    <m:r>
-                      <a:rPr lang="en-US" b="0" i="1" smtClean="0">
-                        <a:latin typeface="Cambria Math" panose="02040503050406030204" pitchFamily="18" charset="0"/>
-                      </a:rPr>
-                      <m:t>∈</m:t>
-                    </m:r>
-                    <m:r>
-                      <a:rPr lang="en-US" b="0" i="1" smtClean="0">
-                        <a:latin typeface="Cambria Math" panose="02040503050406030204" pitchFamily="18" charset="0"/>
-                        <a:ea typeface="Cambria Math" panose="02040503050406030204" pitchFamily="18" charset="0"/>
-                      </a:rPr>
-                      <m:t>𝒮</m:t>
-                    </m:r>
-                  </m:oMath>
-                </a14:m>
-                <a:r>
-                  <a:rPr lang="en-US" dirty="0"/>
-                  <a:t>. </a:t>
-                </a:r>
+                <a:endParaRPr lang="en-US" dirty="0"/>
+              </a:p>
+              <a:p>
+                <a:endParaRPr lang="en-US" dirty="0"/>
               </a:p>
               <a:p>
                 <a:endParaRPr lang="en-US" dirty="0"/>
@@ -7612,7 +7253,7 @@
               <a:blipFill>
                 <a:blip r:embed="rId2"/>
                 <a:stretch>
-                  <a:fillRect l="-812" t="-2806"/>
+                  <a:fillRect l="-696" t="-2551"/>
                 </a:stretch>
               </a:blipFill>
             </p:spPr>
@@ -7631,60 +7272,468 @@
           </p:sp>
         </mc:Fallback>
       </mc:AlternateContent>
-      <p:sp>
-        <p:nvSpPr>
-          <p:cNvPr id="2" name="Rectangle 1">
-            <a:extLst>
-              <a:ext uri="{FF2B5EF4-FFF2-40B4-BE49-F238E27FC236}">
-                <a16:creationId xmlns:a16="http://schemas.microsoft.com/office/drawing/2014/main" id="{287F84E5-3C25-C8BE-2952-1F80F13AB674}"/>
-              </a:ext>
-            </a:extLst>
-          </p:cNvPr>
-          <p:cNvSpPr/>
-          <p:nvPr/>
-        </p:nvSpPr>
-        <p:spPr>
-          <a:xfrm>
-            <a:off x="800463" y="1731708"/>
-            <a:ext cx="7624582" cy="1758112"/>
-          </a:xfrm>
-          <a:prstGeom prst="rect">
-            <a:avLst/>
-          </a:prstGeom>
-          <a:noFill/>
-          <a:ln w="19050" cap="flat" cmpd="sng" algn="ctr">
-            <a:solidFill>
-              <a:schemeClr val="accent2"/>
-            </a:solidFill>
-            <a:prstDash val="solid"/>
-            <a:round/>
-            <a:headEnd type="none" w="med" len="med"/>
-            <a:tailEnd type="none" w="med" len="med"/>
-          </a:ln>
-        </p:spPr>
-        <p:style>
-          <a:lnRef idx="0">
-            <a:scrgbClr r="0" g="0" b="0"/>
-          </a:lnRef>
-          <a:fillRef idx="0">
-            <a:scrgbClr r="0" g="0" b="0"/>
-          </a:fillRef>
-          <a:effectRef idx="0">
-            <a:scrgbClr r="0" g="0" b="0"/>
-          </a:effectRef>
-          <a:fontRef idx="minor">
-            <a:schemeClr val="accent2"/>
-          </a:fontRef>
-        </p:style>
-        <p:txBody>
-          <a:bodyPr rtlCol="0" anchor="ctr"/>
-          <a:lstStyle/>
-          <a:p>
-            <a:pPr algn="ctr"/>
-            <a:endParaRPr lang="en-US"/>
-          </a:p>
-        </p:txBody>
-      </p:sp>
+      <mc:AlternateContent xmlns:mc="http://schemas.openxmlformats.org/markup-compatibility/2006">
+        <mc:Choice xmlns:a14="http://schemas.microsoft.com/office/drawing/2010/main" Requires="a14">
+          <p:sp>
+            <p:nvSpPr>
+              <p:cNvPr id="6" name="TextBox 5">
+                <a:extLst>
+                  <a:ext uri="{FF2B5EF4-FFF2-40B4-BE49-F238E27FC236}">
+                    <a16:creationId xmlns:a16="http://schemas.microsoft.com/office/drawing/2014/main" id="{BFC66EED-553B-0E0F-6F59-A9AF7183D9BE}"/>
+                  </a:ext>
+                </a:extLst>
+              </p:cNvPr>
+              <p:cNvSpPr txBox="1"/>
+              <p:nvPr/>
+            </p:nvSpPr>
+            <p:spPr>
+              <a:xfrm>
+                <a:off x="2033107" y="1949537"/>
+                <a:ext cx="8125786" cy="1366721"/>
+              </a:xfrm>
+              <a:prstGeom prst="rect">
+                <a:avLst/>
+              </a:prstGeom>
+            </p:spPr>
+            <p:style>
+              <a:lnRef idx="2">
+                <a:schemeClr val="accent2"/>
+              </a:lnRef>
+              <a:fillRef idx="1">
+                <a:schemeClr val="lt1"/>
+              </a:fillRef>
+              <a:effectRef idx="0">
+                <a:schemeClr val="accent2"/>
+              </a:effectRef>
+              <a:fontRef idx="minor">
+                <a:schemeClr val="dk1"/>
+              </a:fontRef>
+            </p:style>
+            <p:txBody>
+              <a:bodyPr wrap="square">
+                <a:spAutoFit/>
+              </a:bodyPr>
+              <a:lstStyle/>
+              <a:p>
+                <a:pPr algn="ctr"/>
+                <a:r>
+                  <a:rPr lang="en-US" sz="2000" b="1" dirty="0"/>
+                  <a:t>Policy Improvement Theorem</a:t>
+                </a:r>
+              </a:p>
+              <a:p>
+                <a:endParaRPr lang="en-US" sz="2000" dirty="0"/>
+              </a:p>
+              <a:p>
+                <a:r>
+                  <a:rPr lang="en-US" sz="2000" dirty="0"/>
+                  <a:t>If </a:t>
+                </a:r>
+                <a14:m>
+                  <m:oMath xmlns:m="http://schemas.openxmlformats.org/officeDocument/2006/math">
+                    <m:sSub>
+                      <m:sSubPr>
+                        <m:ctrlPr>
+                          <a:rPr lang="en-US" sz="2000" b="0" i="1" smtClean="0">
+                            <a:latin typeface="Cambria Math" panose="02040503050406030204" pitchFamily="18" charset="0"/>
+                          </a:rPr>
+                        </m:ctrlPr>
+                      </m:sSubPr>
+                      <m:e>
+                        <m:r>
+                          <a:rPr lang="en-US" sz="2000" b="0" i="1" smtClean="0">
+                            <a:latin typeface="Cambria Math" panose="02040503050406030204" pitchFamily="18" charset="0"/>
+                          </a:rPr>
+                          <m:t>𝑞</m:t>
+                        </m:r>
+                      </m:e>
+                      <m:sub>
+                        <m:r>
+                          <a:rPr lang="en-US" sz="2000" b="0" i="1" smtClean="0">
+                            <a:latin typeface="Cambria Math" panose="02040503050406030204" pitchFamily="18" charset="0"/>
+                          </a:rPr>
+                          <m:t>𝜋</m:t>
+                        </m:r>
+                      </m:sub>
+                    </m:sSub>
+                    <m:d>
+                      <m:dPr>
+                        <m:ctrlPr>
+                          <a:rPr lang="en-US" sz="2000" b="0" i="1" smtClean="0">
+                            <a:latin typeface="Cambria Math" panose="02040503050406030204" pitchFamily="18" charset="0"/>
+                          </a:rPr>
+                        </m:ctrlPr>
+                      </m:dPr>
+                      <m:e>
+                        <m:r>
+                          <a:rPr lang="en-US" sz="2000" b="0" i="1" smtClean="0">
+                            <a:latin typeface="Cambria Math" panose="02040503050406030204" pitchFamily="18" charset="0"/>
+                          </a:rPr>
+                          <m:t>𝑠</m:t>
+                        </m:r>
+                        <m:r>
+                          <a:rPr lang="en-US" sz="2000" b="0" i="1" smtClean="0">
+                            <a:latin typeface="Cambria Math" panose="02040503050406030204" pitchFamily="18" charset="0"/>
+                          </a:rPr>
+                          <m:t>, </m:t>
+                        </m:r>
+                        <m:sSup>
+                          <m:sSupPr>
+                            <m:ctrlPr>
+                              <a:rPr lang="en-US" sz="2000" b="0" i="1" smtClean="0">
+                                <a:latin typeface="Cambria Math" panose="02040503050406030204" pitchFamily="18" charset="0"/>
+                              </a:rPr>
+                            </m:ctrlPr>
+                          </m:sSupPr>
+                          <m:e>
+                            <m:r>
+                              <a:rPr lang="en-US" sz="2000" b="0" i="1" smtClean="0">
+                                <a:latin typeface="Cambria Math" panose="02040503050406030204" pitchFamily="18" charset="0"/>
+                              </a:rPr>
+                              <m:t>𝜋</m:t>
+                            </m:r>
+                          </m:e>
+                          <m:sup>
+                            <m:r>
+                              <a:rPr lang="en-US" sz="2000" b="0" i="1" smtClean="0">
+                                <a:latin typeface="Cambria Math" panose="02040503050406030204" pitchFamily="18" charset="0"/>
+                              </a:rPr>
+                              <m:t>′</m:t>
+                            </m:r>
+                          </m:sup>
+                        </m:sSup>
+                        <m:d>
+                          <m:dPr>
+                            <m:ctrlPr>
+                              <a:rPr lang="en-US" sz="2000" b="0" i="1" smtClean="0">
+                                <a:latin typeface="Cambria Math" panose="02040503050406030204" pitchFamily="18" charset="0"/>
+                              </a:rPr>
+                            </m:ctrlPr>
+                          </m:dPr>
+                          <m:e>
+                            <m:r>
+                              <a:rPr lang="en-US" sz="2000" b="0" i="1" smtClean="0">
+                                <a:latin typeface="Cambria Math" panose="02040503050406030204" pitchFamily="18" charset="0"/>
+                              </a:rPr>
+                              <m:t>𝑠</m:t>
+                            </m:r>
+                          </m:e>
+                        </m:d>
+                      </m:e>
+                    </m:d>
+                    <m:r>
+                      <a:rPr lang="en-US" sz="2000" b="0" i="1" smtClean="0">
+                        <a:latin typeface="Cambria Math" panose="02040503050406030204" pitchFamily="18" charset="0"/>
+                      </a:rPr>
+                      <m:t>≥</m:t>
+                    </m:r>
+                    <m:sSub>
+                      <m:sSubPr>
+                        <m:ctrlPr>
+                          <a:rPr lang="en-US" sz="2000" b="0" i="1" smtClean="0">
+                            <a:latin typeface="Cambria Math" panose="02040503050406030204" pitchFamily="18" charset="0"/>
+                          </a:rPr>
+                        </m:ctrlPr>
+                      </m:sSubPr>
+                      <m:e>
+                        <m:r>
+                          <a:rPr lang="en-US" sz="2000" b="0" i="1" smtClean="0">
+                            <a:latin typeface="Cambria Math" panose="02040503050406030204" pitchFamily="18" charset="0"/>
+                          </a:rPr>
+                          <m:t>𝑣</m:t>
+                        </m:r>
+                      </m:e>
+                      <m:sub>
+                        <m:r>
+                          <a:rPr lang="en-US" sz="2000" b="0" i="1" smtClean="0">
+                            <a:latin typeface="Cambria Math" panose="02040503050406030204" pitchFamily="18" charset="0"/>
+                          </a:rPr>
+                          <m:t>𝜋</m:t>
+                        </m:r>
+                      </m:sub>
+                    </m:sSub>
+                    <m:d>
+                      <m:dPr>
+                        <m:ctrlPr>
+                          <a:rPr lang="en-US" sz="2000" b="0" i="1" smtClean="0">
+                            <a:latin typeface="Cambria Math" panose="02040503050406030204" pitchFamily="18" charset="0"/>
+                          </a:rPr>
+                        </m:ctrlPr>
+                      </m:dPr>
+                      <m:e>
+                        <m:r>
+                          <a:rPr lang="en-US" sz="2000" b="0" i="1" smtClean="0">
+                            <a:latin typeface="Cambria Math" panose="02040503050406030204" pitchFamily="18" charset="0"/>
+                          </a:rPr>
+                          <m:t>𝑠</m:t>
+                        </m:r>
+                      </m:e>
+                    </m:d>
+                    <m:r>
+                      <a:rPr lang="en-US" sz="2000" b="0" i="1" smtClean="0">
+                        <a:latin typeface="Cambria Math" panose="02040503050406030204" pitchFamily="18" charset="0"/>
+                      </a:rPr>
+                      <m:t>  ∀</m:t>
+                    </m:r>
+                    <m:r>
+                      <a:rPr lang="en-US" sz="2000" b="0" i="1" smtClean="0">
+                        <a:latin typeface="Cambria Math" panose="02040503050406030204" pitchFamily="18" charset="0"/>
+                      </a:rPr>
+                      <m:t>𝑠</m:t>
+                    </m:r>
+                    <m:r>
+                      <a:rPr lang="en-US" sz="2000" b="0" i="1" smtClean="0">
+                        <a:latin typeface="Cambria Math" panose="02040503050406030204" pitchFamily="18" charset="0"/>
+                      </a:rPr>
+                      <m:t>∈</m:t>
+                    </m:r>
+                    <m:r>
+                      <a:rPr lang="en-US" sz="2000" b="0" i="1" smtClean="0">
+                        <a:latin typeface="Cambria Math" panose="02040503050406030204" pitchFamily="18" charset="0"/>
+                        <a:ea typeface="Cambria Math" panose="02040503050406030204" pitchFamily="18" charset="0"/>
+                      </a:rPr>
+                      <m:t>𝒮</m:t>
+                    </m:r>
+                  </m:oMath>
+                </a14:m>
+                <a:r>
+                  <a:rPr lang="en-US" sz="2000" dirty="0"/>
+                  <a:t> </a:t>
+                </a:r>
+              </a:p>
+              <a:p>
+                <a:pPr marL="0" indent="0">
+                  <a:buNone/>
+                </a:pPr>
+                <a:r>
+                  <a:rPr lang="en-US" sz="2000" dirty="0"/>
+                  <a:t>then </a:t>
+                </a:r>
+                <a14:m>
+                  <m:oMath xmlns:m="http://schemas.openxmlformats.org/officeDocument/2006/math">
+                    <m:r>
+                      <a:rPr lang="en-US" sz="2000" b="0" i="1" smtClean="0">
+                        <a:latin typeface="Cambria Math" panose="02040503050406030204" pitchFamily="18" charset="0"/>
+                      </a:rPr>
+                      <m:t>𝜋</m:t>
+                    </m:r>
+                    <m:r>
+                      <a:rPr lang="en-US" sz="2000" b="0" i="1" smtClean="0">
+                        <a:latin typeface="Cambria Math" panose="02040503050406030204" pitchFamily="18" charset="0"/>
+                      </a:rPr>
+                      <m:t>′</m:t>
+                    </m:r>
+                  </m:oMath>
+                </a14:m>
+                <a:r>
+                  <a:rPr lang="en-US" sz="2000" dirty="0"/>
+                  <a:t> is a least as good as </a:t>
+                </a:r>
+                <a14:m>
+                  <m:oMath xmlns:m="http://schemas.openxmlformats.org/officeDocument/2006/math">
+                    <m:r>
+                      <a:rPr lang="en-US" sz="2000" b="0" i="1" smtClean="0">
+                        <a:latin typeface="Cambria Math" panose="02040503050406030204" pitchFamily="18" charset="0"/>
+                      </a:rPr>
+                      <m:t>𝜋</m:t>
+                    </m:r>
+                  </m:oMath>
+                </a14:m>
+                <a:r>
+                  <a:rPr lang="en-US" sz="2000" dirty="0"/>
+                  <a:t>, i.e., </a:t>
+                </a:r>
+                <a14:m>
+                  <m:oMath xmlns:m="http://schemas.openxmlformats.org/officeDocument/2006/math">
+                    <m:sSub>
+                      <m:sSubPr>
+                        <m:ctrlPr>
+                          <a:rPr lang="en-US" sz="2000" b="0" i="1" smtClean="0">
+                            <a:latin typeface="Cambria Math" panose="02040503050406030204" pitchFamily="18" charset="0"/>
+                          </a:rPr>
+                        </m:ctrlPr>
+                      </m:sSubPr>
+                      <m:e>
+                        <m:r>
+                          <a:rPr lang="en-US" sz="2000" b="0" i="1" smtClean="0">
+                            <a:latin typeface="Cambria Math" panose="02040503050406030204" pitchFamily="18" charset="0"/>
+                          </a:rPr>
+                          <m:t>𝑣</m:t>
+                        </m:r>
+                      </m:e>
+                      <m:sub>
+                        <m:sSup>
+                          <m:sSupPr>
+                            <m:ctrlPr>
+                              <a:rPr lang="en-US" sz="2000" b="0" i="1" smtClean="0">
+                                <a:latin typeface="Cambria Math" panose="02040503050406030204" pitchFamily="18" charset="0"/>
+                              </a:rPr>
+                            </m:ctrlPr>
+                          </m:sSupPr>
+                          <m:e>
+                            <m:r>
+                              <a:rPr lang="en-US" sz="2000" b="0" i="1" smtClean="0">
+                                <a:latin typeface="Cambria Math" panose="02040503050406030204" pitchFamily="18" charset="0"/>
+                              </a:rPr>
+                              <m:t>𝜋</m:t>
+                            </m:r>
+                          </m:e>
+                          <m:sup>
+                            <m:r>
+                              <a:rPr lang="en-US" sz="2000" b="0" i="1" smtClean="0">
+                                <a:latin typeface="Cambria Math" panose="02040503050406030204" pitchFamily="18" charset="0"/>
+                              </a:rPr>
+                              <m:t>′</m:t>
+                            </m:r>
+                          </m:sup>
+                        </m:sSup>
+                      </m:sub>
+                    </m:sSub>
+                    <m:d>
+                      <m:dPr>
+                        <m:ctrlPr>
+                          <a:rPr lang="en-US" sz="2000" b="0" i="1" smtClean="0">
+                            <a:latin typeface="Cambria Math" panose="02040503050406030204" pitchFamily="18" charset="0"/>
+                          </a:rPr>
+                        </m:ctrlPr>
+                      </m:dPr>
+                      <m:e>
+                        <m:r>
+                          <a:rPr lang="en-US" sz="2000" b="0" i="1" smtClean="0">
+                            <a:latin typeface="Cambria Math" panose="02040503050406030204" pitchFamily="18" charset="0"/>
+                          </a:rPr>
+                          <m:t>𝑠</m:t>
+                        </m:r>
+                      </m:e>
+                    </m:d>
+                    <m:r>
+                      <a:rPr lang="en-US" sz="2000" b="0" i="1" smtClean="0">
+                        <a:latin typeface="Cambria Math" panose="02040503050406030204" pitchFamily="18" charset="0"/>
+                      </a:rPr>
+                      <m:t>≥</m:t>
+                    </m:r>
+                    <m:sSub>
+                      <m:sSubPr>
+                        <m:ctrlPr>
+                          <a:rPr lang="en-US" sz="2000" b="0" i="1" smtClean="0">
+                            <a:latin typeface="Cambria Math" panose="02040503050406030204" pitchFamily="18" charset="0"/>
+                          </a:rPr>
+                        </m:ctrlPr>
+                      </m:sSubPr>
+                      <m:e>
+                        <m:r>
+                          <a:rPr lang="en-US" sz="2000" b="0" i="1" smtClean="0">
+                            <a:latin typeface="Cambria Math" panose="02040503050406030204" pitchFamily="18" charset="0"/>
+                          </a:rPr>
+                          <m:t>𝑣</m:t>
+                        </m:r>
+                      </m:e>
+                      <m:sub>
+                        <m:r>
+                          <a:rPr lang="en-US" sz="2000" b="0" i="1" smtClean="0">
+                            <a:latin typeface="Cambria Math" panose="02040503050406030204" pitchFamily="18" charset="0"/>
+                          </a:rPr>
+                          <m:t>𝜋</m:t>
+                        </m:r>
+                      </m:sub>
+                    </m:sSub>
+                    <m:d>
+                      <m:dPr>
+                        <m:ctrlPr>
+                          <a:rPr lang="en-US" sz="2000" b="0" i="1" smtClean="0">
+                            <a:latin typeface="Cambria Math" panose="02040503050406030204" pitchFamily="18" charset="0"/>
+                          </a:rPr>
+                        </m:ctrlPr>
+                      </m:dPr>
+                      <m:e>
+                        <m:r>
+                          <a:rPr lang="en-US" sz="2000" b="0" i="1" smtClean="0">
+                            <a:latin typeface="Cambria Math" panose="02040503050406030204" pitchFamily="18" charset="0"/>
+                          </a:rPr>
+                          <m:t>𝑠</m:t>
+                        </m:r>
+                      </m:e>
+                    </m:d>
+                    <m:r>
+                      <a:rPr lang="en-US" sz="2000" b="0" i="1" smtClean="0">
+                        <a:latin typeface="Cambria Math" panose="02040503050406030204" pitchFamily="18" charset="0"/>
+                      </a:rPr>
+                      <m:t>  ∀</m:t>
+                    </m:r>
+                    <m:r>
+                      <a:rPr lang="en-US" sz="2000" b="0" i="1" smtClean="0">
+                        <a:latin typeface="Cambria Math" panose="02040503050406030204" pitchFamily="18" charset="0"/>
+                      </a:rPr>
+                      <m:t>𝑠</m:t>
+                    </m:r>
+                    <m:r>
+                      <a:rPr lang="en-US" sz="2000" b="0" i="1" smtClean="0">
+                        <a:latin typeface="Cambria Math" panose="02040503050406030204" pitchFamily="18" charset="0"/>
+                      </a:rPr>
+                      <m:t>∈</m:t>
+                    </m:r>
+                    <m:r>
+                      <a:rPr lang="en-US" sz="2000" b="0" i="1" smtClean="0">
+                        <a:latin typeface="Cambria Math" panose="02040503050406030204" pitchFamily="18" charset="0"/>
+                        <a:ea typeface="Cambria Math" panose="02040503050406030204" pitchFamily="18" charset="0"/>
+                      </a:rPr>
+                      <m:t>𝒮</m:t>
+                    </m:r>
+                  </m:oMath>
+                </a14:m>
+                <a:r>
+                  <a:rPr lang="en-US" sz="2000" dirty="0"/>
+                  <a:t>. </a:t>
+                </a:r>
+              </a:p>
+            </p:txBody>
+          </p:sp>
+        </mc:Choice>
+        <mc:Fallback>
+          <p:sp>
+            <p:nvSpPr>
+              <p:cNvPr id="6" name="TextBox 5">
+                <a:extLst>
+                  <a:ext uri="{FF2B5EF4-FFF2-40B4-BE49-F238E27FC236}">
+                    <a16:creationId xmlns:a16="http://schemas.microsoft.com/office/drawing/2014/main" id="{BFC66EED-553B-0E0F-6F59-A9AF7183D9BE}"/>
+                  </a:ext>
+                </a:extLst>
+              </p:cNvPr>
+              <p:cNvSpPr txBox="1">
+                <a:spLocks noRot="1" noChangeAspect="1" noMove="1" noResize="1" noEditPoints="1" noAdjustHandles="1" noChangeArrowheads="1" noChangeShapeType="1" noTextEdit="1"/>
+              </p:cNvSpPr>
+              <p:nvPr/>
+            </p:nvSpPr>
+            <p:spPr>
+              <a:xfrm>
+                <a:off x="2033107" y="1949537"/>
+                <a:ext cx="8125786" cy="1366721"/>
+              </a:xfrm>
+              <a:prstGeom prst="rect">
+                <a:avLst/>
+              </a:prstGeom>
+              <a:blipFill>
+                <a:blip r:embed="rId3"/>
+                <a:stretch>
+                  <a:fillRect l="-749" t="-2203" b="-6608"/>
+                </a:stretch>
+              </a:blipFill>
+            </p:spPr>
+            <p:txBody>
+              <a:bodyPr/>
+              <a:lstStyle/>
+              <a:p>
+                <a:r>
+                  <a:rPr lang="en-US">
+                    <a:noFill/>
+                  </a:rPr>
+                  <a:t> </a:t>
+                </a:r>
+              </a:p>
+            </p:txBody>
+          </p:sp>
+        </mc:Fallback>
+      </mc:AlternateContent>
     </p:spTree>
     <p:extLst>
       <p:ext uri="{BB962C8B-B14F-4D97-AF65-F5344CB8AC3E}">
@@ -14812,7 +14861,7 @@
           <a:p>
             <a:r>
               <a:rPr lang="en-US" dirty="0"/>
-              <a:t>Combine improvement and modified evaluation (1 iteration) into a single update.</a:t>
+              <a:t>Combine improvement and modified evaluation (1 iteration only) into a single update.</a:t>
             </a:r>
           </a:p>
         </p:txBody>
@@ -15135,10 +15184,10 @@
       </p:grpSpPr>
       <p:sp>
         <p:nvSpPr>
-          <p:cNvPr id="2" name="Title 1">
+          <p:cNvPr id="4" name="Title 3">
             <a:extLst>
               <a:ext uri="{FF2B5EF4-FFF2-40B4-BE49-F238E27FC236}">
-                <a16:creationId xmlns:a16="http://schemas.microsoft.com/office/drawing/2014/main" id="{CE64B189-2BE7-EF8E-90AD-B8D2A5B4A30A}"/>
+                <a16:creationId xmlns:a16="http://schemas.microsoft.com/office/drawing/2014/main" id="{0930CFB0-D2B7-437F-8981-207DBA2A813F}"/>
               </a:ext>
             </a:extLst>
           </p:cNvPr>
@@ -15156,154 +15205,40 @@
           <a:p>
             <a:r>
               <a:rPr lang="en-US" dirty="0"/>
-              <a:t>Issues with DP Methods</a:t>
+              <a:t>Code…</a:t>
             </a:r>
           </a:p>
         </p:txBody>
       </p:sp>
-      <mc:AlternateContent xmlns:mc="http://schemas.openxmlformats.org/markup-compatibility/2006" xmlns:a14="http://schemas.microsoft.com/office/drawing/2010/main">
-        <mc:Choice Requires="a14">
-          <p:sp>
-            <p:nvSpPr>
-              <p:cNvPr id="3" name="Content Placeholder 2">
-                <a:extLst>
-                  <a:ext uri="{FF2B5EF4-FFF2-40B4-BE49-F238E27FC236}">
-                    <a16:creationId xmlns:a16="http://schemas.microsoft.com/office/drawing/2014/main" id="{5664E2E2-C328-F2E5-08B7-7436CBE7F52E}"/>
-                  </a:ext>
-                </a:extLst>
-              </p:cNvPr>
-              <p:cNvSpPr>
-                <a:spLocks noGrp="1"/>
-              </p:cNvSpPr>
-              <p:nvPr>
-                <p:ph idx="1"/>
-              </p:nvPr>
-            </p:nvSpPr>
-            <p:spPr/>
-            <p:txBody>
-              <a:bodyPr>
-                <a:normAutofit/>
-              </a:bodyPr>
-              <a:lstStyle/>
-              <a:p>
-                <a:pPr marL="0" indent="0">
-                  <a:buNone/>
-                </a:pPr>
-                <a:r>
-                  <a:rPr lang="en-US" b="1" dirty="0"/>
-                  <a:t>Requires perfect knowledge of the model!</a:t>
-                </a:r>
-              </a:p>
-              <a:p>
-                <a:pPr marL="0" indent="0">
-                  <a:buNone/>
-                </a:pPr>
-                <a:endParaRPr lang="en-US" b="1" dirty="0"/>
-              </a:p>
-              <a:p>
-                <a:pPr marL="0" indent="0">
-                  <a:buNone/>
-                </a:pPr>
-                <a:r>
-                  <a:rPr lang="en-US" b="1" dirty="0"/>
-                  <a:t>Space Complexity</a:t>
-                </a:r>
-                <a:endParaRPr lang="en-US" dirty="0"/>
-              </a:p>
-              <a:p>
-                <a:pPr lvl="1"/>
-                <a:r>
-                  <a:rPr lang="en-US" dirty="0"/>
-                  <a:t>Tabular method: stores the complete value function as table </a:t>
-                </a:r>
-                <a14:m>
-                  <m:oMath xmlns:m="http://schemas.openxmlformats.org/officeDocument/2006/math">
-                    <m:r>
-                      <a:rPr lang="en-US" b="0" i="1" smtClean="0">
-                        <a:latin typeface="Cambria Math" panose="02040503050406030204" pitchFamily="18" charset="0"/>
-                      </a:rPr>
-                      <m:t>𝑉</m:t>
-                    </m:r>
-                  </m:oMath>
-                </a14:m>
-                <a:r>
-                  <a:rPr lang="en-US" dirty="0"/>
-                  <a:t>. </a:t>
-                </a:r>
-              </a:p>
-              <a:p>
-                <a:endParaRPr lang="en-US" dirty="0"/>
-              </a:p>
-              <a:p>
-                <a:pPr marL="0" indent="0">
-                  <a:buNone/>
-                </a:pPr>
-                <a:r>
-                  <a:rPr lang="en-US" b="1" dirty="0"/>
-                  <a:t>Time Complexity</a:t>
-                </a:r>
-              </a:p>
-              <a:p>
-                <a:pPr lvl="1"/>
-                <a:r>
-                  <a:rPr lang="en-US" dirty="0"/>
-                  <a:t>Updates repeatedly sweep over the whole state space.</a:t>
-                </a:r>
-              </a:p>
-              <a:p>
-                <a:pPr lvl="1"/>
-                <a:r>
-                  <a:rPr lang="en-US" dirty="0"/>
-                  <a:t>Wastes computation by updating states that are not relevant for the optimal behavior. I.e., the optimal policy will never visit them.</a:t>
-                </a:r>
-              </a:p>
-            </p:txBody>
-          </p:sp>
-        </mc:Choice>
-        <mc:Fallback xmlns="">
-          <p:sp>
-            <p:nvSpPr>
-              <p:cNvPr id="3" name="Content Placeholder 2">
-                <a:extLst>
-                  <a:ext uri="{FF2B5EF4-FFF2-40B4-BE49-F238E27FC236}">
-                    <a16:creationId xmlns:a16="http://schemas.microsoft.com/office/drawing/2014/main" id="{5664E2E2-C328-F2E5-08B7-7436CBE7F52E}"/>
-                  </a:ext>
-                </a:extLst>
-              </p:cNvPr>
-              <p:cNvSpPr>
-                <a:spLocks noGrp="1" noRot="1" noChangeAspect="1" noMove="1" noResize="1" noEditPoints="1" noAdjustHandles="1" noChangeArrowheads="1" noChangeShapeType="1" noTextEdit="1"/>
-              </p:cNvSpPr>
-              <p:nvPr>
-                <p:ph idx="1"/>
-              </p:nvPr>
-            </p:nvSpPr>
-            <p:spPr>
-              <a:blipFill>
-                <a:blip r:embed="rId2"/>
-                <a:stretch>
-                  <a:fillRect l="-1217" t="-2168"/>
-                </a:stretch>
-              </a:blipFill>
-            </p:spPr>
-            <p:txBody>
-              <a:bodyPr/>
-              <a:lstStyle/>
-              <a:p>
-                <a:r>
-                  <a:rPr lang="en-US">
-                    <a:noFill/>
-                  </a:rPr>
-                  <a:t> </a:t>
-                </a:r>
-              </a:p>
-            </p:txBody>
-          </p:sp>
-        </mc:Fallback>
-      </mc:AlternateContent>
+      <p:sp>
+        <p:nvSpPr>
+          <p:cNvPr id="5" name="Text Placeholder 4">
+            <a:extLst>
+              <a:ext uri="{FF2B5EF4-FFF2-40B4-BE49-F238E27FC236}">
+                <a16:creationId xmlns:a16="http://schemas.microsoft.com/office/drawing/2014/main" id="{6BF9353D-E2F6-5C2D-E559-4D7DA584DF5F}"/>
+              </a:ext>
+            </a:extLst>
+          </p:cNvPr>
+          <p:cNvSpPr>
+            <a:spLocks noGrp="1"/>
+          </p:cNvSpPr>
+          <p:nvPr>
+            <p:ph type="body" idx="1"/>
+          </p:nvPr>
+        </p:nvSpPr>
+        <p:spPr/>
+        <p:txBody>
+          <a:bodyPr/>
+          <a:lstStyle/>
+          <a:p>
+            <a:endParaRPr lang="en-US"/>
+          </a:p>
+        </p:txBody>
+      </p:sp>
     </p:spTree>
     <p:extLst>
       <p:ext uri="{BB962C8B-B14F-4D97-AF65-F5344CB8AC3E}">
-        <p14:creationId xmlns:p14="http://schemas.microsoft.com/office/powerpoint/2010/main" val="2486968449"/>
+        <p14:creationId xmlns:p14="http://schemas.microsoft.com/office/powerpoint/2010/main" val="4164509424"/>
       </p:ext>
     </p:extLst>
   </p:cSld>
@@ -18479,6 +18414,203 @@
           <p:cNvPr id="2" name="Title 1">
             <a:extLst>
               <a:ext uri="{FF2B5EF4-FFF2-40B4-BE49-F238E27FC236}">
+                <a16:creationId xmlns:a16="http://schemas.microsoft.com/office/drawing/2014/main" id="{CE64B189-2BE7-EF8E-90AD-B8D2A5B4A30A}"/>
+              </a:ext>
+            </a:extLst>
+          </p:cNvPr>
+          <p:cNvSpPr>
+            <a:spLocks noGrp="1"/>
+          </p:cNvSpPr>
+          <p:nvPr>
+            <p:ph type="title"/>
+          </p:nvPr>
+        </p:nvSpPr>
+        <p:spPr/>
+        <p:txBody>
+          <a:bodyPr/>
+          <a:lstStyle/>
+          <a:p>
+            <a:r>
+              <a:rPr lang="en-US" dirty="0"/>
+              <a:t>Issues with DP Methods</a:t>
+            </a:r>
+          </a:p>
+        </p:txBody>
+      </p:sp>
+      <mc:AlternateContent xmlns:mc="http://schemas.openxmlformats.org/markup-compatibility/2006" xmlns:a14="http://schemas.microsoft.com/office/drawing/2010/main">
+        <mc:Choice Requires="a14">
+          <p:sp>
+            <p:nvSpPr>
+              <p:cNvPr id="3" name="Content Placeholder 2">
+                <a:extLst>
+                  <a:ext uri="{FF2B5EF4-FFF2-40B4-BE49-F238E27FC236}">
+                    <a16:creationId xmlns:a16="http://schemas.microsoft.com/office/drawing/2014/main" id="{5664E2E2-C328-F2E5-08B7-7436CBE7F52E}"/>
+                  </a:ext>
+                </a:extLst>
+              </p:cNvPr>
+              <p:cNvSpPr>
+                <a:spLocks noGrp="1"/>
+              </p:cNvSpPr>
+              <p:nvPr>
+                <p:ph idx="1"/>
+              </p:nvPr>
+            </p:nvSpPr>
+            <p:spPr/>
+            <p:txBody>
+              <a:bodyPr>
+                <a:normAutofit/>
+              </a:bodyPr>
+              <a:lstStyle/>
+              <a:p>
+                <a:pPr marL="0" indent="0">
+                  <a:buNone/>
+                </a:pPr>
+                <a:r>
+                  <a:rPr lang="en-US" b="1" dirty="0"/>
+                  <a:t>Requires perfect knowledge of the model!</a:t>
+                </a:r>
+              </a:p>
+              <a:p>
+                <a:pPr marL="0" indent="0">
+                  <a:buNone/>
+                </a:pPr>
+                <a:endParaRPr lang="en-US" b="1" dirty="0"/>
+              </a:p>
+              <a:p>
+                <a:pPr marL="0" indent="0">
+                  <a:buNone/>
+                </a:pPr>
+                <a:r>
+                  <a:rPr lang="en-US" b="1" dirty="0"/>
+                  <a:t>Space Complexity</a:t>
+                </a:r>
+                <a:endParaRPr lang="en-US" dirty="0"/>
+              </a:p>
+              <a:p>
+                <a:pPr lvl="1"/>
+                <a:r>
+                  <a:rPr lang="en-US" dirty="0"/>
+                  <a:t>Tabular method: stores the complete value function as table </a:t>
+                </a:r>
+                <a14:m>
+                  <m:oMath xmlns:m="http://schemas.openxmlformats.org/officeDocument/2006/math">
+                    <m:r>
+                      <a:rPr lang="en-US" b="0" i="1" smtClean="0">
+                        <a:latin typeface="Cambria Math" panose="02040503050406030204" pitchFamily="18" charset="0"/>
+                      </a:rPr>
+                      <m:t>𝑉</m:t>
+                    </m:r>
+                  </m:oMath>
+                </a14:m>
+                <a:r>
+                  <a:rPr lang="en-US" dirty="0"/>
+                  <a:t>. </a:t>
+                </a:r>
+              </a:p>
+              <a:p>
+                <a:endParaRPr lang="en-US" dirty="0"/>
+              </a:p>
+              <a:p>
+                <a:pPr marL="0" indent="0">
+                  <a:buNone/>
+                </a:pPr>
+                <a:r>
+                  <a:rPr lang="en-US" b="1" dirty="0"/>
+                  <a:t>Time Complexity</a:t>
+                </a:r>
+              </a:p>
+              <a:p>
+                <a:pPr lvl="1"/>
+                <a:r>
+                  <a:rPr lang="en-US" dirty="0"/>
+                  <a:t>Updates repeatedly sweep over the whole state space.</a:t>
+                </a:r>
+              </a:p>
+              <a:p>
+                <a:pPr lvl="1"/>
+                <a:r>
+                  <a:rPr lang="en-US" dirty="0"/>
+                  <a:t>Wastes computation by updating states that are not relevant for the optimal behavior. I.e., the optimal policy will never visit them.</a:t>
+                </a:r>
+              </a:p>
+            </p:txBody>
+          </p:sp>
+        </mc:Choice>
+        <mc:Fallback xmlns="">
+          <p:sp>
+            <p:nvSpPr>
+              <p:cNvPr id="3" name="Content Placeholder 2">
+                <a:extLst>
+                  <a:ext uri="{FF2B5EF4-FFF2-40B4-BE49-F238E27FC236}">
+                    <a16:creationId xmlns:a16="http://schemas.microsoft.com/office/drawing/2014/main" id="{5664E2E2-C328-F2E5-08B7-7436CBE7F52E}"/>
+                  </a:ext>
+                </a:extLst>
+              </p:cNvPr>
+              <p:cNvSpPr>
+                <a:spLocks noGrp="1" noRot="1" noChangeAspect="1" noMove="1" noResize="1" noEditPoints="1" noAdjustHandles="1" noChangeArrowheads="1" noChangeShapeType="1" noTextEdit="1"/>
+              </p:cNvSpPr>
+              <p:nvPr>
+                <p:ph idx="1"/>
+              </p:nvPr>
+            </p:nvSpPr>
+            <p:spPr>
+              <a:blipFill>
+                <a:blip r:embed="rId2"/>
+                <a:stretch>
+                  <a:fillRect l="-1217" t="-2168"/>
+                </a:stretch>
+              </a:blipFill>
+            </p:spPr>
+            <p:txBody>
+              <a:bodyPr/>
+              <a:lstStyle/>
+              <a:p>
+                <a:r>
+                  <a:rPr lang="en-US">
+                    <a:noFill/>
+                  </a:rPr>
+                  <a:t> </a:t>
+                </a:r>
+              </a:p>
+            </p:txBody>
+          </p:sp>
+        </mc:Fallback>
+      </mc:AlternateContent>
+    </p:spTree>
+    <p:extLst>
+      <p:ext uri="{BB962C8B-B14F-4D97-AF65-F5344CB8AC3E}">
+        <p14:creationId xmlns:p14="http://schemas.microsoft.com/office/powerpoint/2010/main" val="2486968449"/>
+      </p:ext>
+    </p:extLst>
+  </p:cSld>
+  <p:clrMapOvr>
+    <a:masterClrMapping/>
+  </p:clrMapOvr>
+</p:sld>
+</file>
+
+<file path=ppt/slides/slide21.xml><?xml version="1.0" encoding="utf-8"?>
+<p:sld xmlns:a="http://schemas.openxmlformats.org/drawingml/2006/main" xmlns:r="http://schemas.openxmlformats.org/officeDocument/2006/relationships" xmlns:p="http://schemas.openxmlformats.org/presentationml/2006/main">
+  <p:cSld>
+    <p:spTree>
+      <p:nvGrpSpPr>
+        <p:cNvPr id="1" name=""/>
+        <p:cNvGrpSpPr/>
+        <p:nvPr/>
+      </p:nvGrpSpPr>
+      <p:grpSpPr>
+        <a:xfrm>
+          <a:off x="0" y="0"/>
+          <a:ext cx="0" cy="0"/>
+          <a:chOff x="0" y="0"/>
+          <a:chExt cx="0" cy="0"/>
+        </a:xfrm>
+      </p:grpSpPr>
+      <p:sp>
+        <p:nvSpPr>
+          <p:cNvPr id="2" name="Title 1">
+            <a:extLst>
+              <a:ext uri="{FF2B5EF4-FFF2-40B4-BE49-F238E27FC236}">
                 <a16:creationId xmlns:a16="http://schemas.microsoft.com/office/drawing/2014/main" id="{2542819D-6D6F-85AF-5816-7FFAE79AF0F0}"/>
               </a:ext>
             </a:extLst>
@@ -18543,7 +18675,7 @@
 </p:sld>
 </file>
 
-<file path=ppt/slides/slide21.xml><?xml version="1.0" encoding="utf-8"?>
+<file path=ppt/slides/slide22.xml><?xml version="1.0" encoding="utf-8"?>
 <p:sld xmlns:a="http://schemas.openxmlformats.org/drawingml/2006/main" xmlns:r="http://schemas.openxmlformats.org/officeDocument/2006/relationships" xmlns:p="http://schemas.openxmlformats.org/presentationml/2006/main">
   <p:cSld>
     <p:spTree>
@@ -18902,7 +19034,7 @@
 </p:sld>
 </file>
 
-<file path=ppt/slides/slide22.xml><?xml version="1.0" encoding="utf-8"?>
+<file path=ppt/slides/slide23.xml><?xml version="1.0" encoding="utf-8"?>
 <p:sld xmlns:a="http://schemas.openxmlformats.org/drawingml/2006/main" xmlns:r="http://schemas.openxmlformats.org/officeDocument/2006/relationships" xmlns:p="http://schemas.openxmlformats.org/presentationml/2006/main">
   <p:cSld>
     <p:spTree>
@@ -19514,7 +19646,7 @@
 </p:sld>
 </file>
 
-<file path=ppt/slides/slide23.xml><?xml version="1.0" encoding="utf-8"?>
+<file path=ppt/slides/slide24.xml><?xml version="1.0" encoding="utf-8"?>
 <p:sld xmlns:a="http://schemas.openxmlformats.org/drawingml/2006/main" xmlns:r="http://schemas.openxmlformats.org/officeDocument/2006/relationships" xmlns:p="http://schemas.openxmlformats.org/presentationml/2006/main">
   <p:cSld>
     <p:bg>
@@ -26847,8 +26979,8 @@
           </a:p>
         </p:txBody>
       </p:sp>
-      <mc:AlternateContent xmlns:mc="http://schemas.openxmlformats.org/markup-compatibility/2006" xmlns:a14="http://schemas.microsoft.com/office/drawing/2010/main">
-        <mc:Choice Requires="a14">
+      <mc:AlternateContent xmlns:mc="http://schemas.openxmlformats.org/markup-compatibility/2006">
+        <mc:Choice xmlns:a14="http://schemas.microsoft.com/office/drawing/2010/main" Requires="a14">
           <p:sp>
             <p:nvSpPr>
               <p:cNvPr id="3" name="Content Placeholder 2">
@@ -26873,13 +27005,16 @@
             </p:spPr>
             <p:txBody>
               <a:bodyPr>
-                <a:normAutofit/>
+                <a:normAutofit fontScale="85000" lnSpcReduction="10000"/>
               </a:bodyPr>
               <a:lstStyle/>
               <a:p>
+                <a:pPr marL="0" indent="0">
+                  <a:buNone/>
+                </a:pPr>
                 <a:r>
                   <a:rPr lang="en-US" sz="2400" dirty="0"/>
-                  <a:t>Directly solve the system of </a:t>
+                  <a:t>Solve the system of </a:t>
                 </a:r>
                 <a14:m>
                   <m:oMath xmlns:m="http://schemas.openxmlformats.org/officeDocument/2006/math">
@@ -27805,53 +27940,729 @@
                 <a:endParaRPr lang="en-US" sz="2400" dirty="0"/>
               </a:p>
               <a:p>
-                <a:endParaRPr lang="en-US" sz="2400" dirty="0"/>
+                <a:pPr marL="0" indent="0">
+                  <a:buNone/>
+                </a:pPr>
+                <a:r>
+                  <a:rPr lang="en-US" sz="2400" dirty="0"/>
+                  <a:t>As a linear program</a:t>
+                </a:r>
               </a:p>
               <a:p>
+                <a:pPr lvl="1"/>
                 <a:r>
-                  <a:rPr lang="en-US" sz="2400" dirty="0"/>
-                  <a:t>This is hard if </a:t>
+                  <a:rPr lang="en-US" sz="2300" dirty="0"/>
+                  <a:t>Objective function:       </a:t>
                 </a:r>
                 <a14:m>
                   <m:oMath xmlns:m="http://schemas.openxmlformats.org/officeDocument/2006/math">
+                    <m:func>
+                      <m:funcPr>
+                        <m:ctrlPr>
+                          <a:rPr lang="en-US" sz="2300" i="1" smtClean="0">
+                            <a:latin typeface="Cambria Math" panose="02040503050406030204" pitchFamily="18" charset="0"/>
+                          </a:rPr>
+                        </m:ctrlPr>
+                      </m:funcPr>
+                      <m:fName>
+                        <m:limLow>
+                          <m:limLowPr>
+                            <m:ctrlPr>
+                              <a:rPr lang="en-US" sz="2300" i="1" smtClean="0">
+                                <a:latin typeface="Cambria Math" panose="02040503050406030204" pitchFamily="18" charset="0"/>
+                              </a:rPr>
+                            </m:ctrlPr>
+                          </m:limLowPr>
+                          <m:e>
+                            <m:r>
+                              <m:rPr>
+                                <m:sty m:val="p"/>
+                              </m:rPr>
+                              <a:rPr lang="en-US" sz="2300" i="0" smtClean="0">
+                                <a:latin typeface="Cambria Math" panose="02040503050406030204" pitchFamily="18" charset="0"/>
+                              </a:rPr>
+                              <m:t>min</m:t>
+                            </m:r>
+                          </m:e>
+                          <m:lim>
+                            <m:r>
+                              <a:rPr lang="en-US" sz="2300" b="0" i="1" smtClean="0">
+                                <a:latin typeface="Cambria Math" panose="02040503050406030204" pitchFamily="18" charset="0"/>
+                              </a:rPr>
+                              <m:t>𝑉</m:t>
+                            </m:r>
+                          </m:lim>
+                        </m:limLow>
+                      </m:fName>
+                      <m:e>
+                        <m:nary>
+                          <m:naryPr>
+                            <m:chr m:val="∑"/>
+                            <m:supHide m:val="on"/>
+                            <m:ctrlPr>
+                              <a:rPr lang="en-US" sz="2300" i="1" smtClean="0">
+                                <a:latin typeface="Cambria Math" panose="02040503050406030204" pitchFamily="18" charset="0"/>
+                              </a:rPr>
+                            </m:ctrlPr>
+                          </m:naryPr>
+                          <m:sub>
+                            <m:r>
+                              <m:rPr>
+                                <m:brk m:alnAt="7"/>
+                              </m:rPr>
+                              <a:rPr lang="en-US" sz="2300" b="0" i="1" smtClean="0">
+                                <a:latin typeface="Cambria Math" panose="02040503050406030204" pitchFamily="18" charset="0"/>
+                              </a:rPr>
+                              <m:t>𝑠</m:t>
+                            </m:r>
+                            <m:r>
+                              <a:rPr lang="en-US" sz="2300" b="0" i="1" smtClean="0">
+                                <a:latin typeface="Cambria Math" panose="02040503050406030204" pitchFamily="18" charset="0"/>
+                              </a:rPr>
+                              <m:t>∈</m:t>
+                            </m:r>
+                            <m:r>
+                              <a:rPr lang="en-US" sz="2300" b="0" i="1" smtClean="0">
+                                <a:latin typeface="Cambria Math" panose="02040503050406030204" pitchFamily="18" charset="0"/>
+                                <a:ea typeface="Cambria Math" panose="02040503050406030204" pitchFamily="18" charset="0"/>
+                              </a:rPr>
+                              <m:t>𝒮</m:t>
+                            </m:r>
+                          </m:sub>
+                          <m:sup/>
+                          <m:e>
+                            <m:r>
+                              <a:rPr lang="en-US" sz="2300" b="0" i="1" smtClean="0">
+                                <a:latin typeface="Cambria Math" panose="02040503050406030204" pitchFamily="18" charset="0"/>
+                              </a:rPr>
+                              <m:t>𝑉</m:t>
+                            </m:r>
+                            <m:r>
+                              <a:rPr lang="en-US" sz="2300" b="0" i="1" smtClean="0">
+                                <a:latin typeface="Cambria Math" panose="02040503050406030204" pitchFamily="18" charset="0"/>
+                              </a:rPr>
+                              <m:t>(</m:t>
+                            </m:r>
+                            <m:r>
+                              <a:rPr lang="en-US" sz="2300" b="0" i="1" smtClean="0">
+                                <a:latin typeface="Cambria Math" panose="02040503050406030204" pitchFamily="18" charset="0"/>
+                              </a:rPr>
+                              <m:t>𝑠</m:t>
+                            </m:r>
+                            <m:r>
+                              <a:rPr lang="en-US" sz="2300" b="0" i="1" smtClean="0">
+                                <a:latin typeface="Cambria Math" panose="02040503050406030204" pitchFamily="18" charset="0"/>
+                              </a:rPr>
+                              <m:t>)</m:t>
+                            </m:r>
+                          </m:e>
+                        </m:nary>
+                      </m:e>
+                    </m:func>
+                  </m:oMath>
+                </a14:m>
+                <a:endParaRPr lang="en-US" sz="2300" dirty="0"/>
+              </a:p>
+              <a:p>
+                <a:pPr lvl="1"/>
+                <a:r>
+                  <a:rPr lang="en-US" sz="2300" dirty="0"/>
+                  <a:t>Constraints:                     </a:t>
+                </a:r>
+                <a14:m>
+                  <m:oMath xmlns:m="http://schemas.openxmlformats.org/officeDocument/2006/math">
+                    <m:r>
+                      <a:rPr lang="en-US" sz="2300" b="0" i="1" smtClean="0">
+                        <a:latin typeface="Cambria Math" panose="02040503050406030204" pitchFamily="18" charset="0"/>
+                      </a:rPr>
+                      <m:t>𝑉</m:t>
+                    </m:r>
                     <m:d>
                       <m:dPr>
-                        <m:begChr m:val="|"/>
-                        <m:endChr m:val="|"/>
                         <m:ctrlPr>
-                          <a:rPr lang="en-US" sz="2400" i="1">
+                          <a:rPr lang="en-US" sz="2300" b="0" i="1" smtClean="0">
                             <a:latin typeface="Cambria Math" panose="02040503050406030204" pitchFamily="18" charset="0"/>
                           </a:rPr>
                         </m:ctrlPr>
                       </m:dPr>
                       <m:e>
                         <m:r>
-                          <a:rPr lang="en-US" sz="2400" i="1">
+                          <a:rPr lang="en-US" sz="2300" b="0" i="1" smtClean="0">
+                            <a:latin typeface="Cambria Math" panose="02040503050406030204" pitchFamily="18" charset="0"/>
+                          </a:rPr>
+                          <m:t>𝑠</m:t>
+                        </m:r>
+                      </m:e>
+                    </m:d>
+                    <m:r>
+                      <a:rPr lang="en-US" sz="2300" b="0" i="1" smtClean="0">
+                        <a:latin typeface="Cambria Math" panose="02040503050406030204" pitchFamily="18" charset="0"/>
+                      </a:rPr>
+                      <m:t>≥</m:t>
+                    </m:r>
+                    <m:nary>
+                      <m:naryPr>
+                        <m:chr m:val="∑"/>
+                        <m:supHide m:val="on"/>
+                        <m:ctrlPr>
+                          <a:rPr lang="en-US" sz="2300" b="0" i="1" smtClean="0">
+                            <a:latin typeface="Cambria Math" panose="02040503050406030204" pitchFamily="18" charset="0"/>
+                          </a:rPr>
+                        </m:ctrlPr>
+                      </m:naryPr>
+                      <m:sub>
+                        <m:sSup>
+                          <m:sSupPr>
+                            <m:ctrlPr>
+                              <a:rPr lang="en-US" sz="2300" b="0" i="1" smtClean="0">
+                                <a:latin typeface="Cambria Math" panose="02040503050406030204" pitchFamily="18" charset="0"/>
+                              </a:rPr>
+                            </m:ctrlPr>
+                          </m:sSupPr>
+                          <m:e>
+                            <m:r>
+                              <m:rPr>
+                                <m:brk m:alnAt="7"/>
+                              </m:rPr>
+                              <a:rPr lang="en-US" sz="2300" b="0" i="1" smtClean="0">
+                                <a:latin typeface="Cambria Math" panose="02040503050406030204" pitchFamily="18" charset="0"/>
+                              </a:rPr>
+                              <m:t>𝑠</m:t>
+                            </m:r>
+                          </m:e>
+                          <m:sup>
+                            <m:r>
+                              <a:rPr lang="en-US" sz="2300" b="0" i="1" smtClean="0">
+                                <a:latin typeface="Cambria Math" panose="02040503050406030204" pitchFamily="18" charset="0"/>
+                              </a:rPr>
+                              <m:t>′</m:t>
+                            </m:r>
+                          </m:sup>
+                        </m:sSup>
+                        <m:r>
+                          <m:rPr>
+                            <m:brk m:alnAt="7"/>
+                          </m:rPr>
+                          <a:rPr lang="en-US" sz="2300" b="0" i="1" smtClean="0">
+                            <a:latin typeface="Cambria Math" panose="02040503050406030204" pitchFamily="18" charset="0"/>
+                          </a:rPr>
+                          <m:t>,</m:t>
+                        </m:r>
+                        <m:r>
+                          <a:rPr lang="en-US" sz="2300" b="0" i="1" smtClean="0">
+                            <a:latin typeface="Cambria Math" panose="02040503050406030204" pitchFamily="18" charset="0"/>
+                          </a:rPr>
+                          <m:t>𝑟</m:t>
+                        </m:r>
+                      </m:sub>
+                      <m:sup/>
+                      <m:e>
+                        <m:r>
+                          <a:rPr lang="en-US" sz="2300" i="1">
+                            <a:latin typeface="Cambria Math" panose="02040503050406030204" pitchFamily="18" charset="0"/>
+                          </a:rPr>
+                          <m:t>𝑝</m:t>
+                        </m:r>
+                        <m:d>
+                          <m:dPr>
+                            <m:ctrlPr>
+                              <a:rPr lang="en-US" sz="2300" i="1">
+                                <a:latin typeface="Cambria Math" panose="02040503050406030204" pitchFamily="18" charset="0"/>
+                              </a:rPr>
+                            </m:ctrlPr>
+                          </m:dPr>
+                          <m:e>
+                            <m:r>
+                              <a:rPr lang="en-US" sz="2300" i="1">
+                                <a:latin typeface="Cambria Math" panose="02040503050406030204" pitchFamily="18" charset="0"/>
+                              </a:rPr>
+                              <m:t>𝑠</m:t>
+                            </m:r>
+                            <m:r>
+                              <a:rPr lang="en-US" sz="2300" i="1">
+                                <a:latin typeface="Cambria Math" panose="02040503050406030204" pitchFamily="18" charset="0"/>
+                              </a:rPr>
+                              <m:t>′</m:t>
+                            </m:r>
+                            <m:r>
+                              <a:rPr lang="en-US" sz="2300" i="1">
+                                <a:latin typeface="Cambria Math" panose="02040503050406030204" pitchFamily="18" charset="0"/>
+                              </a:rPr>
+                              <m:t>,</m:t>
+                            </m:r>
+                            <m:r>
+                              <a:rPr lang="en-US" sz="2300" i="1">
+                                <a:latin typeface="Cambria Math" panose="02040503050406030204" pitchFamily="18" charset="0"/>
+                              </a:rPr>
+                              <m:t>𝑟</m:t>
+                            </m:r>
+                            <m:r>
+                              <a:rPr lang="en-US" sz="2300" i="1">
+                                <a:latin typeface="Cambria Math" panose="02040503050406030204" pitchFamily="18" charset="0"/>
+                              </a:rPr>
+                              <m:t>|</m:t>
+                            </m:r>
+                            <m:r>
+                              <a:rPr lang="en-US" sz="2300" i="1">
+                                <a:latin typeface="Cambria Math" panose="02040503050406030204" pitchFamily="18" charset="0"/>
+                              </a:rPr>
+                              <m:t>𝑠</m:t>
+                            </m:r>
+                            <m:r>
+                              <a:rPr lang="en-US" sz="2300" i="1">
+                                <a:latin typeface="Cambria Math" panose="02040503050406030204" pitchFamily="18" charset="0"/>
+                              </a:rPr>
+                              <m:t>,</m:t>
+                            </m:r>
+                            <m:r>
+                              <a:rPr lang="en-US" sz="2300" i="1">
+                                <a:latin typeface="Cambria Math" panose="02040503050406030204" pitchFamily="18" charset="0"/>
+                              </a:rPr>
+                              <m:t>𝜋</m:t>
+                            </m:r>
+                            <m:d>
+                              <m:dPr>
+                                <m:ctrlPr>
+                                  <a:rPr lang="en-US" sz="2300" i="1">
+                                    <a:latin typeface="Cambria Math" panose="02040503050406030204" pitchFamily="18" charset="0"/>
+                                  </a:rPr>
+                                </m:ctrlPr>
+                              </m:dPr>
+                              <m:e>
+                                <m:r>
+                                  <a:rPr lang="en-US" sz="2300" i="1">
+                                    <a:latin typeface="Cambria Math" panose="02040503050406030204" pitchFamily="18" charset="0"/>
+                                  </a:rPr>
+                                  <m:t>𝑠</m:t>
+                                </m:r>
+                              </m:e>
+                            </m:d>
+                          </m:e>
+                        </m:d>
+                        <m:d>
+                          <m:dPr>
+                            <m:begChr m:val="["/>
+                            <m:endChr m:val="]"/>
+                            <m:ctrlPr>
+                              <a:rPr lang="en-US" sz="2300" i="1">
+                                <a:latin typeface="Cambria Math" panose="02040503050406030204" pitchFamily="18" charset="0"/>
+                              </a:rPr>
+                            </m:ctrlPr>
+                          </m:dPr>
+                          <m:e>
+                            <m:r>
+                              <a:rPr lang="en-US" sz="2300" i="1">
+                                <a:latin typeface="Cambria Math" panose="02040503050406030204" pitchFamily="18" charset="0"/>
+                              </a:rPr>
+                              <m:t>𝑟</m:t>
+                            </m:r>
+                            <m:r>
+                              <a:rPr lang="en-US" sz="2300" i="1">
+                                <a:latin typeface="Cambria Math" panose="02040503050406030204" pitchFamily="18" charset="0"/>
+                              </a:rPr>
+                              <m:t>+</m:t>
+                            </m:r>
+                            <m:r>
+                              <a:rPr lang="en-US" sz="2300" i="1">
+                                <a:latin typeface="Cambria Math" panose="02040503050406030204" pitchFamily="18" charset="0"/>
+                              </a:rPr>
+                              <m:t>𝛾</m:t>
+                            </m:r>
+                            <m:r>
+                              <a:rPr lang="en-US" sz="2300" i="1">
+                                <a:latin typeface="Cambria Math" panose="02040503050406030204" pitchFamily="18" charset="0"/>
+                              </a:rPr>
+                              <m:t>𝑉</m:t>
+                            </m:r>
+                            <m:d>
+                              <m:dPr>
+                                <m:ctrlPr>
+                                  <a:rPr lang="en-US" sz="2300" i="1">
+                                    <a:latin typeface="Cambria Math" panose="02040503050406030204" pitchFamily="18" charset="0"/>
+                                  </a:rPr>
+                                </m:ctrlPr>
+                              </m:dPr>
+                              <m:e>
+                                <m:sSup>
+                                  <m:sSupPr>
+                                    <m:ctrlPr>
+                                      <a:rPr lang="en-US" sz="2300" i="1">
+                                        <a:latin typeface="Cambria Math" panose="02040503050406030204" pitchFamily="18" charset="0"/>
+                                      </a:rPr>
+                                    </m:ctrlPr>
+                                  </m:sSupPr>
+                                  <m:e>
+                                    <m:r>
+                                      <a:rPr lang="en-US" sz="2300" i="1">
+                                        <a:latin typeface="Cambria Math" panose="02040503050406030204" pitchFamily="18" charset="0"/>
+                                      </a:rPr>
+                                      <m:t>𝑠</m:t>
+                                    </m:r>
+                                  </m:e>
+                                  <m:sup>
+                                    <m:r>
+                                      <a:rPr lang="en-US" sz="2300" i="1">
+                                        <a:latin typeface="Cambria Math" panose="02040503050406030204" pitchFamily="18" charset="0"/>
+                                      </a:rPr>
+                                      <m:t>′</m:t>
+                                    </m:r>
+                                  </m:sup>
+                                </m:sSup>
+                              </m:e>
+                            </m:d>
+                          </m:e>
+                        </m:d>
+                        <m:r>
+                          <a:rPr lang="en-US" sz="2300" b="0" i="1" smtClean="0">
+                            <a:latin typeface="Cambria Math" panose="02040503050406030204" pitchFamily="18" charset="0"/>
+                          </a:rPr>
+                          <m:t>          </m:t>
+                        </m:r>
+                        <m:r>
+                          <a:rPr lang="en-US" sz="2300" b="0" i="1" smtClean="0">
+                            <a:latin typeface="Cambria Math" panose="02040503050406030204" pitchFamily="18" charset="0"/>
+                          </a:rPr>
+                          <m:t>∀</m:t>
+                        </m:r>
+                        <m:r>
+                          <a:rPr lang="en-US" sz="2300" b="0" i="1" smtClean="0">
+                            <a:latin typeface="Cambria Math" panose="02040503050406030204" pitchFamily="18" charset="0"/>
+                          </a:rPr>
+                          <m:t>𝑠</m:t>
+                        </m:r>
+                        <m:r>
+                          <a:rPr lang="en-US" sz="2300" b="0" i="1" smtClean="0">
+                            <a:latin typeface="Cambria Math" panose="02040503050406030204" pitchFamily="18" charset="0"/>
+                          </a:rPr>
+                          <m:t>∈</m:t>
+                        </m:r>
+                        <m:r>
+                          <a:rPr lang="en-US" sz="2300" b="0" i="1" smtClean="0">
                             <a:latin typeface="Cambria Math" panose="02040503050406030204" pitchFamily="18" charset="0"/>
                             <a:ea typeface="Cambria Math" panose="02040503050406030204" pitchFamily="18" charset="0"/>
                           </a:rPr>
                           <m:t>𝒮</m:t>
                         </m:r>
                       </m:e>
-                    </m:d>
+                    </m:nary>
                   </m:oMath>
                 </a14:m>
+                <a:endParaRPr lang="en-US" sz="2000" dirty="0"/>
+              </a:p>
+              <a:p>
+                <a:endParaRPr lang="en-US" sz="2400" dirty="0"/>
+              </a:p>
+              <a:p>
+                <a:pPr marL="0" indent="0">
+                  <a:buNone/>
+                </a:pPr>
                 <a:r>
                   <a:rPr lang="en-US" sz="2400" dirty="0"/>
-                  <a:t> is very large.</a:t>
+                  <a:t>Why this works: The smallest feasible solution will satisfy the Bellman equations. </a:t>
                 </a:r>
+                <a:endParaRPr lang="en-US" sz="2400" i="1" dirty="0">
+                  <a:latin typeface="Cambria Math" panose="02040503050406030204" pitchFamily="18" charset="0"/>
+                </a:endParaRPr>
               </a:p>
               <a:p>
-                <a:pPr marL="514350" indent="-514350">
-                  <a:buFont typeface="+mj-lt"/>
-                  <a:buAutoNum type="arabicPeriod"/>
+                <a:pPr marL="0" indent="0">
+                  <a:buNone/>
+                </a:pPr>
+                <a14:m>
+                  <m:oMathPara xmlns:m="http://schemas.openxmlformats.org/officeDocument/2006/math">
+                    <m:oMathParaPr>
+                      <m:jc m:val="centerGroup"/>
+                    </m:oMathParaPr>
+                    <m:oMath xmlns:m="http://schemas.openxmlformats.org/officeDocument/2006/math">
+                      <m:r>
+                        <a:rPr lang="en-US" sz="2400" i="1">
+                          <a:latin typeface="Cambria Math" panose="02040503050406030204" pitchFamily="18" charset="0"/>
+                        </a:rPr>
+                        <m:t>𝑉</m:t>
+                      </m:r>
+                      <m:r>
+                        <a:rPr lang="en-US" sz="2400" b="0" i="1" smtClean="0">
+                          <a:latin typeface="Cambria Math" panose="02040503050406030204" pitchFamily="18" charset="0"/>
+                        </a:rPr>
+                        <m:t>(</m:t>
+                      </m:r>
+                      <m:r>
+                        <a:rPr lang="en-US" sz="2400" b="0" i="1" smtClean="0">
+                          <a:latin typeface="Cambria Math" panose="02040503050406030204" pitchFamily="18" charset="0"/>
+                        </a:rPr>
+                        <m:t>𝑠</m:t>
+                      </m:r>
+                      <m:r>
+                        <a:rPr lang="en-US" sz="2400" b="0" i="1" smtClean="0">
+                          <a:latin typeface="Cambria Math" panose="02040503050406030204" pitchFamily="18" charset="0"/>
+                        </a:rPr>
+                        <m:t>)=</m:t>
+                      </m:r>
+                      <m:nary>
+                        <m:naryPr>
+                          <m:chr m:val="∑"/>
+                          <m:supHide m:val="on"/>
+                          <m:ctrlPr>
+                            <a:rPr lang="en-US" sz="2400" i="1">
+                              <a:latin typeface="Cambria Math" panose="02040503050406030204" pitchFamily="18" charset="0"/>
+                            </a:rPr>
+                          </m:ctrlPr>
+                        </m:naryPr>
+                        <m:sub>
+                          <m:sSup>
+                            <m:sSupPr>
+                              <m:ctrlPr>
+                                <a:rPr lang="en-US" sz="2400" i="1">
+                                  <a:latin typeface="Cambria Math" panose="02040503050406030204" pitchFamily="18" charset="0"/>
+                                </a:rPr>
+                              </m:ctrlPr>
+                            </m:sSupPr>
+                            <m:e>
+                              <m:r>
+                                <m:rPr>
+                                  <m:brk m:alnAt="7"/>
+                                </m:rPr>
+                                <a:rPr lang="en-US" sz="2400" i="1">
+                                  <a:latin typeface="Cambria Math" panose="02040503050406030204" pitchFamily="18" charset="0"/>
+                                </a:rPr>
+                                <m:t>𝑠</m:t>
+                              </m:r>
+                            </m:e>
+                            <m:sup>
+                              <m:r>
+                                <a:rPr lang="en-US" sz="2400" i="1">
+                                  <a:latin typeface="Cambria Math" panose="02040503050406030204" pitchFamily="18" charset="0"/>
+                                </a:rPr>
+                                <m:t>′</m:t>
+                              </m:r>
+                            </m:sup>
+                          </m:sSup>
+                          <m:r>
+                            <a:rPr lang="en-US" sz="2400" b="0" i="1" smtClean="0">
+                              <a:latin typeface="Cambria Math" panose="02040503050406030204" pitchFamily="18" charset="0"/>
+                            </a:rPr>
+                            <m:t>,</m:t>
+                          </m:r>
+                          <m:r>
+                            <a:rPr lang="en-US" sz="2400" b="0" i="1" smtClean="0">
+                              <a:latin typeface="Cambria Math" panose="02040503050406030204" pitchFamily="18" charset="0"/>
+                            </a:rPr>
+                            <m:t>𝑟</m:t>
+                          </m:r>
+                        </m:sub>
+                        <m:sup/>
+                        <m:e>
+                          <m:r>
+                            <a:rPr lang="en-US" sz="2400" i="1">
+                              <a:latin typeface="Cambria Math" panose="02040503050406030204" pitchFamily="18" charset="0"/>
+                            </a:rPr>
+                            <m:t>𝑝</m:t>
+                          </m:r>
+                          <m:d>
+                            <m:dPr>
+                              <m:ctrlPr>
+                                <a:rPr lang="en-US" sz="2400" i="1">
+                                  <a:latin typeface="Cambria Math" panose="02040503050406030204" pitchFamily="18" charset="0"/>
+                                </a:rPr>
+                              </m:ctrlPr>
+                            </m:dPr>
+                            <m:e>
+                              <m:r>
+                                <a:rPr lang="en-US" sz="2400" i="1">
+                                  <a:latin typeface="Cambria Math" panose="02040503050406030204" pitchFamily="18" charset="0"/>
+                                </a:rPr>
+                                <m:t>𝑠</m:t>
+                              </m:r>
+                              <m:r>
+                                <a:rPr lang="en-US" sz="2400" b="0" i="1" smtClean="0">
+                                  <a:latin typeface="Cambria Math" panose="02040503050406030204" pitchFamily="18" charset="0"/>
+                                </a:rPr>
+                                <m:t>′</m:t>
+                              </m:r>
+                              <m:r>
+                                <a:rPr lang="en-US" sz="2400" i="1">
+                                  <a:latin typeface="Cambria Math" panose="02040503050406030204" pitchFamily="18" charset="0"/>
+                                </a:rPr>
+                                <m:t>,</m:t>
+                              </m:r>
+                              <m:r>
+                                <a:rPr lang="en-US" sz="2400" b="0" i="1" smtClean="0">
+                                  <a:latin typeface="Cambria Math" panose="02040503050406030204" pitchFamily="18" charset="0"/>
+                                </a:rPr>
+                                <m:t>𝑟</m:t>
+                              </m:r>
+                              <m:r>
+                                <a:rPr lang="en-US" sz="2400" b="0" i="1" smtClean="0">
+                                  <a:latin typeface="Cambria Math" panose="02040503050406030204" pitchFamily="18" charset="0"/>
+                                </a:rPr>
+                                <m:t>|</m:t>
+                              </m:r>
+                              <m:r>
+                                <a:rPr lang="en-US" sz="2400" b="0" i="1" smtClean="0">
+                                  <a:latin typeface="Cambria Math" panose="02040503050406030204" pitchFamily="18" charset="0"/>
+                                </a:rPr>
+                                <m:t>𝑠</m:t>
+                              </m:r>
+                              <m:r>
+                                <a:rPr lang="en-US" sz="2400" b="0" i="1" smtClean="0">
+                                  <a:latin typeface="Cambria Math" panose="02040503050406030204" pitchFamily="18" charset="0"/>
+                                </a:rPr>
+                                <m:t>,</m:t>
+                              </m:r>
+                              <m:r>
+                                <a:rPr lang="en-US" sz="2400" i="1">
+                                  <a:latin typeface="Cambria Math" panose="02040503050406030204" pitchFamily="18" charset="0"/>
+                                </a:rPr>
+                                <m:t>𝜋</m:t>
+                              </m:r>
+                              <m:d>
+                                <m:dPr>
+                                  <m:ctrlPr>
+                                    <a:rPr lang="en-US" sz="2400" i="1">
+                                      <a:latin typeface="Cambria Math" panose="02040503050406030204" pitchFamily="18" charset="0"/>
+                                    </a:rPr>
+                                  </m:ctrlPr>
+                                </m:dPr>
+                                <m:e>
+                                  <m:r>
+                                    <a:rPr lang="en-US" sz="2400" i="1">
+                                      <a:latin typeface="Cambria Math" panose="02040503050406030204" pitchFamily="18" charset="0"/>
+                                    </a:rPr>
+                                    <m:t>𝑠</m:t>
+                                  </m:r>
+                                </m:e>
+                              </m:d>
+                            </m:e>
+                          </m:d>
+                          <m:r>
+                            <a:rPr lang="en-US" sz="2400" b="0" i="1" smtClean="0">
+                              <a:latin typeface="Cambria Math" panose="02040503050406030204" pitchFamily="18" charset="0"/>
+                            </a:rPr>
+                            <m:t>[</m:t>
+                          </m:r>
+                          <m:r>
+                            <a:rPr lang="en-US" sz="2400" b="0" i="1" smtClean="0">
+                              <a:latin typeface="Cambria Math" panose="02040503050406030204" pitchFamily="18" charset="0"/>
+                            </a:rPr>
+                            <m:t>𝑟</m:t>
+                          </m:r>
+                          <m:r>
+                            <a:rPr lang="en-US" sz="2400" b="0" i="1" smtClean="0">
+                              <a:latin typeface="Cambria Math" panose="02040503050406030204" pitchFamily="18" charset="0"/>
+                            </a:rPr>
+                            <m:t>+</m:t>
+                          </m:r>
+                          <m:r>
+                            <a:rPr lang="en-US" sz="2400" b="0" i="1" smtClean="0">
+                              <a:latin typeface="Cambria Math" panose="02040503050406030204" pitchFamily="18" charset="0"/>
+                            </a:rPr>
+                            <m:t>𝛾</m:t>
+                          </m:r>
+                          <m:r>
+                            <a:rPr lang="en-US" sz="2400" i="1">
+                              <a:latin typeface="Cambria Math" panose="02040503050406030204" pitchFamily="18" charset="0"/>
+                            </a:rPr>
+                            <m:t>𝑉</m:t>
+                          </m:r>
+                          <m:d>
+                            <m:dPr>
+                              <m:ctrlPr>
+                                <a:rPr lang="en-US" sz="2400" i="1">
+                                  <a:latin typeface="Cambria Math" panose="02040503050406030204" pitchFamily="18" charset="0"/>
+                                </a:rPr>
+                              </m:ctrlPr>
+                            </m:dPr>
+                            <m:e>
+                              <m:sSup>
+                                <m:sSupPr>
+                                  <m:ctrlPr>
+                                    <a:rPr lang="en-US" sz="2400" i="1">
+                                      <a:latin typeface="Cambria Math" panose="02040503050406030204" pitchFamily="18" charset="0"/>
+                                    </a:rPr>
+                                  </m:ctrlPr>
+                                </m:sSupPr>
+                                <m:e>
+                                  <m:r>
+                                    <a:rPr lang="en-US" sz="2400" i="1">
+                                      <a:latin typeface="Cambria Math" panose="02040503050406030204" pitchFamily="18" charset="0"/>
+                                    </a:rPr>
+                                    <m:t>𝑠</m:t>
+                                  </m:r>
+                                </m:e>
+                                <m:sup>
+                                  <m:r>
+                                    <a:rPr lang="en-US" sz="2400" i="1">
+                                      <a:latin typeface="Cambria Math" panose="02040503050406030204" pitchFamily="18" charset="0"/>
+                                    </a:rPr>
+                                    <m:t>′</m:t>
+                                  </m:r>
+                                </m:sup>
+                              </m:sSup>
+                            </m:e>
+                          </m:d>
+                          <m:r>
+                            <a:rPr lang="en-US" sz="2400" b="0" i="1" smtClean="0">
+                              <a:latin typeface="Cambria Math" panose="02040503050406030204" pitchFamily="18" charset="0"/>
+                            </a:rPr>
+                            <m:t>]</m:t>
+                          </m:r>
+                          <m:r>
+                            <a:rPr lang="en-US" sz="2400" i="1">
+                              <a:latin typeface="Cambria Math" panose="02040503050406030204" pitchFamily="18" charset="0"/>
+                            </a:rPr>
+                            <m:t> </m:t>
+                          </m:r>
+                          <m:r>
+                            <a:rPr lang="en-US" sz="2400" b="0" i="1" smtClean="0">
+                              <a:latin typeface="Cambria Math" panose="02040503050406030204" pitchFamily="18" charset="0"/>
+                            </a:rPr>
+                            <m:t>       </m:t>
+                          </m:r>
+                          <m:r>
+                            <a:rPr lang="en-US" sz="2400" i="1">
+                              <a:latin typeface="Cambria Math" panose="02040503050406030204" pitchFamily="18" charset="0"/>
+                            </a:rPr>
+                            <m:t>∀</m:t>
+                          </m:r>
+                          <m:r>
+                            <a:rPr lang="en-US" sz="2400" i="1">
+                              <a:latin typeface="Cambria Math" panose="02040503050406030204" pitchFamily="18" charset="0"/>
+                            </a:rPr>
+                            <m:t>𝑠</m:t>
+                          </m:r>
+                          <m:r>
+                            <a:rPr lang="en-US" sz="2400" i="1">
+                              <a:latin typeface="Cambria Math" panose="02040503050406030204" pitchFamily="18" charset="0"/>
+                            </a:rPr>
+                            <m:t>∈</m:t>
+                          </m:r>
+                          <m:r>
+                            <a:rPr lang="en-US" sz="2400" i="1">
+                              <a:latin typeface="Cambria Math" panose="02040503050406030204" pitchFamily="18" charset="0"/>
+                              <a:ea typeface="Cambria Math" panose="02040503050406030204" pitchFamily="18" charset="0"/>
+                            </a:rPr>
+                            <m:t>𝒮</m:t>
+                          </m:r>
+                        </m:e>
+                      </m:nary>
+                    </m:oMath>
+                  </m:oMathPara>
+                </a14:m>
+                <a:endParaRPr lang="en-US" sz="2400" dirty="0"/>
+              </a:p>
+              <a:p>
+                <a:endParaRPr lang="en-US" sz="2400" dirty="0"/>
+              </a:p>
+              <a:p>
+                <a:pPr marL="0" indent="0">
+                  <a:buNone/>
                 </a:pPr>
                 <a:endParaRPr lang="en-US" sz="2400" dirty="0"/>
               </a:p>
             </p:txBody>
           </p:sp>
         </mc:Choice>
-        <mc:Fallback xmlns="">
+        <mc:Fallback>
           <p:sp>
             <p:nvSpPr>
               <p:cNvPr id="3" name="Content Placeholder 2">
@@ -27876,7 +28687,7 @@
               <a:blipFill>
                 <a:blip r:embed="rId2"/>
                 <a:stretch>
-                  <a:fillRect l="-766" t="-1533"/>
+                  <a:fillRect l="-589" t="-1533"/>
                 </a:stretch>
               </a:blipFill>
             </p:spPr>

--- a/slides/Lecture_Chapter04.pptx
+++ b/slides/Lecture_Chapter04.pptx
@@ -338,7 +338,7 @@
           <a:p>
             <a:fld id="{3E22BF2E-04DA-469E-97C5-BB68A0368813}" type="datetimeFigureOut">
               <a:rPr lang="en-US" smtClean="0"/>
-              <a:t>2/4/2026</a:t>
+              <a:t>2/5/2026</a:t>
             </a:fld>
             <a:endParaRPr lang="en-US"/>
           </a:p>
@@ -536,7 +536,7 @@
           <a:p>
             <a:fld id="{3E22BF2E-04DA-469E-97C5-BB68A0368813}" type="datetimeFigureOut">
               <a:rPr lang="en-US" smtClean="0"/>
-              <a:t>2/4/2026</a:t>
+              <a:t>2/5/2026</a:t>
             </a:fld>
             <a:endParaRPr lang="en-US"/>
           </a:p>
@@ -744,7 +744,7 @@
           <a:p>
             <a:fld id="{3E22BF2E-04DA-469E-97C5-BB68A0368813}" type="datetimeFigureOut">
               <a:rPr lang="en-US" smtClean="0"/>
-              <a:t>2/4/2026</a:t>
+              <a:t>2/5/2026</a:t>
             </a:fld>
             <a:endParaRPr lang="en-US"/>
           </a:p>
@@ -952,7 +952,7 @@
           <a:p>
             <a:fld id="{3E22BF2E-04DA-469E-97C5-BB68A0368813}" type="datetimeFigureOut">
               <a:rPr lang="en-US" smtClean="0"/>
-              <a:t>2/4/2026</a:t>
+              <a:t>2/5/2026</a:t>
             </a:fld>
             <a:endParaRPr lang="en-US"/>
           </a:p>
@@ -1227,7 +1227,7 @@
           <a:p>
             <a:fld id="{3E22BF2E-04DA-469E-97C5-BB68A0368813}" type="datetimeFigureOut">
               <a:rPr lang="en-US" smtClean="0"/>
-              <a:t>2/4/2026</a:t>
+              <a:t>2/5/2026</a:t>
             </a:fld>
             <a:endParaRPr lang="en-US"/>
           </a:p>
@@ -1492,7 +1492,7 @@
           <a:p>
             <a:fld id="{3E22BF2E-04DA-469E-97C5-BB68A0368813}" type="datetimeFigureOut">
               <a:rPr lang="en-US" smtClean="0"/>
-              <a:t>2/4/2026</a:t>
+              <a:t>2/5/2026</a:t>
             </a:fld>
             <a:endParaRPr lang="en-US"/>
           </a:p>
@@ -1904,7 +1904,7 @@
           <a:p>
             <a:fld id="{3E22BF2E-04DA-469E-97C5-BB68A0368813}" type="datetimeFigureOut">
               <a:rPr lang="en-US" smtClean="0"/>
-              <a:t>2/4/2026</a:t>
+              <a:t>2/5/2026</a:t>
             </a:fld>
             <a:endParaRPr lang="en-US"/>
           </a:p>
@@ -2045,7 +2045,7 @@
           <a:p>
             <a:fld id="{3E22BF2E-04DA-469E-97C5-BB68A0368813}" type="datetimeFigureOut">
               <a:rPr lang="en-US" smtClean="0"/>
-              <a:t>2/4/2026</a:t>
+              <a:t>2/5/2026</a:t>
             </a:fld>
             <a:endParaRPr lang="en-US"/>
           </a:p>
@@ -2158,7 +2158,7 @@
           <a:p>
             <a:fld id="{3E22BF2E-04DA-469E-97C5-BB68A0368813}" type="datetimeFigureOut">
               <a:rPr lang="en-US" smtClean="0"/>
-              <a:t>2/4/2026</a:t>
+              <a:t>2/5/2026</a:t>
             </a:fld>
             <a:endParaRPr lang="en-US"/>
           </a:p>
@@ -2469,7 +2469,7 @@
           <a:p>
             <a:fld id="{3E22BF2E-04DA-469E-97C5-BB68A0368813}" type="datetimeFigureOut">
               <a:rPr lang="en-US" smtClean="0"/>
-              <a:t>2/4/2026</a:t>
+              <a:t>2/5/2026</a:t>
             </a:fld>
             <a:endParaRPr lang="en-US"/>
           </a:p>
@@ -2757,7 +2757,7 @@
           <a:p>
             <a:fld id="{3E22BF2E-04DA-469E-97C5-BB68A0368813}" type="datetimeFigureOut">
               <a:rPr lang="en-US" smtClean="0"/>
-              <a:t>2/4/2026</a:t>
+              <a:t>2/5/2026</a:t>
             </a:fld>
             <a:endParaRPr lang="en-US"/>
           </a:p>
@@ -2998,7 +2998,7 @@
           <a:p>
             <a:fld id="{3E22BF2E-04DA-469E-97C5-BB68A0368813}" type="datetimeFigureOut">
               <a:rPr lang="en-US" smtClean="0"/>
-              <a:t>2/4/2026</a:t>
+              <a:t>2/5/2026</a:t>
             </a:fld>
             <a:endParaRPr lang="en-US"/>
           </a:p>
@@ -4080,8 +4080,8 @@
           </a:p>
         </p:txBody>
       </p:sp>
-      <mc:AlternateContent xmlns:mc="http://schemas.openxmlformats.org/markup-compatibility/2006" xmlns:a14="http://schemas.microsoft.com/office/drawing/2010/main">
-        <mc:Choice Requires="a14">
+      <mc:AlternateContent xmlns:mc="http://schemas.openxmlformats.org/markup-compatibility/2006">
+        <mc:Choice xmlns:a14="http://schemas.microsoft.com/office/drawing/2010/main" Requires="a14">
           <p:sp>
             <p:nvSpPr>
               <p:cNvPr id="3" name="Content Placeholder 2">
@@ -4101,12 +4101,12 @@
             <p:spPr>
               <a:xfrm>
                 <a:off x="838200" y="1397331"/>
-                <a:ext cx="8581869" cy="2942321"/>
+                <a:ext cx="8581869" cy="3189659"/>
               </a:xfrm>
             </p:spPr>
             <p:txBody>
               <a:bodyPr>
-                <a:normAutofit fontScale="85000" lnSpcReduction="20000"/>
+                <a:normAutofit fontScale="70000" lnSpcReduction="20000"/>
               </a:bodyPr>
               <a:lstStyle/>
               <a:p>
@@ -4589,6 +4589,16 @@
                   <a:rPr lang="en-US" dirty="0"/>
                   <a:t> as its fixed point:</a:t>
                 </a:r>
+                <a:br>
+                  <a:rPr lang="en-US" dirty="0"/>
+                </a:br>
+                <a:r>
+                  <a:rPr lang="en-US" dirty="0"/>
+                  <a:t>(see textbook for derivation)</a:t>
+                </a:r>
+              </a:p>
+              <a:p>
+                <a:endParaRPr lang="en-US" dirty="0"/>
               </a:p>
               <a:p>
                 <a:pPr marL="0" indent="0">
@@ -4620,31 +4630,6 @@
                               </m:ctrlPr>
                             </m:dPr>
                             <m:e>
-                              <m:sSup>
-                                <m:sSupPr>
-                                  <m:ctrlPr>
-                                    <a:rPr lang="en-US" b="0" i="1" smtClean="0">
-                                      <a:latin typeface="Cambria Math" panose="02040503050406030204" pitchFamily="18" charset="0"/>
-                                    </a:rPr>
-                                  </m:ctrlPr>
-                                </m:sSupPr>
-                                <m:e>
-                                  <m:r>
-                                    <a:rPr lang="en-US" b="0" i="1" smtClean="0">
-                                      <a:latin typeface="Cambria Math" panose="02040503050406030204" pitchFamily="18" charset="0"/>
-                                    </a:rPr>
-                                    <m:t>𝑇</m:t>
-                                  </m:r>
-                                </m:e>
-                                <m:sup>
-                                  <m:r>
-                                    <a:rPr lang="en-US" b="0" i="1" smtClean="0">
-                                      <a:latin typeface="Cambria Math" panose="02040503050406030204" pitchFamily="18" charset="0"/>
-                                    </a:rPr>
-                                    <m:t>𝜋</m:t>
-                                  </m:r>
-                                </m:sup>
-                              </m:sSup>
                               <m:sSub>
                                 <m:sSubPr>
                                   <m:ctrlPr>
@@ -4877,7 +4862,7 @@
             </p:txBody>
           </p:sp>
         </mc:Choice>
-        <mc:Fallback xmlns="">
+        <mc:Fallback>
           <p:sp>
             <p:nvSpPr>
               <p:cNvPr id="3" name="Content Placeholder 2">
@@ -4897,12 +4882,12 @@
             <p:spPr>
               <a:xfrm>
                 <a:off x="838200" y="1397331"/>
-                <a:ext cx="8581869" cy="2942321"/>
+                <a:ext cx="8581869" cy="3189659"/>
               </a:xfrm>
               <a:blipFill>
                 <a:blip r:embed="rId2"/>
                 <a:stretch>
-                  <a:fillRect l="-995" t="-4555" b="-828"/>
+                  <a:fillRect l="-640" t="-3250"/>
                 </a:stretch>
               </a:blipFill>
             </p:spPr>
@@ -4921,8 +4906,8 @@
           </p:sp>
         </mc:Fallback>
       </mc:AlternateContent>
-      <mc:AlternateContent xmlns:mc="http://schemas.openxmlformats.org/markup-compatibility/2006" xmlns:a14="http://schemas.microsoft.com/office/drawing/2010/main">
-        <mc:Choice Requires="a14">
+      <mc:AlternateContent xmlns:mc="http://schemas.openxmlformats.org/markup-compatibility/2006">
+        <mc:Choice xmlns:a14="http://schemas.microsoft.com/office/drawing/2010/main" Requires="a14">
           <p:sp>
             <p:nvSpPr>
               <p:cNvPr id="4" name="Speech Bubble: Rectangle with Corners Rounded 3">
@@ -4937,8 +4922,8 @@
             </p:nvSpPr>
             <p:spPr>
               <a:xfrm>
-                <a:off x="955194" y="5312558"/>
-                <a:ext cx="3776262" cy="1214547"/>
+                <a:off x="955193" y="5312558"/>
+                <a:ext cx="4051521" cy="1214547"/>
               </a:xfrm>
               <a:prstGeom prst="wedgeRoundRectCallout">
                 <a:avLst>
@@ -4971,7 +4956,40 @@
                 <a:pPr algn="ctr"/>
                 <a:r>
                   <a:rPr lang="en-US" dirty="0"/>
-                  <a:t>This means the largest difference (infinity norm) will be reduced, leading to convergence of </a:t>
+                  <a:t>This means the largest difference (infinity norm) will be reduced by applying </a:t>
+                </a:r>
+                <a14:m>
+                  <m:oMath xmlns:m="http://schemas.openxmlformats.org/officeDocument/2006/math">
+                    <m:sSup>
+                      <m:sSupPr>
+                        <m:ctrlPr>
+                          <a:rPr lang="en-US" i="1">
+                            <a:latin typeface="Cambria Math" panose="02040503050406030204" pitchFamily="18" charset="0"/>
+                          </a:rPr>
+                        </m:ctrlPr>
+                      </m:sSupPr>
+                      <m:e>
+                        <m:r>
+                          <a:rPr lang="en-US" i="1">
+                            <a:latin typeface="Cambria Math" panose="02040503050406030204" pitchFamily="18" charset="0"/>
+                          </a:rPr>
+                          <m:t>𝑇</m:t>
+                        </m:r>
+                      </m:e>
+                      <m:sup>
+                        <m:r>
+                          <a:rPr lang="en-US" i="1">
+                            <a:latin typeface="Cambria Math" panose="02040503050406030204" pitchFamily="18" charset="0"/>
+                          </a:rPr>
+                          <m:t>𝜋</m:t>
+                        </m:r>
+                      </m:sup>
+                    </m:sSup>
+                  </m:oMath>
+                </a14:m>
+                <a:r>
+                  <a:rPr lang="en-US" dirty="0"/>
+                  <a:t>, leading to convergence to </a:t>
                 </a:r>
                 <a14:m>
                   <m:oMath xmlns:m="http://schemas.openxmlformats.org/officeDocument/2006/math">
@@ -5016,46 +5034,13 @@
                 </a14:m>
                 <a:r>
                   <a:rPr lang="en-US" dirty="0"/>
-                  <a:t> when </a:t>
-                </a:r>
-                <a14:m>
-                  <m:oMath xmlns:m="http://schemas.openxmlformats.org/officeDocument/2006/math">
-                    <m:sSup>
-                      <m:sSupPr>
-                        <m:ctrlPr>
-                          <a:rPr lang="en-US" b="0" i="1" smtClean="0">
-                            <a:latin typeface="Cambria Math" panose="02040503050406030204" pitchFamily="18" charset="0"/>
-                          </a:rPr>
-                        </m:ctrlPr>
-                      </m:sSupPr>
-                      <m:e>
-                        <m:r>
-                          <a:rPr lang="en-US" b="0" i="1" smtClean="0">
-                            <a:latin typeface="Cambria Math" panose="02040503050406030204" pitchFamily="18" charset="0"/>
-                          </a:rPr>
-                          <m:t>𝑇</m:t>
-                        </m:r>
-                      </m:e>
-                      <m:sup>
-                        <m:r>
-                          <a:rPr lang="en-US" b="0" i="1" smtClean="0">
-                            <a:latin typeface="Cambria Math" panose="02040503050406030204" pitchFamily="18" charset="0"/>
-                          </a:rPr>
-                          <m:t>𝜋</m:t>
-                        </m:r>
-                      </m:sup>
-                    </m:sSup>
-                  </m:oMath>
-                </a14:m>
-                <a:r>
-                  <a:rPr lang="en-US" dirty="0"/>
-                  <a:t> is applied many times.</a:t>
+                  <a:t> when is applied many times.</a:t>
                 </a:r>
               </a:p>
             </p:txBody>
           </p:sp>
         </mc:Choice>
-        <mc:Fallback xmlns="">
+        <mc:Fallback>
           <p:sp>
             <p:nvSpPr>
               <p:cNvPr id="4" name="Speech Bubble: Rectangle with Corners Rounded 3">
@@ -5072,8 +5057,8 @@
             </p:nvSpPr>
             <p:spPr>
               <a:xfrm>
-                <a:off x="955194" y="5312558"/>
-                <a:ext cx="3776262" cy="1214547"/>
+                <a:off x="955193" y="5312558"/>
+                <a:ext cx="4051521" cy="1214547"/>
               </a:xfrm>
               <a:prstGeom prst="wedgeRoundRectCallout">
                 <a:avLst>
@@ -5118,7 +5103,7 @@
         </p:nvSpPr>
         <p:spPr>
           <a:xfrm>
-            <a:off x="7697390" y="5278327"/>
+            <a:off x="7547488" y="5278327"/>
             <a:ext cx="3363494" cy="1214547"/>
           </a:xfrm>
           <a:prstGeom prst="wedgeRoundRectCallout">
@@ -5152,13 +5137,13 @@
             <a:pPr algn="ctr"/>
             <a:r>
               <a:rPr lang="en-US" dirty="0"/>
-              <a:t>Convergence is only guaranteed if the discount factor is strictly smaller than 1!</a:t>
+              <a:t>Convergence is guaranteed if the discount factor is strictly smaller than 1!</a:t>
             </a:r>
           </a:p>
         </p:txBody>
       </p:sp>
-      <mc:AlternateContent xmlns:mc="http://schemas.openxmlformats.org/markup-compatibility/2006" xmlns:a14="http://schemas.microsoft.com/office/drawing/2010/main">
-        <mc:Choice Requires="a14">
+      <mc:AlternateContent xmlns:mc="http://schemas.openxmlformats.org/markup-compatibility/2006">
+        <mc:Choice xmlns:a14="http://schemas.microsoft.com/office/drawing/2010/main" Requires="a14">
           <p:sp>
             <p:nvSpPr>
               <p:cNvPr id="6" name="TextBox 5">
@@ -5173,7 +5158,7 @@
             </p:nvSpPr>
             <p:spPr>
               <a:xfrm>
-                <a:off x="9420069" y="2245216"/>
+                <a:off x="9229235" y="1195993"/>
                 <a:ext cx="2227288" cy="2084225"/>
               </a:xfrm>
               <a:prstGeom prst="rect">
@@ -5478,7 +5463,7 @@
             </p:txBody>
           </p:sp>
         </mc:Choice>
-        <mc:Fallback xmlns="">
+        <mc:Fallback>
           <p:sp>
             <p:nvSpPr>
               <p:cNvPr id="6" name="TextBox 5">
@@ -5495,7 +5480,7 @@
             </p:nvSpPr>
             <p:spPr>
               <a:xfrm>
-                <a:off x="9420069" y="2245216"/>
+                <a:off x="9229235" y="1195993"/>
                 <a:ext cx="2227288" cy="2084225"/>
               </a:xfrm>
               <a:prstGeom prst="rect">
@@ -5504,7 +5489,7 @@
               <a:blipFill>
                 <a:blip r:embed="rId4"/>
                 <a:stretch>
-                  <a:fillRect l="-1084" t="-580"/>
+                  <a:fillRect l="-1359" t="-580"/>
                 </a:stretch>
               </a:blipFill>
             </p:spPr>
@@ -5523,6 +5508,1657 @@
           </p:sp>
         </mc:Fallback>
       </mc:AlternateContent>
+      <p:grpSp>
+        <p:nvGrpSpPr>
+          <p:cNvPr id="8" name="Group 7">
+            <a:extLst>
+              <a:ext uri="{FF2B5EF4-FFF2-40B4-BE49-F238E27FC236}">
+                <a16:creationId xmlns:a16="http://schemas.microsoft.com/office/drawing/2014/main" id="{73DFF17E-DF67-BABC-A51D-6F73F6245657}"/>
+              </a:ext>
+            </a:extLst>
+          </p:cNvPr>
+          <p:cNvGrpSpPr/>
+          <p:nvPr/>
+        </p:nvGrpSpPr>
+        <p:grpSpPr>
+          <a:xfrm>
+            <a:off x="9065494" y="3469270"/>
+            <a:ext cx="2854818" cy="1480504"/>
+            <a:chOff x="8867761" y="4764111"/>
+            <a:chExt cx="2854818" cy="1480504"/>
+          </a:xfrm>
+        </p:grpSpPr>
+        <p:grpSp>
+          <p:nvGrpSpPr>
+            <p:cNvPr id="9" name="Group 8" descr="Updating the value function using iterative Bellman updates.">
+              <a:extLst>
+                <a:ext uri="{FF2B5EF4-FFF2-40B4-BE49-F238E27FC236}">
+                  <a16:creationId xmlns:a16="http://schemas.microsoft.com/office/drawing/2014/main" id="{5E13A197-79F1-6CAE-0A97-FAA7508CBCC7}"/>
+                </a:ext>
+              </a:extLst>
+            </p:cNvPr>
+            <p:cNvGrpSpPr/>
+            <p:nvPr/>
+          </p:nvGrpSpPr>
+          <p:grpSpPr>
+            <a:xfrm>
+              <a:off x="8867761" y="4764111"/>
+              <a:ext cx="2854818" cy="1428805"/>
+              <a:chOff x="9337182" y="2229868"/>
+              <a:chExt cx="2854818" cy="1428805"/>
+            </a:xfrm>
+          </p:grpSpPr>
+          <p:cxnSp>
+            <p:nvCxnSpPr>
+              <p:cNvPr id="11" name="Straight Connector 10">
+                <a:extLst>
+                  <a:ext uri="{FF2B5EF4-FFF2-40B4-BE49-F238E27FC236}">
+                    <a16:creationId xmlns:a16="http://schemas.microsoft.com/office/drawing/2014/main" id="{8A7CFF6D-44E5-4AC6-F8FA-305C74E68FE9}"/>
+                  </a:ext>
+                  <a:ext uri="{C183D7F6-B498-43B3-948B-1728B52AA6E4}">
+                    <adec:decorative xmlns:adec="http://schemas.microsoft.com/office/drawing/2017/decorative" val="1"/>
+                  </a:ext>
+                </a:extLst>
+              </p:cNvPr>
+              <p:cNvCxnSpPr>
+                <a:cxnSpLocks/>
+              </p:cNvCxnSpPr>
+              <p:nvPr/>
+            </p:nvCxnSpPr>
+            <p:spPr>
+              <a:xfrm>
+                <a:off x="9337182" y="3124199"/>
+                <a:ext cx="2393078" cy="0"/>
+              </a:xfrm>
+              <a:prstGeom prst="line">
+                <a:avLst/>
+              </a:prstGeom>
+            </p:spPr>
+            <p:style>
+              <a:lnRef idx="1">
+                <a:schemeClr val="accent1"/>
+              </a:lnRef>
+              <a:fillRef idx="0">
+                <a:schemeClr val="accent1"/>
+              </a:fillRef>
+              <a:effectRef idx="0">
+                <a:schemeClr val="accent1"/>
+              </a:effectRef>
+              <a:fontRef idx="minor">
+                <a:schemeClr val="tx1"/>
+              </a:fontRef>
+            </p:style>
+          </p:cxnSp>
+          <mc:AlternateContent xmlns:mc="http://schemas.openxmlformats.org/markup-compatibility/2006" xmlns:a14="http://schemas.microsoft.com/office/drawing/2010/main">
+            <mc:Choice Requires="a14">
+              <p:sp>
+                <p:nvSpPr>
+                  <p:cNvPr id="12" name="TextBox 8">
+                    <a:extLst>
+                      <a:ext uri="{FF2B5EF4-FFF2-40B4-BE49-F238E27FC236}">
+                        <a16:creationId xmlns:a16="http://schemas.microsoft.com/office/drawing/2014/main" id="{FC62ADE9-9B2E-0CE9-B525-28B9E250FACF}"/>
+                      </a:ext>
+                      <a:ext uri="{C183D7F6-B498-43B3-948B-1728B52AA6E4}">
+                        <adec:decorative xmlns:adec="http://schemas.microsoft.com/office/drawing/2017/decorative" val="1"/>
+                      </a:ext>
+                    </a:extLst>
+                  </p:cNvPr>
+                  <p:cNvSpPr txBox="1"/>
+                  <p:nvPr/>
+                </p:nvSpPr>
+                <p:spPr>
+                  <a:xfrm>
+                    <a:off x="11425004" y="3092683"/>
+                    <a:ext cx="766996" cy="369332"/>
+                  </a:xfrm>
+                  <a:prstGeom prst="rect">
+                    <a:avLst/>
+                  </a:prstGeom>
+                  <a:noFill/>
+                </p:spPr>
+                <p:txBody>
+                  <a:bodyPr wrap="square">
+                    <a:spAutoFit/>
+                  </a:bodyPr>
+                  <a:lstStyle>
+                    <a:defPPr>
+                      <a:defRPr lang="en-US"/>
+                    </a:defPPr>
+                    <a:lvl1pPr marL="0" algn="l" defTabSz="914400" rtl="0" eaLnBrk="1" latinLnBrk="0" hangingPunct="1">
+                      <a:defRPr sz="1800" kern="1200">
+                        <a:solidFill>
+                          <a:schemeClr val="tx1"/>
+                        </a:solidFill>
+                        <a:latin typeface="+mn-lt"/>
+                        <a:ea typeface="+mn-ea"/>
+                        <a:cs typeface="+mn-cs"/>
+                      </a:defRPr>
+                    </a:lvl1pPr>
+                    <a:lvl2pPr marL="457200" algn="l" defTabSz="914400" rtl="0" eaLnBrk="1" latinLnBrk="0" hangingPunct="1">
+                      <a:defRPr sz="1800" kern="1200">
+                        <a:solidFill>
+                          <a:schemeClr val="tx1"/>
+                        </a:solidFill>
+                        <a:latin typeface="+mn-lt"/>
+                        <a:ea typeface="+mn-ea"/>
+                        <a:cs typeface="+mn-cs"/>
+                      </a:defRPr>
+                    </a:lvl2pPr>
+                    <a:lvl3pPr marL="914400" algn="l" defTabSz="914400" rtl="0" eaLnBrk="1" latinLnBrk="0" hangingPunct="1">
+                      <a:defRPr sz="1800" kern="1200">
+                        <a:solidFill>
+                          <a:schemeClr val="tx1"/>
+                        </a:solidFill>
+                        <a:latin typeface="+mn-lt"/>
+                        <a:ea typeface="+mn-ea"/>
+                        <a:cs typeface="+mn-cs"/>
+                      </a:defRPr>
+                    </a:lvl3pPr>
+                    <a:lvl4pPr marL="1371600" algn="l" defTabSz="914400" rtl="0" eaLnBrk="1" latinLnBrk="0" hangingPunct="1">
+                      <a:defRPr sz="1800" kern="1200">
+                        <a:solidFill>
+                          <a:schemeClr val="tx1"/>
+                        </a:solidFill>
+                        <a:latin typeface="+mn-lt"/>
+                        <a:ea typeface="+mn-ea"/>
+                        <a:cs typeface="+mn-cs"/>
+                      </a:defRPr>
+                    </a:lvl4pPr>
+                    <a:lvl5pPr marL="1828800" algn="l" defTabSz="914400" rtl="0" eaLnBrk="1" latinLnBrk="0" hangingPunct="1">
+                      <a:defRPr sz="1800" kern="1200">
+                        <a:solidFill>
+                          <a:schemeClr val="tx1"/>
+                        </a:solidFill>
+                        <a:latin typeface="+mn-lt"/>
+                        <a:ea typeface="+mn-ea"/>
+                        <a:cs typeface="+mn-cs"/>
+                      </a:defRPr>
+                    </a:lvl5pPr>
+                    <a:lvl6pPr marL="2286000" algn="l" defTabSz="914400" rtl="0" eaLnBrk="1" latinLnBrk="0" hangingPunct="1">
+                      <a:defRPr sz="1800" kern="1200">
+                        <a:solidFill>
+                          <a:schemeClr val="tx1"/>
+                        </a:solidFill>
+                        <a:latin typeface="+mn-lt"/>
+                        <a:ea typeface="+mn-ea"/>
+                        <a:cs typeface="+mn-cs"/>
+                      </a:defRPr>
+                    </a:lvl6pPr>
+                    <a:lvl7pPr marL="2743200" algn="l" defTabSz="914400" rtl="0" eaLnBrk="1" latinLnBrk="0" hangingPunct="1">
+                      <a:defRPr sz="1800" kern="1200">
+                        <a:solidFill>
+                          <a:schemeClr val="tx1"/>
+                        </a:solidFill>
+                        <a:latin typeface="+mn-lt"/>
+                        <a:ea typeface="+mn-ea"/>
+                        <a:cs typeface="+mn-cs"/>
+                      </a:defRPr>
+                    </a:lvl7pPr>
+                    <a:lvl8pPr marL="3200400" algn="l" defTabSz="914400" rtl="0" eaLnBrk="1" latinLnBrk="0" hangingPunct="1">
+                      <a:defRPr sz="1800" kern="1200">
+                        <a:solidFill>
+                          <a:schemeClr val="tx1"/>
+                        </a:solidFill>
+                        <a:latin typeface="+mn-lt"/>
+                        <a:ea typeface="+mn-ea"/>
+                        <a:cs typeface="+mn-cs"/>
+                      </a:defRPr>
+                    </a:lvl8pPr>
+                    <a:lvl9pPr marL="3657600" algn="l" defTabSz="914400" rtl="0" eaLnBrk="1" latinLnBrk="0" hangingPunct="1">
+                      <a:defRPr sz="1800" kern="1200">
+                        <a:solidFill>
+                          <a:schemeClr val="tx1"/>
+                        </a:solidFill>
+                        <a:latin typeface="+mn-lt"/>
+                        <a:ea typeface="+mn-ea"/>
+                        <a:cs typeface="+mn-cs"/>
+                      </a:defRPr>
+                    </a:lvl9pPr>
+                  </a:lstStyle>
+                  <a:p>
+                    <a:pPr/>
+                    <a14:m>
+                      <m:oMathPara xmlns:m="http://schemas.openxmlformats.org/officeDocument/2006/math">
+                        <m:oMathParaPr>
+                          <m:jc m:val="centerGroup"/>
+                        </m:oMathParaPr>
+                        <m:oMath xmlns:m="http://schemas.openxmlformats.org/officeDocument/2006/math">
+                          <m:sSub>
+                            <m:sSubPr>
+                              <m:ctrlPr>
+                                <a:rPr lang="en-US" sz="1800" b="0" i="1" smtClean="0">
+                                  <a:latin typeface="Cambria Math" panose="02040503050406030204" pitchFamily="18" charset="0"/>
+                                </a:rPr>
+                              </m:ctrlPr>
+                            </m:sSubPr>
+                            <m:e>
+                              <m:r>
+                                <a:rPr lang="en-US" sz="1800" b="0" i="1" smtClean="0">
+                                  <a:latin typeface="Cambria Math" panose="02040503050406030204" pitchFamily="18" charset="0"/>
+                                </a:rPr>
+                                <m:t>𝑣</m:t>
+                              </m:r>
+                            </m:e>
+                            <m:sub>
+                              <m:r>
+                                <a:rPr lang="en-US" sz="1800" b="0" i="1" smtClean="0">
+                                  <a:latin typeface="Cambria Math" panose="02040503050406030204" pitchFamily="18" charset="0"/>
+                                </a:rPr>
+                                <m:t>𝜋</m:t>
+                              </m:r>
+                            </m:sub>
+                          </m:sSub>
+                        </m:oMath>
+                      </m:oMathPara>
+                    </a14:m>
+                    <a:endParaRPr lang="en-US" dirty="0"/>
+                  </a:p>
+                </p:txBody>
+              </p:sp>
+            </mc:Choice>
+            <mc:Fallback xmlns="">
+              <p:sp>
+                <p:nvSpPr>
+                  <p:cNvPr id="12" name="TextBox 8">
+                    <a:extLst>
+                      <a:ext uri="{FF2B5EF4-FFF2-40B4-BE49-F238E27FC236}">
+                        <a16:creationId xmlns:a16="http://schemas.microsoft.com/office/drawing/2014/main" id="{115AA05C-2180-0AF6-A384-9D75BED15ED1}"/>
+                      </a:ext>
+                      <a:ext uri="{C183D7F6-B498-43B3-948B-1728B52AA6E4}">
+                        <adec:decorative xmlns:adec="http://schemas.microsoft.com/office/drawing/2017/decorative" val="1"/>
+                      </a:ext>
+                    </a:extLst>
+                  </p:cNvPr>
+                  <p:cNvSpPr txBox="1">
+                    <a:spLocks noRot="1" noChangeAspect="1" noMove="1" noResize="1" noEditPoints="1" noAdjustHandles="1" noChangeArrowheads="1" noChangeShapeType="1" noTextEdit="1"/>
+                  </p:cNvSpPr>
+                  <p:nvPr/>
+                </p:nvSpPr>
+                <p:spPr>
+                  <a:xfrm>
+                    <a:off x="11425004" y="3092683"/>
+                    <a:ext cx="766996" cy="369332"/>
+                  </a:xfrm>
+                  <a:prstGeom prst="rect">
+                    <a:avLst/>
+                  </a:prstGeom>
+                  <a:blipFill>
+                    <a:blip r:embed="rId5"/>
+                    <a:stretch>
+                      <a:fillRect/>
+                    </a:stretch>
+                  </a:blipFill>
+                </p:spPr>
+                <p:txBody>
+                  <a:bodyPr/>
+                  <a:lstStyle/>
+                  <a:p>
+                    <a:r>
+                      <a:rPr lang="en-US">
+                        <a:noFill/>
+                      </a:rPr>
+                      <a:t> </a:t>
+                    </a:r>
+                  </a:p>
+                </p:txBody>
+              </p:sp>
+            </mc:Fallback>
+          </mc:AlternateContent>
+          <p:sp>
+            <p:nvSpPr>
+              <p:cNvPr id="13" name="Arc 12">
+                <a:extLst>
+                  <a:ext uri="{FF2B5EF4-FFF2-40B4-BE49-F238E27FC236}">
+                    <a16:creationId xmlns:a16="http://schemas.microsoft.com/office/drawing/2014/main" id="{58658A5E-4BF3-F495-C114-E6EA460FC871}"/>
+                  </a:ext>
+                  <a:ext uri="{C183D7F6-B498-43B3-948B-1728B52AA6E4}">
+                    <adec:decorative xmlns:adec="http://schemas.microsoft.com/office/drawing/2017/decorative" val="1"/>
+                  </a:ext>
+                </a:extLst>
+              </p:cNvPr>
+              <p:cNvSpPr/>
+              <p:nvPr/>
+            </p:nvSpPr>
+            <p:spPr>
+              <a:xfrm>
+                <a:off x="9760371" y="2649297"/>
+                <a:ext cx="574339" cy="1009376"/>
+              </a:xfrm>
+              <a:prstGeom prst="arc">
+                <a:avLst>
+                  <a:gd name="adj1" fmla="val 10871568"/>
+                  <a:gd name="adj2" fmla="val 0"/>
+                </a:avLst>
+              </a:prstGeom>
+              <a:ln w="19050" cap="flat" cmpd="sng" algn="ctr">
+                <a:solidFill>
+                  <a:schemeClr val="accent6"/>
+                </a:solidFill>
+                <a:prstDash val="solid"/>
+                <a:round/>
+                <a:headEnd type="none" w="med" len="med"/>
+                <a:tailEnd type="arrow" w="med" len="med"/>
+              </a:ln>
+            </p:spPr>
+            <p:style>
+              <a:lnRef idx="0">
+                <a:scrgbClr r="0" g="0" b="0"/>
+              </a:lnRef>
+              <a:fillRef idx="0">
+                <a:scrgbClr r="0" g="0" b="0"/>
+              </a:fillRef>
+              <a:effectRef idx="0">
+                <a:scrgbClr r="0" g="0" b="0"/>
+              </a:effectRef>
+              <a:fontRef idx="minor">
+                <a:schemeClr val="tx1"/>
+              </a:fontRef>
+            </p:style>
+            <p:txBody>
+              <a:bodyPr rtlCol="0" anchor="ctr"/>
+              <a:lstStyle>
+                <a:defPPr>
+                  <a:defRPr lang="en-US"/>
+                </a:defPPr>
+                <a:lvl1pPr marL="0" algn="l" defTabSz="914400" rtl="0" eaLnBrk="1" latinLnBrk="0" hangingPunct="1">
+                  <a:defRPr sz="1800" kern="1200">
+                    <a:solidFill>
+                      <a:schemeClr val="tx1"/>
+                    </a:solidFill>
+                    <a:latin typeface="+mn-lt"/>
+                    <a:ea typeface="+mn-ea"/>
+                    <a:cs typeface="+mn-cs"/>
+                  </a:defRPr>
+                </a:lvl1pPr>
+                <a:lvl2pPr marL="457200" algn="l" defTabSz="914400" rtl="0" eaLnBrk="1" latinLnBrk="0" hangingPunct="1">
+                  <a:defRPr sz="1800" kern="1200">
+                    <a:solidFill>
+                      <a:schemeClr val="tx1"/>
+                    </a:solidFill>
+                    <a:latin typeface="+mn-lt"/>
+                    <a:ea typeface="+mn-ea"/>
+                    <a:cs typeface="+mn-cs"/>
+                  </a:defRPr>
+                </a:lvl2pPr>
+                <a:lvl3pPr marL="914400" algn="l" defTabSz="914400" rtl="0" eaLnBrk="1" latinLnBrk="0" hangingPunct="1">
+                  <a:defRPr sz="1800" kern="1200">
+                    <a:solidFill>
+                      <a:schemeClr val="tx1"/>
+                    </a:solidFill>
+                    <a:latin typeface="+mn-lt"/>
+                    <a:ea typeface="+mn-ea"/>
+                    <a:cs typeface="+mn-cs"/>
+                  </a:defRPr>
+                </a:lvl3pPr>
+                <a:lvl4pPr marL="1371600" algn="l" defTabSz="914400" rtl="0" eaLnBrk="1" latinLnBrk="0" hangingPunct="1">
+                  <a:defRPr sz="1800" kern="1200">
+                    <a:solidFill>
+                      <a:schemeClr val="tx1"/>
+                    </a:solidFill>
+                    <a:latin typeface="+mn-lt"/>
+                    <a:ea typeface="+mn-ea"/>
+                    <a:cs typeface="+mn-cs"/>
+                  </a:defRPr>
+                </a:lvl4pPr>
+                <a:lvl5pPr marL="1828800" algn="l" defTabSz="914400" rtl="0" eaLnBrk="1" latinLnBrk="0" hangingPunct="1">
+                  <a:defRPr sz="1800" kern="1200">
+                    <a:solidFill>
+                      <a:schemeClr val="tx1"/>
+                    </a:solidFill>
+                    <a:latin typeface="+mn-lt"/>
+                    <a:ea typeface="+mn-ea"/>
+                    <a:cs typeface="+mn-cs"/>
+                  </a:defRPr>
+                </a:lvl5pPr>
+                <a:lvl6pPr marL="2286000" algn="l" defTabSz="914400" rtl="0" eaLnBrk="1" latinLnBrk="0" hangingPunct="1">
+                  <a:defRPr sz="1800" kern="1200">
+                    <a:solidFill>
+                      <a:schemeClr val="tx1"/>
+                    </a:solidFill>
+                    <a:latin typeface="+mn-lt"/>
+                    <a:ea typeface="+mn-ea"/>
+                    <a:cs typeface="+mn-cs"/>
+                  </a:defRPr>
+                </a:lvl6pPr>
+                <a:lvl7pPr marL="2743200" algn="l" defTabSz="914400" rtl="0" eaLnBrk="1" latinLnBrk="0" hangingPunct="1">
+                  <a:defRPr sz="1800" kern="1200">
+                    <a:solidFill>
+                      <a:schemeClr val="tx1"/>
+                    </a:solidFill>
+                    <a:latin typeface="+mn-lt"/>
+                    <a:ea typeface="+mn-ea"/>
+                    <a:cs typeface="+mn-cs"/>
+                  </a:defRPr>
+                </a:lvl7pPr>
+                <a:lvl8pPr marL="3200400" algn="l" defTabSz="914400" rtl="0" eaLnBrk="1" latinLnBrk="0" hangingPunct="1">
+                  <a:defRPr sz="1800" kern="1200">
+                    <a:solidFill>
+                      <a:schemeClr val="tx1"/>
+                    </a:solidFill>
+                    <a:latin typeface="+mn-lt"/>
+                    <a:ea typeface="+mn-ea"/>
+                    <a:cs typeface="+mn-cs"/>
+                  </a:defRPr>
+                </a:lvl8pPr>
+                <a:lvl9pPr marL="3657600" algn="l" defTabSz="914400" rtl="0" eaLnBrk="1" latinLnBrk="0" hangingPunct="1">
+                  <a:defRPr sz="1800" kern="1200">
+                    <a:solidFill>
+                      <a:schemeClr val="tx1"/>
+                    </a:solidFill>
+                    <a:latin typeface="+mn-lt"/>
+                    <a:ea typeface="+mn-ea"/>
+                    <a:cs typeface="+mn-cs"/>
+                  </a:defRPr>
+                </a:lvl9pPr>
+              </a:lstStyle>
+              <a:p>
+                <a:pPr algn="ctr"/>
+                <a:endParaRPr lang="en-US"/>
+              </a:p>
+            </p:txBody>
+          </p:sp>
+          <p:sp>
+            <p:nvSpPr>
+              <p:cNvPr id="14" name="Arc 13">
+                <a:extLst>
+                  <a:ext uri="{FF2B5EF4-FFF2-40B4-BE49-F238E27FC236}">
+                    <a16:creationId xmlns:a16="http://schemas.microsoft.com/office/drawing/2014/main" id="{8C2E7F1D-DC32-A251-BB28-41567AFC7C70}"/>
+                  </a:ext>
+                  <a:ext uri="{C183D7F6-B498-43B3-948B-1728B52AA6E4}">
+                    <adec:decorative xmlns:adec="http://schemas.microsoft.com/office/drawing/2017/decorative" val="1"/>
+                  </a:ext>
+                </a:extLst>
+              </p:cNvPr>
+              <p:cNvSpPr/>
+              <p:nvPr/>
+            </p:nvSpPr>
+            <p:spPr>
+              <a:xfrm>
+                <a:off x="10334710" y="2614308"/>
+                <a:ext cx="765785" cy="1019782"/>
+              </a:xfrm>
+              <a:prstGeom prst="arc">
+                <a:avLst>
+                  <a:gd name="adj1" fmla="val 10871568"/>
+                  <a:gd name="adj2" fmla="val 0"/>
+                </a:avLst>
+              </a:prstGeom>
+              <a:ln w="19050" cap="flat" cmpd="sng" algn="ctr">
+                <a:solidFill>
+                  <a:schemeClr val="accent6"/>
+                </a:solidFill>
+                <a:prstDash val="solid"/>
+                <a:round/>
+                <a:headEnd type="none" w="med" len="med"/>
+                <a:tailEnd type="arrow" w="med" len="med"/>
+              </a:ln>
+            </p:spPr>
+            <p:style>
+              <a:lnRef idx="0">
+                <a:scrgbClr r="0" g="0" b="0"/>
+              </a:lnRef>
+              <a:fillRef idx="0">
+                <a:scrgbClr r="0" g="0" b="0"/>
+              </a:fillRef>
+              <a:effectRef idx="0">
+                <a:scrgbClr r="0" g="0" b="0"/>
+              </a:effectRef>
+              <a:fontRef idx="minor">
+                <a:schemeClr val="tx1"/>
+              </a:fontRef>
+            </p:style>
+            <p:txBody>
+              <a:bodyPr rtlCol="0" anchor="ctr"/>
+              <a:lstStyle>
+                <a:defPPr>
+                  <a:defRPr lang="en-US"/>
+                </a:defPPr>
+                <a:lvl1pPr marL="0" algn="l" defTabSz="914400" rtl="0" eaLnBrk="1" latinLnBrk="0" hangingPunct="1">
+                  <a:defRPr sz="1800" kern="1200">
+                    <a:solidFill>
+                      <a:schemeClr val="tx1"/>
+                    </a:solidFill>
+                    <a:latin typeface="+mn-lt"/>
+                    <a:ea typeface="+mn-ea"/>
+                    <a:cs typeface="+mn-cs"/>
+                  </a:defRPr>
+                </a:lvl1pPr>
+                <a:lvl2pPr marL="457200" algn="l" defTabSz="914400" rtl="0" eaLnBrk="1" latinLnBrk="0" hangingPunct="1">
+                  <a:defRPr sz="1800" kern="1200">
+                    <a:solidFill>
+                      <a:schemeClr val="tx1"/>
+                    </a:solidFill>
+                    <a:latin typeface="+mn-lt"/>
+                    <a:ea typeface="+mn-ea"/>
+                    <a:cs typeface="+mn-cs"/>
+                  </a:defRPr>
+                </a:lvl2pPr>
+                <a:lvl3pPr marL="914400" algn="l" defTabSz="914400" rtl="0" eaLnBrk="1" latinLnBrk="0" hangingPunct="1">
+                  <a:defRPr sz="1800" kern="1200">
+                    <a:solidFill>
+                      <a:schemeClr val="tx1"/>
+                    </a:solidFill>
+                    <a:latin typeface="+mn-lt"/>
+                    <a:ea typeface="+mn-ea"/>
+                    <a:cs typeface="+mn-cs"/>
+                  </a:defRPr>
+                </a:lvl3pPr>
+                <a:lvl4pPr marL="1371600" algn="l" defTabSz="914400" rtl="0" eaLnBrk="1" latinLnBrk="0" hangingPunct="1">
+                  <a:defRPr sz="1800" kern="1200">
+                    <a:solidFill>
+                      <a:schemeClr val="tx1"/>
+                    </a:solidFill>
+                    <a:latin typeface="+mn-lt"/>
+                    <a:ea typeface="+mn-ea"/>
+                    <a:cs typeface="+mn-cs"/>
+                  </a:defRPr>
+                </a:lvl4pPr>
+                <a:lvl5pPr marL="1828800" algn="l" defTabSz="914400" rtl="0" eaLnBrk="1" latinLnBrk="0" hangingPunct="1">
+                  <a:defRPr sz="1800" kern="1200">
+                    <a:solidFill>
+                      <a:schemeClr val="tx1"/>
+                    </a:solidFill>
+                    <a:latin typeface="+mn-lt"/>
+                    <a:ea typeface="+mn-ea"/>
+                    <a:cs typeface="+mn-cs"/>
+                  </a:defRPr>
+                </a:lvl5pPr>
+                <a:lvl6pPr marL="2286000" algn="l" defTabSz="914400" rtl="0" eaLnBrk="1" latinLnBrk="0" hangingPunct="1">
+                  <a:defRPr sz="1800" kern="1200">
+                    <a:solidFill>
+                      <a:schemeClr val="tx1"/>
+                    </a:solidFill>
+                    <a:latin typeface="+mn-lt"/>
+                    <a:ea typeface="+mn-ea"/>
+                    <a:cs typeface="+mn-cs"/>
+                  </a:defRPr>
+                </a:lvl6pPr>
+                <a:lvl7pPr marL="2743200" algn="l" defTabSz="914400" rtl="0" eaLnBrk="1" latinLnBrk="0" hangingPunct="1">
+                  <a:defRPr sz="1800" kern="1200">
+                    <a:solidFill>
+                      <a:schemeClr val="tx1"/>
+                    </a:solidFill>
+                    <a:latin typeface="+mn-lt"/>
+                    <a:ea typeface="+mn-ea"/>
+                    <a:cs typeface="+mn-cs"/>
+                  </a:defRPr>
+                </a:lvl7pPr>
+                <a:lvl8pPr marL="3200400" algn="l" defTabSz="914400" rtl="0" eaLnBrk="1" latinLnBrk="0" hangingPunct="1">
+                  <a:defRPr sz="1800" kern="1200">
+                    <a:solidFill>
+                      <a:schemeClr val="tx1"/>
+                    </a:solidFill>
+                    <a:latin typeface="+mn-lt"/>
+                    <a:ea typeface="+mn-ea"/>
+                    <a:cs typeface="+mn-cs"/>
+                  </a:defRPr>
+                </a:lvl8pPr>
+                <a:lvl9pPr marL="3657600" algn="l" defTabSz="914400" rtl="0" eaLnBrk="1" latinLnBrk="0" hangingPunct="1">
+                  <a:defRPr sz="1800" kern="1200">
+                    <a:solidFill>
+                      <a:schemeClr val="tx1"/>
+                    </a:solidFill>
+                    <a:latin typeface="+mn-lt"/>
+                    <a:ea typeface="+mn-ea"/>
+                    <a:cs typeface="+mn-cs"/>
+                  </a:defRPr>
+                </a:lvl9pPr>
+              </a:lstStyle>
+              <a:p>
+                <a:pPr algn="ctr"/>
+                <a:endParaRPr lang="en-US"/>
+              </a:p>
+            </p:txBody>
+          </p:sp>
+          <p:sp>
+            <p:nvSpPr>
+              <p:cNvPr id="15" name="Arc 14">
+                <a:extLst>
+                  <a:ext uri="{FF2B5EF4-FFF2-40B4-BE49-F238E27FC236}">
+                    <a16:creationId xmlns:a16="http://schemas.microsoft.com/office/drawing/2014/main" id="{7026F178-8BD0-9B6E-1868-851FF19E16DA}"/>
+                  </a:ext>
+                  <a:ext uri="{C183D7F6-B498-43B3-948B-1728B52AA6E4}">
+                    <adec:decorative xmlns:adec="http://schemas.microsoft.com/office/drawing/2017/decorative" val="1"/>
+                  </a:ext>
+                </a:extLst>
+              </p:cNvPr>
+              <p:cNvSpPr/>
+              <p:nvPr/>
+            </p:nvSpPr>
+            <p:spPr>
+              <a:xfrm>
+                <a:off x="11100495" y="2627412"/>
+                <a:ext cx="220048" cy="1019782"/>
+              </a:xfrm>
+              <a:prstGeom prst="arc">
+                <a:avLst>
+                  <a:gd name="adj1" fmla="val 10871568"/>
+                  <a:gd name="adj2" fmla="val 0"/>
+                </a:avLst>
+              </a:prstGeom>
+              <a:ln w="19050" cap="flat" cmpd="sng" algn="ctr">
+                <a:solidFill>
+                  <a:schemeClr val="accent6"/>
+                </a:solidFill>
+                <a:prstDash val="solid"/>
+                <a:round/>
+                <a:headEnd type="none" w="med" len="med"/>
+                <a:tailEnd type="arrow" w="med" len="med"/>
+              </a:ln>
+            </p:spPr>
+            <p:style>
+              <a:lnRef idx="0">
+                <a:scrgbClr r="0" g="0" b="0"/>
+              </a:lnRef>
+              <a:fillRef idx="0">
+                <a:scrgbClr r="0" g="0" b="0"/>
+              </a:fillRef>
+              <a:effectRef idx="0">
+                <a:scrgbClr r="0" g="0" b="0"/>
+              </a:effectRef>
+              <a:fontRef idx="minor">
+                <a:schemeClr val="tx1"/>
+              </a:fontRef>
+            </p:style>
+            <p:txBody>
+              <a:bodyPr rtlCol="0" anchor="ctr"/>
+              <a:lstStyle>
+                <a:defPPr>
+                  <a:defRPr lang="en-US"/>
+                </a:defPPr>
+                <a:lvl1pPr marL="0" algn="l" defTabSz="914400" rtl="0" eaLnBrk="1" latinLnBrk="0" hangingPunct="1">
+                  <a:defRPr sz="1800" kern="1200">
+                    <a:solidFill>
+                      <a:schemeClr val="tx1"/>
+                    </a:solidFill>
+                    <a:latin typeface="+mn-lt"/>
+                    <a:ea typeface="+mn-ea"/>
+                    <a:cs typeface="+mn-cs"/>
+                  </a:defRPr>
+                </a:lvl1pPr>
+                <a:lvl2pPr marL="457200" algn="l" defTabSz="914400" rtl="0" eaLnBrk="1" latinLnBrk="0" hangingPunct="1">
+                  <a:defRPr sz="1800" kern="1200">
+                    <a:solidFill>
+                      <a:schemeClr val="tx1"/>
+                    </a:solidFill>
+                    <a:latin typeface="+mn-lt"/>
+                    <a:ea typeface="+mn-ea"/>
+                    <a:cs typeface="+mn-cs"/>
+                  </a:defRPr>
+                </a:lvl2pPr>
+                <a:lvl3pPr marL="914400" algn="l" defTabSz="914400" rtl="0" eaLnBrk="1" latinLnBrk="0" hangingPunct="1">
+                  <a:defRPr sz="1800" kern="1200">
+                    <a:solidFill>
+                      <a:schemeClr val="tx1"/>
+                    </a:solidFill>
+                    <a:latin typeface="+mn-lt"/>
+                    <a:ea typeface="+mn-ea"/>
+                    <a:cs typeface="+mn-cs"/>
+                  </a:defRPr>
+                </a:lvl3pPr>
+                <a:lvl4pPr marL="1371600" algn="l" defTabSz="914400" rtl="0" eaLnBrk="1" latinLnBrk="0" hangingPunct="1">
+                  <a:defRPr sz="1800" kern="1200">
+                    <a:solidFill>
+                      <a:schemeClr val="tx1"/>
+                    </a:solidFill>
+                    <a:latin typeface="+mn-lt"/>
+                    <a:ea typeface="+mn-ea"/>
+                    <a:cs typeface="+mn-cs"/>
+                  </a:defRPr>
+                </a:lvl4pPr>
+                <a:lvl5pPr marL="1828800" algn="l" defTabSz="914400" rtl="0" eaLnBrk="1" latinLnBrk="0" hangingPunct="1">
+                  <a:defRPr sz="1800" kern="1200">
+                    <a:solidFill>
+                      <a:schemeClr val="tx1"/>
+                    </a:solidFill>
+                    <a:latin typeface="+mn-lt"/>
+                    <a:ea typeface="+mn-ea"/>
+                    <a:cs typeface="+mn-cs"/>
+                  </a:defRPr>
+                </a:lvl5pPr>
+                <a:lvl6pPr marL="2286000" algn="l" defTabSz="914400" rtl="0" eaLnBrk="1" latinLnBrk="0" hangingPunct="1">
+                  <a:defRPr sz="1800" kern="1200">
+                    <a:solidFill>
+                      <a:schemeClr val="tx1"/>
+                    </a:solidFill>
+                    <a:latin typeface="+mn-lt"/>
+                    <a:ea typeface="+mn-ea"/>
+                    <a:cs typeface="+mn-cs"/>
+                  </a:defRPr>
+                </a:lvl6pPr>
+                <a:lvl7pPr marL="2743200" algn="l" defTabSz="914400" rtl="0" eaLnBrk="1" latinLnBrk="0" hangingPunct="1">
+                  <a:defRPr sz="1800" kern="1200">
+                    <a:solidFill>
+                      <a:schemeClr val="tx1"/>
+                    </a:solidFill>
+                    <a:latin typeface="+mn-lt"/>
+                    <a:ea typeface="+mn-ea"/>
+                    <a:cs typeface="+mn-cs"/>
+                  </a:defRPr>
+                </a:lvl7pPr>
+                <a:lvl8pPr marL="3200400" algn="l" defTabSz="914400" rtl="0" eaLnBrk="1" latinLnBrk="0" hangingPunct="1">
+                  <a:defRPr sz="1800" kern="1200">
+                    <a:solidFill>
+                      <a:schemeClr val="tx1"/>
+                    </a:solidFill>
+                    <a:latin typeface="+mn-lt"/>
+                    <a:ea typeface="+mn-ea"/>
+                    <a:cs typeface="+mn-cs"/>
+                  </a:defRPr>
+                </a:lvl8pPr>
+                <a:lvl9pPr marL="3657600" algn="l" defTabSz="914400" rtl="0" eaLnBrk="1" latinLnBrk="0" hangingPunct="1">
+                  <a:defRPr sz="1800" kern="1200">
+                    <a:solidFill>
+                      <a:schemeClr val="tx1"/>
+                    </a:solidFill>
+                    <a:latin typeface="+mn-lt"/>
+                    <a:ea typeface="+mn-ea"/>
+                    <a:cs typeface="+mn-cs"/>
+                  </a:defRPr>
+                </a:lvl9pPr>
+              </a:lstStyle>
+              <a:p>
+                <a:pPr algn="ctr"/>
+                <a:endParaRPr lang="en-US"/>
+              </a:p>
+            </p:txBody>
+          </p:sp>
+          <p:sp>
+            <p:nvSpPr>
+              <p:cNvPr id="16" name="Arc 15">
+                <a:extLst>
+                  <a:ext uri="{FF2B5EF4-FFF2-40B4-BE49-F238E27FC236}">
+                    <a16:creationId xmlns:a16="http://schemas.microsoft.com/office/drawing/2014/main" id="{57088D6C-4C8C-FE23-F85D-8685A8BA96A3}"/>
+                  </a:ext>
+                  <a:ext uri="{C183D7F6-B498-43B3-948B-1728B52AA6E4}">
+                    <adec:decorative xmlns:adec="http://schemas.microsoft.com/office/drawing/2017/decorative" val="1"/>
+                  </a:ext>
+                </a:extLst>
+              </p:cNvPr>
+              <p:cNvSpPr/>
+              <p:nvPr/>
+            </p:nvSpPr>
+            <p:spPr>
+              <a:xfrm>
+                <a:off x="11308888" y="2648522"/>
+                <a:ext cx="417487" cy="951353"/>
+              </a:xfrm>
+              <a:prstGeom prst="arc">
+                <a:avLst>
+                  <a:gd name="adj1" fmla="val 10871568"/>
+                  <a:gd name="adj2" fmla="val 0"/>
+                </a:avLst>
+              </a:prstGeom>
+              <a:ln w="19050" cap="flat" cmpd="sng" algn="ctr">
+                <a:solidFill>
+                  <a:schemeClr val="accent6"/>
+                </a:solidFill>
+                <a:prstDash val="solid"/>
+                <a:round/>
+                <a:headEnd type="none" w="med" len="med"/>
+                <a:tailEnd type="arrow" w="med" len="med"/>
+              </a:ln>
+            </p:spPr>
+            <p:style>
+              <a:lnRef idx="0">
+                <a:scrgbClr r="0" g="0" b="0"/>
+              </a:lnRef>
+              <a:fillRef idx="0">
+                <a:scrgbClr r="0" g="0" b="0"/>
+              </a:fillRef>
+              <a:effectRef idx="0">
+                <a:scrgbClr r="0" g="0" b="0"/>
+              </a:effectRef>
+              <a:fontRef idx="minor">
+                <a:schemeClr val="tx1"/>
+              </a:fontRef>
+            </p:style>
+            <p:txBody>
+              <a:bodyPr rtlCol="0" anchor="ctr"/>
+              <a:lstStyle>
+                <a:defPPr>
+                  <a:defRPr lang="en-US"/>
+                </a:defPPr>
+                <a:lvl1pPr marL="0" algn="l" defTabSz="914400" rtl="0" eaLnBrk="1" latinLnBrk="0" hangingPunct="1">
+                  <a:defRPr sz="1800" kern="1200">
+                    <a:solidFill>
+                      <a:schemeClr val="tx1"/>
+                    </a:solidFill>
+                    <a:latin typeface="+mn-lt"/>
+                    <a:ea typeface="+mn-ea"/>
+                    <a:cs typeface="+mn-cs"/>
+                  </a:defRPr>
+                </a:lvl1pPr>
+                <a:lvl2pPr marL="457200" algn="l" defTabSz="914400" rtl="0" eaLnBrk="1" latinLnBrk="0" hangingPunct="1">
+                  <a:defRPr sz="1800" kern="1200">
+                    <a:solidFill>
+                      <a:schemeClr val="tx1"/>
+                    </a:solidFill>
+                    <a:latin typeface="+mn-lt"/>
+                    <a:ea typeface="+mn-ea"/>
+                    <a:cs typeface="+mn-cs"/>
+                  </a:defRPr>
+                </a:lvl2pPr>
+                <a:lvl3pPr marL="914400" algn="l" defTabSz="914400" rtl="0" eaLnBrk="1" latinLnBrk="0" hangingPunct="1">
+                  <a:defRPr sz="1800" kern="1200">
+                    <a:solidFill>
+                      <a:schemeClr val="tx1"/>
+                    </a:solidFill>
+                    <a:latin typeface="+mn-lt"/>
+                    <a:ea typeface="+mn-ea"/>
+                    <a:cs typeface="+mn-cs"/>
+                  </a:defRPr>
+                </a:lvl3pPr>
+                <a:lvl4pPr marL="1371600" algn="l" defTabSz="914400" rtl="0" eaLnBrk="1" latinLnBrk="0" hangingPunct="1">
+                  <a:defRPr sz="1800" kern="1200">
+                    <a:solidFill>
+                      <a:schemeClr val="tx1"/>
+                    </a:solidFill>
+                    <a:latin typeface="+mn-lt"/>
+                    <a:ea typeface="+mn-ea"/>
+                    <a:cs typeface="+mn-cs"/>
+                  </a:defRPr>
+                </a:lvl4pPr>
+                <a:lvl5pPr marL="1828800" algn="l" defTabSz="914400" rtl="0" eaLnBrk="1" latinLnBrk="0" hangingPunct="1">
+                  <a:defRPr sz="1800" kern="1200">
+                    <a:solidFill>
+                      <a:schemeClr val="tx1"/>
+                    </a:solidFill>
+                    <a:latin typeface="+mn-lt"/>
+                    <a:ea typeface="+mn-ea"/>
+                    <a:cs typeface="+mn-cs"/>
+                  </a:defRPr>
+                </a:lvl5pPr>
+                <a:lvl6pPr marL="2286000" algn="l" defTabSz="914400" rtl="0" eaLnBrk="1" latinLnBrk="0" hangingPunct="1">
+                  <a:defRPr sz="1800" kern="1200">
+                    <a:solidFill>
+                      <a:schemeClr val="tx1"/>
+                    </a:solidFill>
+                    <a:latin typeface="+mn-lt"/>
+                    <a:ea typeface="+mn-ea"/>
+                    <a:cs typeface="+mn-cs"/>
+                  </a:defRPr>
+                </a:lvl6pPr>
+                <a:lvl7pPr marL="2743200" algn="l" defTabSz="914400" rtl="0" eaLnBrk="1" latinLnBrk="0" hangingPunct="1">
+                  <a:defRPr sz="1800" kern="1200">
+                    <a:solidFill>
+                      <a:schemeClr val="tx1"/>
+                    </a:solidFill>
+                    <a:latin typeface="+mn-lt"/>
+                    <a:ea typeface="+mn-ea"/>
+                    <a:cs typeface="+mn-cs"/>
+                  </a:defRPr>
+                </a:lvl7pPr>
+                <a:lvl8pPr marL="3200400" algn="l" defTabSz="914400" rtl="0" eaLnBrk="1" latinLnBrk="0" hangingPunct="1">
+                  <a:defRPr sz="1800" kern="1200">
+                    <a:solidFill>
+                      <a:schemeClr val="tx1"/>
+                    </a:solidFill>
+                    <a:latin typeface="+mn-lt"/>
+                    <a:ea typeface="+mn-ea"/>
+                    <a:cs typeface="+mn-cs"/>
+                  </a:defRPr>
+                </a:lvl8pPr>
+                <a:lvl9pPr marL="3657600" algn="l" defTabSz="914400" rtl="0" eaLnBrk="1" latinLnBrk="0" hangingPunct="1">
+                  <a:defRPr sz="1800" kern="1200">
+                    <a:solidFill>
+                      <a:schemeClr val="tx1"/>
+                    </a:solidFill>
+                    <a:latin typeface="+mn-lt"/>
+                    <a:ea typeface="+mn-ea"/>
+                    <a:cs typeface="+mn-cs"/>
+                  </a:defRPr>
+                </a:lvl9pPr>
+              </a:lstStyle>
+              <a:p>
+                <a:pPr algn="ctr"/>
+                <a:endParaRPr lang="en-US"/>
+              </a:p>
+            </p:txBody>
+          </p:sp>
+          <mc:AlternateContent xmlns:mc="http://schemas.openxmlformats.org/markup-compatibility/2006" xmlns:a14="http://schemas.microsoft.com/office/drawing/2010/main">
+            <mc:Choice Requires="a14">
+              <p:sp>
+                <p:nvSpPr>
+                  <p:cNvPr id="17" name="TextBox 29">
+                    <a:extLst>
+                      <a:ext uri="{FF2B5EF4-FFF2-40B4-BE49-F238E27FC236}">
+                        <a16:creationId xmlns:a16="http://schemas.microsoft.com/office/drawing/2014/main" id="{33B57A32-72F6-077F-22AE-C34A118F7D55}"/>
+                      </a:ext>
+                      <a:ext uri="{C183D7F6-B498-43B3-948B-1728B52AA6E4}">
+                        <adec:decorative xmlns:adec="http://schemas.microsoft.com/office/drawing/2017/decorative" val="1"/>
+                      </a:ext>
+                    </a:extLst>
+                  </p:cNvPr>
+                  <p:cNvSpPr txBox="1"/>
+                  <p:nvPr/>
+                </p:nvSpPr>
+                <p:spPr>
+                  <a:xfrm>
+                    <a:off x="9564903" y="3086337"/>
+                    <a:ext cx="395810" cy="369332"/>
+                  </a:xfrm>
+                  <a:prstGeom prst="rect">
+                    <a:avLst/>
+                  </a:prstGeom>
+                  <a:noFill/>
+                </p:spPr>
+                <p:txBody>
+                  <a:bodyPr wrap="square">
+                    <a:spAutoFit/>
+                  </a:bodyPr>
+                  <a:lstStyle>
+                    <a:defPPr>
+                      <a:defRPr lang="en-US"/>
+                    </a:defPPr>
+                    <a:lvl1pPr marL="0" algn="l" defTabSz="914400" rtl="0" eaLnBrk="1" latinLnBrk="0" hangingPunct="1">
+                      <a:defRPr sz="1800" kern="1200">
+                        <a:solidFill>
+                          <a:schemeClr val="tx1"/>
+                        </a:solidFill>
+                        <a:latin typeface="+mn-lt"/>
+                        <a:ea typeface="+mn-ea"/>
+                        <a:cs typeface="+mn-cs"/>
+                      </a:defRPr>
+                    </a:lvl1pPr>
+                    <a:lvl2pPr marL="457200" algn="l" defTabSz="914400" rtl="0" eaLnBrk="1" latinLnBrk="0" hangingPunct="1">
+                      <a:defRPr sz="1800" kern="1200">
+                        <a:solidFill>
+                          <a:schemeClr val="tx1"/>
+                        </a:solidFill>
+                        <a:latin typeface="+mn-lt"/>
+                        <a:ea typeface="+mn-ea"/>
+                        <a:cs typeface="+mn-cs"/>
+                      </a:defRPr>
+                    </a:lvl2pPr>
+                    <a:lvl3pPr marL="914400" algn="l" defTabSz="914400" rtl="0" eaLnBrk="1" latinLnBrk="0" hangingPunct="1">
+                      <a:defRPr sz="1800" kern="1200">
+                        <a:solidFill>
+                          <a:schemeClr val="tx1"/>
+                        </a:solidFill>
+                        <a:latin typeface="+mn-lt"/>
+                        <a:ea typeface="+mn-ea"/>
+                        <a:cs typeface="+mn-cs"/>
+                      </a:defRPr>
+                    </a:lvl3pPr>
+                    <a:lvl4pPr marL="1371600" algn="l" defTabSz="914400" rtl="0" eaLnBrk="1" latinLnBrk="0" hangingPunct="1">
+                      <a:defRPr sz="1800" kern="1200">
+                        <a:solidFill>
+                          <a:schemeClr val="tx1"/>
+                        </a:solidFill>
+                        <a:latin typeface="+mn-lt"/>
+                        <a:ea typeface="+mn-ea"/>
+                        <a:cs typeface="+mn-cs"/>
+                      </a:defRPr>
+                    </a:lvl4pPr>
+                    <a:lvl5pPr marL="1828800" algn="l" defTabSz="914400" rtl="0" eaLnBrk="1" latinLnBrk="0" hangingPunct="1">
+                      <a:defRPr sz="1800" kern="1200">
+                        <a:solidFill>
+                          <a:schemeClr val="tx1"/>
+                        </a:solidFill>
+                        <a:latin typeface="+mn-lt"/>
+                        <a:ea typeface="+mn-ea"/>
+                        <a:cs typeface="+mn-cs"/>
+                      </a:defRPr>
+                    </a:lvl5pPr>
+                    <a:lvl6pPr marL="2286000" algn="l" defTabSz="914400" rtl="0" eaLnBrk="1" latinLnBrk="0" hangingPunct="1">
+                      <a:defRPr sz="1800" kern="1200">
+                        <a:solidFill>
+                          <a:schemeClr val="tx1"/>
+                        </a:solidFill>
+                        <a:latin typeface="+mn-lt"/>
+                        <a:ea typeface="+mn-ea"/>
+                        <a:cs typeface="+mn-cs"/>
+                      </a:defRPr>
+                    </a:lvl6pPr>
+                    <a:lvl7pPr marL="2743200" algn="l" defTabSz="914400" rtl="0" eaLnBrk="1" latinLnBrk="0" hangingPunct="1">
+                      <a:defRPr sz="1800" kern="1200">
+                        <a:solidFill>
+                          <a:schemeClr val="tx1"/>
+                        </a:solidFill>
+                        <a:latin typeface="+mn-lt"/>
+                        <a:ea typeface="+mn-ea"/>
+                        <a:cs typeface="+mn-cs"/>
+                      </a:defRPr>
+                    </a:lvl7pPr>
+                    <a:lvl8pPr marL="3200400" algn="l" defTabSz="914400" rtl="0" eaLnBrk="1" latinLnBrk="0" hangingPunct="1">
+                      <a:defRPr sz="1800" kern="1200">
+                        <a:solidFill>
+                          <a:schemeClr val="tx1"/>
+                        </a:solidFill>
+                        <a:latin typeface="+mn-lt"/>
+                        <a:ea typeface="+mn-ea"/>
+                        <a:cs typeface="+mn-cs"/>
+                      </a:defRPr>
+                    </a:lvl8pPr>
+                    <a:lvl9pPr marL="3657600" algn="l" defTabSz="914400" rtl="0" eaLnBrk="1" latinLnBrk="0" hangingPunct="1">
+                      <a:defRPr sz="1800" kern="1200">
+                        <a:solidFill>
+                          <a:schemeClr val="tx1"/>
+                        </a:solidFill>
+                        <a:latin typeface="+mn-lt"/>
+                        <a:ea typeface="+mn-ea"/>
+                        <a:cs typeface="+mn-cs"/>
+                      </a:defRPr>
+                    </a:lvl9pPr>
+                  </a:lstStyle>
+                  <a:p>
+                    <a:pPr/>
+                    <a14:m>
+                      <m:oMathPara xmlns:m="http://schemas.openxmlformats.org/officeDocument/2006/math">
+                        <m:oMathParaPr>
+                          <m:jc m:val="centerGroup"/>
+                        </m:oMathParaPr>
+                        <m:oMath xmlns:m="http://schemas.openxmlformats.org/officeDocument/2006/math">
+                          <m:sSub>
+                            <m:sSubPr>
+                              <m:ctrlPr>
+                                <a:rPr lang="en-US" sz="1800" b="0" i="1" smtClean="0">
+                                  <a:latin typeface="Cambria Math" panose="02040503050406030204" pitchFamily="18" charset="0"/>
+                                </a:rPr>
+                              </m:ctrlPr>
+                            </m:sSubPr>
+                            <m:e>
+                              <m:r>
+                                <a:rPr lang="en-US" sz="1800" b="0" i="1" smtClean="0">
+                                  <a:latin typeface="Cambria Math" panose="02040503050406030204" pitchFamily="18" charset="0"/>
+                                </a:rPr>
+                                <m:t>𝑣</m:t>
+                              </m:r>
+                            </m:e>
+                            <m:sub>
+                              <m:r>
+                                <a:rPr lang="en-US" sz="1800" b="0" i="1" smtClean="0">
+                                  <a:latin typeface="Cambria Math" panose="02040503050406030204" pitchFamily="18" charset="0"/>
+                                </a:rPr>
+                                <m:t>0</m:t>
+                              </m:r>
+                            </m:sub>
+                          </m:sSub>
+                        </m:oMath>
+                      </m:oMathPara>
+                    </a14:m>
+                    <a:endParaRPr lang="en-US" dirty="0"/>
+                  </a:p>
+                </p:txBody>
+              </p:sp>
+            </mc:Choice>
+            <mc:Fallback xmlns="">
+              <p:sp>
+                <p:nvSpPr>
+                  <p:cNvPr id="17" name="TextBox 29">
+                    <a:extLst>
+                      <a:ext uri="{FF2B5EF4-FFF2-40B4-BE49-F238E27FC236}">
+                        <a16:creationId xmlns:a16="http://schemas.microsoft.com/office/drawing/2014/main" id="{6DB673C8-2425-685A-8CBE-35EDDCA1EB91}"/>
+                      </a:ext>
+                      <a:ext uri="{C183D7F6-B498-43B3-948B-1728B52AA6E4}">
+                        <adec:decorative xmlns:adec="http://schemas.microsoft.com/office/drawing/2017/decorative" val="1"/>
+                      </a:ext>
+                    </a:extLst>
+                  </p:cNvPr>
+                  <p:cNvSpPr txBox="1">
+                    <a:spLocks noRot="1" noChangeAspect="1" noMove="1" noResize="1" noEditPoints="1" noAdjustHandles="1" noChangeArrowheads="1" noChangeShapeType="1" noTextEdit="1"/>
+                  </p:cNvSpPr>
+                  <p:nvPr/>
+                </p:nvSpPr>
+                <p:spPr>
+                  <a:xfrm>
+                    <a:off x="9564903" y="3086337"/>
+                    <a:ext cx="395810" cy="369332"/>
+                  </a:xfrm>
+                  <a:prstGeom prst="rect">
+                    <a:avLst/>
+                  </a:prstGeom>
+                  <a:blipFill>
+                    <a:blip r:embed="rId6"/>
+                    <a:stretch>
+                      <a:fillRect/>
+                    </a:stretch>
+                  </a:blipFill>
+                </p:spPr>
+                <p:txBody>
+                  <a:bodyPr/>
+                  <a:lstStyle/>
+                  <a:p>
+                    <a:r>
+                      <a:rPr lang="en-US">
+                        <a:noFill/>
+                      </a:rPr>
+                      <a:t> </a:t>
+                    </a:r>
+                  </a:p>
+                </p:txBody>
+              </p:sp>
+            </mc:Fallback>
+          </mc:AlternateContent>
+          <mc:AlternateContent xmlns:mc="http://schemas.openxmlformats.org/markup-compatibility/2006" xmlns:a14="http://schemas.microsoft.com/office/drawing/2010/main">
+            <mc:Choice Requires="a14">
+              <p:sp>
+                <p:nvSpPr>
+                  <p:cNvPr id="18" name="TextBox 30">
+                    <a:extLst>
+                      <a:ext uri="{FF2B5EF4-FFF2-40B4-BE49-F238E27FC236}">
+                        <a16:creationId xmlns:a16="http://schemas.microsoft.com/office/drawing/2014/main" id="{1223FDB0-EDE1-D3F8-B49E-7C42FE2277C4}"/>
+                      </a:ext>
+                      <a:ext uri="{C183D7F6-B498-43B3-948B-1728B52AA6E4}">
+                        <adec:decorative xmlns:adec="http://schemas.microsoft.com/office/drawing/2017/decorative" val="1"/>
+                      </a:ext>
+                    </a:extLst>
+                  </p:cNvPr>
+                  <p:cNvSpPr txBox="1"/>
+                  <p:nvPr/>
+                </p:nvSpPr>
+                <p:spPr>
+                  <a:xfrm>
+                    <a:off x="10066895" y="3115740"/>
+                    <a:ext cx="395810" cy="369332"/>
+                  </a:xfrm>
+                  <a:prstGeom prst="rect">
+                    <a:avLst/>
+                  </a:prstGeom>
+                  <a:noFill/>
+                </p:spPr>
+                <p:txBody>
+                  <a:bodyPr wrap="square">
+                    <a:spAutoFit/>
+                  </a:bodyPr>
+                  <a:lstStyle>
+                    <a:defPPr>
+                      <a:defRPr lang="en-US"/>
+                    </a:defPPr>
+                    <a:lvl1pPr marL="0" algn="l" defTabSz="914400" rtl="0" eaLnBrk="1" latinLnBrk="0" hangingPunct="1">
+                      <a:defRPr sz="1800" kern="1200">
+                        <a:solidFill>
+                          <a:schemeClr val="tx1"/>
+                        </a:solidFill>
+                        <a:latin typeface="+mn-lt"/>
+                        <a:ea typeface="+mn-ea"/>
+                        <a:cs typeface="+mn-cs"/>
+                      </a:defRPr>
+                    </a:lvl1pPr>
+                    <a:lvl2pPr marL="457200" algn="l" defTabSz="914400" rtl="0" eaLnBrk="1" latinLnBrk="0" hangingPunct="1">
+                      <a:defRPr sz="1800" kern="1200">
+                        <a:solidFill>
+                          <a:schemeClr val="tx1"/>
+                        </a:solidFill>
+                        <a:latin typeface="+mn-lt"/>
+                        <a:ea typeface="+mn-ea"/>
+                        <a:cs typeface="+mn-cs"/>
+                      </a:defRPr>
+                    </a:lvl2pPr>
+                    <a:lvl3pPr marL="914400" algn="l" defTabSz="914400" rtl="0" eaLnBrk="1" latinLnBrk="0" hangingPunct="1">
+                      <a:defRPr sz="1800" kern="1200">
+                        <a:solidFill>
+                          <a:schemeClr val="tx1"/>
+                        </a:solidFill>
+                        <a:latin typeface="+mn-lt"/>
+                        <a:ea typeface="+mn-ea"/>
+                        <a:cs typeface="+mn-cs"/>
+                      </a:defRPr>
+                    </a:lvl3pPr>
+                    <a:lvl4pPr marL="1371600" algn="l" defTabSz="914400" rtl="0" eaLnBrk="1" latinLnBrk="0" hangingPunct="1">
+                      <a:defRPr sz="1800" kern="1200">
+                        <a:solidFill>
+                          <a:schemeClr val="tx1"/>
+                        </a:solidFill>
+                        <a:latin typeface="+mn-lt"/>
+                        <a:ea typeface="+mn-ea"/>
+                        <a:cs typeface="+mn-cs"/>
+                      </a:defRPr>
+                    </a:lvl4pPr>
+                    <a:lvl5pPr marL="1828800" algn="l" defTabSz="914400" rtl="0" eaLnBrk="1" latinLnBrk="0" hangingPunct="1">
+                      <a:defRPr sz="1800" kern="1200">
+                        <a:solidFill>
+                          <a:schemeClr val="tx1"/>
+                        </a:solidFill>
+                        <a:latin typeface="+mn-lt"/>
+                        <a:ea typeface="+mn-ea"/>
+                        <a:cs typeface="+mn-cs"/>
+                      </a:defRPr>
+                    </a:lvl5pPr>
+                    <a:lvl6pPr marL="2286000" algn="l" defTabSz="914400" rtl="0" eaLnBrk="1" latinLnBrk="0" hangingPunct="1">
+                      <a:defRPr sz="1800" kern="1200">
+                        <a:solidFill>
+                          <a:schemeClr val="tx1"/>
+                        </a:solidFill>
+                        <a:latin typeface="+mn-lt"/>
+                        <a:ea typeface="+mn-ea"/>
+                        <a:cs typeface="+mn-cs"/>
+                      </a:defRPr>
+                    </a:lvl6pPr>
+                    <a:lvl7pPr marL="2743200" algn="l" defTabSz="914400" rtl="0" eaLnBrk="1" latinLnBrk="0" hangingPunct="1">
+                      <a:defRPr sz="1800" kern="1200">
+                        <a:solidFill>
+                          <a:schemeClr val="tx1"/>
+                        </a:solidFill>
+                        <a:latin typeface="+mn-lt"/>
+                        <a:ea typeface="+mn-ea"/>
+                        <a:cs typeface="+mn-cs"/>
+                      </a:defRPr>
+                    </a:lvl7pPr>
+                    <a:lvl8pPr marL="3200400" algn="l" defTabSz="914400" rtl="0" eaLnBrk="1" latinLnBrk="0" hangingPunct="1">
+                      <a:defRPr sz="1800" kern="1200">
+                        <a:solidFill>
+                          <a:schemeClr val="tx1"/>
+                        </a:solidFill>
+                        <a:latin typeface="+mn-lt"/>
+                        <a:ea typeface="+mn-ea"/>
+                        <a:cs typeface="+mn-cs"/>
+                      </a:defRPr>
+                    </a:lvl8pPr>
+                    <a:lvl9pPr marL="3657600" algn="l" defTabSz="914400" rtl="0" eaLnBrk="1" latinLnBrk="0" hangingPunct="1">
+                      <a:defRPr sz="1800" kern="1200">
+                        <a:solidFill>
+                          <a:schemeClr val="tx1"/>
+                        </a:solidFill>
+                        <a:latin typeface="+mn-lt"/>
+                        <a:ea typeface="+mn-ea"/>
+                        <a:cs typeface="+mn-cs"/>
+                      </a:defRPr>
+                    </a:lvl9pPr>
+                  </a:lstStyle>
+                  <a:p>
+                    <a:pPr/>
+                    <a14:m>
+                      <m:oMathPara xmlns:m="http://schemas.openxmlformats.org/officeDocument/2006/math">
+                        <m:oMathParaPr>
+                          <m:jc m:val="centerGroup"/>
+                        </m:oMathParaPr>
+                        <m:oMath xmlns:m="http://schemas.openxmlformats.org/officeDocument/2006/math">
+                          <m:sSub>
+                            <m:sSubPr>
+                              <m:ctrlPr>
+                                <a:rPr lang="en-US" sz="1800" b="0" i="1" smtClean="0">
+                                  <a:latin typeface="Cambria Math" panose="02040503050406030204" pitchFamily="18" charset="0"/>
+                                </a:rPr>
+                              </m:ctrlPr>
+                            </m:sSubPr>
+                            <m:e>
+                              <m:r>
+                                <a:rPr lang="en-US" sz="1800" b="0" i="1" smtClean="0">
+                                  <a:latin typeface="Cambria Math" panose="02040503050406030204" pitchFamily="18" charset="0"/>
+                                </a:rPr>
+                                <m:t>𝑣</m:t>
+                              </m:r>
+                            </m:e>
+                            <m:sub>
+                              <m:r>
+                                <a:rPr lang="en-US" sz="1800" b="0" i="1" smtClean="0">
+                                  <a:latin typeface="Cambria Math" panose="02040503050406030204" pitchFamily="18" charset="0"/>
+                                </a:rPr>
+                                <m:t>1</m:t>
+                              </m:r>
+                            </m:sub>
+                          </m:sSub>
+                        </m:oMath>
+                      </m:oMathPara>
+                    </a14:m>
+                    <a:endParaRPr lang="en-US" dirty="0"/>
+                  </a:p>
+                </p:txBody>
+              </p:sp>
+            </mc:Choice>
+            <mc:Fallback xmlns="">
+              <p:sp>
+                <p:nvSpPr>
+                  <p:cNvPr id="18" name="TextBox 30">
+                    <a:extLst>
+                      <a:ext uri="{FF2B5EF4-FFF2-40B4-BE49-F238E27FC236}">
+                        <a16:creationId xmlns:a16="http://schemas.microsoft.com/office/drawing/2014/main" id="{56DA2FE2-AC26-7B66-B5BD-7064ECD50CE7}"/>
+                      </a:ext>
+                      <a:ext uri="{C183D7F6-B498-43B3-948B-1728B52AA6E4}">
+                        <adec:decorative xmlns:adec="http://schemas.microsoft.com/office/drawing/2017/decorative" val="1"/>
+                      </a:ext>
+                    </a:extLst>
+                  </p:cNvPr>
+                  <p:cNvSpPr txBox="1">
+                    <a:spLocks noRot="1" noChangeAspect="1" noMove="1" noResize="1" noEditPoints="1" noAdjustHandles="1" noChangeArrowheads="1" noChangeShapeType="1" noTextEdit="1"/>
+                  </p:cNvSpPr>
+                  <p:nvPr/>
+                </p:nvSpPr>
+                <p:spPr>
+                  <a:xfrm>
+                    <a:off x="10066895" y="3115740"/>
+                    <a:ext cx="395810" cy="369332"/>
+                  </a:xfrm>
+                  <a:prstGeom prst="rect">
+                    <a:avLst/>
+                  </a:prstGeom>
+                  <a:blipFill>
+                    <a:blip r:embed="rId7"/>
+                    <a:stretch>
+                      <a:fillRect/>
+                    </a:stretch>
+                  </a:blipFill>
+                </p:spPr>
+                <p:txBody>
+                  <a:bodyPr/>
+                  <a:lstStyle/>
+                  <a:p>
+                    <a:r>
+                      <a:rPr lang="en-US">
+                        <a:noFill/>
+                      </a:rPr>
+                      <a:t> </a:t>
+                    </a:r>
+                  </a:p>
+                </p:txBody>
+              </p:sp>
+            </mc:Fallback>
+          </mc:AlternateContent>
+          <p:sp>
+            <p:nvSpPr>
+              <p:cNvPr id="19" name="Oval 18">
+                <a:extLst>
+                  <a:ext uri="{FF2B5EF4-FFF2-40B4-BE49-F238E27FC236}">
+                    <a16:creationId xmlns:a16="http://schemas.microsoft.com/office/drawing/2014/main" id="{4FB5ACCD-0701-2FB2-F78E-42498C38670D}"/>
+                  </a:ext>
+                  <a:ext uri="{C183D7F6-B498-43B3-948B-1728B52AA6E4}">
+                    <adec:decorative xmlns:adec="http://schemas.microsoft.com/office/drawing/2017/decorative" val="1"/>
+                  </a:ext>
+                </a:extLst>
+              </p:cNvPr>
+              <p:cNvSpPr/>
+              <p:nvPr/>
+            </p:nvSpPr>
+            <p:spPr>
+              <a:xfrm>
+                <a:off x="11680507" y="3066584"/>
+                <a:ext cx="127995" cy="117892"/>
+              </a:xfrm>
+              <a:prstGeom prst="ellipse">
+                <a:avLst/>
+              </a:prstGeom>
+            </p:spPr>
+            <p:style>
+              <a:lnRef idx="2">
+                <a:schemeClr val="accent6">
+                  <a:shade val="15000"/>
+                </a:schemeClr>
+              </a:lnRef>
+              <a:fillRef idx="1">
+                <a:schemeClr val="accent6"/>
+              </a:fillRef>
+              <a:effectRef idx="0">
+                <a:schemeClr val="accent6"/>
+              </a:effectRef>
+              <a:fontRef idx="minor">
+                <a:schemeClr val="lt1"/>
+              </a:fontRef>
+            </p:style>
+            <p:txBody>
+              <a:bodyPr rtlCol="0" anchor="ctr"/>
+              <a:lstStyle>
+                <a:defPPr>
+                  <a:defRPr lang="en-US"/>
+                </a:defPPr>
+                <a:lvl1pPr marL="0" algn="l" defTabSz="914400" rtl="0" eaLnBrk="1" latinLnBrk="0" hangingPunct="1">
+                  <a:defRPr sz="1800" kern="1200">
+                    <a:solidFill>
+                      <a:schemeClr val="lt1"/>
+                    </a:solidFill>
+                    <a:latin typeface="+mn-lt"/>
+                    <a:ea typeface="+mn-ea"/>
+                    <a:cs typeface="+mn-cs"/>
+                  </a:defRPr>
+                </a:lvl1pPr>
+                <a:lvl2pPr marL="457200" algn="l" defTabSz="914400" rtl="0" eaLnBrk="1" latinLnBrk="0" hangingPunct="1">
+                  <a:defRPr sz="1800" kern="1200">
+                    <a:solidFill>
+                      <a:schemeClr val="lt1"/>
+                    </a:solidFill>
+                    <a:latin typeface="+mn-lt"/>
+                    <a:ea typeface="+mn-ea"/>
+                    <a:cs typeface="+mn-cs"/>
+                  </a:defRPr>
+                </a:lvl2pPr>
+                <a:lvl3pPr marL="914400" algn="l" defTabSz="914400" rtl="0" eaLnBrk="1" latinLnBrk="0" hangingPunct="1">
+                  <a:defRPr sz="1800" kern="1200">
+                    <a:solidFill>
+                      <a:schemeClr val="lt1"/>
+                    </a:solidFill>
+                    <a:latin typeface="+mn-lt"/>
+                    <a:ea typeface="+mn-ea"/>
+                    <a:cs typeface="+mn-cs"/>
+                  </a:defRPr>
+                </a:lvl3pPr>
+                <a:lvl4pPr marL="1371600" algn="l" defTabSz="914400" rtl="0" eaLnBrk="1" latinLnBrk="0" hangingPunct="1">
+                  <a:defRPr sz="1800" kern="1200">
+                    <a:solidFill>
+                      <a:schemeClr val="lt1"/>
+                    </a:solidFill>
+                    <a:latin typeface="+mn-lt"/>
+                    <a:ea typeface="+mn-ea"/>
+                    <a:cs typeface="+mn-cs"/>
+                  </a:defRPr>
+                </a:lvl4pPr>
+                <a:lvl5pPr marL="1828800" algn="l" defTabSz="914400" rtl="0" eaLnBrk="1" latinLnBrk="0" hangingPunct="1">
+                  <a:defRPr sz="1800" kern="1200">
+                    <a:solidFill>
+                      <a:schemeClr val="lt1"/>
+                    </a:solidFill>
+                    <a:latin typeface="+mn-lt"/>
+                    <a:ea typeface="+mn-ea"/>
+                    <a:cs typeface="+mn-cs"/>
+                  </a:defRPr>
+                </a:lvl5pPr>
+                <a:lvl6pPr marL="2286000" algn="l" defTabSz="914400" rtl="0" eaLnBrk="1" latinLnBrk="0" hangingPunct="1">
+                  <a:defRPr sz="1800" kern="1200">
+                    <a:solidFill>
+                      <a:schemeClr val="lt1"/>
+                    </a:solidFill>
+                    <a:latin typeface="+mn-lt"/>
+                    <a:ea typeface="+mn-ea"/>
+                    <a:cs typeface="+mn-cs"/>
+                  </a:defRPr>
+                </a:lvl6pPr>
+                <a:lvl7pPr marL="2743200" algn="l" defTabSz="914400" rtl="0" eaLnBrk="1" latinLnBrk="0" hangingPunct="1">
+                  <a:defRPr sz="1800" kern="1200">
+                    <a:solidFill>
+                      <a:schemeClr val="lt1"/>
+                    </a:solidFill>
+                    <a:latin typeface="+mn-lt"/>
+                    <a:ea typeface="+mn-ea"/>
+                    <a:cs typeface="+mn-cs"/>
+                  </a:defRPr>
+                </a:lvl7pPr>
+                <a:lvl8pPr marL="3200400" algn="l" defTabSz="914400" rtl="0" eaLnBrk="1" latinLnBrk="0" hangingPunct="1">
+                  <a:defRPr sz="1800" kern="1200">
+                    <a:solidFill>
+                      <a:schemeClr val="lt1"/>
+                    </a:solidFill>
+                    <a:latin typeface="+mn-lt"/>
+                    <a:ea typeface="+mn-ea"/>
+                    <a:cs typeface="+mn-cs"/>
+                  </a:defRPr>
+                </a:lvl8pPr>
+                <a:lvl9pPr marL="3657600" algn="l" defTabSz="914400" rtl="0" eaLnBrk="1" latinLnBrk="0" hangingPunct="1">
+                  <a:defRPr sz="1800" kern="1200">
+                    <a:solidFill>
+                      <a:schemeClr val="lt1"/>
+                    </a:solidFill>
+                    <a:latin typeface="+mn-lt"/>
+                    <a:ea typeface="+mn-ea"/>
+                    <a:cs typeface="+mn-cs"/>
+                  </a:defRPr>
+                </a:lvl9pPr>
+              </a:lstStyle>
+              <a:p>
+                <a:pPr algn="ctr"/>
+                <a:endParaRPr lang="en-US"/>
+              </a:p>
+            </p:txBody>
+          </p:sp>
+          <p:sp>
+            <p:nvSpPr>
+              <p:cNvPr id="20" name="TextBox 35">
+                <a:extLst>
+                  <a:ext uri="{FF2B5EF4-FFF2-40B4-BE49-F238E27FC236}">
+                    <a16:creationId xmlns:a16="http://schemas.microsoft.com/office/drawing/2014/main" id="{0BA13DE3-9692-0A72-42C2-2997B4BD90D3}"/>
+                  </a:ext>
+                  <a:ext uri="{C183D7F6-B498-43B3-948B-1728B52AA6E4}">
+                    <adec:decorative xmlns:adec="http://schemas.microsoft.com/office/drawing/2017/decorative" val="1"/>
+                  </a:ext>
+                </a:extLst>
+              </p:cNvPr>
+              <p:cNvSpPr txBox="1"/>
+              <p:nvPr/>
+            </p:nvSpPr>
+            <p:spPr>
+              <a:xfrm>
+                <a:off x="9337182" y="2229868"/>
+                <a:ext cx="1796338" cy="338554"/>
+              </a:xfrm>
+              <a:prstGeom prst="rect">
+                <a:avLst/>
+              </a:prstGeom>
+              <a:noFill/>
+            </p:spPr>
+            <p:txBody>
+              <a:bodyPr wrap="square">
+                <a:spAutoFit/>
+              </a:bodyPr>
+              <a:lstStyle>
+                <a:defPPr>
+                  <a:defRPr lang="en-US"/>
+                </a:defPPr>
+                <a:lvl1pPr marL="0" algn="l" defTabSz="914400" rtl="0" eaLnBrk="1" latinLnBrk="0" hangingPunct="1">
+                  <a:defRPr sz="1800" kern="1200">
+                    <a:solidFill>
+                      <a:schemeClr val="tx1"/>
+                    </a:solidFill>
+                    <a:latin typeface="+mn-lt"/>
+                    <a:ea typeface="+mn-ea"/>
+                    <a:cs typeface="+mn-cs"/>
+                  </a:defRPr>
+                </a:lvl1pPr>
+                <a:lvl2pPr marL="457200" algn="l" defTabSz="914400" rtl="0" eaLnBrk="1" latinLnBrk="0" hangingPunct="1">
+                  <a:defRPr sz="1800" kern="1200">
+                    <a:solidFill>
+                      <a:schemeClr val="tx1"/>
+                    </a:solidFill>
+                    <a:latin typeface="+mn-lt"/>
+                    <a:ea typeface="+mn-ea"/>
+                    <a:cs typeface="+mn-cs"/>
+                  </a:defRPr>
+                </a:lvl2pPr>
+                <a:lvl3pPr marL="914400" algn="l" defTabSz="914400" rtl="0" eaLnBrk="1" latinLnBrk="0" hangingPunct="1">
+                  <a:defRPr sz="1800" kern="1200">
+                    <a:solidFill>
+                      <a:schemeClr val="tx1"/>
+                    </a:solidFill>
+                    <a:latin typeface="+mn-lt"/>
+                    <a:ea typeface="+mn-ea"/>
+                    <a:cs typeface="+mn-cs"/>
+                  </a:defRPr>
+                </a:lvl3pPr>
+                <a:lvl4pPr marL="1371600" algn="l" defTabSz="914400" rtl="0" eaLnBrk="1" latinLnBrk="0" hangingPunct="1">
+                  <a:defRPr sz="1800" kern="1200">
+                    <a:solidFill>
+                      <a:schemeClr val="tx1"/>
+                    </a:solidFill>
+                    <a:latin typeface="+mn-lt"/>
+                    <a:ea typeface="+mn-ea"/>
+                    <a:cs typeface="+mn-cs"/>
+                  </a:defRPr>
+                </a:lvl4pPr>
+                <a:lvl5pPr marL="1828800" algn="l" defTabSz="914400" rtl="0" eaLnBrk="1" latinLnBrk="0" hangingPunct="1">
+                  <a:defRPr sz="1800" kern="1200">
+                    <a:solidFill>
+                      <a:schemeClr val="tx1"/>
+                    </a:solidFill>
+                    <a:latin typeface="+mn-lt"/>
+                    <a:ea typeface="+mn-ea"/>
+                    <a:cs typeface="+mn-cs"/>
+                  </a:defRPr>
+                </a:lvl5pPr>
+                <a:lvl6pPr marL="2286000" algn="l" defTabSz="914400" rtl="0" eaLnBrk="1" latinLnBrk="0" hangingPunct="1">
+                  <a:defRPr sz="1800" kern="1200">
+                    <a:solidFill>
+                      <a:schemeClr val="tx1"/>
+                    </a:solidFill>
+                    <a:latin typeface="+mn-lt"/>
+                    <a:ea typeface="+mn-ea"/>
+                    <a:cs typeface="+mn-cs"/>
+                  </a:defRPr>
+                </a:lvl6pPr>
+                <a:lvl7pPr marL="2743200" algn="l" defTabSz="914400" rtl="0" eaLnBrk="1" latinLnBrk="0" hangingPunct="1">
+                  <a:defRPr sz="1800" kern="1200">
+                    <a:solidFill>
+                      <a:schemeClr val="tx1"/>
+                    </a:solidFill>
+                    <a:latin typeface="+mn-lt"/>
+                    <a:ea typeface="+mn-ea"/>
+                    <a:cs typeface="+mn-cs"/>
+                  </a:defRPr>
+                </a:lvl7pPr>
+                <a:lvl8pPr marL="3200400" algn="l" defTabSz="914400" rtl="0" eaLnBrk="1" latinLnBrk="0" hangingPunct="1">
+                  <a:defRPr sz="1800" kern="1200">
+                    <a:solidFill>
+                      <a:schemeClr val="tx1"/>
+                    </a:solidFill>
+                    <a:latin typeface="+mn-lt"/>
+                    <a:ea typeface="+mn-ea"/>
+                    <a:cs typeface="+mn-cs"/>
+                  </a:defRPr>
+                </a:lvl8pPr>
+                <a:lvl9pPr marL="3657600" algn="l" defTabSz="914400" rtl="0" eaLnBrk="1" latinLnBrk="0" hangingPunct="1">
+                  <a:defRPr sz="1800" kern="1200">
+                    <a:solidFill>
+                      <a:schemeClr val="tx1"/>
+                    </a:solidFill>
+                    <a:latin typeface="+mn-lt"/>
+                    <a:ea typeface="+mn-ea"/>
+                    <a:cs typeface="+mn-cs"/>
+                  </a:defRPr>
+                </a:lvl9pPr>
+              </a:lstStyle>
+              <a:p>
+                <a:r>
+                  <a:rPr lang="en-US" sz="1600" dirty="0"/>
+                  <a:t>Bellman updates</a:t>
+                </a:r>
+              </a:p>
+            </p:txBody>
+          </p:sp>
+        </p:grpSp>
+        <p:sp>
+          <p:nvSpPr>
+            <p:cNvPr id="10" name="TextBox 9">
+              <a:extLst>
+                <a:ext uri="{FF2B5EF4-FFF2-40B4-BE49-F238E27FC236}">
+                  <a16:creationId xmlns:a16="http://schemas.microsoft.com/office/drawing/2014/main" id="{6EDF9F97-99C7-C914-8056-5CB2B24BFC7D}"/>
+                </a:ext>
+              </a:extLst>
+            </p:cNvPr>
+            <p:cNvSpPr txBox="1"/>
+            <p:nvPr/>
+          </p:nvSpPr>
+          <p:spPr>
+            <a:xfrm>
+              <a:off x="9189345" y="5967616"/>
+              <a:ext cx="1978780" cy="276999"/>
+            </a:xfrm>
+            <a:prstGeom prst="rect">
+              <a:avLst/>
+            </a:prstGeom>
+            <a:noFill/>
+          </p:spPr>
+          <p:txBody>
+            <a:bodyPr wrap="square" rtlCol="0">
+              <a:spAutoFit/>
+            </a:bodyPr>
+            <a:lstStyle/>
+            <a:p>
+              <a:pPr algn="ctr"/>
+              <a:r>
+                <a:rPr lang="en-US" sz="1200" dirty="0"/>
+                <a:t>Distance means difference</a:t>
+              </a:r>
+            </a:p>
+          </p:txBody>
+        </p:sp>
+      </p:grpSp>
     </p:spTree>
     <p:extLst>
       <p:ext uri="{BB962C8B-B14F-4D97-AF65-F5344CB8AC3E}">
@@ -5533,6 +7169,237 @@
   <p:clrMapOvr>
     <a:masterClrMapping/>
   </p:clrMapOvr>
+  <p:timing>
+    <p:tnLst>
+      <p:par>
+        <p:cTn id="1" dur="indefinite" restart="never" nodeType="tmRoot">
+          <p:childTnLst>
+            <p:seq concurrent="1" nextAc="seek">
+              <p:cTn id="2" dur="indefinite" nodeType="mainSeq">
+                <p:childTnLst>
+                  <p:par>
+                    <p:cTn id="3" fill="hold">
+                      <p:stCondLst>
+                        <p:cond delay="indefinite"/>
+                      </p:stCondLst>
+                      <p:childTnLst>
+                        <p:par>
+                          <p:cTn id="4" fill="hold">
+                            <p:stCondLst>
+                              <p:cond delay="0"/>
+                            </p:stCondLst>
+                            <p:childTnLst>
+                              <p:par>
+                                <p:cTn id="5" presetID="1" presetClass="entr" presetSubtype="0" fill="hold" nodeType="clickEffect">
+                                  <p:stCondLst>
+                                    <p:cond delay="0"/>
+                                  </p:stCondLst>
+                                  <p:childTnLst>
+                                    <p:set>
+                                      <p:cBhvr>
+                                        <p:cTn id="6" dur="1" fill="hold">
+                                          <p:stCondLst>
+                                            <p:cond delay="0"/>
+                                          </p:stCondLst>
+                                        </p:cTn>
+                                        <p:tgtEl>
+                                          <p:spTgt spid="3">
+                                            <p:txEl>
+                                              <p:pRg st="4" end="4"/>
+                                            </p:txEl>
+                                          </p:spTgt>
+                                        </p:tgtEl>
+                                        <p:attrNameLst>
+                                          <p:attrName>style.visibility</p:attrName>
+                                        </p:attrNameLst>
+                                      </p:cBhvr>
+                                      <p:to>
+                                        <p:strVal val="visible"/>
+                                      </p:to>
+                                    </p:set>
+                                  </p:childTnLst>
+                                </p:cTn>
+                              </p:par>
+                              <p:par>
+                                <p:cTn id="7" presetID="1" presetClass="entr" presetSubtype="0" fill="hold" nodeType="withEffect">
+                                  <p:stCondLst>
+                                    <p:cond delay="0"/>
+                                  </p:stCondLst>
+                                  <p:childTnLst>
+                                    <p:set>
+                                      <p:cBhvr>
+                                        <p:cTn id="8" dur="1" fill="hold">
+                                          <p:stCondLst>
+                                            <p:cond delay="0"/>
+                                          </p:stCondLst>
+                                        </p:cTn>
+                                        <p:tgtEl>
+                                          <p:spTgt spid="3">
+                                            <p:txEl>
+                                              <p:pRg st="6" end="6"/>
+                                            </p:txEl>
+                                          </p:spTgt>
+                                        </p:tgtEl>
+                                        <p:attrNameLst>
+                                          <p:attrName>style.visibility</p:attrName>
+                                        </p:attrNameLst>
+                                      </p:cBhvr>
+                                      <p:to>
+                                        <p:strVal val="visible"/>
+                                      </p:to>
+                                    </p:set>
+                                  </p:childTnLst>
+                                </p:cTn>
+                              </p:par>
+                              <p:par>
+                                <p:cTn id="9" presetID="1" presetClass="entr" presetSubtype="0" fill="hold" nodeType="withEffect">
+                                  <p:stCondLst>
+                                    <p:cond delay="0"/>
+                                  </p:stCondLst>
+                                  <p:childTnLst>
+                                    <p:set>
+                                      <p:cBhvr>
+                                        <p:cTn id="10" dur="1" fill="hold">
+                                          <p:stCondLst>
+                                            <p:cond delay="0"/>
+                                          </p:stCondLst>
+                                        </p:cTn>
+                                        <p:tgtEl>
+                                          <p:spTgt spid="8"/>
+                                        </p:tgtEl>
+                                        <p:attrNameLst>
+                                          <p:attrName>style.visibility</p:attrName>
+                                        </p:attrNameLst>
+                                      </p:cBhvr>
+                                      <p:to>
+                                        <p:strVal val="visible"/>
+                                      </p:to>
+                                    </p:set>
+                                  </p:childTnLst>
+                                </p:cTn>
+                              </p:par>
+                            </p:childTnLst>
+                          </p:cTn>
+                        </p:par>
+                      </p:childTnLst>
+                    </p:cTn>
+                  </p:par>
+                  <p:par>
+                    <p:cTn id="11" fill="hold">
+                      <p:stCondLst>
+                        <p:cond delay="indefinite"/>
+                      </p:stCondLst>
+                      <p:childTnLst>
+                        <p:par>
+                          <p:cTn id="12" fill="hold">
+                            <p:stCondLst>
+                              <p:cond delay="0"/>
+                            </p:stCondLst>
+                            <p:childTnLst>
+                              <p:par>
+                                <p:cTn id="13" presetID="1" presetClass="entr" presetSubtype="0" fill="hold" grpId="0" nodeType="clickEffect">
+                                  <p:stCondLst>
+                                    <p:cond delay="0"/>
+                                  </p:stCondLst>
+                                  <p:childTnLst>
+                                    <p:set>
+                                      <p:cBhvr>
+                                        <p:cTn id="14" dur="1" fill="hold">
+                                          <p:stCondLst>
+                                            <p:cond delay="0"/>
+                                          </p:stCondLst>
+                                        </p:cTn>
+                                        <p:tgtEl>
+                                          <p:spTgt spid="4"/>
+                                        </p:tgtEl>
+                                        <p:attrNameLst>
+                                          <p:attrName>style.visibility</p:attrName>
+                                        </p:attrNameLst>
+                                      </p:cBhvr>
+                                      <p:to>
+                                        <p:strVal val="visible"/>
+                                      </p:to>
+                                    </p:set>
+                                  </p:childTnLst>
+                                </p:cTn>
+                              </p:par>
+                            </p:childTnLst>
+                          </p:cTn>
+                        </p:par>
+                      </p:childTnLst>
+                    </p:cTn>
+                  </p:par>
+                  <p:par>
+                    <p:cTn id="15" fill="hold">
+                      <p:stCondLst>
+                        <p:cond delay="indefinite"/>
+                      </p:stCondLst>
+                      <p:childTnLst>
+                        <p:par>
+                          <p:cTn id="16" fill="hold">
+                            <p:stCondLst>
+                              <p:cond delay="0"/>
+                            </p:stCondLst>
+                            <p:childTnLst>
+                              <p:par>
+                                <p:cTn id="17" presetID="1" presetClass="entr" presetSubtype="0" fill="hold" grpId="0" nodeType="clickEffect">
+                                  <p:stCondLst>
+                                    <p:cond delay="0"/>
+                                  </p:stCondLst>
+                                  <p:childTnLst>
+                                    <p:set>
+                                      <p:cBhvr>
+                                        <p:cTn id="18" dur="1" fill="hold">
+                                          <p:stCondLst>
+                                            <p:cond delay="0"/>
+                                          </p:stCondLst>
+                                        </p:cTn>
+                                        <p:tgtEl>
+                                          <p:spTgt spid="5"/>
+                                        </p:tgtEl>
+                                        <p:attrNameLst>
+                                          <p:attrName>style.visibility</p:attrName>
+                                        </p:attrNameLst>
+                                      </p:cBhvr>
+                                      <p:to>
+                                        <p:strVal val="visible"/>
+                                      </p:to>
+                                    </p:set>
+                                  </p:childTnLst>
+                                </p:cTn>
+                              </p:par>
+                            </p:childTnLst>
+                          </p:cTn>
+                        </p:par>
+                      </p:childTnLst>
+                    </p:cTn>
+                  </p:par>
+                </p:childTnLst>
+              </p:cTn>
+              <p:prevCondLst>
+                <p:cond evt="onPrev" delay="0">
+                  <p:tgtEl>
+                    <p:sldTgt/>
+                  </p:tgtEl>
+                </p:cond>
+              </p:prevCondLst>
+              <p:nextCondLst>
+                <p:cond evt="onNext" delay="0">
+                  <p:tgtEl>
+                    <p:sldTgt/>
+                  </p:tgtEl>
+                </p:cond>
+              </p:nextCondLst>
+            </p:seq>
+          </p:childTnLst>
+        </p:cTn>
+      </p:par>
+    </p:tnLst>
+    <p:bldLst>
+      <p:bldP spid="4" grpId="0" animBg="1"/>
+      <p:bldP spid="5" grpId="0" animBg="1"/>
+    </p:bldLst>
+  </p:timing>
 </p:sld>
 </file>
 
@@ -6956,59 +8823,7 @@
                 </a14:m>
                 <a:r>
                   <a:rPr lang="en-US" dirty="0"/>
-                  <a:t> will lead to the larges </a:t>
-                </a:r>
-                <a14:m>
-                  <m:oMath xmlns:m="http://schemas.openxmlformats.org/officeDocument/2006/math">
-                    <m:sSub>
-                      <m:sSubPr>
-                        <m:ctrlPr>
-                          <a:rPr lang="en-US" i="1">
-                            <a:latin typeface="Cambria Math" panose="02040503050406030204" pitchFamily="18" charset="0"/>
-                          </a:rPr>
-                        </m:ctrlPr>
-                      </m:sSubPr>
-                      <m:e>
-                        <m:r>
-                          <a:rPr lang="en-US" i="1">
-                            <a:latin typeface="Cambria Math" panose="02040503050406030204" pitchFamily="18" charset="0"/>
-                          </a:rPr>
-                          <m:t>𝑣</m:t>
-                        </m:r>
-                      </m:e>
-                      <m:sub>
-                        <m:sSup>
-                          <m:sSupPr>
-                            <m:ctrlPr>
-                              <a:rPr lang="en-US" i="1">
-                                <a:latin typeface="Cambria Math" panose="02040503050406030204" pitchFamily="18" charset="0"/>
-                              </a:rPr>
-                            </m:ctrlPr>
-                          </m:sSupPr>
-                          <m:e>
-                            <m:r>
-                              <a:rPr lang="en-US" i="1">
-                                <a:latin typeface="Cambria Math" panose="02040503050406030204" pitchFamily="18" charset="0"/>
-                              </a:rPr>
-                              <m:t>𝜋</m:t>
-                            </m:r>
-                          </m:e>
-                          <m:sup>
-                            <m:r>
-                              <a:rPr lang="en-US" i="1">
-                                <a:latin typeface="Cambria Math" panose="02040503050406030204" pitchFamily="18" charset="0"/>
-                              </a:rPr>
-                              <m:t>′</m:t>
-                            </m:r>
-                          </m:sup>
-                        </m:sSup>
-                      </m:sub>
-                    </m:sSub>
-                  </m:oMath>
-                </a14:m>
-                <a:r>
-                  <a:rPr lang="en-US" dirty="0"/>
-                  <a:t>:</a:t>
+                  <a:t>. </a:t>
                 </a:r>
               </a:p>
               <a:p>
@@ -7167,6 +8982,9 @@
                   </m:oMathPara>
                 </a14:m>
                 <a:endParaRPr lang="en-US" dirty="0"/>
+              </a:p>
+              <a:p>
+                <a:endParaRPr lang="en-US" b="1" dirty="0"/>
               </a:p>
               <a:p>
                 <a:r>
@@ -7288,8 +9106,8 @@
             </p:nvSpPr>
             <p:spPr>
               <a:xfrm>
-                <a:off x="2033107" y="1949537"/>
-                <a:ext cx="8125786" cy="1366721"/>
+                <a:off x="838201" y="1897071"/>
+                <a:ext cx="10771682" cy="1670842"/>
               </a:xfrm>
               <a:prstGeom prst="rect">
                 <a:avLst/>
@@ -7325,189 +9143,368 @@
                 <a:endParaRPr lang="en-US" sz="2000" dirty="0"/>
               </a:p>
               <a:p>
+                <a14:m>
+                  <m:oMathPara xmlns:m="http://schemas.openxmlformats.org/officeDocument/2006/math">
+                    <m:oMathParaPr>
+                      <m:jc m:val="centerGroup"/>
+                    </m:oMathParaPr>
+                    <m:oMath xmlns:m="http://schemas.openxmlformats.org/officeDocument/2006/math">
+                      <m:sSub>
+                        <m:sSubPr>
+                          <m:ctrlPr>
+                            <a:rPr lang="en-US" sz="2000" b="0" i="1" smtClean="0">
+                              <a:latin typeface="Cambria Math" panose="02040503050406030204" pitchFamily="18" charset="0"/>
+                            </a:rPr>
+                          </m:ctrlPr>
+                        </m:sSubPr>
+                        <m:e>
+                          <m:r>
+                            <a:rPr lang="en-US" sz="2000" b="0" i="1" smtClean="0">
+                              <a:latin typeface="Cambria Math" panose="02040503050406030204" pitchFamily="18" charset="0"/>
+                            </a:rPr>
+                            <m:t>𝑞</m:t>
+                          </m:r>
+                        </m:e>
+                        <m:sub>
+                          <m:r>
+                            <a:rPr lang="en-US" sz="2000" b="0" i="1" smtClean="0">
+                              <a:latin typeface="Cambria Math" panose="02040503050406030204" pitchFamily="18" charset="0"/>
+                            </a:rPr>
+                            <m:t>𝜋</m:t>
+                          </m:r>
+                        </m:sub>
+                      </m:sSub>
+                      <m:d>
+                        <m:dPr>
+                          <m:ctrlPr>
+                            <a:rPr lang="en-US" sz="2000" b="0" i="1" smtClean="0">
+                              <a:latin typeface="Cambria Math" panose="02040503050406030204" pitchFamily="18" charset="0"/>
+                            </a:rPr>
+                          </m:ctrlPr>
+                        </m:dPr>
+                        <m:e>
+                          <m:r>
+                            <a:rPr lang="en-US" sz="2000" b="0" i="1" smtClean="0">
+                              <a:latin typeface="Cambria Math" panose="02040503050406030204" pitchFamily="18" charset="0"/>
+                            </a:rPr>
+                            <m:t>𝑠</m:t>
+                          </m:r>
+                          <m:r>
+                            <a:rPr lang="en-US" sz="2000" b="0" i="1" smtClean="0">
+                              <a:latin typeface="Cambria Math" panose="02040503050406030204" pitchFamily="18" charset="0"/>
+                            </a:rPr>
+                            <m:t>, </m:t>
+                          </m:r>
+                          <m:sSup>
+                            <m:sSupPr>
+                              <m:ctrlPr>
+                                <a:rPr lang="en-US" sz="2000" b="0" i="1" smtClean="0">
+                                  <a:latin typeface="Cambria Math" panose="02040503050406030204" pitchFamily="18" charset="0"/>
+                                </a:rPr>
+                              </m:ctrlPr>
+                            </m:sSupPr>
+                            <m:e>
+                              <m:r>
+                                <a:rPr lang="en-US" sz="2000" b="0" i="1" smtClean="0">
+                                  <a:latin typeface="Cambria Math" panose="02040503050406030204" pitchFamily="18" charset="0"/>
+                                </a:rPr>
+                                <m:t>𝜋</m:t>
+                              </m:r>
+                            </m:e>
+                            <m:sup>
+                              <m:r>
+                                <a:rPr lang="en-US" sz="2000" b="0" i="1" smtClean="0">
+                                  <a:latin typeface="Cambria Math" panose="02040503050406030204" pitchFamily="18" charset="0"/>
+                                </a:rPr>
+                                <m:t>′</m:t>
+                              </m:r>
+                            </m:sup>
+                          </m:sSup>
+                          <m:d>
+                            <m:dPr>
+                              <m:ctrlPr>
+                                <a:rPr lang="en-US" sz="2000" b="0" i="1" smtClean="0">
+                                  <a:latin typeface="Cambria Math" panose="02040503050406030204" pitchFamily="18" charset="0"/>
+                                </a:rPr>
+                              </m:ctrlPr>
+                            </m:dPr>
+                            <m:e>
+                              <m:r>
+                                <a:rPr lang="en-US" sz="2000" b="0" i="1" smtClean="0">
+                                  <a:latin typeface="Cambria Math" panose="02040503050406030204" pitchFamily="18" charset="0"/>
+                                </a:rPr>
+                                <m:t>𝑠</m:t>
+                              </m:r>
+                            </m:e>
+                          </m:d>
+                        </m:e>
+                      </m:d>
+                      <m:r>
+                        <a:rPr lang="en-US" sz="2000" b="0" i="1" smtClean="0">
+                          <a:latin typeface="Cambria Math" panose="02040503050406030204" pitchFamily="18" charset="0"/>
+                        </a:rPr>
+                        <m:t>≥</m:t>
+                      </m:r>
+                      <m:sSub>
+                        <m:sSubPr>
+                          <m:ctrlPr>
+                            <a:rPr lang="en-US" sz="2000" b="0" i="1" smtClean="0">
+                              <a:latin typeface="Cambria Math" panose="02040503050406030204" pitchFamily="18" charset="0"/>
+                            </a:rPr>
+                          </m:ctrlPr>
+                        </m:sSubPr>
+                        <m:e>
+                          <m:r>
+                            <a:rPr lang="en-US" sz="2000" b="0" i="1" smtClean="0">
+                              <a:latin typeface="Cambria Math" panose="02040503050406030204" pitchFamily="18" charset="0"/>
+                            </a:rPr>
+                            <m:t>𝑣</m:t>
+                          </m:r>
+                        </m:e>
+                        <m:sub>
+                          <m:r>
+                            <a:rPr lang="en-US" sz="2000" b="0" i="1" smtClean="0">
+                              <a:latin typeface="Cambria Math" panose="02040503050406030204" pitchFamily="18" charset="0"/>
+                            </a:rPr>
+                            <m:t>𝜋</m:t>
+                          </m:r>
+                        </m:sub>
+                      </m:sSub>
+                      <m:d>
+                        <m:dPr>
+                          <m:ctrlPr>
+                            <a:rPr lang="en-US" sz="2000" b="0" i="1" smtClean="0">
+                              <a:latin typeface="Cambria Math" panose="02040503050406030204" pitchFamily="18" charset="0"/>
+                            </a:rPr>
+                          </m:ctrlPr>
+                        </m:dPr>
+                        <m:e>
+                          <m:r>
+                            <a:rPr lang="en-US" sz="2000" b="0" i="1" smtClean="0">
+                              <a:latin typeface="Cambria Math" panose="02040503050406030204" pitchFamily="18" charset="0"/>
+                            </a:rPr>
+                            <m:t>𝑠</m:t>
+                          </m:r>
+                        </m:e>
+                      </m:d>
+                      <m:r>
+                        <a:rPr lang="en-US" sz="2000" b="0" i="1" smtClean="0">
+                          <a:latin typeface="Cambria Math" panose="02040503050406030204" pitchFamily="18" charset="0"/>
+                        </a:rPr>
+                        <m:t>  ∀</m:t>
+                      </m:r>
+                      <m:r>
+                        <a:rPr lang="en-US" sz="2000" b="0" i="1" smtClean="0">
+                          <a:latin typeface="Cambria Math" panose="02040503050406030204" pitchFamily="18" charset="0"/>
+                        </a:rPr>
+                        <m:t>𝑠</m:t>
+                      </m:r>
+                      <m:r>
+                        <a:rPr lang="en-US" sz="2000" b="0" i="1" smtClean="0">
+                          <a:latin typeface="Cambria Math" panose="02040503050406030204" pitchFamily="18" charset="0"/>
+                        </a:rPr>
+                        <m:t>∈</m:t>
+                      </m:r>
+                      <m:r>
+                        <a:rPr lang="en-US" sz="2000" b="0" i="1" smtClean="0">
+                          <a:latin typeface="Cambria Math" panose="02040503050406030204" pitchFamily="18" charset="0"/>
+                          <a:ea typeface="Cambria Math" panose="02040503050406030204" pitchFamily="18" charset="0"/>
+                        </a:rPr>
+                        <m:t>𝒮</m:t>
+                      </m:r>
+                      <m:r>
+                        <a:rPr lang="en-US" sz="2000" b="0" i="1" smtClean="0">
+                          <a:latin typeface="Cambria Math" panose="02040503050406030204" pitchFamily="18" charset="0"/>
+                          <a:ea typeface="Cambria Math" panose="02040503050406030204" pitchFamily="18" charset="0"/>
+                        </a:rPr>
+                        <m:t>  ⇒</m:t>
+                      </m:r>
+                      <m:sSub>
+                        <m:sSubPr>
+                          <m:ctrlPr>
+                            <a:rPr lang="en-US" sz="2000" i="1">
+                              <a:latin typeface="Cambria Math" panose="02040503050406030204" pitchFamily="18" charset="0"/>
+                            </a:rPr>
+                          </m:ctrlPr>
+                        </m:sSubPr>
+                        <m:e>
+                          <m:r>
+                            <a:rPr lang="en-US" sz="2000" b="0" i="1" smtClean="0">
+                              <a:latin typeface="Cambria Math" panose="02040503050406030204" pitchFamily="18" charset="0"/>
+                            </a:rPr>
+                            <m:t>    </m:t>
+                          </m:r>
+                          <m:r>
+                            <a:rPr lang="en-US" sz="2000" i="1">
+                              <a:latin typeface="Cambria Math" panose="02040503050406030204" pitchFamily="18" charset="0"/>
+                            </a:rPr>
+                            <m:t>𝑣</m:t>
+                          </m:r>
+                        </m:e>
+                        <m:sub>
+                          <m:sSup>
+                            <m:sSupPr>
+                              <m:ctrlPr>
+                                <a:rPr lang="en-US" sz="2000" i="1">
+                                  <a:latin typeface="Cambria Math" panose="02040503050406030204" pitchFamily="18" charset="0"/>
+                                </a:rPr>
+                              </m:ctrlPr>
+                            </m:sSupPr>
+                            <m:e>
+                              <m:r>
+                                <a:rPr lang="en-US" sz="2000" i="1">
+                                  <a:latin typeface="Cambria Math" panose="02040503050406030204" pitchFamily="18" charset="0"/>
+                                </a:rPr>
+                                <m:t>𝜋</m:t>
+                              </m:r>
+                            </m:e>
+                            <m:sup>
+                              <m:r>
+                                <a:rPr lang="en-US" sz="2000" i="1">
+                                  <a:latin typeface="Cambria Math" panose="02040503050406030204" pitchFamily="18" charset="0"/>
+                                </a:rPr>
+                                <m:t>′</m:t>
+                              </m:r>
+                            </m:sup>
+                          </m:sSup>
+                        </m:sub>
+                      </m:sSub>
+                      <m:d>
+                        <m:dPr>
+                          <m:ctrlPr>
+                            <a:rPr lang="en-US" sz="2000" i="1">
+                              <a:latin typeface="Cambria Math" panose="02040503050406030204" pitchFamily="18" charset="0"/>
+                            </a:rPr>
+                          </m:ctrlPr>
+                        </m:dPr>
+                        <m:e>
+                          <m:r>
+                            <a:rPr lang="en-US" sz="2000" i="1">
+                              <a:latin typeface="Cambria Math" panose="02040503050406030204" pitchFamily="18" charset="0"/>
+                            </a:rPr>
+                            <m:t>𝑠</m:t>
+                          </m:r>
+                        </m:e>
+                      </m:d>
+                      <m:r>
+                        <a:rPr lang="en-US" sz="2000" i="1">
+                          <a:latin typeface="Cambria Math" panose="02040503050406030204" pitchFamily="18" charset="0"/>
+                        </a:rPr>
+                        <m:t>≥</m:t>
+                      </m:r>
+                      <m:sSub>
+                        <m:sSubPr>
+                          <m:ctrlPr>
+                            <a:rPr lang="en-US" sz="2000" i="1">
+                              <a:latin typeface="Cambria Math" panose="02040503050406030204" pitchFamily="18" charset="0"/>
+                            </a:rPr>
+                          </m:ctrlPr>
+                        </m:sSubPr>
+                        <m:e>
+                          <m:r>
+                            <a:rPr lang="en-US" sz="2000" i="1">
+                              <a:latin typeface="Cambria Math" panose="02040503050406030204" pitchFamily="18" charset="0"/>
+                            </a:rPr>
+                            <m:t>𝑣</m:t>
+                          </m:r>
+                        </m:e>
+                        <m:sub>
+                          <m:r>
+                            <a:rPr lang="en-US" sz="2000" i="1">
+                              <a:latin typeface="Cambria Math" panose="02040503050406030204" pitchFamily="18" charset="0"/>
+                            </a:rPr>
+                            <m:t>𝜋</m:t>
+                          </m:r>
+                        </m:sub>
+                      </m:sSub>
+                      <m:d>
+                        <m:dPr>
+                          <m:ctrlPr>
+                            <a:rPr lang="en-US" sz="2000" i="1">
+                              <a:latin typeface="Cambria Math" panose="02040503050406030204" pitchFamily="18" charset="0"/>
+                            </a:rPr>
+                          </m:ctrlPr>
+                        </m:dPr>
+                        <m:e>
+                          <m:r>
+                            <a:rPr lang="en-US" sz="2000" i="1">
+                              <a:latin typeface="Cambria Math" panose="02040503050406030204" pitchFamily="18" charset="0"/>
+                            </a:rPr>
+                            <m:t>𝑠</m:t>
+                          </m:r>
+                        </m:e>
+                      </m:d>
+                      <m:r>
+                        <a:rPr lang="en-US" sz="2000" i="1">
+                          <a:latin typeface="Cambria Math" panose="02040503050406030204" pitchFamily="18" charset="0"/>
+                        </a:rPr>
+                        <m:t>  ∀</m:t>
+                      </m:r>
+                      <m:r>
+                        <a:rPr lang="en-US" sz="2000" i="1">
+                          <a:latin typeface="Cambria Math" panose="02040503050406030204" pitchFamily="18" charset="0"/>
+                        </a:rPr>
+                        <m:t>𝑠</m:t>
+                      </m:r>
+                      <m:r>
+                        <a:rPr lang="en-US" sz="2000" i="1">
+                          <a:latin typeface="Cambria Math" panose="02040503050406030204" pitchFamily="18" charset="0"/>
+                        </a:rPr>
+                        <m:t>∈</m:t>
+                      </m:r>
+                      <m:r>
+                        <a:rPr lang="en-US" sz="2000" i="1">
+                          <a:latin typeface="Cambria Math" panose="02040503050406030204" pitchFamily="18" charset="0"/>
+                          <a:ea typeface="Cambria Math" panose="02040503050406030204" pitchFamily="18" charset="0"/>
+                        </a:rPr>
+                        <m:t>𝒮</m:t>
+                      </m:r>
+                    </m:oMath>
+                  </m:oMathPara>
+                </a14:m>
+                <a:endParaRPr lang="en-US" sz="2000" dirty="0"/>
+              </a:p>
+              <a:p>
+                <a:endParaRPr lang="en-US" sz="2000" dirty="0"/>
+              </a:p>
+              <a:p>
                 <a:r>
                   <a:rPr lang="en-US" sz="2000" dirty="0"/>
                   <a:t>If </a:t>
                 </a:r>
                 <a14:m>
                   <m:oMath xmlns:m="http://schemas.openxmlformats.org/officeDocument/2006/math">
-                    <m:sSub>
-                      <m:sSubPr>
-                        <m:ctrlPr>
-                          <a:rPr lang="en-US" sz="2000" b="0" i="1" smtClean="0">
-                            <a:latin typeface="Cambria Math" panose="02040503050406030204" pitchFamily="18" charset="0"/>
-                          </a:rPr>
-                        </m:ctrlPr>
-                      </m:sSubPr>
-                      <m:e>
-                        <m:r>
-                          <a:rPr lang="en-US" sz="2000" b="0" i="1" smtClean="0">
-                            <a:latin typeface="Cambria Math" panose="02040503050406030204" pitchFamily="18" charset="0"/>
-                          </a:rPr>
-                          <m:t>𝑞</m:t>
-                        </m:r>
-                      </m:e>
-                      <m:sub>
-                        <m:r>
-                          <a:rPr lang="en-US" sz="2000" b="0" i="1" smtClean="0">
-                            <a:latin typeface="Cambria Math" panose="02040503050406030204" pitchFamily="18" charset="0"/>
-                          </a:rPr>
-                          <m:t>𝜋</m:t>
-                        </m:r>
-                      </m:sub>
-                    </m:sSub>
-                    <m:d>
-                      <m:dPr>
-                        <m:ctrlPr>
-                          <a:rPr lang="en-US" sz="2000" b="0" i="1" smtClean="0">
-                            <a:latin typeface="Cambria Math" panose="02040503050406030204" pitchFamily="18" charset="0"/>
-                          </a:rPr>
-                        </m:ctrlPr>
-                      </m:dPr>
-                      <m:e>
-                        <m:r>
-                          <a:rPr lang="en-US" sz="2000" b="0" i="1" smtClean="0">
-                            <a:latin typeface="Cambria Math" panose="02040503050406030204" pitchFamily="18" charset="0"/>
-                          </a:rPr>
-                          <m:t>𝑠</m:t>
-                        </m:r>
-                        <m:r>
-                          <a:rPr lang="en-US" sz="2000" b="0" i="1" smtClean="0">
-                            <a:latin typeface="Cambria Math" panose="02040503050406030204" pitchFamily="18" charset="0"/>
-                          </a:rPr>
-                          <m:t>, </m:t>
-                        </m:r>
-                        <m:sSup>
-                          <m:sSupPr>
-                            <m:ctrlPr>
-                              <a:rPr lang="en-US" sz="2000" b="0" i="1" smtClean="0">
-                                <a:latin typeface="Cambria Math" panose="02040503050406030204" pitchFamily="18" charset="0"/>
-                              </a:rPr>
-                            </m:ctrlPr>
-                          </m:sSupPr>
-                          <m:e>
-                            <m:r>
-                              <a:rPr lang="en-US" sz="2000" b="0" i="1" smtClean="0">
-                                <a:latin typeface="Cambria Math" panose="02040503050406030204" pitchFamily="18" charset="0"/>
-                              </a:rPr>
-                              <m:t>𝜋</m:t>
-                            </m:r>
-                          </m:e>
-                          <m:sup>
-                            <m:r>
-                              <a:rPr lang="en-US" sz="2000" b="0" i="1" smtClean="0">
-                                <a:latin typeface="Cambria Math" panose="02040503050406030204" pitchFamily="18" charset="0"/>
-                              </a:rPr>
-                              <m:t>′</m:t>
-                            </m:r>
-                          </m:sup>
-                        </m:sSup>
-                        <m:d>
-                          <m:dPr>
-                            <m:ctrlPr>
-                              <a:rPr lang="en-US" sz="2000" b="0" i="1" smtClean="0">
-                                <a:latin typeface="Cambria Math" panose="02040503050406030204" pitchFamily="18" charset="0"/>
-                              </a:rPr>
-                            </m:ctrlPr>
-                          </m:dPr>
-                          <m:e>
-                            <m:r>
-                              <a:rPr lang="en-US" sz="2000" b="0" i="1" smtClean="0">
-                                <a:latin typeface="Cambria Math" panose="02040503050406030204" pitchFamily="18" charset="0"/>
-                              </a:rPr>
-                              <m:t>𝑠</m:t>
-                            </m:r>
-                          </m:e>
-                        </m:d>
-                      </m:e>
-                    </m:d>
                     <m:r>
-                      <a:rPr lang="en-US" sz="2000" b="0" i="1" smtClean="0">
+                      <a:rPr lang="en-US" sz="2000" i="1">
                         <a:latin typeface="Cambria Math" panose="02040503050406030204" pitchFamily="18" charset="0"/>
                       </a:rPr>
-                      <m:t>≥</m:t>
+                      <m:t>𝜋</m:t>
                     </m:r>
-                    <m:sSub>
-                      <m:sSubPr>
-                        <m:ctrlPr>
-                          <a:rPr lang="en-US" sz="2000" b="0" i="1" smtClean="0">
-                            <a:latin typeface="Cambria Math" panose="02040503050406030204" pitchFamily="18" charset="0"/>
-                          </a:rPr>
-                        </m:ctrlPr>
-                      </m:sSubPr>
-                      <m:e>
-                        <m:r>
-                          <a:rPr lang="en-US" sz="2000" b="0" i="1" smtClean="0">
-                            <a:latin typeface="Cambria Math" panose="02040503050406030204" pitchFamily="18" charset="0"/>
-                          </a:rPr>
-                          <m:t>𝑣</m:t>
-                        </m:r>
-                      </m:e>
-                      <m:sub>
-                        <m:r>
-                          <a:rPr lang="en-US" sz="2000" b="0" i="1" smtClean="0">
-                            <a:latin typeface="Cambria Math" panose="02040503050406030204" pitchFamily="18" charset="0"/>
-                          </a:rPr>
-                          <m:t>𝜋</m:t>
-                        </m:r>
-                      </m:sub>
-                    </m:sSub>
-                    <m:d>
-                      <m:dPr>
-                        <m:ctrlPr>
-                          <a:rPr lang="en-US" sz="2000" b="0" i="1" smtClean="0">
-                            <a:latin typeface="Cambria Math" panose="02040503050406030204" pitchFamily="18" charset="0"/>
-                          </a:rPr>
-                        </m:ctrlPr>
-                      </m:dPr>
-                      <m:e>
-                        <m:r>
-                          <a:rPr lang="en-US" sz="2000" b="0" i="1" smtClean="0">
-                            <a:latin typeface="Cambria Math" panose="02040503050406030204" pitchFamily="18" charset="0"/>
-                          </a:rPr>
-                          <m:t>𝑠</m:t>
-                        </m:r>
-                      </m:e>
-                    </m:d>
                     <m:r>
-                      <a:rPr lang="en-US" sz="2000" b="0" i="1" smtClean="0">
+                      <a:rPr lang="en-US" sz="2000" i="1">
                         <a:latin typeface="Cambria Math" panose="02040503050406030204" pitchFamily="18" charset="0"/>
                       </a:rPr>
-                      <m:t>  ∀</m:t>
-                    </m:r>
-                    <m:r>
-                      <a:rPr lang="en-US" sz="2000" b="0" i="1" smtClean="0">
-                        <a:latin typeface="Cambria Math" panose="02040503050406030204" pitchFamily="18" charset="0"/>
-                      </a:rPr>
-                      <m:t>𝑠</m:t>
-                    </m:r>
-                    <m:r>
-                      <a:rPr lang="en-US" sz="2000" b="0" i="1" smtClean="0">
-                        <a:latin typeface="Cambria Math" panose="02040503050406030204" pitchFamily="18" charset="0"/>
-                      </a:rPr>
-                      <m:t>∈</m:t>
-                    </m:r>
-                    <m:r>
-                      <a:rPr lang="en-US" sz="2000" b="0" i="1" smtClean="0">
-                        <a:latin typeface="Cambria Math" panose="02040503050406030204" pitchFamily="18" charset="0"/>
-                        <a:ea typeface="Cambria Math" panose="02040503050406030204" pitchFamily="18" charset="0"/>
-                      </a:rPr>
-                      <m:t>𝒮</m:t>
+                      <m:t>′</m:t>
                     </m:r>
                   </m:oMath>
                 </a14:m>
                 <a:r>
                   <a:rPr lang="en-US" sz="2000" dirty="0"/>
-                  <a:t> </a:t>
+                  <a:t> is the same as </a:t>
                 </a:r>
-              </a:p>
-              <a:p>
-                <a:pPr marL="0" indent="0">
-                  <a:buNone/>
-                </a:pPr>
+                <a14:m>
+                  <m:oMath xmlns:m="http://schemas.openxmlformats.org/officeDocument/2006/math">
+                    <m:r>
+                      <a:rPr lang="en-US" sz="2000" b="0" i="1" smtClean="0">
+                        <a:latin typeface="Cambria Math" panose="02040503050406030204" pitchFamily="18" charset="0"/>
+                      </a:rPr>
+                      <m:t>𝜋</m:t>
+                    </m:r>
+                  </m:oMath>
+                </a14:m>
                 <a:r>
                   <a:rPr lang="en-US" sz="2000" dirty="0"/>
-                  <a:t>then </a:t>
+                  <a:t> but has a better action for at least one state then </a:t>
                 </a:r>
                 <a14:m>
                   <m:oMath xmlns:m="http://schemas.openxmlformats.org/officeDocument/2006/math">
@@ -7527,7 +9524,7 @@
                 </a14:m>
                 <a:r>
                   <a:rPr lang="en-US" sz="2000" dirty="0"/>
-                  <a:t> is a least as good as </a:t>
+                  <a:t> is strictly better than </a:t>
                 </a:r>
                 <a14:m>
                   <m:oMath xmlns:m="http://schemas.openxmlformats.org/officeDocument/2006/math">
@@ -7539,152 +9536,7 @@
                     </m:r>
                   </m:oMath>
                 </a14:m>
-                <a:r>
-                  <a:rPr lang="en-US" sz="2000" dirty="0"/>
-                  <a:t>, i.e., </a:t>
-                </a:r>
-                <a14:m>
-                  <m:oMath xmlns:m="http://schemas.openxmlformats.org/officeDocument/2006/math">
-                    <m:sSub>
-                      <m:sSubPr>
-                        <m:ctrlPr>
-                          <a:rPr lang="en-US" sz="2000" b="0" i="1" smtClean="0">
-                            <a:latin typeface="Cambria Math" panose="02040503050406030204" pitchFamily="18" charset="0"/>
-                          </a:rPr>
-                        </m:ctrlPr>
-                      </m:sSubPr>
-                      <m:e>
-                        <m:r>
-                          <a:rPr lang="en-US" sz="2000" b="0" i="1" smtClean="0">
-                            <a:latin typeface="Cambria Math" panose="02040503050406030204" pitchFamily="18" charset="0"/>
-                          </a:rPr>
-                          <m:t>𝑣</m:t>
-                        </m:r>
-                      </m:e>
-                      <m:sub>
-                        <m:sSup>
-                          <m:sSupPr>
-                            <m:ctrlPr>
-                              <a:rPr lang="en-US" sz="2000" b="0" i="1" smtClean="0">
-                                <a:latin typeface="Cambria Math" panose="02040503050406030204" pitchFamily="18" charset="0"/>
-                              </a:rPr>
-                            </m:ctrlPr>
-                          </m:sSupPr>
-                          <m:e>
-                            <m:r>
-                              <a:rPr lang="en-US" sz="2000" b="0" i="1" smtClean="0">
-                                <a:latin typeface="Cambria Math" panose="02040503050406030204" pitchFamily="18" charset="0"/>
-                              </a:rPr>
-                              <m:t>𝜋</m:t>
-                            </m:r>
-                          </m:e>
-                          <m:sup>
-                            <m:r>
-                              <a:rPr lang="en-US" sz="2000" b="0" i="1" smtClean="0">
-                                <a:latin typeface="Cambria Math" panose="02040503050406030204" pitchFamily="18" charset="0"/>
-                              </a:rPr>
-                              <m:t>′</m:t>
-                            </m:r>
-                          </m:sup>
-                        </m:sSup>
-                      </m:sub>
-                    </m:sSub>
-                    <m:d>
-                      <m:dPr>
-                        <m:ctrlPr>
-                          <a:rPr lang="en-US" sz="2000" b="0" i="1" smtClean="0">
-                            <a:latin typeface="Cambria Math" panose="02040503050406030204" pitchFamily="18" charset="0"/>
-                          </a:rPr>
-                        </m:ctrlPr>
-                      </m:dPr>
-                      <m:e>
-                        <m:r>
-                          <a:rPr lang="en-US" sz="2000" b="0" i="1" smtClean="0">
-                            <a:latin typeface="Cambria Math" panose="02040503050406030204" pitchFamily="18" charset="0"/>
-                          </a:rPr>
-                          <m:t>𝑠</m:t>
-                        </m:r>
-                      </m:e>
-                    </m:d>
-                    <m:r>
-                      <a:rPr lang="en-US" sz="2000" b="0" i="1" smtClean="0">
-                        <a:latin typeface="Cambria Math" panose="02040503050406030204" pitchFamily="18" charset="0"/>
-                      </a:rPr>
-                      <m:t>≥</m:t>
-                    </m:r>
-                    <m:sSub>
-                      <m:sSubPr>
-                        <m:ctrlPr>
-                          <a:rPr lang="en-US" sz="2000" b="0" i="1" smtClean="0">
-                            <a:latin typeface="Cambria Math" panose="02040503050406030204" pitchFamily="18" charset="0"/>
-                          </a:rPr>
-                        </m:ctrlPr>
-                      </m:sSubPr>
-                      <m:e>
-                        <m:r>
-                          <a:rPr lang="en-US" sz="2000" b="0" i="1" smtClean="0">
-                            <a:latin typeface="Cambria Math" panose="02040503050406030204" pitchFamily="18" charset="0"/>
-                          </a:rPr>
-                          <m:t>𝑣</m:t>
-                        </m:r>
-                      </m:e>
-                      <m:sub>
-                        <m:r>
-                          <a:rPr lang="en-US" sz="2000" b="0" i="1" smtClean="0">
-                            <a:latin typeface="Cambria Math" panose="02040503050406030204" pitchFamily="18" charset="0"/>
-                          </a:rPr>
-                          <m:t>𝜋</m:t>
-                        </m:r>
-                      </m:sub>
-                    </m:sSub>
-                    <m:d>
-                      <m:dPr>
-                        <m:ctrlPr>
-                          <a:rPr lang="en-US" sz="2000" b="0" i="1" smtClean="0">
-                            <a:latin typeface="Cambria Math" panose="02040503050406030204" pitchFamily="18" charset="0"/>
-                          </a:rPr>
-                        </m:ctrlPr>
-                      </m:dPr>
-                      <m:e>
-                        <m:r>
-                          <a:rPr lang="en-US" sz="2000" b="0" i="1" smtClean="0">
-                            <a:latin typeface="Cambria Math" panose="02040503050406030204" pitchFamily="18" charset="0"/>
-                          </a:rPr>
-                          <m:t>𝑠</m:t>
-                        </m:r>
-                      </m:e>
-                    </m:d>
-                    <m:r>
-                      <a:rPr lang="en-US" sz="2000" b="0" i="1" smtClean="0">
-                        <a:latin typeface="Cambria Math" panose="02040503050406030204" pitchFamily="18" charset="0"/>
-                      </a:rPr>
-                      <m:t>  ∀</m:t>
-                    </m:r>
-                    <m:r>
-                      <a:rPr lang="en-US" sz="2000" b="0" i="1" smtClean="0">
-                        <a:latin typeface="Cambria Math" panose="02040503050406030204" pitchFamily="18" charset="0"/>
-                      </a:rPr>
-                      <m:t>𝑠</m:t>
-                    </m:r>
-                    <m:r>
-                      <a:rPr lang="en-US" sz="2000" b="0" i="1" smtClean="0">
-                        <a:latin typeface="Cambria Math" panose="02040503050406030204" pitchFamily="18" charset="0"/>
-                      </a:rPr>
-                      <m:t>∈</m:t>
-                    </m:r>
-                    <m:r>
-                      <a:rPr lang="en-US" sz="2000" b="0" i="1" smtClean="0">
-                        <a:latin typeface="Cambria Math" panose="02040503050406030204" pitchFamily="18" charset="0"/>
-                        <a:ea typeface="Cambria Math" panose="02040503050406030204" pitchFamily="18" charset="0"/>
-                      </a:rPr>
-                      <m:t>𝒮</m:t>
-                    </m:r>
-                  </m:oMath>
-                </a14:m>
-                <a:r>
-                  <a:rPr lang="en-US" sz="2000" dirty="0"/>
-                  <a:t>. </a:t>
-                </a:r>
+                <a:endParaRPr lang="en-US" sz="2000" dirty="0"/>
               </a:p>
             </p:txBody>
           </p:sp>
@@ -7706,8 +9558,8 @@
             </p:nvSpPr>
             <p:spPr>
               <a:xfrm>
-                <a:off x="2033107" y="1949537"/>
-                <a:ext cx="8125786" cy="1366721"/>
+                <a:off x="838201" y="1897071"/>
+                <a:ext cx="10771682" cy="1670842"/>
               </a:xfrm>
               <a:prstGeom prst="rect">
                 <a:avLst/>
@@ -7715,7 +9567,7 @@
               <a:blipFill>
                 <a:blip r:embed="rId3"/>
                 <a:stretch>
-                  <a:fillRect l="-749" t="-2203" b="-6608"/>
+                  <a:fillRect l="-565" t="-1444" b="-5054"/>
                 </a:stretch>
               </a:blipFill>
             </p:spPr>
@@ -7744,6 +9596,165 @@
   <p:clrMapOvr>
     <a:masterClrMapping/>
   </p:clrMapOvr>
+  <p:timing>
+    <p:tnLst>
+      <p:par>
+        <p:cTn id="1" dur="indefinite" restart="never" nodeType="tmRoot">
+          <p:childTnLst>
+            <p:seq concurrent="1" nextAc="seek">
+              <p:cTn id="2" dur="indefinite" nodeType="mainSeq">
+                <p:childTnLst>
+                  <p:par>
+                    <p:cTn id="3" fill="hold">
+                      <p:stCondLst>
+                        <p:cond delay="indefinite"/>
+                      </p:stCondLst>
+                      <p:childTnLst>
+                        <p:par>
+                          <p:cTn id="4" fill="hold">
+                            <p:stCondLst>
+                              <p:cond delay="0"/>
+                            </p:stCondLst>
+                            <p:childTnLst>
+                              <p:par>
+                                <p:cTn id="5" presetID="1" presetClass="entr" presetSubtype="0" fill="hold" nodeType="clickEffect">
+                                  <p:stCondLst>
+                                    <p:cond delay="0"/>
+                                  </p:stCondLst>
+                                  <p:childTnLst>
+                                    <p:set>
+                                      <p:cBhvr>
+                                        <p:cTn id="6" dur="1" fill="hold">
+                                          <p:stCondLst>
+                                            <p:cond delay="0"/>
+                                          </p:stCondLst>
+                                        </p:cTn>
+                                        <p:tgtEl>
+                                          <p:spTgt spid="5">
+                                            <p:txEl>
+                                              <p:pRg st="7" end="7"/>
+                                            </p:txEl>
+                                          </p:spTgt>
+                                        </p:tgtEl>
+                                        <p:attrNameLst>
+                                          <p:attrName>style.visibility</p:attrName>
+                                        </p:attrNameLst>
+                                      </p:cBhvr>
+                                      <p:to>
+                                        <p:strVal val="visible"/>
+                                      </p:to>
+                                    </p:set>
+                                  </p:childTnLst>
+                                </p:cTn>
+                              </p:par>
+                              <p:par>
+                                <p:cTn id="7" presetID="1" presetClass="entr" presetSubtype="0" fill="hold" nodeType="withEffect">
+                                  <p:stCondLst>
+                                    <p:cond delay="0"/>
+                                  </p:stCondLst>
+                                  <p:childTnLst>
+                                    <p:set>
+                                      <p:cBhvr>
+                                        <p:cTn id="8" dur="1" fill="hold">
+                                          <p:stCondLst>
+                                            <p:cond delay="0"/>
+                                          </p:stCondLst>
+                                        </p:cTn>
+                                        <p:tgtEl>
+                                          <p:spTgt spid="5">
+                                            <p:txEl>
+                                              <p:pRg st="9" end="9"/>
+                                            </p:txEl>
+                                          </p:spTgt>
+                                        </p:tgtEl>
+                                        <p:attrNameLst>
+                                          <p:attrName>style.visibility</p:attrName>
+                                        </p:attrNameLst>
+                                      </p:cBhvr>
+                                      <p:to>
+                                        <p:strVal val="visible"/>
+                                      </p:to>
+                                    </p:set>
+                                  </p:childTnLst>
+                                </p:cTn>
+                              </p:par>
+                            </p:childTnLst>
+                          </p:cTn>
+                        </p:par>
+                      </p:childTnLst>
+                    </p:cTn>
+                  </p:par>
+                  <p:par>
+                    <p:cTn id="9" fill="hold">
+                      <p:stCondLst>
+                        <p:cond delay="indefinite"/>
+                      </p:stCondLst>
+                      <p:childTnLst>
+                        <p:par>
+                          <p:cTn id="10" fill="hold">
+                            <p:stCondLst>
+                              <p:cond delay="0"/>
+                            </p:stCondLst>
+                            <p:childTnLst>
+                              <p:par>
+                                <p:cTn id="11" presetID="1" presetClass="entr" presetSubtype="0" fill="hold" nodeType="clickEffect">
+                                  <p:stCondLst>
+                                    <p:cond delay="0"/>
+                                  </p:stCondLst>
+                                  <p:childTnLst>
+                                    <p:set>
+                                      <p:cBhvr>
+                                        <p:cTn id="12" dur="1" fill="hold">
+                                          <p:stCondLst>
+                                            <p:cond delay="0"/>
+                                          </p:stCondLst>
+                                        </p:cTn>
+                                        <p:tgtEl>
+                                          <p:spTgt spid="5">
+                                            <p:txEl>
+                                              <p:pRg st="11" end="11"/>
+                                            </p:txEl>
+                                          </p:spTgt>
+                                        </p:tgtEl>
+                                        <p:attrNameLst>
+                                          <p:attrName>style.visibility</p:attrName>
+                                        </p:attrNameLst>
+                                      </p:cBhvr>
+                                      <p:to>
+                                        <p:strVal val="visible"/>
+                                      </p:to>
+                                    </p:set>
+                                  </p:childTnLst>
+                                </p:cTn>
+                              </p:par>
+                            </p:childTnLst>
+                          </p:cTn>
+                        </p:par>
+                      </p:childTnLst>
+                    </p:cTn>
+                  </p:par>
+                </p:childTnLst>
+              </p:cTn>
+              <p:prevCondLst>
+                <p:cond evt="onPrev" delay="0">
+                  <p:tgtEl>
+                    <p:sldTgt/>
+                  </p:tgtEl>
+                </p:cond>
+              </p:prevCondLst>
+              <p:nextCondLst>
+                <p:cond evt="onNext" delay="0">
+                  <p:tgtEl>
+                    <p:sldTgt/>
+                  </p:tgtEl>
+                </p:cond>
+              </p:nextCondLst>
+            </p:seq>
+          </p:childTnLst>
+        </p:cTn>
+      </p:par>
+    </p:tnLst>
+  </p:timing>
 </p:sld>
 </file>
 
@@ -20203,8 +22214,8 @@
           </a:p>
         </p:txBody>
       </p:sp>
-      <mc:AlternateContent xmlns:mc="http://schemas.openxmlformats.org/markup-compatibility/2006" xmlns:a14="http://schemas.microsoft.com/office/drawing/2010/main">
-        <mc:Choice Requires="a14">
+      <mc:AlternateContent xmlns:mc="http://schemas.openxmlformats.org/markup-compatibility/2006">
+        <mc:Choice xmlns:a14="http://schemas.microsoft.com/office/drawing/2010/main" Requires="a14">
           <p:sp>
             <p:nvSpPr>
               <p:cNvPr id="3" name="Content Placeholder 2">
@@ -20224,12 +22235,12 @@
             <p:spPr>
               <a:xfrm>
                 <a:off x="838200" y="1170264"/>
-                <a:ext cx="8403522" cy="5006699"/>
+                <a:ext cx="8403522" cy="5265437"/>
               </a:xfrm>
             </p:spPr>
             <p:txBody>
               <a:bodyPr>
-                <a:normAutofit lnSpcReduction="10000"/>
+                <a:normAutofit/>
               </a:bodyPr>
               <a:lstStyle/>
               <a:p>
@@ -20239,7 +22250,7 @@
                 </a:r>
                 <a:r>
                   <a:rPr lang="en-US" sz="1500" dirty="0"/>
-                  <a:t>: MDPs have an optimal deterministic policy.</a:t>
+                  <a:t>: Finite MDPs have an optimal deterministic policy (under some mild conditions).</a:t>
                 </a:r>
               </a:p>
               <a:p>
@@ -20388,7 +22399,7 @@
                 </a14:m>
                 <a:r>
                   <a:rPr lang="en-US" sz="1500" dirty="0"/>
-                  <a:t> given a perfect finite MDP model.</a:t>
+                  <a:t> given a perfect MDP model.</a:t>
                 </a:r>
               </a:p>
               <a:p>
@@ -21253,12 +23264,6 @@
                 <a:pPr marL="0" indent="0">
                   <a:buNone/>
                 </a:pPr>
-                <a:endParaRPr lang="en-US" sz="1500" dirty="0"/>
-              </a:p>
-              <a:p>
-                <a:pPr marL="0" indent="0">
-                  <a:buNone/>
-                </a:pPr>
                 <a:endParaRPr lang="en-US" sz="1500" b="1" dirty="0"/>
               </a:p>
               <a:p>
@@ -21388,36 +23393,23 @@
                         <m:t>𝜋</m:t>
                       </m:r>
                       <m:r>
+                        <a:rPr lang="en-US" sz="1500" b="0" i="1" smtClean="0">
+                          <a:latin typeface="Cambria Math" panose="02040503050406030204" pitchFamily="18" charset="0"/>
+                        </a:rPr>
+                        <m:t>′</m:t>
+                      </m:r>
+                      <m:r>
                         <a:rPr lang="en-US" sz="1500" i="1">
                           <a:latin typeface="Cambria Math" panose="02040503050406030204" pitchFamily="18" charset="0"/>
                         </a:rPr>
                         <m:t>≥</m:t>
                       </m:r>
-                      <m:sSup>
-                        <m:sSupPr>
-                          <m:ctrlPr>
-                            <a:rPr lang="en-US" sz="1500" i="1">
-                              <a:latin typeface="Cambria Math" panose="02040503050406030204" pitchFamily="18" charset="0"/>
-                            </a:rPr>
-                          </m:ctrlPr>
-                        </m:sSupPr>
-                        <m:e>
-                          <m:r>
-                            <a:rPr lang="en-US" sz="1500" i="1">
-                              <a:latin typeface="Cambria Math" panose="02040503050406030204" pitchFamily="18" charset="0"/>
-                            </a:rPr>
-                            <m:t>𝜋</m:t>
-                          </m:r>
-                        </m:e>
-                        <m:sup>
-                          <m:r>
-                            <a:rPr lang="en-US" sz="1500" i="1">
-                              <a:latin typeface="Cambria Math" panose="02040503050406030204" pitchFamily="18" charset="0"/>
-                            </a:rPr>
-                            <m:t>′</m:t>
-                          </m:r>
-                        </m:sup>
-                      </m:sSup>
+                      <m:r>
+                        <a:rPr lang="en-US" sz="1500" b="0" i="1" smtClean="0">
+                          <a:latin typeface="Cambria Math" panose="02040503050406030204" pitchFamily="18" charset="0"/>
+                        </a:rPr>
+                        <m:t>𝜋</m:t>
+                      </m:r>
                       <m:groupChr>
                         <m:groupChrPr>
                           <m:chr m:val="⇔"/>
@@ -21447,12 +23439,31 @@
                           </m:r>
                         </m:e>
                         <m:sub>
-                          <m:r>
-                            <a:rPr lang="en-US" sz="1500" i="1">
-                              <a:latin typeface="Cambria Math" panose="02040503050406030204" pitchFamily="18" charset="0"/>
-                            </a:rPr>
-                            <m:t>𝜋</m:t>
-                          </m:r>
+                          <m:sSup>
+                            <m:sSupPr>
+                              <m:ctrlPr>
+                                <a:rPr lang="en-US" sz="1500" b="0" i="1" smtClean="0">
+                                  <a:latin typeface="Cambria Math" panose="02040503050406030204" pitchFamily="18" charset="0"/>
+                                </a:rPr>
+                              </m:ctrlPr>
+                            </m:sSupPr>
+                            <m:e>
+                              <m:r>
+                                <a:rPr lang="en-US" sz="1500" i="1">
+                                  <a:latin typeface="Cambria Math" panose="02040503050406030204" pitchFamily="18" charset="0"/>
+                                </a:rPr>
+                                <m:t>𝜋</m:t>
+                              </m:r>
+                            </m:e>
+                            <m:sup>
+                              <m:r>
+                                <a:rPr lang="en-US" sz="1500" b="0" i="1" smtClean="0">
+                                  <a:latin typeface="Cambria Math" panose="02040503050406030204" pitchFamily="18" charset="0"/>
+                                </a:rPr>
+                                <m:t>′</m:t>
+                              </m:r>
+                            </m:sup>
+                          </m:sSup>
                         </m:sub>
                       </m:sSub>
                       <m:d>
@@ -21495,31 +23506,12 @@
                           </m:r>
                         </m:e>
                         <m:sub>
-                          <m:sSup>
-                            <m:sSupPr>
-                              <m:ctrlPr>
-                                <a:rPr lang="en-US" sz="1500" i="1">
-                                  <a:latin typeface="Cambria Math" panose="02040503050406030204" pitchFamily="18" charset="0"/>
-                                </a:rPr>
-                              </m:ctrlPr>
-                            </m:sSupPr>
-                            <m:e>
-                              <m:r>
-                                <a:rPr lang="en-US" sz="1500" i="1">
-                                  <a:latin typeface="Cambria Math" panose="02040503050406030204" pitchFamily="18" charset="0"/>
-                                </a:rPr>
-                                <m:t>𝜋</m:t>
-                              </m:r>
-                            </m:e>
-                            <m:sup>
-                              <m:r>
-                                <a:rPr lang="en-US" sz="1500" i="1">
-                                  <a:latin typeface="Cambria Math" panose="02040503050406030204" pitchFamily="18" charset="0"/>
-                                </a:rPr>
-                                <m:t>′</m:t>
-                              </m:r>
-                            </m:sup>
-                          </m:sSup>
+                          <m:r>
+                            <a:rPr lang="en-US" sz="1500" b="0" i="1" smtClean="0">
+                              <a:latin typeface="Cambria Math" panose="02040503050406030204" pitchFamily="18" charset="0"/>
+                            </a:rPr>
+                            <m:t>𝜋</m:t>
+                          </m:r>
                         </m:sub>
                       </m:sSub>
                       <m:d>
@@ -21546,7 +23538,25 @@
                         <a:rPr lang="en-US" sz="1500">
                           <a:latin typeface="Cambria Math" panose="02040503050406030204" pitchFamily="18" charset="0"/>
                         </a:rPr>
-                        <m:t>  </m:t>
+                        <m:t> </m:t>
+                      </m:r>
+                      <m:r>
+                        <m:rPr>
+                          <m:nor/>
+                        </m:rPr>
+                        <a:rPr lang="en-US" sz="1500" b="0" i="0" smtClean="0">
+                          <a:latin typeface="Cambria Math" panose="02040503050406030204" pitchFamily="18" charset="0"/>
+                        </a:rPr>
+                        <m:t>            </m:t>
+                      </m:r>
+                      <m:r>
+                        <m:rPr>
+                          <m:nor/>
+                        </m:rPr>
+                        <a:rPr lang="en-US" sz="1500">
+                          <a:latin typeface="Cambria Math" panose="02040503050406030204" pitchFamily="18" charset="0"/>
+                        </a:rPr>
+                        <m:t> </m:t>
                       </m:r>
                       <m:r>
                         <m:rPr>
@@ -21608,15 +23618,7 @@
               <a:p>
                 <a:r>
                   <a:rPr lang="en-US" sz="1500" dirty="0"/>
-                  <a:t>To do this we need to be able to </a:t>
-                </a:r>
-                <a:r>
-                  <a:rPr lang="en-US" sz="1500" b="1" dirty="0"/>
-                  <a:t>evaluate a policy </a:t>
-                </a:r>
-                <a:r>
-                  <a:rPr lang="en-US" sz="1500" dirty="0"/>
-                  <a:t>(i.e., compute </a:t>
+                  <a:t>To do this we need to be able to compute </a:t>
                 </a:r>
                 <a14:m>
                   <m:oMath xmlns:m="http://schemas.openxmlformats.org/officeDocument/2006/math">
@@ -21688,13 +23690,13 @@
                 </a14:m>
                 <a:r>
                   <a:rPr lang="en-US" sz="1500" dirty="0"/>
-                  <a:t>). </a:t>
+                  <a:t>. </a:t>
                 </a:r>
               </a:p>
             </p:txBody>
           </p:sp>
         </mc:Choice>
-        <mc:Fallback xmlns="">
+        <mc:Fallback>
           <p:sp>
             <p:nvSpPr>
               <p:cNvPr id="3" name="Content Placeholder 2">
@@ -21714,12 +23716,12 @@
             <p:spPr>
               <a:xfrm>
                 <a:off x="838200" y="1170264"/>
-                <a:ext cx="8403522" cy="5006699"/>
+                <a:ext cx="8403522" cy="5265437"/>
               </a:xfrm>
               <a:blipFill>
                 <a:blip r:embed="rId2"/>
                 <a:stretch>
-                  <a:fillRect l="-218" t="-853" r="-435"/>
+                  <a:fillRect l="-218" t="-579"/>
                 </a:stretch>
               </a:blipFill>
             </p:spPr>
@@ -21752,10 +23754,10 @@
         </p:nvGrpSpPr>
         <p:grpSpPr>
           <a:xfrm>
-            <a:off x="4924608" y="3522501"/>
-            <a:ext cx="1265236" cy="517988"/>
+            <a:off x="4889708" y="3599283"/>
+            <a:ext cx="1299326" cy="398202"/>
             <a:chOff x="2533296" y="3175233"/>
-            <a:chExt cx="1503726" cy="517988"/>
+            <a:chExt cx="1544242" cy="398202"/>
           </a:xfrm>
         </p:grpSpPr>
         <p:sp>
@@ -21802,8 +23804,8 @@
             </a:p>
           </p:txBody>
         </p:sp>
-        <mc:AlternateContent xmlns:mc="http://schemas.openxmlformats.org/markup-compatibility/2006" xmlns:a14="http://schemas.microsoft.com/office/drawing/2010/main">
-          <mc:Choice Requires="a14">
+        <mc:AlternateContent xmlns:mc="http://schemas.openxmlformats.org/markup-compatibility/2006">
+          <mc:Choice xmlns:a14="http://schemas.microsoft.com/office/drawing/2010/main" Requires="a14">
             <p:sp>
               <p:nvSpPr>
                 <p:cNvPr id="6" name="TextBox 5">
@@ -21818,7 +23820,7 @@
               </p:nvSpPr>
               <p:spPr>
                 <a:xfrm>
-                  <a:off x="2602325" y="3385444"/>
+                  <a:off x="2711871" y="3265658"/>
                   <a:ext cx="1365667" cy="307777"/>
                 </a:xfrm>
                 <a:prstGeom prst="rect">
@@ -21921,7 +23923,7 @@
               </p:txBody>
             </p:sp>
           </mc:Choice>
-          <mc:Fallback xmlns="">
+          <mc:Fallback>
             <p:sp>
               <p:nvSpPr>
                 <p:cNvPr id="6" name="TextBox 5">
@@ -21938,7 +23940,7 @@
               </p:nvSpPr>
               <p:spPr>
                 <a:xfrm>
-                  <a:off x="2602325" y="3385444"/>
+                  <a:off x="2711871" y="3265658"/>
                   <a:ext cx="1365667" cy="307777"/>
                 </a:xfrm>
                 <a:prstGeom prst="rect">
@@ -22076,7 +24078,7 @@
             <a:p>
               <a:r>
                 <a:rPr lang="en-US" sz="1600" b="1" dirty="0"/>
-                <a:t>Control</a:t>
+                <a:t>Control Problem</a:t>
               </a:r>
               <a:r>
                 <a:rPr lang="en-US" sz="1600" dirty="0"/>
@@ -22100,10 +24102,10 @@
         </p:nvGrpSpPr>
         <p:grpSpPr>
           <a:xfrm>
-            <a:off x="9283600" y="5079986"/>
-            <a:ext cx="2717168" cy="1228272"/>
-            <a:chOff x="9283602" y="5193234"/>
-            <a:chExt cx="2728862" cy="1228272"/>
+            <a:off x="9260295" y="5151352"/>
+            <a:ext cx="2740473" cy="975421"/>
+            <a:chOff x="9283602" y="5446084"/>
+            <a:chExt cx="2752267" cy="975421"/>
           </a:xfrm>
         </p:grpSpPr>
         <p:sp>
@@ -22120,8 +24122,8 @@
           </p:nvSpPr>
           <p:spPr>
             <a:xfrm>
-              <a:off x="9283602" y="5193234"/>
-              <a:ext cx="289677" cy="1228272"/>
+              <a:off x="9283602" y="5446084"/>
+              <a:ext cx="385560" cy="975421"/>
             </a:xfrm>
             <a:prstGeom prst="rightBrace">
               <a:avLst/>
@@ -22164,7 +24166,7 @@
           </p:nvSpPr>
           <p:spPr>
             <a:xfrm>
-              <a:off x="9725248" y="5345966"/>
+              <a:off x="9748653" y="5518295"/>
               <a:ext cx="2287216" cy="830997"/>
             </a:xfrm>
             <a:prstGeom prst="rect">
@@ -22195,15 +24197,11 @@
             <a:p>
               <a:r>
                 <a:rPr lang="en-US" sz="1600" b="1" dirty="0"/>
-                <a:t>Prediction/</a:t>
-              </a:r>
-              <a:r>
-                <a:rPr lang="en-US" sz="1600" b="1" dirty="0" err="1"/>
-                <a:t>Evaluaiton</a:t>
+                <a:t>Prediction Problem: </a:t>
               </a:r>
               <a:r>
                 <a:rPr lang="en-US" sz="1600" dirty="0"/>
-                <a:t>: Estimate the value function for a policy.</a:t>
+                <a:t> Estimate the value function for a policy.</a:t>
               </a:r>
             </a:p>
           </p:txBody>
@@ -22219,6 +24217,437 @@
   <p:clrMapOvr>
     <a:masterClrMapping/>
   </p:clrMapOvr>
+  <p:timing>
+    <p:tnLst>
+      <p:par>
+        <p:cTn id="1" dur="indefinite" restart="never" nodeType="tmRoot">
+          <p:childTnLst>
+            <p:seq concurrent="1" nextAc="seek">
+              <p:cTn id="2" dur="indefinite" nodeType="mainSeq">
+                <p:childTnLst>
+                  <p:par>
+                    <p:cTn id="3" fill="hold">
+                      <p:stCondLst>
+                        <p:cond delay="indefinite"/>
+                      </p:stCondLst>
+                      <p:childTnLst>
+                        <p:par>
+                          <p:cTn id="4" fill="hold">
+                            <p:stCondLst>
+                              <p:cond delay="0"/>
+                            </p:stCondLst>
+                            <p:childTnLst>
+                              <p:par>
+                                <p:cTn id="5" presetID="1" presetClass="entr" presetSubtype="0" fill="hold" nodeType="clickEffect">
+                                  <p:stCondLst>
+                                    <p:cond delay="0"/>
+                                  </p:stCondLst>
+                                  <p:childTnLst>
+                                    <p:set>
+                                      <p:cBhvr>
+                                        <p:cTn id="6" dur="1" fill="hold">
+                                          <p:stCondLst>
+                                            <p:cond delay="0"/>
+                                          </p:stCondLst>
+                                        </p:cTn>
+                                        <p:tgtEl>
+                                          <p:spTgt spid="3">
+                                            <p:txEl>
+                                              <p:pRg st="2" end="2"/>
+                                            </p:txEl>
+                                          </p:spTgt>
+                                        </p:tgtEl>
+                                        <p:attrNameLst>
+                                          <p:attrName>style.visibility</p:attrName>
+                                        </p:attrNameLst>
+                                      </p:cBhvr>
+                                      <p:to>
+                                        <p:strVal val="visible"/>
+                                      </p:to>
+                                    </p:set>
+                                  </p:childTnLst>
+                                </p:cTn>
+                              </p:par>
+                              <p:par>
+                                <p:cTn id="7" presetID="1" presetClass="entr" presetSubtype="0" fill="hold" nodeType="withEffect">
+                                  <p:stCondLst>
+                                    <p:cond delay="0"/>
+                                  </p:stCondLst>
+                                  <p:childTnLst>
+                                    <p:set>
+                                      <p:cBhvr>
+                                        <p:cTn id="8" dur="1" fill="hold">
+                                          <p:stCondLst>
+                                            <p:cond delay="0"/>
+                                          </p:stCondLst>
+                                        </p:cTn>
+                                        <p:tgtEl>
+                                          <p:spTgt spid="3">
+                                            <p:txEl>
+                                              <p:pRg st="4" end="4"/>
+                                            </p:txEl>
+                                          </p:spTgt>
+                                        </p:tgtEl>
+                                        <p:attrNameLst>
+                                          <p:attrName>style.visibility</p:attrName>
+                                        </p:attrNameLst>
+                                      </p:cBhvr>
+                                      <p:to>
+                                        <p:strVal val="visible"/>
+                                      </p:to>
+                                    </p:set>
+                                  </p:childTnLst>
+                                </p:cTn>
+                              </p:par>
+                              <p:par>
+                                <p:cTn id="9" presetID="1" presetClass="entr" presetSubtype="0" fill="hold" nodeType="withEffect">
+                                  <p:stCondLst>
+                                    <p:cond delay="0"/>
+                                  </p:stCondLst>
+                                  <p:childTnLst>
+                                    <p:set>
+                                      <p:cBhvr>
+                                        <p:cTn id="10" dur="1" fill="hold">
+                                          <p:stCondLst>
+                                            <p:cond delay="0"/>
+                                          </p:stCondLst>
+                                        </p:cTn>
+                                        <p:tgtEl>
+                                          <p:spTgt spid="3">
+                                            <p:txEl>
+                                              <p:pRg st="5" end="5"/>
+                                            </p:txEl>
+                                          </p:spTgt>
+                                        </p:tgtEl>
+                                        <p:attrNameLst>
+                                          <p:attrName>style.visibility</p:attrName>
+                                        </p:attrNameLst>
+                                      </p:cBhvr>
+                                      <p:to>
+                                        <p:strVal val="visible"/>
+                                      </p:to>
+                                    </p:set>
+                                  </p:childTnLst>
+                                </p:cTn>
+                              </p:par>
+                              <p:par>
+                                <p:cTn id="11" presetID="1" presetClass="entr" presetSubtype="0" fill="hold" nodeType="withEffect">
+                                  <p:stCondLst>
+                                    <p:cond delay="0"/>
+                                  </p:stCondLst>
+                                  <p:childTnLst>
+                                    <p:set>
+                                      <p:cBhvr>
+                                        <p:cTn id="12" dur="1" fill="hold">
+                                          <p:stCondLst>
+                                            <p:cond delay="0"/>
+                                          </p:stCondLst>
+                                        </p:cTn>
+                                        <p:tgtEl>
+                                          <p:spTgt spid="3">
+                                            <p:txEl>
+                                              <p:pRg st="6" end="6"/>
+                                            </p:txEl>
+                                          </p:spTgt>
+                                        </p:tgtEl>
+                                        <p:attrNameLst>
+                                          <p:attrName>style.visibility</p:attrName>
+                                        </p:attrNameLst>
+                                      </p:cBhvr>
+                                      <p:to>
+                                        <p:strVal val="visible"/>
+                                      </p:to>
+                                    </p:set>
+                                  </p:childTnLst>
+                                </p:cTn>
+                              </p:par>
+                              <p:par>
+                                <p:cTn id="13" presetID="1" presetClass="entr" presetSubtype="0" fill="hold" nodeType="withEffect">
+                                  <p:stCondLst>
+                                    <p:cond delay="0"/>
+                                  </p:stCondLst>
+                                  <p:childTnLst>
+                                    <p:set>
+                                      <p:cBhvr>
+                                        <p:cTn id="14" dur="1" fill="hold">
+                                          <p:stCondLst>
+                                            <p:cond delay="0"/>
+                                          </p:stCondLst>
+                                        </p:cTn>
+                                        <p:tgtEl>
+                                          <p:spTgt spid="3">
+                                            <p:txEl>
+                                              <p:pRg st="8" end="8"/>
+                                            </p:txEl>
+                                          </p:spTgt>
+                                        </p:tgtEl>
+                                        <p:attrNameLst>
+                                          <p:attrName>style.visibility</p:attrName>
+                                        </p:attrNameLst>
+                                      </p:cBhvr>
+                                      <p:to>
+                                        <p:strVal val="visible"/>
+                                      </p:to>
+                                    </p:set>
+                                  </p:childTnLst>
+                                </p:cTn>
+                              </p:par>
+                              <p:par>
+                                <p:cTn id="15" presetID="1" presetClass="entr" presetSubtype="0" fill="hold" nodeType="withEffect">
+                                  <p:stCondLst>
+                                    <p:cond delay="0"/>
+                                  </p:stCondLst>
+                                  <p:childTnLst>
+                                    <p:set>
+                                      <p:cBhvr>
+                                        <p:cTn id="16" dur="1" fill="hold">
+                                          <p:stCondLst>
+                                            <p:cond delay="0"/>
+                                          </p:stCondLst>
+                                        </p:cTn>
+                                        <p:tgtEl>
+                                          <p:spTgt spid="4"/>
+                                        </p:tgtEl>
+                                        <p:attrNameLst>
+                                          <p:attrName>style.visibility</p:attrName>
+                                        </p:attrNameLst>
+                                      </p:cBhvr>
+                                      <p:to>
+                                        <p:strVal val="visible"/>
+                                      </p:to>
+                                    </p:set>
+                                  </p:childTnLst>
+                                </p:cTn>
+                              </p:par>
+                            </p:childTnLst>
+                          </p:cTn>
+                        </p:par>
+                      </p:childTnLst>
+                    </p:cTn>
+                  </p:par>
+                  <p:par>
+                    <p:cTn id="17" fill="hold">
+                      <p:stCondLst>
+                        <p:cond delay="indefinite"/>
+                      </p:stCondLst>
+                      <p:childTnLst>
+                        <p:par>
+                          <p:cTn id="18" fill="hold">
+                            <p:stCondLst>
+                              <p:cond delay="0"/>
+                            </p:stCondLst>
+                            <p:childTnLst>
+                              <p:par>
+                                <p:cTn id="19" presetID="1" presetClass="entr" presetSubtype="0" fill="hold" nodeType="clickEffect">
+                                  <p:stCondLst>
+                                    <p:cond delay="0"/>
+                                  </p:stCondLst>
+                                  <p:childTnLst>
+                                    <p:set>
+                                      <p:cBhvr>
+                                        <p:cTn id="20" dur="1" fill="hold">
+                                          <p:stCondLst>
+                                            <p:cond delay="0"/>
+                                          </p:stCondLst>
+                                        </p:cTn>
+                                        <p:tgtEl>
+                                          <p:spTgt spid="13"/>
+                                        </p:tgtEl>
+                                        <p:attrNameLst>
+                                          <p:attrName>style.visibility</p:attrName>
+                                        </p:attrNameLst>
+                                      </p:cBhvr>
+                                      <p:to>
+                                        <p:strVal val="visible"/>
+                                      </p:to>
+                                    </p:set>
+                                  </p:childTnLst>
+                                </p:cTn>
+                              </p:par>
+                            </p:childTnLst>
+                          </p:cTn>
+                        </p:par>
+                      </p:childTnLst>
+                    </p:cTn>
+                  </p:par>
+                  <p:par>
+                    <p:cTn id="21" fill="hold">
+                      <p:stCondLst>
+                        <p:cond delay="indefinite"/>
+                      </p:stCondLst>
+                      <p:childTnLst>
+                        <p:par>
+                          <p:cTn id="22" fill="hold">
+                            <p:stCondLst>
+                              <p:cond delay="0"/>
+                            </p:stCondLst>
+                            <p:childTnLst>
+                              <p:par>
+                                <p:cTn id="23" presetID="1" presetClass="entr" presetSubtype="0" fill="hold" nodeType="clickEffect">
+                                  <p:stCondLst>
+                                    <p:cond delay="0"/>
+                                  </p:stCondLst>
+                                  <p:childTnLst>
+                                    <p:set>
+                                      <p:cBhvr>
+                                        <p:cTn id="24" dur="1" fill="hold">
+                                          <p:stCondLst>
+                                            <p:cond delay="0"/>
+                                          </p:stCondLst>
+                                        </p:cTn>
+                                        <p:tgtEl>
+                                          <p:spTgt spid="3">
+                                            <p:txEl>
+                                              <p:pRg st="10" end="10"/>
+                                            </p:txEl>
+                                          </p:spTgt>
+                                        </p:tgtEl>
+                                        <p:attrNameLst>
+                                          <p:attrName>style.visibility</p:attrName>
+                                        </p:attrNameLst>
+                                      </p:cBhvr>
+                                      <p:to>
+                                        <p:strVal val="visible"/>
+                                      </p:to>
+                                    </p:set>
+                                  </p:childTnLst>
+                                </p:cTn>
+                              </p:par>
+                              <p:par>
+                                <p:cTn id="25" presetID="1" presetClass="entr" presetSubtype="0" fill="hold" nodeType="withEffect">
+                                  <p:stCondLst>
+                                    <p:cond delay="0"/>
+                                  </p:stCondLst>
+                                  <p:childTnLst>
+                                    <p:set>
+                                      <p:cBhvr>
+                                        <p:cTn id="26" dur="1" fill="hold">
+                                          <p:stCondLst>
+                                            <p:cond delay="0"/>
+                                          </p:stCondLst>
+                                        </p:cTn>
+                                        <p:tgtEl>
+                                          <p:spTgt spid="3">
+                                            <p:txEl>
+                                              <p:pRg st="11" end="11"/>
+                                            </p:txEl>
+                                          </p:spTgt>
+                                        </p:tgtEl>
+                                        <p:attrNameLst>
+                                          <p:attrName>style.visibility</p:attrName>
+                                        </p:attrNameLst>
+                                      </p:cBhvr>
+                                      <p:to>
+                                        <p:strVal val="visible"/>
+                                      </p:to>
+                                    </p:set>
+                                  </p:childTnLst>
+                                </p:cTn>
+                              </p:par>
+                              <p:par>
+                                <p:cTn id="27" presetID="1" presetClass="entr" presetSubtype="0" fill="hold" nodeType="withEffect">
+                                  <p:stCondLst>
+                                    <p:cond delay="0"/>
+                                  </p:stCondLst>
+                                  <p:childTnLst>
+                                    <p:set>
+                                      <p:cBhvr>
+                                        <p:cTn id="28" dur="1" fill="hold">
+                                          <p:stCondLst>
+                                            <p:cond delay="0"/>
+                                          </p:stCondLst>
+                                        </p:cTn>
+                                        <p:tgtEl>
+                                          <p:spTgt spid="3">
+                                            <p:txEl>
+                                              <p:pRg st="12" end="12"/>
+                                            </p:txEl>
+                                          </p:spTgt>
+                                        </p:tgtEl>
+                                        <p:attrNameLst>
+                                          <p:attrName>style.visibility</p:attrName>
+                                        </p:attrNameLst>
+                                      </p:cBhvr>
+                                      <p:to>
+                                        <p:strVal val="visible"/>
+                                      </p:to>
+                                    </p:set>
+                                  </p:childTnLst>
+                                </p:cTn>
+                              </p:par>
+                            </p:childTnLst>
+                          </p:cTn>
+                        </p:par>
+                      </p:childTnLst>
+                    </p:cTn>
+                  </p:par>
+                  <p:par>
+                    <p:cTn id="29" fill="hold">
+                      <p:stCondLst>
+                        <p:cond delay="indefinite"/>
+                      </p:stCondLst>
+                      <p:childTnLst>
+                        <p:par>
+                          <p:cTn id="30" fill="hold">
+                            <p:stCondLst>
+                              <p:cond delay="0"/>
+                            </p:stCondLst>
+                            <p:childTnLst>
+                              <p:par>
+                                <p:cTn id="31" presetID="1" presetClass="entr" presetSubtype="0" fill="hold" nodeType="clickEffect">
+                                  <p:stCondLst>
+                                    <p:cond delay="0"/>
+                                  </p:stCondLst>
+                                  <p:childTnLst>
+                                    <p:set>
+                                      <p:cBhvr>
+                                        <p:cTn id="32" dur="1" fill="hold">
+                                          <p:stCondLst>
+                                            <p:cond delay="0"/>
+                                          </p:stCondLst>
+                                        </p:cTn>
+                                        <p:tgtEl>
+                                          <p:spTgt spid="14"/>
+                                        </p:tgtEl>
+                                        <p:attrNameLst>
+                                          <p:attrName>style.visibility</p:attrName>
+                                        </p:attrNameLst>
+                                      </p:cBhvr>
+                                      <p:to>
+                                        <p:strVal val="visible"/>
+                                      </p:to>
+                                    </p:set>
+                                  </p:childTnLst>
+                                </p:cTn>
+                              </p:par>
+                            </p:childTnLst>
+                          </p:cTn>
+                        </p:par>
+                      </p:childTnLst>
+                    </p:cTn>
+                  </p:par>
+                </p:childTnLst>
+              </p:cTn>
+              <p:prevCondLst>
+                <p:cond evt="onPrev" delay="0">
+                  <p:tgtEl>
+                    <p:sldTgt/>
+                  </p:tgtEl>
+                </p:cond>
+              </p:prevCondLst>
+              <p:nextCondLst>
+                <p:cond evt="onNext" delay="0">
+                  <p:tgtEl>
+                    <p:sldTgt/>
+                  </p:tgtEl>
+                </p:cond>
+              </p:nextCondLst>
+            </p:seq>
+          </p:childTnLst>
+        </p:cTn>
+      </p:par>
+    </p:tnLst>
+  </p:timing>
 </p:sld>
 </file>
 
@@ -25598,7 +28027,7 @@
           <a:p>
             <a:r>
               <a:rPr lang="en-US" dirty="0"/>
-              <a:t>What is the value function of a given policy?</a:t>
+              <a:t>What is the value function for a given policy?</a:t>
             </a:r>
           </a:p>
         </p:txBody>
@@ -25736,8 +28165,8 @@
           </p:sp>
         </mc:Fallback>
       </mc:AlternateContent>
-      <mc:AlternateContent xmlns:mc="http://schemas.openxmlformats.org/markup-compatibility/2006" xmlns:a14="http://schemas.microsoft.com/office/drawing/2010/main">
-        <mc:Choice Requires="a14">
+      <mc:AlternateContent xmlns:mc="http://schemas.openxmlformats.org/markup-compatibility/2006">
+        <mc:Choice xmlns:a14="http://schemas.microsoft.com/office/drawing/2010/main" Requires="a14">
           <p:sp>
             <p:nvSpPr>
               <p:cNvPr id="3" name="Content Placeholder 2">
@@ -25762,10 +28191,13 @@
             </p:spPr>
             <p:txBody>
               <a:bodyPr>
-                <a:normAutofit fontScale="77500" lnSpcReduction="20000"/>
+                <a:normAutofit fontScale="62500" lnSpcReduction="20000"/>
               </a:bodyPr>
               <a:lstStyle/>
               <a:p>
+                <a:pPr marL="0" indent="0">
+                  <a:buNone/>
+                </a:pPr>
                 <a:r>
                   <a:rPr lang="en-US" b="1" dirty="0"/>
                   <a:t>Goal</a:t>
@@ -25833,10 +28265,11 @@
                 </a:endParaRPr>
               </a:p>
               <a:p>
-                <a:pPr>
+                <a:pPr marL="0" indent="0">
                   <a:lnSpc>
                     <a:spcPct val="100000"/>
                   </a:lnSpc>
+                  <a:buNone/>
                 </a:pPr>
                 <a:r>
                   <a:rPr lang="en-US" dirty="0"/>
@@ -26798,13 +29231,43 @@
                 <a:endParaRPr lang="en-US" b="1" dirty="0"/>
               </a:p>
               <a:p>
+                <a:pPr marL="0" indent="0">
+                  <a:buNone/>
+                </a:pPr>
                 <a:r>
                   <a:rPr lang="en-US" b="1" dirty="0"/>
-                  <a:t>Guarantee</a:t>
+                  <a:t>Guarantees</a:t>
                 </a:r>
                 <a:r>
                   <a:rPr lang="en-US" dirty="0"/>
-                  <a:t>: There exists a unique </a:t>
+                  <a:t>: </a:t>
+                </a:r>
+              </a:p>
+              <a:p>
+                <a:pPr lvl="1"/>
+                <a:r>
+                  <a:rPr lang="en-US" dirty="0"/>
+                  <a:t>Discounted finite MDPs (</a:t>
+                </a:r>
+                <a14:m>
+                  <m:oMath xmlns:m="http://schemas.openxmlformats.org/officeDocument/2006/math">
+                    <m:r>
+                      <a:rPr lang="en-US" i="1">
+                        <a:latin typeface="Cambria Math" panose="02040503050406030204" pitchFamily="18" charset="0"/>
+                      </a:rPr>
+                      <m:t>𝛾</m:t>
+                    </m:r>
+                    <m:r>
+                      <a:rPr lang="en-US" i="1">
+                        <a:latin typeface="Cambria Math" panose="02040503050406030204" pitchFamily="18" charset="0"/>
+                      </a:rPr>
+                      <m:t>&lt;1 </m:t>
+                    </m:r>
+                  </m:oMath>
+                </a14:m>
+                <a:r>
+                  <a:rPr lang="en-US" dirty="0"/>
+                  <a:t>)  have a unique </a:t>
                 </a:r>
                 <a14:m>
                   <m:oMath xmlns:m="http://schemas.openxmlformats.org/officeDocument/2006/math">
@@ -26837,7 +29300,14 @@
                 </a14:m>
                 <a:r>
                   <a:rPr lang="en-US" dirty="0"/>
-                  <a:t> if </a:t>
+                  <a:t>.</a:t>
+                </a:r>
+              </a:p>
+              <a:p>
+                <a:pPr lvl="1"/>
+                <a:r>
+                  <a:rPr lang="en-US" dirty="0"/>
+                  <a:t>Undiscounted finite MDPs (</a:t>
                 </a:r>
                 <a14:m>
                   <m:oMath xmlns:m="http://schemas.openxmlformats.org/officeDocument/2006/math">
@@ -26851,13 +29321,46 @@
                       <a:rPr lang="en-US" b="0" i="1" smtClean="0">
                         <a:latin typeface="Cambria Math" panose="02040503050406030204" pitchFamily="18" charset="0"/>
                       </a:rPr>
-                      <m:t>&lt;1 </m:t>
+                      <m:t>=1</m:t>
                     </m:r>
                   </m:oMath>
                 </a14:m>
                 <a:r>
                   <a:rPr lang="en-US" dirty="0"/>
-                  <a:t>or termination is guaranteed by </a:t>
+                  <a:t>) have a unique </a:t>
+                </a:r>
+                <a14:m>
+                  <m:oMath xmlns:m="http://schemas.openxmlformats.org/officeDocument/2006/math">
+                    <m:sSub>
+                      <m:sSubPr>
+                        <m:ctrlPr>
+                          <a:rPr lang="en-US" i="1">
+                            <a:latin typeface="Cambria Math" panose="02040503050406030204" pitchFamily="18" charset="0"/>
+                          </a:rPr>
+                        </m:ctrlPr>
+                      </m:sSubPr>
+                      <m:e>
+                        <m:r>
+                          <a:rPr lang="en-US" i="1">
+                            <a:latin typeface="Cambria Math" panose="02040503050406030204" pitchFamily="18" charset="0"/>
+                          </a:rPr>
+                          <m:t>𝑣</m:t>
+                        </m:r>
+                      </m:e>
+                      <m:sub>
+                        <m:r>
+                          <a:rPr lang="en-US" i="1">
+                            <a:latin typeface="Cambria Math" panose="02040503050406030204" pitchFamily="18" charset="0"/>
+                          </a:rPr>
+                          <m:t>𝜋</m:t>
+                        </m:r>
+                      </m:sub>
+                    </m:sSub>
+                  </m:oMath>
+                </a14:m>
+                <a:r>
+                  <a:rPr lang="en-US" dirty="0"/>
+                  <a:t> if </a:t>
                 </a:r>
                 <a14:m>
                   <m:oMath xmlns:m="http://schemas.openxmlformats.org/officeDocument/2006/math">
@@ -26871,13 +29374,75 @@
                 </a14:m>
                 <a:r>
                   <a:rPr lang="en-US" dirty="0"/>
-                  <a:t>.</a:t>
+                  <a:t> guarantees to reach a terminal state.</a:t>
+                </a:r>
+              </a:p>
+              <a:p>
+                <a:pPr lvl="1"/>
+                <a:r>
+                  <a:rPr lang="en-US" dirty="0"/>
+                  <a:t>Finite-horizon MDPs have unique </a:t>
+                </a:r>
+                <a14:m>
+                  <m:oMath xmlns:m="http://schemas.openxmlformats.org/officeDocument/2006/math">
+                    <m:sSubSup>
+                      <m:sSubSupPr>
+                        <m:ctrlPr>
+                          <a:rPr lang="en-US" b="0" i="1" smtClean="0">
+                            <a:latin typeface="Cambria Math" panose="02040503050406030204" pitchFamily="18" charset="0"/>
+                          </a:rPr>
+                        </m:ctrlPr>
+                      </m:sSubSupPr>
+                      <m:e>
+                        <m:r>
+                          <a:rPr lang="en-US" b="0" i="1" smtClean="0">
+                            <a:latin typeface="Cambria Math" panose="02040503050406030204" pitchFamily="18" charset="0"/>
+                          </a:rPr>
+                          <m:t>𝑣</m:t>
+                        </m:r>
+                      </m:e>
+                      <m:sub>
+                        <m:r>
+                          <a:rPr lang="en-US" b="0" i="1" smtClean="0">
+                            <a:latin typeface="Cambria Math" panose="02040503050406030204" pitchFamily="18" charset="0"/>
+                          </a:rPr>
+                          <m:t>𝜋</m:t>
+                        </m:r>
+                      </m:sub>
+                      <m:sup>
+                        <m:r>
+                          <a:rPr lang="en-US" b="0" i="1" smtClean="0">
+                            <a:latin typeface="Cambria Math" panose="02040503050406030204" pitchFamily="18" charset="0"/>
+                          </a:rPr>
+                          <m:t>𝑘</m:t>
+                        </m:r>
+                      </m:sup>
+                    </m:sSubSup>
+                  </m:oMath>
+                </a14:m>
+                <a:r>
+                  <a:rPr lang="en-US" dirty="0"/>
+                  <a:t> where </a:t>
+                </a:r>
+                <a14:m>
+                  <m:oMath xmlns:m="http://schemas.openxmlformats.org/officeDocument/2006/math">
+                    <m:r>
+                      <a:rPr lang="en-US" b="0" i="1" smtClean="0">
+                        <a:latin typeface="Cambria Math" panose="02040503050406030204" pitchFamily="18" charset="0"/>
+                      </a:rPr>
+                      <m:t>𝑘</m:t>
+                    </m:r>
+                  </m:oMath>
+                </a14:m>
+                <a:r>
+                  <a:rPr lang="en-US" dirty="0"/>
+                  <a:t> is the time step.  I.e. , value depends on how close we are to the end of the episode.</a:t>
                 </a:r>
               </a:p>
             </p:txBody>
           </p:sp>
         </mc:Choice>
-        <mc:Fallback xmlns="">
+        <mc:Fallback>
           <p:sp>
             <p:nvSpPr>
               <p:cNvPr id="3" name="Content Placeholder 2">
@@ -26902,7 +29467,7 @@
               <a:blipFill>
                 <a:blip r:embed="rId3"/>
                 <a:stretch>
-                  <a:fillRect l="-696" t="-2535"/>
+                  <a:fillRect l="-522" t="-1901"/>
                 </a:stretch>
               </a:blipFill>
             </p:spPr>
@@ -27042,7 +29607,7 @@
                 </a14:m>
                 <a:r>
                   <a:rPr lang="en-US" sz="2400" dirty="0"/>
-                  <a:t> linear equations. </a:t>
+                  <a:t> linear Bellman Expectation Equations:</a:t>
                 </a:r>
                 <a:br>
                   <a:rPr lang="en-US" sz="2400" dirty="0"/>
@@ -27945,7 +30510,7 @@
                 </a:pPr>
                 <a:r>
                   <a:rPr lang="en-US" sz="2400" dirty="0"/>
-                  <a:t>As a linear program</a:t>
+                  <a:t>Formulate as a linear program</a:t>
                 </a:r>
               </a:p>
               <a:p>
@@ -28182,13 +30747,7 @@
                               <a:rPr lang="en-US" sz="2300" i="1">
                                 <a:latin typeface="Cambria Math" panose="02040503050406030204" pitchFamily="18" charset="0"/>
                               </a:rPr>
-                              <m:t>′</m:t>
-                            </m:r>
-                            <m:r>
-                              <a:rPr lang="en-US" sz="2300" i="1">
-                                <a:latin typeface="Cambria Math" panose="02040503050406030204" pitchFamily="18" charset="0"/>
-                              </a:rPr>
-                              <m:t>,</m:t>
+                              <m:t>′,</m:t>
                             </m:r>
                             <m:r>
                               <a:rPr lang="en-US" sz="2300" i="1">
@@ -28316,13 +30875,7 @@
                           <a:rPr lang="en-US" sz="2300" b="0" i="1" smtClean="0">
                             <a:latin typeface="Cambria Math" panose="02040503050406030204" pitchFamily="18" charset="0"/>
                           </a:rPr>
-                          <m:t>          </m:t>
-                        </m:r>
-                        <m:r>
-                          <a:rPr lang="en-US" sz="2300" b="0" i="1" smtClean="0">
-                            <a:latin typeface="Cambria Math" panose="02040503050406030204" pitchFamily="18" charset="0"/>
-                          </a:rPr>
-                          <m:t>∀</m:t>
+                          <m:t>          ∀</m:t>
                         </m:r>
                         <m:r>
                           <a:rPr lang="en-US" sz="2300" b="0" i="1" smtClean="0">
@@ -28358,7 +30911,7 @@
                 </a:pPr>
                 <a:r>
                   <a:rPr lang="en-US" sz="2400" dirty="0"/>
-                  <a:t>Why this works: The smallest feasible solution will satisfy the Bellman equations. </a:t>
+                  <a:t>Why this works: The smallest feasible solution will satisfy all Bellman equations. </a:t>
                 </a:r>
                 <a:endParaRPr lang="en-US" sz="2400" i="1" dirty="0">
                   <a:latin typeface="Cambria Math" panose="02040503050406030204" pitchFamily="18" charset="0"/>
@@ -28716,6 +31269,227 @@
   <p:clrMapOvr>
     <a:masterClrMapping/>
   </p:clrMapOvr>
+  <p:timing>
+    <p:tnLst>
+      <p:par>
+        <p:cTn id="1" dur="indefinite" restart="never" nodeType="tmRoot">
+          <p:childTnLst>
+            <p:seq concurrent="1" nextAc="seek">
+              <p:cTn id="2" dur="indefinite" nodeType="mainSeq">
+                <p:childTnLst>
+                  <p:par>
+                    <p:cTn id="3" fill="hold">
+                      <p:stCondLst>
+                        <p:cond delay="indefinite"/>
+                      </p:stCondLst>
+                      <p:childTnLst>
+                        <p:par>
+                          <p:cTn id="4" fill="hold">
+                            <p:stCondLst>
+                              <p:cond delay="0"/>
+                            </p:stCondLst>
+                            <p:childTnLst>
+                              <p:par>
+                                <p:cTn id="5" presetID="1" presetClass="entr" presetSubtype="0" fill="hold" nodeType="clickEffect">
+                                  <p:stCondLst>
+                                    <p:cond delay="0"/>
+                                  </p:stCondLst>
+                                  <p:childTnLst>
+                                    <p:set>
+                                      <p:cBhvr>
+                                        <p:cTn id="6" dur="1" fill="hold">
+                                          <p:stCondLst>
+                                            <p:cond delay="0"/>
+                                          </p:stCondLst>
+                                        </p:cTn>
+                                        <p:tgtEl>
+                                          <p:spTgt spid="3">
+                                            <p:txEl>
+                                              <p:pRg st="5" end="5"/>
+                                            </p:txEl>
+                                          </p:spTgt>
+                                        </p:tgtEl>
+                                        <p:attrNameLst>
+                                          <p:attrName>style.visibility</p:attrName>
+                                        </p:attrNameLst>
+                                      </p:cBhvr>
+                                      <p:to>
+                                        <p:strVal val="visible"/>
+                                      </p:to>
+                                    </p:set>
+                                  </p:childTnLst>
+                                </p:cTn>
+                              </p:par>
+                              <p:par>
+                                <p:cTn id="7" presetID="1" presetClass="entr" presetSubtype="0" fill="hold" nodeType="withEffect">
+                                  <p:stCondLst>
+                                    <p:cond delay="0"/>
+                                  </p:stCondLst>
+                                  <p:childTnLst>
+                                    <p:set>
+                                      <p:cBhvr>
+                                        <p:cTn id="8" dur="1" fill="hold">
+                                          <p:stCondLst>
+                                            <p:cond delay="0"/>
+                                          </p:stCondLst>
+                                        </p:cTn>
+                                        <p:tgtEl>
+                                          <p:spTgt spid="3">
+                                            <p:txEl>
+                                              <p:pRg st="6" end="6"/>
+                                            </p:txEl>
+                                          </p:spTgt>
+                                        </p:tgtEl>
+                                        <p:attrNameLst>
+                                          <p:attrName>style.visibility</p:attrName>
+                                        </p:attrNameLst>
+                                      </p:cBhvr>
+                                      <p:to>
+                                        <p:strVal val="visible"/>
+                                      </p:to>
+                                    </p:set>
+                                  </p:childTnLst>
+                                </p:cTn>
+                              </p:par>
+                              <p:par>
+                                <p:cTn id="9" presetID="1" presetClass="entr" presetSubtype="0" fill="hold" nodeType="withEffect">
+                                  <p:stCondLst>
+                                    <p:cond delay="0"/>
+                                  </p:stCondLst>
+                                  <p:childTnLst>
+                                    <p:set>
+                                      <p:cBhvr>
+                                        <p:cTn id="10" dur="1" fill="hold">
+                                          <p:stCondLst>
+                                            <p:cond delay="0"/>
+                                          </p:stCondLst>
+                                        </p:cTn>
+                                        <p:tgtEl>
+                                          <p:spTgt spid="3">
+                                            <p:txEl>
+                                              <p:pRg st="7" end="7"/>
+                                            </p:txEl>
+                                          </p:spTgt>
+                                        </p:tgtEl>
+                                        <p:attrNameLst>
+                                          <p:attrName>style.visibility</p:attrName>
+                                        </p:attrNameLst>
+                                      </p:cBhvr>
+                                      <p:to>
+                                        <p:strVal val="visible"/>
+                                      </p:to>
+                                    </p:set>
+                                  </p:childTnLst>
+                                </p:cTn>
+                              </p:par>
+                            </p:childTnLst>
+                          </p:cTn>
+                        </p:par>
+                      </p:childTnLst>
+                    </p:cTn>
+                  </p:par>
+                  <p:par>
+                    <p:cTn id="11" fill="hold">
+                      <p:stCondLst>
+                        <p:cond delay="indefinite"/>
+                      </p:stCondLst>
+                      <p:childTnLst>
+                        <p:par>
+                          <p:cTn id="12" fill="hold">
+                            <p:stCondLst>
+                              <p:cond delay="0"/>
+                            </p:stCondLst>
+                            <p:childTnLst>
+                              <p:par>
+                                <p:cTn id="13" presetID="1" presetClass="entr" presetSubtype="0" fill="hold" nodeType="clickEffect">
+                                  <p:stCondLst>
+                                    <p:cond delay="0"/>
+                                  </p:stCondLst>
+                                  <p:childTnLst>
+                                    <p:set>
+                                      <p:cBhvr>
+                                        <p:cTn id="14" dur="1" fill="hold">
+                                          <p:stCondLst>
+                                            <p:cond delay="0"/>
+                                          </p:stCondLst>
+                                        </p:cTn>
+                                        <p:tgtEl>
+                                          <p:spTgt spid="3">
+                                            <p:txEl>
+                                              <p:pRg st="9" end="9"/>
+                                            </p:txEl>
+                                          </p:spTgt>
+                                        </p:tgtEl>
+                                        <p:attrNameLst>
+                                          <p:attrName>style.visibility</p:attrName>
+                                        </p:attrNameLst>
+                                      </p:cBhvr>
+                                      <p:to>
+                                        <p:strVal val="visible"/>
+                                      </p:to>
+                                    </p:set>
+                                  </p:childTnLst>
+                                </p:cTn>
+                              </p:par>
+                              <p:par>
+                                <p:cTn id="15" presetID="1" presetClass="entr" presetSubtype="0" fill="hold" nodeType="withEffect">
+                                  <p:stCondLst>
+                                    <p:cond delay="0"/>
+                                  </p:stCondLst>
+                                  <p:childTnLst>
+                                    <p:set>
+                                      <p:cBhvr>
+                                        <p:cTn id="16" dur="1" fill="hold">
+                                          <p:stCondLst>
+                                            <p:cond delay="0"/>
+                                          </p:stCondLst>
+                                        </p:cTn>
+                                        <p:tgtEl>
+                                          <p:spTgt spid="3">
+                                            <p:txEl>
+                                              <p:pRg st="10" end="10"/>
+                                            </p:txEl>
+                                          </p:spTgt>
+                                        </p:tgtEl>
+                                        <p:attrNameLst>
+                                          <p:attrName>style.visibility</p:attrName>
+                                        </p:attrNameLst>
+                                      </p:cBhvr>
+                                      <p:to>
+                                        <p:strVal val="visible"/>
+                                      </p:to>
+                                    </p:set>
+                                  </p:childTnLst>
+                                </p:cTn>
+                              </p:par>
+                            </p:childTnLst>
+                          </p:cTn>
+                        </p:par>
+                      </p:childTnLst>
+                    </p:cTn>
+                  </p:par>
+                </p:childTnLst>
+              </p:cTn>
+              <p:prevCondLst>
+                <p:cond evt="onPrev" delay="0">
+                  <p:tgtEl>
+                    <p:sldTgt/>
+                  </p:tgtEl>
+                </p:cond>
+              </p:prevCondLst>
+              <p:nextCondLst>
+                <p:cond evt="onNext" delay="0">
+                  <p:tgtEl>
+                    <p:sldTgt/>
+                  </p:tgtEl>
+                </p:cond>
+              </p:nextCondLst>
+            </p:seq>
+          </p:childTnLst>
+        </p:cTn>
+      </p:par>
+    </p:tnLst>
+  </p:timing>
 </p:sld>
 </file>
 
@@ -28860,8 +31634,8 @@
           </a:p>
         </p:txBody>
       </p:sp>
-      <mc:AlternateContent xmlns:mc="http://schemas.openxmlformats.org/markup-compatibility/2006" xmlns:a14="http://schemas.microsoft.com/office/drawing/2010/main">
-        <mc:Choice Requires="a14">
+      <mc:AlternateContent xmlns:mc="http://schemas.openxmlformats.org/markup-compatibility/2006">
+        <mc:Choice xmlns:a14="http://schemas.microsoft.com/office/drawing/2010/main" Requires="a14">
           <p:sp>
             <p:nvSpPr>
               <p:cNvPr id="3" name="Content Placeholder 2">
@@ -28881,7 +31655,7 @@
             <p:spPr>
               <a:xfrm>
                 <a:off x="838200" y="1397330"/>
-                <a:ext cx="7732419" cy="4847286"/>
+                <a:ext cx="7732419" cy="5120418"/>
               </a:xfrm>
             </p:spPr>
             <p:txBody>
@@ -29617,11 +32391,18 @@
                   <a:rPr lang="en-US" sz="2000" dirty="0"/>
                   <a:t> iterations.</a:t>
                 </a:r>
+                <a:br>
+                  <a:rPr lang="en-US" sz="2000" dirty="0"/>
+                </a:br>
+                <a:r>
+                  <a:rPr lang="en-US" sz="2000" dirty="0"/>
+                  <a:t>Reason is on the next slide.</a:t>
+                </a:r>
               </a:p>
             </p:txBody>
           </p:sp>
         </mc:Choice>
-        <mc:Fallback xmlns="">
+        <mc:Fallback>
           <p:sp>
             <p:nvSpPr>
               <p:cNvPr id="3" name="Content Placeholder 2">
@@ -29641,12 +32422,12 @@
             <p:spPr>
               <a:xfrm>
                 <a:off x="838200" y="1397330"/>
-                <a:ext cx="7732419" cy="4847286"/>
+                <a:ext cx="7732419" cy="5120418"/>
               </a:xfrm>
               <a:blipFill>
                 <a:blip r:embed="rId3"/>
                 <a:stretch>
-                  <a:fillRect l="-1025" t="-2516"/>
+                  <a:fillRect l="-1025" t="-2381"/>
                 </a:stretch>
               </a:blipFill>
             </p:spPr>

--- a/slides/Lecture_Chapter04.pptx
+++ b/slides/Lecture_Chapter04.pptx
@@ -340,7 +340,7 @@
           <a:p>
             <a:fld id="{3E22BF2E-04DA-469E-97C5-BB68A0368813}" type="datetimeFigureOut">
               <a:rPr lang="en-US" smtClean="0"/>
-              <a:t>2/6/2026</a:t>
+              <a:t>2/12/2026</a:t>
             </a:fld>
             <a:endParaRPr lang="en-US"/>
           </a:p>
@@ -538,7 +538,7 @@
           <a:p>
             <a:fld id="{3E22BF2E-04DA-469E-97C5-BB68A0368813}" type="datetimeFigureOut">
               <a:rPr lang="en-US" smtClean="0"/>
-              <a:t>2/6/2026</a:t>
+              <a:t>2/12/2026</a:t>
             </a:fld>
             <a:endParaRPr lang="en-US"/>
           </a:p>
@@ -746,7 +746,7 @@
           <a:p>
             <a:fld id="{3E22BF2E-04DA-469E-97C5-BB68A0368813}" type="datetimeFigureOut">
               <a:rPr lang="en-US" smtClean="0"/>
-              <a:t>2/6/2026</a:t>
+              <a:t>2/12/2026</a:t>
             </a:fld>
             <a:endParaRPr lang="en-US"/>
           </a:p>
@@ -954,7 +954,7 @@
           <a:p>
             <a:fld id="{3E22BF2E-04DA-469E-97C5-BB68A0368813}" type="datetimeFigureOut">
               <a:rPr lang="en-US" smtClean="0"/>
-              <a:t>2/6/2026</a:t>
+              <a:t>2/12/2026</a:t>
             </a:fld>
             <a:endParaRPr lang="en-US"/>
           </a:p>
@@ -1229,7 +1229,7 @@
           <a:p>
             <a:fld id="{3E22BF2E-04DA-469E-97C5-BB68A0368813}" type="datetimeFigureOut">
               <a:rPr lang="en-US" smtClean="0"/>
-              <a:t>2/6/2026</a:t>
+              <a:t>2/12/2026</a:t>
             </a:fld>
             <a:endParaRPr lang="en-US"/>
           </a:p>
@@ -1494,7 +1494,7 @@
           <a:p>
             <a:fld id="{3E22BF2E-04DA-469E-97C5-BB68A0368813}" type="datetimeFigureOut">
               <a:rPr lang="en-US" smtClean="0"/>
-              <a:t>2/6/2026</a:t>
+              <a:t>2/12/2026</a:t>
             </a:fld>
             <a:endParaRPr lang="en-US"/>
           </a:p>
@@ -1906,7 +1906,7 @@
           <a:p>
             <a:fld id="{3E22BF2E-04DA-469E-97C5-BB68A0368813}" type="datetimeFigureOut">
               <a:rPr lang="en-US" smtClean="0"/>
-              <a:t>2/6/2026</a:t>
+              <a:t>2/12/2026</a:t>
             </a:fld>
             <a:endParaRPr lang="en-US"/>
           </a:p>
@@ -2047,7 +2047,7 @@
           <a:p>
             <a:fld id="{3E22BF2E-04DA-469E-97C5-BB68A0368813}" type="datetimeFigureOut">
               <a:rPr lang="en-US" smtClean="0"/>
-              <a:t>2/6/2026</a:t>
+              <a:t>2/12/2026</a:t>
             </a:fld>
             <a:endParaRPr lang="en-US"/>
           </a:p>
@@ -2160,7 +2160,7 @@
           <a:p>
             <a:fld id="{3E22BF2E-04DA-469E-97C5-BB68A0368813}" type="datetimeFigureOut">
               <a:rPr lang="en-US" smtClean="0"/>
-              <a:t>2/6/2026</a:t>
+              <a:t>2/12/2026</a:t>
             </a:fld>
             <a:endParaRPr lang="en-US"/>
           </a:p>
@@ -2471,7 +2471,7 @@
           <a:p>
             <a:fld id="{3E22BF2E-04DA-469E-97C5-BB68A0368813}" type="datetimeFigureOut">
               <a:rPr lang="en-US" smtClean="0"/>
-              <a:t>2/6/2026</a:t>
+              <a:t>2/12/2026</a:t>
             </a:fld>
             <a:endParaRPr lang="en-US"/>
           </a:p>
@@ -2759,7 +2759,7 @@
           <a:p>
             <a:fld id="{3E22BF2E-04DA-469E-97C5-BB68A0368813}" type="datetimeFigureOut">
               <a:rPr lang="en-US" smtClean="0"/>
-              <a:t>2/6/2026</a:t>
+              <a:t>2/12/2026</a:t>
             </a:fld>
             <a:endParaRPr lang="en-US"/>
           </a:p>
@@ -3000,7 +3000,7 @@
           <a:p>
             <a:fld id="{3E22BF2E-04DA-469E-97C5-BB68A0368813}" type="datetimeFigureOut">
               <a:rPr lang="en-US" smtClean="0"/>
-              <a:t>2/6/2026</a:t>
+              <a:t>2/12/2026</a:t>
             </a:fld>
             <a:endParaRPr lang="en-US"/>
           </a:p>
@@ -20515,8 +20515,8 @@
           </a:p>
         </p:txBody>
       </p:sp>
-      <mc:AlternateContent xmlns:mc="http://schemas.openxmlformats.org/markup-compatibility/2006" xmlns:a14="http://schemas.microsoft.com/office/drawing/2010/main">
-        <mc:Choice Requires="a14">
+      <mc:AlternateContent xmlns:mc="http://schemas.openxmlformats.org/markup-compatibility/2006">
+        <mc:Choice xmlns:a14="http://schemas.microsoft.com/office/drawing/2010/main" Requires="a14">
           <p:sp>
             <p:nvSpPr>
               <p:cNvPr id="3" name="Content Placeholder 2">
@@ -20699,13 +20699,21 @@
                 </a:pPr>
                 <a:r>
                   <a:rPr lang="en-US" dirty="0"/>
-                  <a:t>All three approaches typically converge to the optimal solution.</a:t>
+                  <a:t>All three approaches typically converge to the optimal solution due to the </a:t>
+                </a:r>
+                <a:r>
+                  <a:rPr lang="en-US" b="1" dirty="0"/>
+                  <a:t>Policy Improvement Theorem</a:t>
+                </a:r>
+                <a:r>
+                  <a:rPr lang="en-US" dirty="0"/>
+                  <a:t>.</a:t>
                 </a:r>
               </a:p>
             </p:txBody>
           </p:sp>
         </mc:Choice>
-        <mc:Fallback xmlns="">
+        <mc:Fallback>
           <p:sp>
             <p:nvSpPr>
               <p:cNvPr id="3" name="Content Placeholder 2">
@@ -20868,8 +20876,8 @@
           </a:p>
         </p:txBody>
       </p:sp>
-      <mc:AlternateContent xmlns:mc="http://schemas.openxmlformats.org/markup-compatibility/2006">
-        <mc:Choice xmlns:a14="http://schemas.microsoft.com/office/drawing/2010/main" Requires="a14">
+      <mc:AlternateContent xmlns:mc="http://schemas.openxmlformats.org/markup-compatibility/2006" xmlns:a14="http://schemas.microsoft.com/office/drawing/2010/main">
+        <mc:Choice Requires="a14">
           <p:sp>
             <p:nvSpPr>
               <p:cNvPr id="3" name="Content Placeholder 2">
@@ -20993,7 +21001,7 @@
             </p:txBody>
           </p:sp>
         </mc:Choice>
-        <mc:Fallback>
+        <mc:Fallback xmlns="">
           <p:sp>
             <p:nvSpPr>
               <p:cNvPr id="3" name="Content Placeholder 2">
@@ -21189,8 +21197,8 @@
           </a:p>
         </p:txBody>
       </p:sp>
-      <mc:AlternateContent xmlns:mc="http://schemas.openxmlformats.org/markup-compatibility/2006">
-        <mc:Choice xmlns:a14="http://schemas.microsoft.com/office/drawing/2010/main" Requires="a14">
+      <mc:AlternateContent xmlns:mc="http://schemas.openxmlformats.org/markup-compatibility/2006" xmlns:a14="http://schemas.microsoft.com/office/drawing/2010/main">
+        <mc:Choice Requires="a14">
           <p:sp>
             <p:nvSpPr>
               <p:cNvPr id="3" name="Content Placeholder 2">
@@ -21608,7 +21616,7 @@
             </p:txBody>
           </p:sp>
         </mc:Choice>
-        <mc:Fallback>
+        <mc:Fallback xmlns="">
           <p:sp>
             <p:nvSpPr>
               <p:cNvPr id="3" name="Content Placeholder 2">
@@ -21838,8 +21846,8 @@
           </a:extLst>
         </p:spPr>
       </p:pic>
-      <mc:AlternateContent xmlns:mc="http://schemas.openxmlformats.org/markup-compatibility/2006">
-        <mc:Choice xmlns:a14="http://schemas.microsoft.com/office/drawing/2010/main" Requires="a14">
+      <mc:AlternateContent xmlns:mc="http://schemas.openxmlformats.org/markup-compatibility/2006" xmlns:a14="http://schemas.microsoft.com/office/drawing/2010/main">
+        <mc:Choice Requires="a14">
           <p:sp>
             <p:nvSpPr>
               <p:cNvPr id="3" name="Content Placeholder 2">
@@ -22100,17 +22108,12 @@
                 </a:pPr>
                 <a:r>
                   <a:rPr lang="en-US" sz="1600" b="1" dirty="0"/>
-                  <a:t>Generalized </a:t>
+                  <a:t>Generalized Policy Iteration (GPI)</a:t>
                 </a:r>
                 <a:r>
-                  <a:rPr lang="en-US" sz="1600" b="1"/>
-                  <a:t>Policy Iteration (GPI)</a:t>
-                </a:r>
-                <a:r>
-                  <a:rPr lang="en-US" sz="1600"/>
+                  <a:rPr lang="en-US" sz="1600" dirty="0"/>
                   <a:t>: </a:t>
                 </a:r>
-                <a:endParaRPr lang="en-US" sz="1600" dirty="0"/>
               </a:p>
               <a:p>
                 <a:r>
@@ -22121,7 +22124,7 @@
             </p:txBody>
           </p:sp>
         </mc:Choice>
-        <mc:Fallback>
+        <mc:Fallback xmlns="">
           <p:sp>
             <p:nvSpPr>
               <p:cNvPr id="3" name="Content Placeholder 2">

--- a/slides/Lecture_Chapter04.pptx
+++ b/slides/Lecture_Chapter04.pptx
@@ -340,7 +340,7 @@
           <a:p>
             <a:fld id="{3E22BF2E-04DA-469E-97C5-BB68A0368813}" type="datetimeFigureOut">
               <a:rPr lang="en-US" smtClean="0"/>
-              <a:t>2/12/2026</a:t>
+              <a:t>3/30/2026</a:t>
             </a:fld>
             <a:endParaRPr lang="en-US"/>
           </a:p>
@@ -538,7 +538,7 @@
           <a:p>
             <a:fld id="{3E22BF2E-04DA-469E-97C5-BB68A0368813}" type="datetimeFigureOut">
               <a:rPr lang="en-US" smtClean="0"/>
-              <a:t>2/12/2026</a:t>
+              <a:t>3/30/2026</a:t>
             </a:fld>
             <a:endParaRPr lang="en-US"/>
           </a:p>
@@ -746,7 +746,7 @@
           <a:p>
             <a:fld id="{3E22BF2E-04DA-469E-97C5-BB68A0368813}" type="datetimeFigureOut">
               <a:rPr lang="en-US" smtClean="0"/>
-              <a:t>2/12/2026</a:t>
+              <a:t>3/30/2026</a:t>
             </a:fld>
             <a:endParaRPr lang="en-US"/>
           </a:p>
@@ -954,7 +954,7 @@
           <a:p>
             <a:fld id="{3E22BF2E-04DA-469E-97C5-BB68A0368813}" type="datetimeFigureOut">
               <a:rPr lang="en-US" smtClean="0"/>
-              <a:t>2/12/2026</a:t>
+              <a:t>3/30/2026</a:t>
             </a:fld>
             <a:endParaRPr lang="en-US"/>
           </a:p>
@@ -1229,7 +1229,7 @@
           <a:p>
             <a:fld id="{3E22BF2E-04DA-469E-97C5-BB68A0368813}" type="datetimeFigureOut">
               <a:rPr lang="en-US" smtClean="0"/>
-              <a:t>2/12/2026</a:t>
+              <a:t>3/30/2026</a:t>
             </a:fld>
             <a:endParaRPr lang="en-US"/>
           </a:p>
@@ -1494,7 +1494,7 @@
           <a:p>
             <a:fld id="{3E22BF2E-04DA-469E-97C5-BB68A0368813}" type="datetimeFigureOut">
               <a:rPr lang="en-US" smtClean="0"/>
-              <a:t>2/12/2026</a:t>
+              <a:t>3/30/2026</a:t>
             </a:fld>
             <a:endParaRPr lang="en-US"/>
           </a:p>
@@ -1906,7 +1906,7 @@
           <a:p>
             <a:fld id="{3E22BF2E-04DA-469E-97C5-BB68A0368813}" type="datetimeFigureOut">
               <a:rPr lang="en-US" smtClean="0"/>
-              <a:t>2/12/2026</a:t>
+              <a:t>3/30/2026</a:t>
             </a:fld>
             <a:endParaRPr lang="en-US"/>
           </a:p>
@@ -2047,7 +2047,7 @@
           <a:p>
             <a:fld id="{3E22BF2E-04DA-469E-97C5-BB68A0368813}" type="datetimeFigureOut">
               <a:rPr lang="en-US" smtClean="0"/>
-              <a:t>2/12/2026</a:t>
+              <a:t>3/30/2026</a:t>
             </a:fld>
             <a:endParaRPr lang="en-US"/>
           </a:p>
@@ -2160,7 +2160,7 @@
           <a:p>
             <a:fld id="{3E22BF2E-04DA-469E-97C5-BB68A0368813}" type="datetimeFigureOut">
               <a:rPr lang="en-US" smtClean="0"/>
-              <a:t>2/12/2026</a:t>
+              <a:t>3/30/2026</a:t>
             </a:fld>
             <a:endParaRPr lang="en-US"/>
           </a:p>
@@ -2471,7 +2471,7 @@
           <a:p>
             <a:fld id="{3E22BF2E-04DA-469E-97C5-BB68A0368813}" type="datetimeFigureOut">
               <a:rPr lang="en-US" smtClean="0"/>
-              <a:t>2/12/2026</a:t>
+              <a:t>3/30/2026</a:t>
             </a:fld>
             <a:endParaRPr lang="en-US"/>
           </a:p>
@@ -2759,7 +2759,7 @@
           <a:p>
             <a:fld id="{3E22BF2E-04DA-469E-97C5-BB68A0368813}" type="datetimeFigureOut">
               <a:rPr lang="en-US" smtClean="0"/>
-              <a:t>2/12/2026</a:t>
+              <a:t>3/30/2026</a:t>
             </a:fld>
             <a:endParaRPr lang="en-US"/>
           </a:p>
@@ -3000,7 +3000,7 @@
           <a:p>
             <a:fld id="{3E22BF2E-04DA-469E-97C5-BB68A0368813}" type="datetimeFigureOut">
               <a:rPr lang="en-US" smtClean="0"/>
-              <a:t>2/12/2026</a:t>
+              <a:t>3/30/2026</a:t>
             </a:fld>
             <a:endParaRPr lang="en-US"/>
           </a:p>
@@ -4024,6 +4024,87 @@
           </a:extLst>
         </p:spPr>
       </p:pic>
+      <p:grpSp>
+        <p:nvGrpSpPr>
+          <p:cNvPr id="7" name="Group 6">
+            <a:extLst>
+              <a:ext uri="{FF2B5EF4-FFF2-40B4-BE49-F238E27FC236}">
+                <a16:creationId xmlns:a16="http://schemas.microsoft.com/office/drawing/2014/main" id="{DA1C6744-BD97-2C10-F393-A0B726F71E7A}"/>
+              </a:ext>
+            </a:extLst>
+          </p:cNvPr>
+          <p:cNvGrpSpPr/>
+          <p:nvPr/>
+        </p:nvGrpSpPr>
+        <p:grpSpPr>
+          <a:xfrm>
+            <a:off x="10961015" y="4868822"/>
+            <a:ext cx="1037459" cy="1303078"/>
+            <a:chOff x="5248582" y="2401735"/>
+            <a:chExt cx="1694835" cy="2054530"/>
+          </a:xfrm>
+        </p:grpSpPr>
+        <p:pic>
+          <p:nvPicPr>
+            <p:cNvPr id="8" name="Picture 7">
+              <a:extLst>
+                <a:ext uri="{FF2B5EF4-FFF2-40B4-BE49-F238E27FC236}">
+                  <a16:creationId xmlns:a16="http://schemas.microsoft.com/office/drawing/2014/main" id="{2F5FC233-1ACF-0EE9-5B1F-F0A29270EECF}"/>
+                </a:ext>
+              </a:extLst>
+            </p:cNvPr>
+            <p:cNvPicPr>
+              <a:picLocks noChangeAspect="1"/>
+            </p:cNvPicPr>
+            <p:nvPr/>
+          </p:nvPicPr>
+          <p:blipFill>
+            <a:blip r:embed="rId6"/>
+            <a:stretch>
+              <a:fillRect/>
+            </a:stretch>
+          </p:blipFill>
+          <p:spPr>
+            <a:xfrm>
+              <a:off x="5248582" y="2401735"/>
+              <a:ext cx="1694835" cy="2054530"/>
+            </a:xfrm>
+            <a:prstGeom prst="rect">
+              <a:avLst/>
+            </a:prstGeom>
+          </p:spPr>
+        </p:pic>
+        <p:pic>
+          <p:nvPicPr>
+            <p:cNvPr id="9" name="Picture 8">
+              <a:extLst>
+                <a:ext uri="{FF2B5EF4-FFF2-40B4-BE49-F238E27FC236}">
+                  <a16:creationId xmlns:a16="http://schemas.microsoft.com/office/drawing/2014/main" id="{26CB3135-CE78-1137-FBA3-29AA8592D8FA}"/>
+                </a:ext>
+              </a:extLst>
+            </p:cNvPr>
+            <p:cNvPicPr>
+              <a:picLocks noChangeAspect="1"/>
+            </p:cNvPicPr>
+            <p:nvPr/>
+          </p:nvPicPr>
+          <p:blipFill>
+            <a:blip r:embed="rId7"/>
+            <a:stretch>
+              <a:fillRect/>
+            </a:stretch>
+          </p:blipFill>
+          <p:spPr>
+            <a:xfrm>
+              <a:off x="5315643" y="2435129"/>
+              <a:ext cx="1560711" cy="1560711"/>
+            </a:xfrm>
+            <a:prstGeom prst="rect">
+              <a:avLst/>
+            </a:prstGeom>
+          </p:spPr>
+        </p:pic>
+      </p:grpSp>
     </p:spTree>
     <p:extLst>
       <p:ext uri="{BB962C8B-B14F-4D97-AF65-F5344CB8AC3E}">
@@ -20515,8 +20596,8 @@
           </a:p>
         </p:txBody>
       </p:sp>
-      <mc:AlternateContent xmlns:mc="http://schemas.openxmlformats.org/markup-compatibility/2006">
-        <mc:Choice xmlns:a14="http://schemas.microsoft.com/office/drawing/2010/main" Requires="a14">
+      <mc:AlternateContent xmlns:mc="http://schemas.openxmlformats.org/markup-compatibility/2006" xmlns:a14="http://schemas.microsoft.com/office/drawing/2010/main">
+        <mc:Choice Requires="a14">
           <p:sp>
             <p:nvSpPr>
               <p:cNvPr id="3" name="Content Placeholder 2">
@@ -20713,7 +20794,7 @@
             </p:txBody>
           </p:sp>
         </mc:Choice>
-        <mc:Fallback>
+        <mc:Fallback xmlns="">
           <p:sp>
             <p:nvSpPr>
               <p:cNvPr id="3" name="Content Placeholder 2">

--- a/slides/Lecture_Chapter04.pptx
+++ b/slides/Lecture_Chapter04.pptx
@@ -340,7 +340,7 @@
           <a:p>
             <a:fld id="{3E22BF2E-04DA-469E-97C5-BB68A0368813}" type="datetimeFigureOut">
               <a:rPr lang="en-US" smtClean="0"/>
-              <a:t>3/30/2026</a:t>
+              <a:t>4/9/2026</a:t>
             </a:fld>
             <a:endParaRPr lang="en-US"/>
           </a:p>
@@ -538,7 +538,7 @@
           <a:p>
             <a:fld id="{3E22BF2E-04DA-469E-97C5-BB68A0368813}" type="datetimeFigureOut">
               <a:rPr lang="en-US" smtClean="0"/>
-              <a:t>3/30/2026</a:t>
+              <a:t>4/9/2026</a:t>
             </a:fld>
             <a:endParaRPr lang="en-US"/>
           </a:p>
@@ -746,7 +746,7 @@
           <a:p>
             <a:fld id="{3E22BF2E-04DA-469E-97C5-BB68A0368813}" type="datetimeFigureOut">
               <a:rPr lang="en-US" smtClean="0"/>
-              <a:t>3/30/2026</a:t>
+              <a:t>4/9/2026</a:t>
             </a:fld>
             <a:endParaRPr lang="en-US"/>
           </a:p>
@@ -954,7 +954,7 @@
           <a:p>
             <a:fld id="{3E22BF2E-04DA-469E-97C5-BB68A0368813}" type="datetimeFigureOut">
               <a:rPr lang="en-US" smtClean="0"/>
-              <a:t>3/30/2026</a:t>
+              <a:t>4/9/2026</a:t>
             </a:fld>
             <a:endParaRPr lang="en-US"/>
           </a:p>
@@ -1229,7 +1229,7 @@
           <a:p>
             <a:fld id="{3E22BF2E-04DA-469E-97C5-BB68A0368813}" type="datetimeFigureOut">
               <a:rPr lang="en-US" smtClean="0"/>
-              <a:t>3/30/2026</a:t>
+              <a:t>4/9/2026</a:t>
             </a:fld>
             <a:endParaRPr lang="en-US"/>
           </a:p>
@@ -1494,7 +1494,7 @@
           <a:p>
             <a:fld id="{3E22BF2E-04DA-469E-97C5-BB68A0368813}" type="datetimeFigureOut">
               <a:rPr lang="en-US" smtClean="0"/>
-              <a:t>3/30/2026</a:t>
+              <a:t>4/9/2026</a:t>
             </a:fld>
             <a:endParaRPr lang="en-US"/>
           </a:p>
@@ -1906,7 +1906,7 @@
           <a:p>
             <a:fld id="{3E22BF2E-04DA-469E-97C5-BB68A0368813}" type="datetimeFigureOut">
               <a:rPr lang="en-US" smtClean="0"/>
-              <a:t>3/30/2026</a:t>
+              <a:t>4/9/2026</a:t>
             </a:fld>
             <a:endParaRPr lang="en-US"/>
           </a:p>
@@ -2047,7 +2047,7 @@
           <a:p>
             <a:fld id="{3E22BF2E-04DA-469E-97C5-BB68A0368813}" type="datetimeFigureOut">
               <a:rPr lang="en-US" smtClean="0"/>
-              <a:t>3/30/2026</a:t>
+              <a:t>4/9/2026</a:t>
             </a:fld>
             <a:endParaRPr lang="en-US"/>
           </a:p>
@@ -2160,7 +2160,7 @@
           <a:p>
             <a:fld id="{3E22BF2E-04DA-469E-97C5-BB68A0368813}" type="datetimeFigureOut">
               <a:rPr lang="en-US" smtClean="0"/>
-              <a:t>3/30/2026</a:t>
+              <a:t>4/9/2026</a:t>
             </a:fld>
             <a:endParaRPr lang="en-US"/>
           </a:p>
@@ -2471,7 +2471,7 @@
           <a:p>
             <a:fld id="{3E22BF2E-04DA-469E-97C5-BB68A0368813}" type="datetimeFigureOut">
               <a:rPr lang="en-US" smtClean="0"/>
-              <a:t>3/30/2026</a:t>
+              <a:t>4/9/2026</a:t>
             </a:fld>
             <a:endParaRPr lang="en-US"/>
           </a:p>
@@ -2759,7 +2759,7 @@
           <a:p>
             <a:fld id="{3E22BF2E-04DA-469E-97C5-BB68A0368813}" type="datetimeFigureOut">
               <a:rPr lang="en-US" smtClean="0"/>
-              <a:t>3/30/2026</a:t>
+              <a:t>4/9/2026</a:t>
             </a:fld>
             <a:endParaRPr lang="en-US"/>
           </a:p>
@@ -3000,7 +3000,7 @@
           <a:p>
             <a:fld id="{3E22BF2E-04DA-469E-97C5-BB68A0368813}" type="datetimeFigureOut">
               <a:rPr lang="en-US" smtClean="0"/>
-              <a:t>3/30/2026</a:t>
+              <a:t>4/9/2026</a:t>
             </a:fld>
             <a:endParaRPr lang="en-US"/>
           </a:p>
@@ -21861,7 +21861,7 @@
         <p:spPr>
           <a:xfrm>
             <a:off x="758952" y="785366"/>
-            <a:ext cx="4069055" cy="2072853"/>
+            <a:ext cx="3687405" cy="2072853"/>
           </a:xfrm>
         </p:spPr>
         <p:txBody>
@@ -21872,7 +21872,7 @@
           <a:p>
             <a:r>
               <a:rPr lang="en-US" sz="4000" dirty="0"/>
-              <a:t>What you need to know</a:t>
+              <a:t>What You Need to Know</a:t>
             </a:r>
           </a:p>
         </p:txBody>
@@ -21927,8 +21927,8 @@
           </a:extLst>
         </p:spPr>
       </p:pic>
-      <mc:AlternateContent xmlns:mc="http://schemas.openxmlformats.org/markup-compatibility/2006" xmlns:a14="http://schemas.microsoft.com/office/drawing/2010/main">
-        <mc:Choice Requires="a14">
+      <mc:AlternateContent xmlns:mc="http://schemas.openxmlformats.org/markup-compatibility/2006">
+        <mc:Choice xmlns:a14="http://schemas.microsoft.com/office/drawing/2010/main" Requires="a14">
           <p:sp>
             <p:nvSpPr>
               <p:cNvPr id="3" name="Content Placeholder 2">
@@ -21953,7 +21953,7 @@
             </p:spPr>
             <p:txBody>
               <a:bodyPr anchor="ctr">
-                <a:normAutofit fontScale="92500" lnSpcReduction="20000"/>
+                <a:normAutofit fontScale="85000" lnSpcReduction="20000"/>
               </a:bodyPr>
               <a:lstStyle/>
               <a:p>
@@ -22063,88 +22063,85 @@
                 </a:pPr>
                 <a:r>
                   <a:rPr lang="en-US" sz="1600" b="1" dirty="0"/>
-                  <a:t>Approach</a:t>
-                </a:r>
-                <a:r>
-                  <a:rPr lang="en-US" sz="1600" dirty="0"/>
-                  <a:t>: </a:t>
-                </a:r>
-              </a:p>
-              <a:p>
-                <a:r>
-                  <a:rPr lang="en-US" sz="1600" dirty="0"/>
-                  <a:t>Convert the recursive Bellman equations into the Belmann update operators and sweep the state space till the optimal solution is found.</a:t>
+                  <a:t>Value Iteration: </a:t>
                 </a:r>
               </a:p>
               <a:p>
                 <a:pPr lvl="1"/>
                 <a:r>
                   <a:rPr lang="en-US" sz="1600" dirty="0"/>
-                  <a:t>Expected Bellman update operator </a:t>
+                  <a:t>Convert the recursive Bellman equations into the Belmann update operators and sweep the state space till the optimal value function is found.</a:t>
+                </a:r>
+              </a:p>
+              <a:p>
+                <a:pPr lvl="1"/>
+                <a:r>
+                  <a:rPr lang="en-US" sz="1600" b="1" dirty="0"/>
+                  <a:t>The Expected Bellman operator is </a:t>
                 </a:r>
                 <a14:m>
                   <m:oMath xmlns:m="http://schemas.openxmlformats.org/officeDocument/2006/math">
-                    <m:sSup>
-                      <m:sSupPr>
-                        <m:ctrlPr>
-                          <a:rPr lang="en-US" sz="1600" b="0" i="1">
-                            <a:latin typeface="Cambria Math" panose="02040503050406030204" pitchFamily="18" charset="0"/>
-                          </a:rPr>
-                        </m:ctrlPr>
-                      </m:sSupPr>
-                      <m:e>
-                        <m:r>
-                          <a:rPr lang="en-US" sz="1600" b="0" i="1">
-                            <a:latin typeface="Cambria Math" panose="02040503050406030204" pitchFamily="18" charset="0"/>
-                          </a:rPr>
-                          <m:t>𝑇</m:t>
-                        </m:r>
-                      </m:e>
-                      <m:sup>
-                        <m:r>
-                          <a:rPr lang="en-US" sz="1600" b="0" i="1">
-                            <a:latin typeface="Cambria Math" panose="02040503050406030204" pitchFamily="18" charset="0"/>
-                          </a:rPr>
-                          <m:t>𝜋</m:t>
-                        </m:r>
-                      </m:sup>
-                    </m:sSup>
+                    <m:r>
+                      <a:rPr lang="en-US" sz="1600" b="1" i="1">
+                        <a:latin typeface="Cambria Math" panose="02040503050406030204" pitchFamily="18" charset="0"/>
+                      </a:rPr>
+                      <m:t>𝜸</m:t>
+                    </m:r>
+                  </m:oMath>
+                </a14:m>
+                <a:r>
+                  <a:rPr lang="en-US" sz="1600" b="1" dirty="0"/>
+                  <a:t>-contracting and converges to the optimal value function</a:t>
+                </a:r>
+                <a:r>
+                  <a:rPr lang="en-US" sz="1600" dirty="0"/>
+                  <a:t> (requires either </a:t>
+                </a:r>
+                <a14:m>
+                  <m:oMath xmlns:m="http://schemas.openxmlformats.org/officeDocument/2006/math">
+                    <m:r>
+                      <a:rPr lang="en-US" sz="1600" i="1">
+                        <a:latin typeface="Cambria Math" panose="02040503050406030204" pitchFamily="18" charset="0"/>
+                      </a:rPr>
+                      <m:t>𝛾</m:t>
+                    </m:r>
+                    <m:r>
+                      <a:rPr lang="en-US" sz="1600" i="1">
+                        <a:latin typeface="Cambria Math" panose="02040503050406030204" pitchFamily="18" charset="0"/>
+                      </a:rPr>
+                      <m:t>&lt;1</m:t>
+                    </m:r>
                   </m:oMath>
                 </a14:m>
                 <a:r>
                   <a:rPr lang="en-US" sz="1600" dirty="0"/>
-                  <a:t> vs. Bellman optimality operator </a:t>
+                  <a:t> or a guarantee that the policy will reach a terminal state).</a:t>
                 </a:r>
-                <a14:m>
-                  <m:oMath xmlns:m="http://schemas.openxmlformats.org/officeDocument/2006/math">
-                    <m:sSup>
-                      <m:sSupPr>
-                        <m:ctrlPr>
-                          <a:rPr lang="en-US" sz="1600" b="0" i="1">
-                            <a:latin typeface="Cambria Math" panose="02040503050406030204" pitchFamily="18" charset="0"/>
-                          </a:rPr>
-                        </m:ctrlPr>
-                      </m:sSupPr>
-                      <m:e>
-                        <m:r>
-                          <a:rPr lang="en-US" sz="1600" b="0" i="1">
-                            <a:latin typeface="Cambria Math" panose="02040503050406030204" pitchFamily="18" charset="0"/>
-                          </a:rPr>
-                          <m:t>𝑇</m:t>
-                        </m:r>
-                      </m:e>
-                      <m:sup>
-                        <m:r>
-                          <a:rPr lang="en-US" sz="1600" b="0" i="1">
-                            <a:latin typeface="Cambria Math" panose="02040503050406030204" pitchFamily="18" charset="0"/>
-                          </a:rPr>
-                          <m:t>∗</m:t>
-                        </m:r>
-                      </m:sup>
-                    </m:sSup>
-                  </m:oMath>
-                </a14:m>
+              </a:p>
+              <a:p>
+                <a:pPr lvl="1"/>
+                <a:endParaRPr lang="en-US" sz="1600" b="1" dirty="0"/>
+              </a:p>
+              <a:p>
+                <a:pPr marL="0" indent="0">
+                  <a:buNone/>
+                </a:pPr>
+                <a:r>
+                  <a:rPr lang="en-US" sz="1600" b="1" dirty="0"/>
+                  <a:t>Policy Iteration:</a:t>
+                </a:r>
                 <a:endParaRPr lang="en-US" sz="1600" dirty="0"/>
+              </a:p>
+              <a:p>
+                <a:pPr lvl="1"/>
+                <a:r>
+                  <a:rPr lang="en-US" sz="1600" b="1" dirty="0"/>
+                  <a:t>Policy Improvement Theorem</a:t>
+                </a:r>
+                <a:r>
+                  <a:rPr lang="en-US" sz="1600" dirty="0"/>
+                  <a:t>: the policy strictly improves with each policy iteration step.</a:t>
+                </a:r>
               </a:p>
               <a:p>
                 <a:pPr lvl="1"/>
@@ -22157,55 +22154,13 @@
                 <a:pPr lvl="1"/>
                 <a:r>
                   <a:rPr lang="en-US" sz="1600" dirty="0"/>
-                  <a:t>Convergence requires either </a:t>
-                </a:r>
-                <a14:m>
-                  <m:oMath xmlns:m="http://schemas.openxmlformats.org/officeDocument/2006/math">
-                    <m:r>
-                      <a:rPr lang="en-US" sz="1600" b="0" i="1" smtClean="0">
-                        <a:latin typeface="Cambria Math" panose="02040503050406030204" pitchFamily="18" charset="0"/>
-                      </a:rPr>
-                      <m:t>𝛾</m:t>
-                    </m:r>
-                    <m:r>
-                      <a:rPr lang="en-US" sz="1600" b="0" i="1" smtClean="0">
-                        <a:latin typeface="Cambria Math" panose="02040503050406030204" pitchFamily="18" charset="0"/>
-                      </a:rPr>
-                      <m:t>&lt;1</m:t>
-                    </m:r>
-                  </m:oMath>
-                </a14:m>
-                <a:r>
-                  <a:rPr lang="en-US" sz="1600" dirty="0"/>
-                  <a:t> or a guarantee that the policy will reach a terminal state.</a:t>
-                </a:r>
-              </a:p>
-              <a:p>
-                <a:endParaRPr lang="en-US" sz="1600" b="1" dirty="0"/>
-              </a:p>
-              <a:p>
-                <a:pPr marL="0" indent="0">
-                  <a:buNone/>
-                </a:pPr>
-                <a:r>
-                  <a:rPr lang="en-US" sz="1600" b="1" dirty="0"/>
-                  <a:t>Generalized Policy Iteration (GPI)</a:t>
-                </a:r>
-                <a:r>
-                  <a:rPr lang="en-US" sz="1600" dirty="0"/>
-                  <a:t>: </a:t>
-                </a:r>
-              </a:p>
-              <a:p>
-                <a:r>
-                  <a:rPr lang="en-US" sz="1600" dirty="0"/>
                   <a:t>All DP methods can be generalized using the GPI evaluation/improvement framework.</a:t>
                 </a:r>
               </a:p>
             </p:txBody>
           </p:sp>
         </mc:Choice>
-        <mc:Fallback xmlns="">
+        <mc:Fallback>
           <p:sp>
             <p:nvSpPr>
               <p:cNvPr id="3" name="Content Placeholder 2">
@@ -22230,7 +22185,7 @@
               <a:blipFill>
                 <a:blip r:embed="rId3"/>
                 <a:stretch>
-                  <a:fillRect l="-464" t="-526" r="-1160" b="-631"/>
+                  <a:fillRect l="-348" r="-1044"/>
                 </a:stretch>
               </a:blipFill>
             </p:spPr>
